--- a/reports/WeeklyPre/week4_pre.pptx
+++ b/reports/WeeklyPre/week4_pre.pptx
@@ -1,22 +1,22 @@
 
 <file path=ppt/presentation.xml><?xml version="1.0" encoding="utf-8"?>
-<p:presentation xmlns:a="http://schemas.openxmlformats.org/drawingml/2006/main" xmlns:r="http://schemas.openxmlformats.org/officeDocument/2006/relationships" xmlns:p="http://schemas.openxmlformats.org/presentationml/2006/main" saveSubsetFonts="1" autoCompressPictures="0">
+<p:presentation xmlns:a="http://schemas.openxmlformats.org/drawingml/2006/main" xmlns:r="http://schemas.openxmlformats.org/officeDocument/2006/relationships" xmlns:p="http://schemas.openxmlformats.org/presentationml/2006/main" autoCompressPictures="0">
   <p:sldMasterIdLst>
     <p:sldMasterId id="2147483648" r:id="rId1"/>
   </p:sldMasterIdLst>
   <p:sldIdLst>
-    <p:sldId id="256" r:id="rId7"/>
-    <p:sldId id="257" r:id="rId8"/>
-    <p:sldId id="258" r:id="rId9"/>
-    <p:sldId id="259" r:id="rId10"/>
-    <p:sldId id="266" r:id="rId17"/>
-    <p:sldId id="267" r:id="rId18"/>
-    <p:sldId id="260" r:id="rId11"/>
-    <p:sldId id="261" r:id="rId12"/>
-    <p:sldId id="262" r:id="rId13"/>
-    <p:sldId id="263" r:id="rId14"/>
-    <p:sldId id="264" r:id="rId15"/>
-    <p:sldId id="265" r:id="rId16"/>
+    <p:sldId id="256" r:id="rId3"/>
+    <p:sldId id="257" r:id="rId4"/>
+    <p:sldId id="258" r:id="rId5"/>
+    <p:sldId id="259" r:id="rId6"/>
+    <p:sldId id="266" r:id="rId7"/>
+    <p:sldId id="267" r:id="rId8"/>
+    <p:sldId id="260" r:id="rId9"/>
+    <p:sldId id="261" r:id="rId10"/>
+    <p:sldId id="262" r:id="rId11"/>
+    <p:sldId id="263" r:id="rId12"/>
+    <p:sldId id="264" r:id="rId13"/>
+    <p:sldId id="265" r:id="rId14"/>
   </p:sldIdLst>
   <p:sldSz cx="12192000" cy="6858000" type="screen4x3"/>
   <p:notesSz cx="6858000" cy="9144000"/>
@@ -115,11 +115,27 @@
       </a:defRPr>
     </a:lvl9pPr>
   </p:defaultTextStyle>
+  <p:extLst>
+    <p:ext uri="{EFAFB233-063F-42B5-8137-9DF3F51BA10A}">
+      <p15:sldGuideLst xmlns:p15="http://schemas.microsoft.com/office/powerpoint/2012/main">
+        <p15:guide id="1" orient="horz" pos="2160" userDrawn="1">
+          <p15:clr>
+            <a:srgbClr val="A4A3A4"/>
+          </p15:clr>
+        </p15:guide>
+        <p15:guide id="2" pos="2880" userDrawn="1">
+          <p15:clr>
+            <a:srgbClr val="A4A3A4"/>
+          </p15:clr>
+        </p15:guide>
+      </p15:sldGuideLst>
+    </p:ext>
+  </p:extLst>
 </p:presentation>
 </file>
 
-<file path=ppt/slideLayouts/slideLayout7.xml><?xml version="1.0" encoding="utf-8"?>
-<p:sldLayout xmlns:a="http://schemas.openxmlformats.org/drawingml/2006/main" xmlns:p="http://schemas.openxmlformats.org/presentationml/2006/main" type="blank" preserve="1">
+<file path=ppt/slideLayouts/slideLayout1.xml><?xml version="1.0" encoding="utf-8"?>
+<p:sldLayout xmlns:a="http://schemas.openxmlformats.org/drawingml/2006/main" xmlns:r="http://schemas.openxmlformats.org/officeDocument/2006/relationships" xmlns:p="http://schemas.openxmlformats.org/presentationml/2006/main" type="blank" preserve="1">
   <p:cSld name="weekly_five_minute_research_update — Blank">
     <p:spTree>
       <p:nvGrpSpPr>
@@ -152,7 +168,6 @@
           <a:p>
             <a:fld id="{5BCAD085-E8A6-8845-BD4E-CB4CCA059FC4}" type="datetimeFigureOut">
               <a:rPr lang="en-US" smtClean="0"/>
-              <a:t>1/27/13</a:t>
             </a:fld>
             <a:endParaRPr lang="en-US"/>
           </a:p>
@@ -194,7 +209,6 @@
           <a:p>
             <a:fld id="{C1FF6DA9-008F-8B48-92A6-B652298478BF}" type="slidenum">
               <a:rPr lang="en-US" smtClean="0"/>
-              <a:t>‹#›</a:t>
             </a:fld>
             <a:endParaRPr lang="en-US"/>
           </a:p>
@@ -209,8 +223,8 @@
 </file>
 
 <file path=ppt/slideMasters/slideMaster1.xml><?xml version="1.0" encoding="utf-8"?>
-<p:sldMaster xmlns:a="http://schemas.openxmlformats.org/drawingml/2006/main" xmlns:p="http://schemas.openxmlformats.org/presentationml/2006/main" xmlns:r="http://schemas.openxmlformats.org/officeDocument/2006/relationships">
-  <p:cSld name="weekly_five_minute_research_update — Master">
+<p:sldMaster xmlns:a="http://schemas.openxmlformats.org/drawingml/2006/main" xmlns:r="http://schemas.openxmlformats.org/officeDocument/2006/relationships" xmlns:p="http://schemas.openxmlformats.org/presentationml/2006/main">
+  <p:cSld>
     <p:bg>
       <p:bgRef idx="1001">
         <a:schemeClr val="bg1"/>
@@ -265,7 +279,6 @@
           <a:p>
             <a:fld id="{5BCAD085-E8A6-8845-BD4E-CB4CCA059FC4}" type="datetimeFigureOut">
               <a:rPr lang="en-US" smtClean="0"/>
-              <a:t>1/27/13</a:t>
             </a:fld>
             <a:endParaRPr lang="en-US"/>
           </a:p>
@@ -343,7 +356,6 @@
           <a:p>
             <a:fld id="{C1FF6DA9-008F-8B48-92A6-B652298478BF}" type="slidenum">
               <a:rPr lang="en-US" smtClean="0"/>
-              <a:t>‹#›</a:t>
             </a:fld>
             <a:endParaRPr lang="en-US"/>
           </a:p>
@@ -353,7 +365,7 @@
   </p:cSld>
   <p:clrMap bg1="lt1" tx1="dk1" bg2="lt2" tx2="dk2" accent1="accent1" accent2="accent2" accent3="accent3" accent4="accent4" accent5="accent5" accent6="accent6" hlink="hlink" folHlink="folHlink"/>
   <p:sldLayoutIdLst>
-    <p:sldLayoutId id="2147483655" r:id="rId7"/>
+    <p:sldLayoutId id="2147483649" r:id="rId1"/>
   </p:sldLayoutIdLst>
   <p:txStyles>
     <p:titleStyle>
@@ -377,7 +389,7 @@
         <a:spcBef>
           <a:spcPct val="20000"/>
         </a:spcBef>
-        <a:buFont typeface="Arial"/>
+        <a:buFont typeface="Arial" panose="020B0604020202090204"/>
         <a:buChar char="•"/>
         <a:defRPr sz="3200" kern="1200">
           <a:solidFill>
@@ -392,7 +404,7 @@
         <a:spcBef>
           <a:spcPct val="20000"/>
         </a:spcBef>
-        <a:buFont typeface="Arial"/>
+        <a:buFont typeface="Arial" panose="020B0604020202090204"/>
         <a:buChar char="–"/>
         <a:defRPr sz="2800" kern="1200">
           <a:solidFill>
@@ -407,7 +419,7 @@
         <a:spcBef>
           <a:spcPct val="20000"/>
         </a:spcBef>
-        <a:buFont typeface="Arial"/>
+        <a:buFont typeface="Arial" panose="020B0604020202090204"/>
         <a:buChar char="•"/>
         <a:defRPr sz="2400" kern="1200">
           <a:solidFill>
@@ -422,7 +434,7 @@
         <a:spcBef>
           <a:spcPct val="20000"/>
         </a:spcBef>
-        <a:buFont typeface="Arial"/>
+        <a:buFont typeface="Arial" panose="020B0604020202090204"/>
         <a:buChar char="–"/>
         <a:defRPr sz="2000" kern="1200">
           <a:solidFill>
@@ -437,7 +449,7 @@
         <a:spcBef>
           <a:spcPct val="20000"/>
         </a:spcBef>
-        <a:buFont typeface="Arial"/>
+        <a:buFont typeface="Arial" panose="020B0604020202090204"/>
         <a:buChar char="»"/>
         <a:defRPr sz="2000" kern="1200">
           <a:solidFill>
@@ -452,7 +464,7 @@
         <a:spcBef>
           <a:spcPct val="20000"/>
         </a:spcBef>
-        <a:buFont typeface="Arial"/>
+        <a:buFont typeface="Arial" panose="020B0604020202090204"/>
         <a:buChar char="•"/>
         <a:defRPr sz="2000" kern="1200">
           <a:solidFill>
@@ -467,7 +479,7 @@
         <a:spcBef>
           <a:spcPct val="20000"/>
         </a:spcBef>
-        <a:buFont typeface="Arial"/>
+        <a:buFont typeface="Arial" panose="020B0604020202090204"/>
         <a:buChar char="•"/>
         <a:defRPr sz="2000" kern="1200">
           <a:solidFill>
@@ -482,7 +494,7 @@
         <a:spcBef>
           <a:spcPct val="20000"/>
         </a:spcBef>
-        <a:buFont typeface="Arial"/>
+        <a:buFont typeface="Arial" panose="020B0604020202090204"/>
         <a:buChar char="•"/>
         <a:defRPr sz="2000" kern="1200">
           <a:solidFill>
@@ -497,7 +509,7 @@
         <a:spcBef>
           <a:spcPct val="20000"/>
         </a:spcBef>
-        <a:buFont typeface="Arial"/>
+        <a:buFont typeface="Arial" panose="020B0604020202090204"/>
         <a:buChar char="•"/>
         <a:defRPr sz="2000" kern="1200">
           <a:solidFill>
@@ -664,7 +676,7 @@
           <p:nvPr/>
         </p:nvPicPr>
         <p:blipFill>
-          <a:blip r:embed="rId2"/>
+          <a:blip r:embed="rId1"/>
           <a:stretch>
             <a:fillRect/>
           </a:stretch>
@@ -732,12 +744,20 @@
                 <a:solidFill>
                   <a:srgbClr val="FFFFFF"/>
                 </a:solidFill>
-                <a:latin typeface="Arial"/>
-                <a:ea typeface="Arial"/>
-                <a:cs typeface="Arial"/>
+                <a:latin typeface="Arial" panose="020B0604020202090204"/>
+                <a:ea typeface="Arial" panose="020B0604020202090204"/>
+                <a:cs typeface="Arial" panose="020B0604020202090204"/>
               </a:rPr>
               <a:t>EE6008 · HUMAN POSE ANALYTICS</a:t>
             </a:r>
+            <a:endParaRPr lang="en-US" sz="980" dirty="0">
+              <a:solidFill>
+                <a:srgbClr val="FFFFFF"/>
+              </a:solidFill>
+              <a:latin typeface="Arial" panose="020B0604020202090204"/>
+              <a:ea typeface="Arial" panose="020B0604020202090204"/>
+              <a:cs typeface="Arial" panose="020B0604020202090204"/>
+            </a:endParaRPr>
           </a:p>
         </p:txBody>
       </p:sp>
@@ -772,7 +792,7 @@
           <p:nvPr/>
         </p:nvPicPr>
         <p:blipFill>
-          <a:blip r:embed="rId3">
+          <a:blip r:embed="rId2">
             <a:alphaModFix amt="56000"/>
           </a:blip>
           <a:stretch>
@@ -903,12 +923,20 @@
                 <a:solidFill>
                   <a:srgbClr val="181C62"/>
                 </a:solidFill>
-                <a:latin typeface="Arial"/>
-                <a:ea typeface="Arial"/>
-                <a:cs typeface="Arial"/>
+                <a:latin typeface="Arial" panose="020B0604020202090204"/>
+                <a:ea typeface="Arial" panose="020B0604020202090204"/>
+                <a:cs typeface="Arial" panose="020B0604020202090204"/>
               </a:rPr>
               <a:t>Human Pose Analytics</a:t>
             </a:r>
+            <a:endParaRPr lang="en-US" sz="3150" b="1" dirty="0">
+              <a:solidFill>
+                <a:srgbClr val="181C62"/>
+              </a:solidFill>
+              <a:latin typeface="Arial" panose="020B0604020202090204"/>
+              <a:ea typeface="Arial" panose="020B0604020202090204"/>
+              <a:cs typeface="Arial" panose="020B0604020202090204"/>
+            </a:endParaRPr>
           </a:p>
         </p:txBody>
       </p:sp>
@@ -943,12 +971,20 @@
                 <a:solidFill>
                   <a:srgbClr val="20243A"/>
                 </a:solidFill>
-                <a:latin typeface="Arial"/>
-                <a:ea typeface="Arial"/>
-                <a:cs typeface="Arial"/>
+                <a:latin typeface="Arial" panose="020B0604020202090204"/>
+                <a:ea typeface="Arial" panose="020B0604020202090204"/>
+                <a:cs typeface="Arial" panose="020B0604020202090204"/>
               </a:rPr>
               <a:t>Weekly research update · {{SUBTITLE}}</a:t>
             </a:r>
+            <a:endParaRPr lang="en-US" sz="1720" dirty="0">
+              <a:solidFill>
+                <a:srgbClr val="20243A"/>
+              </a:solidFill>
+              <a:latin typeface="Arial" panose="020B0604020202090204"/>
+              <a:ea typeface="Arial" panose="020B0604020202090204"/>
+              <a:cs typeface="Arial" panose="020B0604020202090204"/>
+            </a:endParaRPr>
           </a:p>
         </p:txBody>
       </p:sp>
@@ -983,12 +1019,20 @@
                 <a:solidFill>
                   <a:srgbClr val="D71440"/>
                 </a:solidFill>
-                <a:latin typeface="Arial"/>
-                <a:ea typeface="Arial"/>
-                <a:cs typeface="Arial"/>
+                <a:latin typeface="Arial" panose="020B0604020202090204"/>
+                <a:ea typeface="Arial" panose="020B0604020202090204"/>
+                <a:cs typeface="Arial" panose="020B0604020202090204"/>
               </a:rPr>
               <a:t>Week ending · {{DATE}}</a:t>
             </a:r>
+            <a:endParaRPr lang="en-US" sz="1350" b="1" dirty="0">
+              <a:solidFill>
+                <a:srgbClr val="D71440"/>
+              </a:solidFill>
+              <a:latin typeface="Arial" panose="020B0604020202090204"/>
+              <a:ea typeface="Arial" panose="020B0604020202090204"/>
+              <a:cs typeface="Arial" panose="020B0604020202090204"/>
+            </a:endParaRPr>
           </a:p>
         </p:txBody>
       </p:sp>
@@ -1023,12 +1067,20 @@
                 <a:solidFill>
                   <a:srgbClr val="5E6478"/>
                 </a:solidFill>
-                <a:latin typeface="Arial"/>
-                <a:ea typeface="Arial"/>
-                <a:cs typeface="Arial"/>
+                <a:latin typeface="Arial" panose="020B0604020202090204"/>
+                <a:ea typeface="Arial" panose="020B0604020202090204"/>
+                <a:cs typeface="Arial" panose="020B0604020202090204"/>
               </a:rPr>
               <a:t>Presenter · {{AUTHOR}}</a:t>
             </a:r>
+            <a:endParaRPr lang="en-US" sz="1350" dirty="0">
+              <a:solidFill>
+                <a:srgbClr val="5E6478"/>
+              </a:solidFill>
+              <a:latin typeface="Arial" panose="020B0604020202090204"/>
+              <a:ea typeface="Arial" panose="020B0604020202090204"/>
+              <a:cs typeface="Arial" panose="020B0604020202090204"/>
+            </a:endParaRPr>
           </a:p>
         </p:txBody>
       </p:sp>
@@ -1096,7 +1148,7 @@
           <p:nvPr/>
         </p:nvPicPr>
         <p:blipFill>
-          <a:blip r:embed="rId2"/>
+          <a:blip r:embed="rId1"/>
           <a:stretch>
             <a:fillRect/>
           </a:stretch>
@@ -1164,12 +1216,20 @@
                 <a:solidFill>
                   <a:srgbClr val="FFFFFF"/>
                 </a:solidFill>
-                <a:latin typeface="Arial"/>
-                <a:ea typeface="Arial"/>
-                <a:cs typeface="Arial"/>
+                <a:latin typeface="Arial" panose="020B0604020202090204"/>
+                <a:ea typeface="Arial" panose="020B0604020202090204"/>
+                <a:cs typeface="Arial" panose="020B0604020202090204"/>
               </a:rPr>
               <a:t>EE6008 · HUMAN POSE ANALYTICS</a:t>
             </a:r>
+            <a:endParaRPr lang="en-US" sz="980" dirty="0">
+              <a:solidFill>
+                <a:srgbClr val="FFFFFF"/>
+              </a:solidFill>
+              <a:latin typeface="Arial" panose="020B0604020202090204"/>
+              <a:ea typeface="Arial" panose="020B0604020202090204"/>
+              <a:cs typeface="Arial" panose="020B0604020202090204"/>
+            </a:endParaRPr>
           </a:p>
         </p:txBody>
       </p:sp>
@@ -1298,12 +1358,20 @@
                 <a:solidFill>
                   <a:srgbClr val="181C62"/>
                 </a:solidFill>
-                <a:latin typeface="Arial"/>
-                <a:ea typeface="Arial"/>
-                <a:cs typeface="Arial"/>
+                <a:latin typeface="Arial" panose="020B0604020202090204"/>
+                <a:ea typeface="Arial" panose="020B0604020202090204"/>
+                <a:cs typeface="Arial" panose="020B0604020202090204"/>
               </a:rPr>
               <a:t>IMAGE DESCRIPTION</a:t>
             </a:r>
+            <a:endParaRPr lang="en-US" sz="980" b="1" dirty="0">
+              <a:solidFill>
+                <a:srgbClr val="181C62"/>
+              </a:solidFill>
+              <a:latin typeface="Arial" panose="020B0604020202090204"/>
+              <a:ea typeface="Arial" panose="020B0604020202090204"/>
+              <a:cs typeface="Arial" panose="020B0604020202090204"/>
+            </a:endParaRPr>
           </a:p>
         </p:txBody>
       </p:sp>
@@ -1338,12 +1406,20 @@
                 <a:solidFill>
                   <a:srgbClr val="20243A"/>
                 </a:solidFill>
-                <a:latin typeface="Arial"/>
-                <a:ea typeface="Arial"/>
-                <a:cs typeface="Arial"/>
+                <a:latin typeface="Arial" panose="020B0604020202090204"/>
+                <a:ea typeface="Arial" panose="020B0604020202090204"/>
+                <a:cs typeface="Arial" panose="020B0604020202090204"/>
               </a:rPr>
               <a:t>Single-Image Story</a:t>
             </a:r>
+            <a:endParaRPr lang="en-US" sz="2550" b="1" dirty="0">
+              <a:solidFill>
+                <a:srgbClr val="20243A"/>
+              </a:solidFill>
+              <a:latin typeface="Arial" panose="020B0604020202090204"/>
+              <a:ea typeface="Arial" panose="020B0604020202090204"/>
+              <a:cs typeface="Arial" panose="020B0604020202090204"/>
+            </a:endParaRPr>
           </a:p>
         </p:txBody>
       </p:sp>
@@ -1356,8 +1432,8 @@
           <p:nvPr/>
         </p:nvPicPr>
         <p:blipFill>
-          <a:blip r:embed="rId3"/>
-          <a:srcRect l="4974" t="0" r="4973" b="0"/>
+          <a:blip r:embed="rId2"/>
+          <a:srcRect l="4974" r="4973"/>
           <a:stretch>
             <a:fillRect/>
           </a:stretch>
@@ -1407,12 +1483,20 @@
                 <a:solidFill>
                   <a:srgbClr val="20243A"/>
                 </a:solidFill>
-                <a:latin typeface="Arial"/>
-                <a:ea typeface="Arial"/>
-                <a:cs typeface="Arial"/>
+                <a:latin typeface="Arial" panose="020B0604020202090204"/>
+                <a:ea typeface="Arial" panose="020B0604020202090204"/>
+                <a:cs typeface="Arial" panose="020B0604020202090204"/>
               </a:rPr>
               <a:t>{{IMAGE_DESCRIPTION}}</a:t>
             </a:r>
+            <a:endParaRPr lang="en-US" sz="1580" dirty="0">
+              <a:solidFill>
+                <a:srgbClr val="20243A"/>
+              </a:solidFill>
+              <a:latin typeface="Arial" panose="020B0604020202090204"/>
+              <a:ea typeface="Arial" panose="020B0604020202090204"/>
+              <a:cs typeface="Arial" panose="020B0604020202090204"/>
+            </a:endParaRPr>
           </a:p>
           <a:p>
             <a:pPr algn="l">
@@ -1428,12 +1512,20 @@
                 <a:solidFill>
                   <a:srgbClr val="5E6478"/>
                 </a:solidFill>
-                <a:latin typeface="Arial"/>
-                <a:ea typeface="Arial"/>
-                <a:cs typeface="Arial"/>
+                <a:latin typeface="Arial" panose="020B0604020202090204"/>
+                <a:ea typeface="Arial" panose="020B0604020202090204"/>
+                <a:cs typeface="Arial" panose="020B0604020202090204"/>
               </a:rPr>
               <a:t>What does the image show?</a:t>
             </a:r>
+            <a:endParaRPr lang="en-US" sz="1120" dirty="0">
+              <a:solidFill>
+                <a:srgbClr val="5E6478"/>
+              </a:solidFill>
+              <a:latin typeface="Arial" panose="020B0604020202090204"/>
+              <a:ea typeface="Arial" panose="020B0604020202090204"/>
+              <a:cs typeface="Arial" panose="020B0604020202090204"/>
+            </a:endParaRPr>
           </a:p>
           <a:p>
             <a:pPr algn="l">
@@ -1449,12 +1541,20 @@
                 <a:solidFill>
                   <a:srgbClr val="5E6478"/>
                 </a:solidFill>
-                <a:latin typeface="Arial"/>
-                <a:ea typeface="Arial"/>
-                <a:cs typeface="Arial"/>
+                <a:latin typeface="Arial" panose="020B0604020202090204"/>
+                <a:ea typeface="Arial" panose="020B0604020202090204"/>
+                <a:cs typeface="Arial" panose="020B0604020202090204"/>
               </a:rPr>
               <a:t>Why is it relevant this week?</a:t>
             </a:r>
+            <a:endParaRPr lang="en-US" sz="1120" dirty="0">
+              <a:solidFill>
+                <a:srgbClr val="5E6478"/>
+              </a:solidFill>
+              <a:latin typeface="Arial" panose="020B0604020202090204"/>
+              <a:ea typeface="Arial" panose="020B0604020202090204"/>
+              <a:cs typeface="Arial" panose="020B0604020202090204"/>
+            </a:endParaRPr>
           </a:p>
           <a:p>
             <a:pPr algn="l">
@@ -1470,12 +1570,20 @@
                 <a:solidFill>
                   <a:srgbClr val="5E6478"/>
                 </a:solidFill>
-                <a:latin typeface="Arial"/>
-                <a:ea typeface="Arial"/>
-                <a:cs typeface="Arial"/>
+                <a:latin typeface="Arial" panose="020B0604020202090204"/>
+                <a:ea typeface="Arial" panose="020B0604020202090204"/>
+                <a:cs typeface="Arial" panose="020B0604020202090204"/>
               </a:rPr>
               <a:t>What should the audience notice?</a:t>
             </a:r>
+            <a:endParaRPr lang="en-US" sz="1120" dirty="0">
+              <a:solidFill>
+                <a:srgbClr val="5E6478"/>
+              </a:solidFill>
+              <a:latin typeface="Arial" panose="020B0604020202090204"/>
+              <a:ea typeface="Arial" panose="020B0604020202090204"/>
+              <a:cs typeface="Arial" panose="020B0604020202090204"/>
+            </a:endParaRPr>
           </a:p>
           <a:p>
             <a:pPr algn="l">
@@ -1491,12 +1599,20 @@
                 <a:solidFill>
                   <a:srgbClr val="D71440"/>
                 </a:solidFill>
-                <a:latin typeface="Arial"/>
-                <a:ea typeface="Arial"/>
-                <a:cs typeface="Arial"/>
+                <a:latin typeface="Arial" panose="020B0604020202090204"/>
+                <a:ea typeface="Arial" panose="020B0604020202090204"/>
+                <a:cs typeface="Arial" panose="020B0604020202090204"/>
               </a:rPr>
               <a:t>TIP</a:t>
             </a:r>
+            <a:endParaRPr lang="en-US" sz="1050" b="1" dirty="0">
+              <a:solidFill>
+                <a:srgbClr val="D71440"/>
+              </a:solidFill>
+              <a:latin typeface="Arial" panose="020B0604020202090204"/>
+              <a:ea typeface="Arial" panose="020B0604020202090204"/>
+              <a:cs typeface="Arial" panose="020B0604020202090204"/>
+            </a:endParaRPr>
           </a:p>
           <a:p>
             <a:pPr algn="l">
@@ -1512,36 +1628,62 @@
                 <a:solidFill>
                   <a:srgbClr val="5E6478"/>
                 </a:solidFill>
-                <a:latin typeface="Arial"/>
-                <a:ea typeface="Arial"/>
-                <a:cs typeface="Arial"/>
+                <a:latin typeface="Arial" panose="020B0604020202090204"/>
+                <a:ea typeface="Arial" panose="020B0604020202090204"/>
+                <a:cs typeface="Arial" panose="020B0604020202090204"/>
               </a:rPr>
               <a:t>Use one annotated result, system</a:t>
             </a:r>
-            <a:br/>
-            <a:r>
+            <a:br>
               <a:rPr lang="en-US" sz="1050" dirty="0">
                 <a:solidFill>
                   <a:srgbClr val="5E6478"/>
                 </a:solidFill>
-                <a:latin typeface="Arial"/>
-                <a:ea typeface="Arial"/>
-                <a:cs typeface="Arial"/>
+                <a:latin typeface="Arial" panose="020B0604020202090204"/>
+                <a:ea typeface="Arial" panose="020B0604020202090204"/>
+                <a:cs typeface="Arial" panose="020B0604020202090204"/>
+              </a:rPr>
+            </a:br>
+            <a:r>
+              <a:rPr lang="en-US" sz="1050" dirty="0">
+                <a:solidFill>
+                  <a:srgbClr val="5E6478"/>
+                </a:solidFill>
+                <a:latin typeface="Arial" panose="020B0604020202090204"/>
+                <a:ea typeface="Arial" panose="020B0604020202090204"/>
+                <a:cs typeface="Arial" panose="020B0604020202090204"/>
               </a:rPr>
               <a:t>overview, qualitative example,</a:t>
             </a:r>
-            <a:br/>
-            <a:r>
+            <a:br>
               <a:rPr lang="en-US" sz="1050" dirty="0">
                 <a:solidFill>
                   <a:srgbClr val="5E6478"/>
                 </a:solidFill>
-                <a:latin typeface="Arial"/>
-                <a:ea typeface="Arial"/>
-                <a:cs typeface="Arial"/>
+                <a:latin typeface="Arial" panose="020B0604020202090204"/>
+                <a:ea typeface="Arial" panose="020B0604020202090204"/>
+                <a:cs typeface="Arial" panose="020B0604020202090204"/>
+              </a:rPr>
+            </a:br>
+            <a:r>
+              <a:rPr lang="en-US" sz="1050" dirty="0">
+                <a:solidFill>
+                  <a:srgbClr val="5E6478"/>
+                </a:solidFill>
+                <a:latin typeface="Arial" panose="020B0604020202090204"/>
+                <a:ea typeface="Arial" panose="020B0604020202090204"/>
+                <a:cs typeface="Arial" panose="020B0604020202090204"/>
               </a:rPr>
               <a:t>or implementation photograph.</a:t>
             </a:r>
+            <a:endParaRPr lang="en-US" sz="1050" dirty="0">
+              <a:solidFill>
+                <a:srgbClr val="5E6478"/>
+              </a:solidFill>
+              <a:latin typeface="Arial" panose="020B0604020202090204"/>
+              <a:ea typeface="Arial" panose="020B0604020202090204"/>
+              <a:cs typeface="Arial" panose="020B0604020202090204"/>
+            </a:endParaRPr>
           </a:p>
         </p:txBody>
       </p:sp>
@@ -1576,12 +1718,20 @@
                 <a:solidFill>
                   <a:srgbClr val="FFFFFF"/>
                 </a:solidFill>
-                <a:latin typeface="Arial"/>
-                <a:ea typeface="Arial"/>
-                <a:cs typeface="Arial"/>
+                <a:latin typeface="Arial" panose="020B0604020202090204"/>
+                <a:ea typeface="Arial" panose="020B0604020202090204"/>
+                <a:cs typeface="Arial" panose="020B0604020202090204"/>
               </a:rPr>
               <a:t>{{SOURCE}}</a:t>
             </a:r>
+            <a:endParaRPr lang="en-US" sz="900" dirty="0">
+              <a:solidFill>
+                <a:srgbClr val="FFFFFF"/>
+              </a:solidFill>
+              <a:latin typeface="Arial" panose="020B0604020202090204"/>
+              <a:ea typeface="Arial" panose="020B0604020202090204"/>
+              <a:cs typeface="Arial" panose="020B0604020202090204"/>
+            </a:endParaRPr>
           </a:p>
         </p:txBody>
       </p:sp>
@@ -1616,12 +1766,20 @@
                 <a:solidFill>
                   <a:srgbClr val="FFFFFF"/>
                 </a:solidFill>
-                <a:latin typeface="Arial"/>
-                <a:ea typeface="Arial"/>
-                <a:cs typeface="Arial"/>
+                <a:latin typeface="Arial" panose="020B0604020202090204"/>
+                <a:ea typeface="Arial" panose="020B0604020202090204"/>
+                <a:cs typeface="Arial" panose="020B0604020202090204"/>
               </a:rPr>
               <a:t>{{PAGE_NUM}}</a:t>
             </a:r>
+            <a:endParaRPr lang="en-US" sz="900" dirty="0">
+              <a:solidFill>
+                <a:srgbClr val="FFFFFF"/>
+              </a:solidFill>
+              <a:latin typeface="Arial" panose="020B0604020202090204"/>
+              <a:ea typeface="Arial" panose="020B0604020202090204"/>
+              <a:cs typeface="Arial" panose="020B0604020202090204"/>
+            </a:endParaRPr>
           </a:p>
         </p:txBody>
       </p:sp>
@@ -1689,7 +1847,7 @@
           <p:nvPr/>
         </p:nvPicPr>
         <p:blipFill>
-          <a:blip r:embed="rId2"/>
+          <a:blip r:embed="rId1"/>
           <a:stretch>
             <a:fillRect/>
           </a:stretch>
@@ -1757,12 +1915,20 @@
                 <a:solidFill>
                   <a:srgbClr val="FFFFFF"/>
                 </a:solidFill>
-                <a:latin typeface="Arial"/>
-                <a:ea typeface="Arial"/>
-                <a:cs typeface="Arial"/>
+                <a:latin typeface="Arial" panose="020B0604020202090204"/>
+                <a:ea typeface="Arial" panose="020B0604020202090204"/>
+                <a:cs typeface="Arial" panose="020B0604020202090204"/>
               </a:rPr>
               <a:t>EE6008 · HUMAN POSE ANALYTICS</a:t>
             </a:r>
+            <a:endParaRPr lang="en-US" sz="980" dirty="0">
+              <a:solidFill>
+                <a:srgbClr val="FFFFFF"/>
+              </a:solidFill>
+              <a:latin typeface="Arial" panose="020B0604020202090204"/>
+              <a:ea typeface="Arial" panose="020B0604020202090204"/>
+              <a:cs typeface="Arial" panose="020B0604020202090204"/>
+            </a:endParaRPr>
           </a:p>
         </p:txBody>
       </p:sp>
@@ -1819,12 +1985,20 @@
                 <a:solidFill>
                   <a:srgbClr val="5E6478"/>
                 </a:solidFill>
-                <a:latin typeface="Arial"/>
-                <a:ea typeface="Arial"/>
-                <a:cs typeface="Arial"/>
+                <a:latin typeface="Arial" panose="020B0604020202090204"/>
+                <a:ea typeface="Arial" panose="020B0604020202090204"/>
+                <a:cs typeface="Arial" panose="020B0604020202090204"/>
               </a:rPr>
               <a:t>USE 2–4 IMAGES</a:t>
             </a:r>
+            <a:endParaRPr lang="en-US" sz="980" b="1" dirty="0">
+              <a:solidFill>
+                <a:srgbClr val="5E6478"/>
+              </a:solidFill>
+              <a:latin typeface="Arial" panose="020B0604020202090204"/>
+              <a:ea typeface="Arial" panose="020B0604020202090204"/>
+              <a:cs typeface="Arial" panose="020B0604020202090204"/>
+            </a:endParaRPr>
           </a:p>
         </p:txBody>
       </p:sp>
@@ -2051,12 +2225,20 @@
                 <a:solidFill>
                   <a:srgbClr val="20243A"/>
                 </a:solidFill>
-                <a:latin typeface="Arial"/>
-                <a:ea typeface="Arial"/>
-                <a:cs typeface="Arial"/>
+                <a:latin typeface="Arial" panose="020B0604020202090204"/>
+                <a:ea typeface="Arial" panose="020B0604020202090204"/>
+                <a:cs typeface="Arial" panose="020B0604020202090204"/>
               </a:rPr>
               <a:t>Multi-Image Story</a:t>
             </a:r>
+            <a:endParaRPr lang="en-US" sz="2550" b="1" dirty="0">
+              <a:solidFill>
+                <a:srgbClr val="20243A"/>
+              </a:solidFill>
+              <a:latin typeface="Arial" panose="020B0604020202090204"/>
+              <a:ea typeface="Arial" panose="020B0604020202090204"/>
+              <a:cs typeface="Arial" panose="020B0604020202090204"/>
+            </a:endParaRPr>
           </a:p>
         </p:txBody>
       </p:sp>
@@ -2069,8 +2251,8 @@
           <p:nvPr/>
         </p:nvPicPr>
         <p:blipFill>
-          <a:blip r:embed="rId3"/>
-          <a:srcRect l="0" t="19517" r="0" b="19517"/>
+          <a:blip r:embed="rId2"/>
+          <a:srcRect t="19517" b="19517"/>
           <a:stretch>
             <a:fillRect/>
           </a:stretch>
@@ -2094,8 +2276,8 @@
           <p:nvPr/>
         </p:nvPicPr>
         <p:blipFill>
-          <a:blip r:embed="rId4"/>
-          <a:srcRect l="0" t="14228" r="0" b="14227"/>
+          <a:blip r:embed="rId3"/>
+          <a:srcRect t="14228" b="14227"/>
           <a:stretch>
             <a:fillRect/>
           </a:stretch>
@@ -2119,8 +2301,8 @@
           <p:nvPr/>
         </p:nvPicPr>
         <p:blipFill>
-          <a:blip r:embed="rId5"/>
-          <a:srcRect l="0" t="25000" r="0" b="25000"/>
+          <a:blip r:embed="rId4"/>
+          <a:srcRect t="25000" b="25000"/>
           <a:stretch>
             <a:fillRect/>
           </a:stretch>
@@ -2144,8 +2326,8 @@
           <p:nvPr/>
         </p:nvPicPr>
         <p:blipFill>
-          <a:blip r:embed="rId6"/>
-          <a:srcRect l="0" t="28986" r="0" b="28987"/>
+          <a:blip r:embed="rId5"/>
+          <a:srcRect t="28986" b="28987"/>
           <a:stretch>
             <a:fillRect/>
           </a:stretch>
@@ -2191,12 +2373,20 @@
                 <a:solidFill>
                   <a:srgbClr val="20243A"/>
                 </a:solidFill>
-                <a:latin typeface="Arial"/>
-                <a:ea typeface="Arial"/>
-                <a:cs typeface="Arial"/>
+                <a:latin typeface="Arial" panose="020B0604020202090204"/>
+                <a:ea typeface="Arial" panose="020B0604020202090204"/>
+                <a:cs typeface="Arial" panose="020B0604020202090204"/>
               </a:rPr>
               <a:t>{{CAPTION_1}}</a:t>
             </a:r>
+            <a:endParaRPr lang="en-US" sz="1120" dirty="0">
+              <a:solidFill>
+                <a:srgbClr val="20243A"/>
+              </a:solidFill>
+              <a:latin typeface="Arial" panose="020B0604020202090204"/>
+              <a:ea typeface="Arial" panose="020B0604020202090204"/>
+              <a:cs typeface="Arial" panose="020B0604020202090204"/>
+            </a:endParaRPr>
           </a:p>
         </p:txBody>
       </p:sp>
@@ -2231,12 +2421,20 @@
                 <a:solidFill>
                   <a:srgbClr val="20243A"/>
                 </a:solidFill>
-                <a:latin typeface="Arial"/>
-                <a:ea typeface="Arial"/>
-                <a:cs typeface="Arial"/>
+                <a:latin typeface="Arial" panose="020B0604020202090204"/>
+                <a:ea typeface="Arial" panose="020B0604020202090204"/>
+                <a:cs typeface="Arial" panose="020B0604020202090204"/>
               </a:rPr>
               <a:t>{{CAPTION_2}}</a:t>
             </a:r>
+            <a:endParaRPr lang="en-US" sz="1120" dirty="0">
+              <a:solidFill>
+                <a:srgbClr val="20243A"/>
+              </a:solidFill>
+              <a:latin typeface="Arial" panose="020B0604020202090204"/>
+              <a:ea typeface="Arial" panose="020B0604020202090204"/>
+              <a:cs typeface="Arial" panose="020B0604020202090204"/>
+            </a:endParaRPr>
           </a:p>
         </p:txBody>
       </p:sp>
@@ -2271,12 +2469,20 @@
                 <a:solidFill>
                   <a:srgbClr val="20243A"/>
                 </a:solidFill>
-                <a:latin typeface="Arial"/>
-                <a:ea typeface="Arial"/>
-                <a:cs typeface="Arial"/>
+                <a:latin typeface="Arial" panose="020B0604020202090204"/>
+                <a:ea typeface="Arial" panose="020B0604020202090204"/>
+                <a:cs typeface="Arial" panose="020B0604020202090204"/>
               </a:rPr>
               <a:t>{{CAPTION_3}}</a:t>
             </a:r>
+            <a:endParaRPr lang="en-US" sz="1120" dirty="0">
+              <a:solidFill>
+                <a:srgbClr val="20243A"/>
+              </a:solidFill>
+              <a:latin typeface="Arial" panose="020B0604020202090204"/>
+              <a:ea typeface="Arial" panose="020B0604020202090204"/>
+              <a:cs typeface="Arial" panose="020B0604020202090204"/>
+            </a:endParaRPr>
           </a:p>
         </p:txBody>
       </p:sp>
@@ -2311,12 +2517,20 @@
                 <a:solidFill>
                   <a:srgbClr val="20243A"/>
                 </a:solidFill>
-                <a:latin typeface="Arial"/>
-                <a:ea typeface="Arial"/>
-                <a:cs typeface="Arial"/>
+                <a:latin typeface="Arial" panose="020B0604020202090204"/>
+                <a:ea typeface="Arial" panose="020B0604020202090204"/>
+                <a:cs typeface="Arial" panose="020B0604020202090204"/>
               </a:rPr>
               <a:t>{{CAPTION_4}}</a:t>
             </a:r>
+            <a:endParaRPr lang="en-US" sz="1120" dirty="0">
+              <a:solidFill>
+                <a:srgbClr val="20243A"/>
+              </a:solidFill>
+              <a:latin typeface="Arial" panose="020B0604020202090204"/>
+              <a:ea typeface="Arial" panose="020B0604020202090204"/>
+              <a:cs typeface="Arial" panose="020B0604020202090204"/>
+            </a:endParaRPr>
           </a:p>
         </p:txBody>
       </p:sp>
@@ -2351,12 +2565,20 @@
                 <a:solidFill>
                   <a:srgbClr val="FFFFFF"/>
                 </a:solidFill>
-                <a:latin typeface="Arial"/>
-                <a:ea typeface="Arial"/>
-                <a:cs typeface="Arial"/>
+                <a:latin typeface="Arial" panose="020B0604020202090204"/>
+                <a:ea typeface="Arial" panose="020B0604020202090204"/>
+                <a:cs typeface="Arial" panose="020B0604020202090204"/>
               </a:rPr>
               <a:t>{{SOURCE}}</a:t>
             </a:r>
+            <a:endParaRPr lang="en-US" sz="900" dirty="0">
+              <a:solidFill>
+                <a:srgbClr val="FFFFFF"/>
+              </a:solidFill>
+              <a:latin typeface="Arial" panose="020B0604020202090204"/>
+              <a:ea typeface="Arial" panose="020B0604020202090204"/>
+              <a:cs typeface="Arial" panose="020B0604020202090204"/>
+            </a:endParaRPr>
           </a:p>
         </p:txBody>
       </p:sp>
@@ -2391,12 +2613,20 @@
                 <a:solidFill>
                   <a:srgbClr val="FFFFFF"/>
                 </a:solidFill>
-                <a:latin typeface="Arial"/>
-                <a:ea typeface="Arial"/>
-                <a:cs typeface="Arial"/>
+                <a:latin typeface="Arial" panose="020B0604020202090204"/>
+                <a:ea typeface="Arial" panose="020B0604020202090204"/>
+                <a:cs typeface="Arial" panose="020B0604020202090204"/>
               </a:rPr>
               <a:t>{{PAGE_NUM}}</a:t>
             </a:r>
+            <a:endParaRPr lang="en-US" sz="900" dirty="0">
+              <a:solidFill>
+                <a:srgbClr val="FFFFFF"/>
+              </a:solidFill>
+              <a:latin typeface="Arial" panose="020B0604020202090204"/>
+              <a:ea typeface="Arial" panose="020B0604020202090204"/>
+              <a:cs typeface="Arial" panose="020B0604020202090204"/>
+            </a:endParaRPr>
           </a:p>
         </p:txBody>
       </p:sp>
@@ -2464,7 +2694,7 @@
           <p:nvPr/>
         </p:nvPicPr>
         <p:blipFill>
-          <a:blip r:embed="rId2"/>
+          <a:blip r:embed="rId1"/>
           <a:stretch>
             <a:fillRect/>
           </a:stretch>
@@ -2532,12 +2762,20 @@
                 <a:solidFill>
                   <a:srgbClr val="FFFFFF"/>
                 </a:solidFill>
-                <a:latin typeface="Arial"/>
-                <a:ea typeface="Arial"/>
-                <a:cs typeface="Arial"/>
+                <a:latin typeface="Arial" panose="020B0604020202090204"/>
+                <a:ea typeface="Arial" panose="020B0604020202090204"/>
+                <a:cs typeface="Arial" panose="020B0604020202090204"/>
               </a:rPr>
               <a:t>EE6008 · HUMAN POSE ANALYTICS</a:t>
             </a:r>
+            <a:endParaRPr lang="en-US" sz="980" dirty="0">
+              <a:solidFill>
+                <a:srgbClr val="FFFFFF"/>
+              </a:solidFill>
+              <a:latin typeface="Arial" panose="020B0604020202090204"/>
+              <a:ea typeface="Arial" panose="020B0604020202090204"/>
+              <a:cs typeface="Arial" panose="020B0604020202090204"/>
+            </a:endParaRPr>
           </a:p>
         </p:txBody>
       </p:sp>
@@ -2550,7 +2788,7 @@
           <p:nvPr/>
         </p:nvPicPr>
         <p:blipFill>
-          <a:blip r:embed="rId3"/>
+          <a:blip r:embed="rId2"/>
           <a:stretch>
             <a:fillRect/>
           </a:stretch>
@@ -2624,7 +2862,7 @@
           <p:nvPr/>
         </p:nvPicPr>
         <p:blipFill>
-          <a:blip r:embed="rId4"/>
+          <a:blip r:embed="rId1"/>
           <a:stretch>
             <a:fillRect/>
           </a:stretch>
@@ -2670,12 +2908,20 @@
                 <a:solidFill>
                   <a:srgbClr val="181C62"/>
                 </a:solidFill>
-                <a:latin typeface="Arial"/>
-                <a:ea typeface="Arial"/>
-                <a:cs typeface="Arial"/>
+                <a:latin typeface="Arial" panose="020B0604020202090204"/>
+                <a:ea typeface="Arial" panose="020B0604020202090204"/>
+                <a:cs typeface="Arial" panose="020B0604020202090204"/>
               </a:rPr>
               <a:t>EE6008 · HUMAN POSE ANALYTICS</a:t>
             </a:r>
+            <a:endParaRPr lang="en-US" sz="1200" b="1" dirty="0">
+              <a:solidFill>
+                <a:srgbClr val="181C62"/>
+              </a:solidFill>
+              <a:latin typeface="Arial" panose="020B0604020202090204"/>
+              <a:ea typeface="Arial" panose="020B0604020202090204"/>
+              <a:cs typeface="Arial" panose="020B0604020202090204"/>
+            </a:endParaRPr>
           </a:p>
         </p:txBody>
       </p:sp>
@@ -2732,12 +2978,20 @@
                 <a:solidFill>
                   <a:srgbClr val="181C62"/>
                 </a:solidFill>
-                <a:latin typeface="Arial"/>
-                <a:ea typeface="Arial"/>
-                <a:cs typeface="Arial"/>
+                <a:latin typeface="Arial" panose="020B0604020202090204"/>
+                <a:ea typeface="Arial" panose="020B0604020202090204"/>
+                <a:cs typeface="Arial" panose="020B0604020202090204"/>
               </a:rPr>
               <a:t>Thank You</a:t>
             </a:r>
+            <a:endParaRPr lang="en-US" sz="4050" b="1" dirty="0">
+              <a:solidFill>
+                <a:srgbClr val="181C62"/>
+              </a:solidFill>
+              <a:latin typeface="Arial" panose="020B0604020202090204"/>
+              <a:ea typeface="Arial" panose="020B0604020202090204"/>
+              <a:cs typeface="Arial" panose="020B0604020202090204"/>
+            </a:endParaRPr>
           </a:p>
         </p:txBody>
       </p:sp>
@@ -2805,7 +3059,7 @@
           <p:nvPr/>
         </p:nvPicPr>
         <p:blipFill>
-          <a:blip r:embed="rId2"/>
+          <a:blip r:embed="rId1"/>
           <a:stretch>
             <a:fillRect/>
           </a:stretch>
@@ -2873,12 +3127,20 @@
                 <a:solidFill>
                   <a:srgbClr val="FFFFFF"/>
                 </a:solidFill>
-                <a:latin typeface="Arial"/>
-                <a:ea typeface="Arial"/>
-                <a:cs typeface="Arial"/>
+                <a:latin typeface="Arial" panose="020B0604020202090204"/>
+                <a:ea typeface="Arial" panose="020B0604020202090204"/>
+                <a:cs typeface="Arial" panose="020B0604020202090204"/>
               </a:rPr>
               <a:t>EE6008 · HUMAN POSE ANALYTICS</a:t>
             </a:r>
+            <a:endParaRPr lang="en-US" sz="980" dirty="0">
+              <a:solidFill>
+                <a:srgbClr val="FFFFFF"/>
+              </a:solidFill>
+              <a:latin typeface="Arial" panose="020B0604020202090204"/>
+              <a:ea typeface="Arial" panose="020B0604020202090204"/>
+              <a:cs typeface="Arial" panose="020B0604020202090204"/>
+            </a:endParaRPr>
           </a:p>
         </p:txBody>
       </p:sp>
@@ -3177,12 +3439,20 @@
                 <a:solidFill>
                   <a:srgbClr val="D71440"/>
                 </a:solidFill>
-                <a:latin typeface="Arial"/>
-                <a:ea typeface="Arial"/>
-                <a:cs typeface="Arial"/>
+                <a:latin typeface="Arial" panose="020B0604020202090204"/>
+                <a:ea typeface="Arial" panose="020B0604020202090204"/>
+                <a:cs typeface="Arial" panose="020B0604020202090204"/>
               </a:rPr>
               <a:t>WEEKLY TAKEAWAY</a:t>
             </a:r>
+            <a:endParaRPr lang="en-US" sz="980" b="1" dirty="0">
+              <a:solidFill>
+                <a:srgbClr val="D71440"/>
+              </a:solidFill>
+              <a:latin typeface="Arial" panose="020B0604020202090204"/>
+              <a:ea typeface="Arial" panose="020B0604020202090204"/>
+              <a:cs typeface="Arial" panose="020B0604020202090204"/>
+            </a:endParaRPr>
           </a:p>
         </p:txBody>
       </p:sp>
@@ -3217,12 +3487,20 @@
                 <a:solidFill>
                   <a:srgbClr val="FFFFFF"/>
                 </a:solidFill>
-                <a:latin typeface="Arial"/>
-                <a:ea typeface="Arial"/>
-                <a:cs typeface="Arial"/>
+                <a:latin typeface="Arial" panose="020B0604020202090204"/>
+                <a:ea typeface="Arial" panose="020B0604020202090204"/>
+                <a:cs typeface="Arial" panose="020B0604020202090204"/>
               </a:rPr>
               <a:t>PROJECT STATUS</a:t>
             </a:r>
+            <a:endParaRPr lang="en-US" sz="980" b="1" dirty="0">
+              <a:solidFill>
+                <a:srgbClr val="FFFFFF"/>
+              </a:solidFill>
+              <a:latin typeface="Arial" panose="020B0604020202090204"/>
+              <a:ea typeface="Arial" panose="020B0604020202090204"/>
+              <a:cs typeface="Arial" panose="020B0604020202090204"/>
+            </a:endParaRPr>
           </a:p>
         </p:txBody>
       </p:sp>
@@ -3257,12 +3535,20 @@
                 <a:solidFill>
                   <a:srgbClr val="181C62"/>
                 </a:solidFill>
-                <a:latin typeface="Arial"/>
-                <a:ea typeface="Arial"/>
-                <a:cs typeface="Arial"/>
+                <a:latin typeface="Arial" panose="020B0604020202090204"/>
+                <a:ea typeface="Arial" panose="020B0604020202090204"/>
+                <a:cs typeface="Arial" panose="020B0604020202090204"/>
               </a:rPr>
               <a:t>CURRENT MILESTONE · EVIDENCE · BLOCKER · NEXT CHECKPOINT</a:t>
             </a:r>
+            <a:endParaRPr lang="en-US" sz="1050" b="1" dirty="0">
+              <a:solidFill>
+                <a:srgbClr val="181C62"/>
+              </a:solidFill>
+              <a:latin typeface="Arial" panose="020B0604020202090204"/>
+              <a:ea typeface="Arial" panose="020B0604020202090204"/>
+              <a:cs typeface="Arial" panose="020B0604020202090204"/>
+            </a:endParaRPr>
           </a:p>
         </p:txBody>
       </p:sp>
@@ -3297,12 +3583,20 @@
                 <a:solidFill>
                   <a:srgbClr val="5E6478"/>
                 </a:solidFill>
-                <a:latin typeface="Arial"/>
-                <a:ea typeface="Arial"/>
-                <a:cs typeface="Arial"/>
+                <a:latin typeface="Arial" panose="020B0604020202090204"/>
+                <a:ea typeface="Arial" panose="020B0604020202090204"/>
+                <a:cs typeface="Arial" panose="020B0604020202090204"/>
               </a:rPr>
               <a:t>Kick-off</a:t>
             </a:r>
+            <a:endParaRPr lang="en-US" sz="900" dirty="0">
+              <a:solidFill>
+                <a:srgbClr val="5E6478"/>
+              </a:solidFill>
+              <a:latin typeface="Arial" panose="020B0604020202090204"/>
+              <a:ea typeface="Arial" panose="020B0604020202090204"/>
+              <a:cs typeface="Arial" panose="020B0604020202090204"/>
+            </a:endParaRPr>
           </a:p>
         </p:txBody>
       </p:sp>
@@ -3337,12 +3631,20 @@
                 <a:solidFill>
                   <a:srgbClr val="5E6478"/>
                 </a:solidFill>
-                <a:latin typeface="Arial"/>
-                <a:ea typeface="Arial"/>
-                <a:cs typeface="Arial"/>
+                <a:latin typeface="Arial" panose="020B0604020202090204"/>
+                <a:ea typeface="Arial" panose="020B0604020202090204"/>
+                <a:cs typeface="Arial" panose="020B0604020202090204"/>
               </a:rPr>
               <a:t>Data</a:t>
             </a:r>
+            <a:endParaRPr lang="en-US" sz="900" dirty="0">
+              <a:solidFill>
+                <a:srgbClr val="5E6478"/>
+              </a:solidFill>
+              <a:latin typeface="Arial" panose="020B0604020202090204"/>
+              <a:ea typeface="Arial" panose="020B0604020202090204"/>
+              <a:cs typeface="Arial" panose="020B0604020202090204"/>
+            </a:endParaRPr>
           </a:p>
         </p:txBody>
       </p:sp>
@@ -3377,12 +3679,20 @@
                 <a:solidFill>
                   <a:srgbClr val="D71440"/>
                 </a:solidFill>
-                <a:latin typeface="Arial"/>
-                <a:ea typeface="Arial"/>
-                <a:cs typeface="Arial"/>
+                <a:latin typeface="Arial" panose="020B0604020202090204"/>
+                <a:ea typeface="Arial" panose="020B0604020202090204"/>
+                <a:cs typeface="Arial" panose="020B0604020202090204"/>
               </a:rPr>
               <a:t>Baselines</a:t>
             </a:r>
+            <a:endParaRPr lang="en-US" sz="900" b="1" dirty="0">
+              <a:solidFill>
+                <a:srgbClr val="D71440"/>
+              </a:solidFill>
+              <a:latin typeface="Arial" panose="020B0604020202090204"/>
+              <a:ea typeface="Arial" panose="020B0604020202090204"/>
+              <a:cs typeface="Arial" panose="020B0604020202090204"/>
+            </a:endParaRPr>
           </a:p>
         </p:txBody>
       </p:sp>
@@ -3417,12 +3727,20 @@
                 <a:solidFill>
                   <a:srgbClr val="5E6478"/>
                 </a:solidFill>
-                <a:latin typeface="Arial"/>
-                <a:ea typeface="Arial"/>
-                <a:cs typeface="Arial"/>
+                <a:latin typeface="Arial" panose="020B0604020202090204"/>
+                <a:ea typeface="Arial" panose="020B0604020202090204"/>
+                <a:cs typeface="Arial" panose="020B0604020202090204"/>
               </a:rPr>
               <a:t>IP Module</a:t>
             </a:r>
+            <a:endParaRPr lang="en-US" sz="900" dirty="0">
+              <a:solidFill>
+                <a:srgbClr val="5E6478"/>
+              </a:solidFill>
+              <a:latin typeface="Arial" panose="020B0604020202090204"/>
+              <a:ea typeface="Arial" panose="020B0604020202090204"/>
+              <a:cs typeface="Arial" panose="020B0604020202090204"/>
+            </a:endParaRPr>
           </a:p>
         </p:txBody>
       </p:sp>
@@ -3457,12 +3775,20 @@
                 <a:solidFill>
                   <a:srgbClr val="5E6478"/>
                 </a:solidFill>
-                <a:latin typeface="Arial"/>
-                <a:ea typeface="Arial"/>
-                <a:cs typeface="Arial"/>
+                <a:latin typeface="Arial" panose="020B0604020202090204"/>
+                <a:ea typeface="Arial" panose="020B0604020202090204"/>
+                <a:cs typeface="Arial" panose="020B0604020202090204"/>
               </a:rPr>
               <a:t>Experiments</a:t>
             </a:r>
+            <a:endParaRPr lang="en-US" sz="900" dirty="0">
+              <a:solidFill>
+                <a:srgbClr val="5E6478"/>
+              </a:solidFill>
+              <a:latin typeface="Arial" panose="020B0604020202090204"/>
+              <a:ea typeface="Arial" panose="020B0604020202090204"/>
+              <a:cs typeface="Arial" panose="020B0604020202090204"/>
+            </a:endParaRPr>
           </a:p>
         </p:txBody>
       </p:sp>
@@ -3497,12 +3823,20 @@
                 <a:solidFill>
                   <a:srgbClr val="5E6478"/>
                 </a:solidFill>
-                <a:latin typeface="Arial"/>
-                <a:ea typeface="Arial"/>
-                <a:cs typeface="Arial"/>
+                <a:latin typeface="Arial" panose="020B0604020202090204"/>
+                <a:ea typeface="Arial" panose="020B0604020202090204"/>
+                <a:cs typeface="Arial" panose="020B0604020202090204"/>
               </a:rPr>
               <a:t>Final Report</a:t>
             </a:r>
+            <a:endParaRPr lang="en-US" sz="900" dirty="0">
+              <a:solidFill>
+                <a:srgbClr val="5E6478"/>
+              </a:solidFill>
+              <a:latin typeface="Arial" panose="020B0604020202090204"/>
+              <a:ea typeface="Arial" panose="020B0604020202090204"/>
+              <a:cs typeface="Arial" panose="020B0604020202090204"/>
+            </a:endParaRPr>
           </a:p>
         </p:txBody>
       </p:sp>
@@ -3537,12 +3871,20 @@
                 <a:solidFill>
                   <a:srgbClr val="20243A"/>
                 </a:solidFill>
-                <a:latin typeface="Arial"/>
-                <a:ea typeface="Arial"/>
-                <a:cs typeface="Arial"/>
+                <a:latin typeface="Arial" panose="020B0604020202090204"/>
+                <a:ea typeface="Arial" panose="020B0604020202090204"/>
+                <a:cs typeface="Arial" panose="020B0604020202090204"/>
               </a:rPr>
               <a:t>Weekly Snapshot &amp; Milestone</a:t>
             </a:r>
+            <a:endParaRPr lang="en-US" sz="2550" b="1" dirty="0">
+              <a:solidFill>
+                <a:srgbClr val="20243A"/>
+              </a:solidFill>
+              <a:latin typeface="Arial" panose="020B0604020202090204"/>
+              <a:ea typeface="Arial" panose="020B0604020202090204"/>
+              <a:cs typeface="Arial" panose="020B0604020202090204"/>
+            </a:endParaRPr>
           </a:p>
         </p:txBody>
       </p:sp>
@@ -3581,12 +3923,20 @@
                 <a:solidFill>
                   <a:srgbClr val="181C62"/>
                 </a:solidFill>
-                <a:latin typeface="Arial"/>
-                <a:ea typeface="Arial"/>
-                <a:cs typeface="Arial"/>
+                <a:latin typeface="Arial" panose="020B0604020202090204"/>
+                <a:ea typeface="Arial" panose="020B0604020202090204"/>
+                <a:cs typeface="Arial" panose="020B0604020202090204"/>
               </a:rPr>
               <a:t>{{KEY_MESSAGE}}</a:t>
             </a:r>
+            <a:endParaRPr lang="en-US" sz="1800" b="1" dirty="0">
+              <a:solidFill>
+                <a:srgbClr val="181C62"/>
+              </a:solidFill>
+              <a:latin typeface="Arial" panose="020B0604020202090204"/>
+              <a:ea typeface="Arial" panose="020B0604020202090204"/>
+              <a:cs typeface="Arial" panose="020B0604020202090204"/>
+            </a:endParaRPr>
           </a:p>
           <a:p>
             <a:pPr algn="l">
@@ -3599,12 +3949,20 @@
                 <a:solidFill>
                   <a:srgbClr val="5E6478"/>
                 </a:solidFill>
-                <a:latin typeface="Arial"/>
-                <a:ea typeface="Arial"/>
-                <a:cs typeface="Arial"/>
+                <a:latin typeface="Arial" panose="020B0604020202090204"/>
+                <a:ea typeface="Arial" panose="020B0604020202090204"/>
+                <a:cs typeface="Arial" panose="020B0604020202090204"/>
               </a:rPr>
               <a:t>State the one result or decision the supervisor should remember.</a:t>
             </a:r>
+            <a:endParaRPr lang="en-US" sz="1050" dirty="0">
+              <a:solidFill>
+                <a:srgbClr val="5E6478"/>
+              </a:solidFill>
+              <a:latin typeface="Arial" panose="020B0604020202090204"/>
+              <a:ea typeface="Arial" panose="020B0604020202090204"/>
+              <a:cs typeface="Arial" panose="020B0604020202090204"/>
+            </a:endParaRPr>
           </a:p>
         </p:txBody>
       </p:sp>
@@ -3643,12 +4001,20 @@
                 <a:solidFill>
                   <a:srgbClr val="FFFFFF"/>
                 </a:solidFill>
-                <a:latin typeface="Arial"/>
-                <a:ea typeface="Arial"/>
-                <a:cs typeface="Arial"/>
+                <a:latin typeface="Arial" panose="020B0604020202090204"/>
+                <a:ea typeface="Arial" panose="020B0604020202090204"/>
+                <a:cs typeface="Arial" panose="020B0604020202090204"/>
               </a:rPr>
               <a:t>{{STATUS}}</a:t>
             </a:r>
+            <a:endParaRPr lang="en-US" sz="1880" b="1" dirty="0">
+              <a:solidFill>
+                <a:srgbClr val="FFFFFF"/>
+              </a:solidFill>
+              <a:latin typeface="Arial" panose="020B0604020202090204"/>
+              <a:ea typeface="Arial" panose="020B0604020202090204"/>
+              <a:cs typeface="Arial" panose="020B0604020202090204"/>
+            </a:endParaRPr>
           </a:p>
           <a:p>
             <a:pPr algn="ctr">
@@ -3661,12 +4027,20 @@
                 <a:solidFill>
                   <a:srgbClr val="C8C8C8"/>
                 </a:solidFill>
-                <a:latin typeface="Arial"/>
-                <a:ea typeface="Arial"/>
-                <a:cs typeface="Arial"/>
+                <a:latin typeface="Arial" panose="020B0604020202090204"/>
+                <a:ea typeface="Arial" panose="020B0604020202090204"/>
+                <a:cs typeface="Arial" panose="020B0604020202090204"/>
               </a:rPr>
               <a:t>ON TRACK · AT RISK · BLOCKED</a:t>
             </a:r>
+            <a:endParaRPr lang="en-US" sz="980" dirty="0">
+              <a:solidFill>
+                <a:srgbClr val="C8C8C8"/>
+              </a:solidFill>
+              <a:latin typeface="Arial" panose="020B0604020202090204"/>
+              <a:ea typeface="Arial" panose="020B0604020202090204"/>
+              <a:cs typeface="Arial" panose="020B0604020202090204"/>
+            </a:endParaRPr>
           </a:p>
         </p:txBody>
       </p:sp>
@@ -3705,12 +4079,20 @@
                 <a:solidFill>
                   <a:srgbClr val="20243A"/>
                 </a:solidFill>
-                <a:latin typeface="Arial"/>
-                <a:ea typeface="Arial"/>
-                <a:cs typeface="Arial"/>
+                <a:latin typeface="Arial" panose="020B0604020202090204"/>
+                <a:ea typeface="Arial" panose="020B0604020202090204"/>
+                <a:cs typeface="Arial" panose="020B0604020202090204"/>
               </a:rPr>
               <a:t>{{MILESTONE}}</a:t>
             </a:r>
+            <a:endParaRPr lang="en-US" sz="1580" dirty="0">
+              <a:solidFill>
+                <a:srgbClr val="20243A"/>
+              </a:solidFill>
+              <a:latin typeface="Arial" panose="020B0604020202090204"/>
+              <a:ea typeface="Arial" panose="020B0604020202090204"/>
+              <a:cs typeface="Arial" panose="020B0604020202090204"/>
+            </a:endParaRPr>
           </a:p>
           <a:p>
             <a:pPr algn="l">
@@ -3723,12 +4105,20 @@
                 <a:solidFill>
                   <a:srgbClr val="5E6478"/>
                 </a:solidFill>
-                <a:latin typeface="Arial"/>
-                <a:ea typeface="Arial"/>
-                <a:cs typeface="Arial"/>
+                <a:latin typeface="Arial" panose="020B0604020202090204"/>
+                <a:ea typeface="Arial" panose="020B0604020202090204"/>
+                <a:cs typeface="Arial" panose="020B0604020202090204"/>
               </a:rPr>
               <a:t>Evidence completed: … | Current blocker: … | Next checkpoint: …</a:t>
             </a:r>
+            <a:endParaRPr lang="en-US" sz="1120" dirty="0">
+              <a:solidFill>
+                <a:srgbClr val="5E6478"/>
+              </a:solidFill>
+              <a:latin typeface="Arial" panose="020B0604020202090204"/>
+              <a:ea typeface="Arial" panose="020B0604020202090204"/>
+              <a:cs typeface="Arial" panose="020B0604020202090204"/>
+            </a:endParaRPr>
           </a:p>
         </p:txBody>
       </p:sp>
@@ -3763,12 +4153,20 @@
                 <a:solidFill>
                   <a:srgbClr val="FFFFFF"/>
                 </a:solidFill>
-                <a:latin typeface="Arial"/>
-                <a:ea typeface="Arial"/>
-                <a:cs typeface="Arial"/>
+                <a:latin typeface="Arial" panose="020B0604020202090204"/>
+                <a:ea typeface="Arial" panose="020B0604020202090204"/>
+                <a:cs typeface="Arial" panose="020B0604020202090204"/>
               </a:rPr>
               <a:t>{{SOURCE}}</a:t>
             </a:r>
+            <a:endParaRPr lang="en-US" sz="900" dirty="0">
+              <a:solidFill>
+                <a:srgbClr val="FFFFFF"/>
+              </a:solidFill>
+              <a:latin typeface="Arial" panose="020B0604020202090204"/>
+              <a:ea typeface="Arial" panose="020B0604020202090204"/>
+              <a:cs typeface="Arial" panose="020B0604020202090204"/>
+            </a:endParaRPr>
           </a:p>
         </p:txBody>
       </p:sp>
@@ -3803,12 +4201,20 @@
                 <a:solidFill>
                   <a:srgbClr val="FFFFFF"/>
                 </a:solidFill>
-                <a:latin typeface="Arial"/>
-                <a:ea typeface="Arial"/>
-                <a:cs typeface="Arial"/>
+                <a:latin typeface="Arial" panose="020B0604020202090204"/>
+                <a:ea typeface="Arial" panose="020B0604020202090204"/>
+                <a:cs typeface="Arial" panose="020B0604020202090204"/>
               </a:rPr>
               <a:t>{{PAGE_NUM}}</a:t>
             </a:r>
+            <a:endParaRPr lang="en-US" sz="900" dirty="0">
+              <a:solidFill>
+                <a:srgbClr val="FFFFFF"/>
+              </a:solidFill>
+              <a:latin typeface="Arial" panose="020B0604020202090204"/>
+              <a:ea typeface="Arial" panose="020B0604020202090204"/>
+              <a:cs typeface="Arial" panose="020B0604020202090204"/>
+            </a:endParaRPr>
           </a:p>
         </p:txBody>
       </p:sp>
@@ -3876,7 +4282,7 @@
           <p:nvPr/>
         </p:nvPicPr>
         <p:blipFill>
-          <a:blip r:embed="rId2"/>
+          <a:blip r:embed="rId1"/>
           <a:stretch>
             <a:fillRect/>
           </a:stretch>
@@ -3944,12 +4350,20 @@
                 <a:solidFill>
                   <a:srgbClr val="FFFFFF"/>
                 </a:solidFill>
-                <a:latin typeface="Arial"/>
-                <a:ea typeface="Arial"/>
-                <a:cs typeface="Arial"/>
+                <a:latin typeface="Arial" panose="020B0604020202090204"/>
+                <a:ea typeface="Arial" panose="020B0604020202090204"/>
+                <a:cs typeface="Arial" panose="020B0604020202090204"/>
               </a:rPr>
               <a:t>EE6008 · HUMAN POSE ANALYTICS</a:t>
             </a:r>
+            <a:endParaRPr lang="en-US" sz="980" dirty="0">
+              <a:solidFill>
+                <a:srgbClr val="FFFFFF"/>
+              </a:solidFill>
+              <a:latin typeface="Arial" panose="020B0604020202090204"/>
+              <a:ea typeface="Arial" panose="020B0604020202090204"/>
+              <a:cs typeface="Arial" panose="020B0604020202090204"/>
+            </a:endParaRPr>
           </a:p>
         </p:txBody>
       </p:sp>
@@ -4102,12 +4516,20 @@
                 <a:solidFill>
                   <a:srgbClr val="D71440"/>
                 </a:solidFill>
-                <a:latin typeface="Arial"/>
-                <a:ea typeface="Arial"/>
-                <a:cs typeface="Arial"/>
+                <a:latin typeface="Arial" panose="020B0604020202090204"/>
+                <a:ea typeface="Arial" panose="020B0604020202090204"/>
+                <a:cs typeface="Arial" panose="020B0604020202090204"/>
               </a:rPr>
               <a:t>THIS WEEK</a:t>
             </a:r>
+            <a:endParaRPr lang="en-US" sz="980" b="1" dirty="0">
+              <a:solidFill>
+                <a:srgbClr val="D71440"/>
+              </a:solidFill>
+              <a:latin typeface="Arial" panose="020B0604020202090204"/>
+              <a:ea typeface="Arial" panose="020B0604020202090204"/>
+              <a:cs typeface="Arial" panose="020B0604020202090204"/>
+            </a:endParaRPr>
           </a:p>
         </p:txBody>
       </p:sp>
@@ -4142,12 +4564,20 @@
                 <a:solidFill>
                   <a:srgbClr val="181C62"/>
                 </a:solidFill>
-                <a:latin typeface="Arial"/>
-                <a:ea typeface="Arial"/>
-                <a:cs typeface="Arial"/>
+                <a:latin typeface="Arial" panose="020B0604020202090204"/>
+                <a:ea typeface="Arial" panose="020B0604020202090204"/>
+                <a:cs typeface="Arial" panose="020B0604020202090204"/>
               </a:rPr>
               <a:t>PIPELINE / ARCHITECTURE / IMPLEMENTATION EVIDENCE</a:t>
             </a:r>
+            <a:endParaRPr lang="en-US" sz="980" b="1" dirty="0">
+              <a:solidFill>
+                <a:srgbClr val="181C62"/>
+              </a:solidFill>
+              <a:latin typeface="Arial" panose="020B0604020202090204"/>
+              <a:ea typeface="Arial" panose="020B0604020202090204"/>
+              <a:cs typeface="Arial" panose="020B0604020202090204"/>
+            </a:endParaRPr>
           </a:p>
         </p:txBody>
       </p:sp>
@@ -4182,12 +4612,20 @@
                 <a:solidFill>
                   <a:srgbClr val="FFFFFF"/>
                 </a:solidFill>
-                <a:latin typeface="Arial"/>
-                <a:ea typeface="Arial"/>
-                <a:cs typeface="Arial"/>
+                <a:latin typeface="Arial" panose="020B0604020202090204"/>
+                <a:ea typeface="Arial" panose="020B0604020202090204"/>
+                <a:cs typeface="Arial" panose="020B0604020202090204"/>
               </a:rPr>
               <a:t>TECHNICAL TAKEAWAY</a:t>
             </a:r>
+            <a:endParaRPr lang="en-US" sz="980" b="1" dirty="0">
+              <a:solidFill>
+                <a:srgbClr val="FFFFFF"/>
+              </a:solidFill>
+              <a:latin typeface="Arial" panose="020B0604020202090204"/>
+              <a:ea typeface="Arial" panose="020B0604020202090204"/>
+              <a:cs typeface="Arial" panose="020B0604020202090204"/>
+            </a:endParaRPr>
           </a:p>
         </p:txBody>
       </p:sp>
@@ -4222,12 +4660,20 @@
                 <a:solidFill>
                   <a:srgbClr val="20243A"/>
                 </a:solidFill>
-                <a:latin typeface="Arial"/>
-                <a:ea typeface="Arial"/>
-                <a:cs typeface="Arial"/>
+                <a:latin typeface="Arial" panose="020B0604020202090204"/>
+                <a:ea typeface="Arial" panose="020B0604020202090204"/>
+                <a:cs typeface="Arial" panose="020B0604020202090204"/>
               </a:rPr>
               <a:t>Technical Progress</a:t>
             </a:r>
+            <a:endParaRPr lang="en-US" sz="2550" b="1" dirty="0">
+              <a:solidFill>
+                <a:srgbClr val="20243A"/>
+              </a:solidFill>
+              <a:latin typeface="Arial" panose="020B0604020202090204"/>
+              <a:ea typeface="Arial" panose="020B0604020202090204"/>
+              <a:cs typeface="Arial" panose="020B0604020202090204"/>
+            </a:endParaRPr>
           </a:p>
         </p:txBody>
       </p:sp>
@@ -4266,12 +4712,20 @@
                 <a:solidFill>
                   <a:srgbClr val="20243A"/>
                 </a:solidFill>
-                <a:latin typeface="Arial"/>
-                <a:ea typeface="Arial"/>
-                <a:cs typeface="Arial"/>
+                <a:latin typeface="Arial" panose="020B0604020202090204"/>
+                <a:ea typeface="Arial" panose="020B0604020202090204"/>
+                <a:cs typeface="Arial" panose="020B0604020202090204"/>
               </a:rPr>
               <a:t>{{TECHNICAL_PROGRESS}}</a:t>
             </a:r>
+            <a:endParaRPr lang="en-US" sz="1580" dirty="0">
+              <a:solidFill>
+                <a:srgbClr val="20243A"/>
+              </a:solidFill>
+              <a:latin typeface="Arial" panose="020B0604020202090204"/>
+              <a:ea typeface="Arial" panose="020B0604020202090204"/>
+              <a:cs typeface="Arial" panose="020B0604020202090204"/>
+            </a:endParaRPr>
           </a:p>
           <a:p>
             <a:pPr algn="l">
@@ -4287,24 +4741,41 @@
                 <a:solidFill>
                   <a:srgbClr val="5E6478"/>
                 </a:solidFill>
-                <a:latin typeface="Arial"/>
-                <a:ea typeface="Arial"/>
-                <a:cs typeface="Arial"/>
+                <a:latin typeface="Arial" panose="020B0604020202090204"/>
+                <a:ea typeface="Arial" panose="020B0604020202090204"/>
+                <a:cs typeface="Arial" panose="020B0604020202090204"/>
               </a:rPr>
               <a:t>Completed · In progress · Blocked</a:t>
             </a:r>
-            <a:br/>
-            <a:r>
+            <a:br>
               <a:rPr lang="en-US" sz="1050" dirty="0">
                 <a:solidFill>
                   <a:srgbClr val="5E6478"/>
                 </a:solidFill>
-                <a:latin typeface="Arial"/>
-                <a:ea typeface="Arial"/>
-                <a:cs typeface="Arial"/>
+                <a:latin typeface="Arial" panose="020B0604020202090204"/>
+                <a:ea typeface="Arial" panose="020B0604020202090204"/>
+                <a:cs typeface="Arial" panose="020B0604020202090204"/>
+              </a:rPr>
+            </a:br>
+            <a:r>
+              <a:rPr lang="en-US" sz="1050" dirty="0">
+                <a:solidFill>
+                  <a:srgbClr val="5E6478"/>
+                </a:solidFill>
+                <a:latin typeface="Arial" panose="020B0604020202090204"/>
+                <a:ea typeface="Arial" panose="020B0604020202090204"/>
+                <a:cs typeface="Arial" panose="020B0604020202090204"/>
               </a:rPr>
               <a:t>Include the concrete output, not only the activity.</a:t>
             </a:r>
+            <a:endParaRPr lang="en-US" sz="1050" dirty="0">
+              <a:solidFill>
+                <a:srgbClr val="5E6478"/>
+              </a:solidFill>
+              <a:latin typeface="Arial" panose="020B0604020202090204"/>
+              <a:ea typeface="Arial" panose="020B0604020202090204"/>
+              <a:cs typeface="Arial" panose="020B0604020202090204"/>
+            </a:endParaRPr>
           </a:p>
         </p:txBody>
       </p:sp>
@@ -4343,12 +4814,20 @@
                 <a:solidFill>
                   <a:srgbClr val="5E6478"/>
                 </a:solidFill>
-                <a:latin typeface="Arial"/>
-                <a:ea typeface="Arial"/>
-                <a:cs typeface="Arial"/>
+                <a:latin typeface="Arial" panose="020B0604020202090204"/>
+                <a:ea typeface="Arial" panose="020B0604020202090204"/>
+                <a:cs typeface="Arial" panose="020B0604020202090204"/>
               </a:rPr>
               <a:t>{{CONTENT_AREA}}</a:t>
             </a:r>
+            <a:endParaRPr lang="en-US" sz="1420" dirty="0">
+              <a:solidFill>
+                <a:srgbClr val="5E6478"/>
+              </a:solidFill>
+              <a:latin typeface="Arial" panose="020B0604020202090204"/>
+              <a:ea typeface="Arial" panose="020B0604020202090204"/>
+              <a:cs typeface="Arial" panose="020B0604020202090204"/>
+            </a:endParaRPr>
           </a:p>
           <a:p>
             <a:pPr algn="l">
@@ -4364,24 +4843,41 @@
                 <a:solidFill>
                   <a:srgbClr val="5E6478"/>
                 </a:solidFill>
-                <a:latin typeface="Arial"/>
-                <a:ea typeface="Arial"/>
-                <a:cs typeface="Arial"/>
+                <a:latin typeface="Arial" panose="020B0604020202090204"/>
+                <a:ea typeface="Arial" panose="020B0604020202090204"/>
+                <a:cs typeface="Arial" panose="020B0604020202090204"/>
               </a:rPr>
               <a:t>Recommended: module diagram, interface contract,</a:t>
             </a:r>
-            <a:br/>
-            <a:r>
+            <a:br>
               <a:rPr lang="en-US" sz="1050" dirty="0">
                 <a:solidFill>
                   <a:srgbClr val="5E6478"/>
                 </a:solidFill>
-                <a:latin typeface="Arial"/>
-                <a:ea typeface="Arial"/>
-                <a:cs typeface="Arial"/>
+                <a:latin typeface="Arial" panose="020B0604020202090204"/>
+                <a:ea typeface="Arial" panose="020B0604020202090204"/>
+                <a:cs typeface="Arial" panose="020B0604020202090204"/>
+              </a:rPr>
+            </a:br>
+            <a:r>
+              <a:rPr lang="en-US" sz="1050" dirty="0">
+                <a:solidFill>
+                  <a:srgbClr val="5E6478"/>
+                </a:solidFill>
+                <a:latin typeface="Arial" panose="020B0604020202090204"/>
+                <a:ea typeface="Arial" panose="020B0604020202090204"/>
+                <a:cs typeface="Arial" panose="020B0604020202090204"/>
               </a:rPr>
               <a:t>training pipeline, code evidence, or data-flow change.</a:t>
             </a:r>
+            <a:endParaRPr lang="en-US" sz="1050" dirty="0">
+              <a:solidFill>
+                <a:srgbClr val="5E6478"/>
+              </a:solidFill>
+              <a:latin typeface="Arial" panose="020B0604020202090204"/>
+              <a:ea typeface="Arial" panose="020B0604020202090204"/>
+              <a:cs typeface="Arial" panose="020B0604020202090204"/>
+            </a:endParaRPr>
           </a:p>
         </p:txBody>
       </p:sp>
@@ -4420,12 +4916,20 @@
                 <a:solidFill>
                   <a:srgbClr val="FFFFFF"/>
                 </a:solidFill>
-                <a:latin typeface="Arial"/>
-                <a:ea typeface="Arial"/>
-                <a:cs typeface="Arial"/>
+                <a:latin typeface="Arial" panose="020B0604020202090204"/>
+                <a:ea typeface="Arial" panose="020B0604020202090204"/>
+                <a:cs typeface="Arial" panose="020B0604020202090204"/>
               </a:rPr>
               <a:t>{{KEY_FINDING}}</a:t>
             </a:r>
+            <a:endParaRPr lang="en-US" sz="1580" b="1" dirty="0">
+              <a:solidFill>
+                <a:srgbClr val="FFFFFF"/>
+              </a:solidFill>
+              <a:latin typeface="Arial" panose="020B0604020202090204"/>
+              <a:ea typeface="Arial" panose="020B0604020202090204"/>
+              <a:cs typeface="Arial" panose="020B0604020202090204"/>
+            </a:endParaRPr>
           </a:p>
           <a:p>
             <a:pPr algn="l">
@@ -4441,12 +4945,20 @@
                 <a:solidFill>
                   <a:srgbClr val="C8C8C8"/>
                 </a:solidFill>
-                <a:latin typeface="Arial"/>
-                <a:ea typeface="Arial"/>
-                <a:cs typeface="Arial"/>
+                <a:latin typeface="Arial" panose="020B0604020202090204"/>
+                <a:ea typeface="Arial" panose="020B0604020202090204"/>
+                <a:cs typeface="Arial" panose="020B0604020202090204"/>
               </a:rPr>
               <a:t>Why it matters:</a:t>
             </a:r>
+            <a:endParaRPr lang="en-US" sz="1050" dirty="0">
+              <a:solidFill>
+                <a:srgbClr val="C8C8C8"/>
+              </a:solidFill>
+              <a:latin typeface="Arial" panose="020B0604020202090204"/>
+              <a:ea typeface="Arial" panose="020B0604020202090204"/>
+              <a:cs typeface="Arial" panose="020B0604020202090204"/>
+            </a:endParaRPr>
           </a:p>
           <a:p>
             <a:pPr algn="l">
@@ -4462,24 +4974,41 @@
                 <a:solidFill>
                   <a:srgbClr val="FFFFFF"/>
                 </a:solidFill>
-                <a:latin typeface="Arial"/>
-                <a:ea typeface="Arial"/>
-                <a:cs typeface="Arial"/>
+                <a:latin typeface="Arial" panose="020B0604020202090204"/>
+                <a:ea typeface="Arial" panose="020B0604020202090204"/>
+                <a:cs typeface="Arial" panose="020B0604020202090204"/>
               </a:rPr>
               <a:t>What changed in the design,</a:t>
             </a:r>
-            <a:br/>
-            <a:r>
+            <a:br>
               <a:rPr lang="en-US" sz="1120" dirty="0">
                 <a:solidFill>
                   <a:srgbClr val="FFFFFF"/>
                 </a:solidFill>
-                <a:latin typeface="Arial"/>
-                <a:ea typeface="Arial"/>
-                <a:cs typeface="Arial"/>
+                <a:latin typeface="Arial" panose="020B0604020202090204"/>
+                <a:ea typeface="Arial" panose="020B0604020202090204"/>
+                <a:cs typeface="Arial" panose="020B0604020202090204"/>
+              </a:rPr>
+            </a:br>
+            <a:r>
+              <a:rPr lang="en-US" sz="1120" dirty="0">
+                <a:solidFill>
+                  <a:srgbClr val="FFFFFF"/>
+                </a:solidFill>
+                <a:latin typeface="Arial" panose="020B0604020202090204"/>
+                <a:ea typeface="Arial" panose="020B0604020202090204"/>
+                <a:cs typeface="Arial" panose="020B0604020202090204"/>
               </a:rPr>
               <a:t>evidence, or next decision?</a:t>
             </a:r>
+            <a:endParaRPr lang="en-US" sz="1120" dirty="0">
+              <a:solidFill>
+                <a:srgbClr val="FFFFFF"/>
+              </a:solidFill>
+              <a:latin typeface="Arial" panose="020B0604020202090204"/>
+              <a:ea typeface="Arial" panose="020B0604020202090204"/>
+              <a:cs typeface="Arial" panose="020B0604020202090204"/>
+            </a:endParaRPr>
           </a:p>
         </p:txBody>
       </p:sp>
@@ -4514,12 +5043,20 @@
                 <a:solidFill>
                   <a:srgbClr val="FFFFFF"/>
                 </a:solidFill>
-                <a:latin typeface="Arial"/>
-                <a:ea typeface="Arial"/>
-                <a:cs typeface="Arial"/>
+                <a:latin typeface="Arial" panose="020B0604020202090204"/>
+                <a:ea typeface="Arial" panose="020B0604020202090204"/>
+                <a:cs typeface="Arial" panose="020B0604020202090204"/>
               </a:rPr>
               <a:t>{{SOURCE}}</a:t>
             </a:r>
+            <a:endParaRPr lang="en-US" sz="900" dirty="0">
+              <a:solidFill>
+                <a:srgbClr val="FFFFFF"/>
+              </a:solidFill>
+              <a:latin typeface="Arial" panose="020B0604020202090204"/>
+              <a:ea typeface="Arial" panose="020B0604020202090204"/>
+              <a:cs typeface="Arial" panose="020B0604020202090204"/>
+            </a:endParaRPr>
           </a:p>
         </p:txBody>
       </p:sp>
@@ -4554,12 +5091,20 @@
                 <a:solidFill>
                   <a:srgbClr val="FFFFFF"/>
                 </a:solidFill>
-                <a:latin typeface="Arial"/>
-                <a:ea typeface="Arial"/>
-                <a:cs typeface="Arial"/>
+                <a:latin typeface="Arial" panose="020B0604020202090204"/>
+                <a:ea typeface="Arial" panose="020B0604020202090204"/>
+                <a:cs typeface="Arial" panose="020B0604020202090204"/>
               </a:rPr>
               <a:t>{{PAGE_NUM}}</a:t>
             </a:r>
+            <a:endParaRPr lang="en-US" sz="900" dirty="0">
+              <a:solidFill>
+                <a:srgbClr val="FFFFFF"/>
+              </a:solidFill>
+              <a:latin typeface="Arial" panose="020B0604020202090204"/>
+              <a:ea typeface="Arial" panose="020B0604020202090204"/>
+              <a:cs typeface="Arial" panose="020B0604020202090204"/>
+            </a:endParaRPr>
           </a:p>
         </p:txBody>
       </p:sp>
@@ -4627,7 +5172,7 @@
           <p:nvPr/>
         </p:nvPicPr>
         <p:blipFill>
-          <a:blip r:embed="rId2"/>
+          <a:blip r:embed="rId1"/>
           <a:stretch>
             <a:fillRect/>
           </a:stretch>
@@ -4695,12 +5240,20 @@
                 <a:solidFill>
                   <a:srgbClr val="FFFFFF"/>
                 </a:solidFill>
-                <a:latin typeface="Arial"/>
-                <a:ea typeface="Arial"/>
-                <a:cs typeface="Arial"/>
+                <a:latin typeface="Arial" panose="020B0604020202090204"/>
+                <a:ea typeface="Arial" panose="020B0604020202090204"/>
+                <a:cs typeface="Arial" panose="020B0604020202090204"/>
               </a:rPr>
               <a:t>EE6008 · HUMAN POSE ANALYTICS</a:t>
             </a:r>
+            <a:endParaRPr lang="en-US" sz="980" dirty="0">
+              <a:solidFill>
+                <a:srgbClr val="FFFFFF"/>
+              </a:solidFill>
+              <a:latin typeface="Arial" panose="020B0604020202090204"/>
+              <a:ea typeface="Arial" panose="020B0604020202090204"/>
+              <a:cs typeface="Arial" panose="020B0604020202090204"/>
+            </a:endParaRPr>
           </a:p>
         </p:txBody>
       </p:sp>
@@ -4853,12 +5406,20 @@
                 <a:solidFill>
                   <a:srgbClr val="D71440"/>
                 </a:solidFill>
-                <a:latin typeface="Arial"/>
-                <a:ea typeface="Arial"/>
-                <a:cs typeface="Arial"/>
+                <a:latin typeface="Arial" panose="020B0604020202090204"/>
+                <a:ea typeface="Arial" panose="020B0604020202090204"/>
+                <a:cs typeface="Arial" panose="020B0604020202090204"/>
               </a:rPr>
               <a:t>ONE-LINE RESULT</a:t>
             </a:r>
+            <a:endParaRPr lang="en-US" sz="900" b="1" dirty="0">
+              <a:solidFill>
+                <a:srgbClr val="D71440"/>
+              </a:solidFill>
+              <a:latin typeface="Arial" panose="020B0604020202090204"/>
+              <a:ea typeface="Arial" panose="020B0604020202090204"/>
+              <a:cs typeface="Arial" panose="020B0604020202090204"/>
+            </a:endParaRPr>
           </a:p>
         </p:txBody>
       </p:sp>
@@ -4893,12 +5454,20 @@
                 <a:solidFill>
                   <a:srgbClr val="181C62"/>
                 </a:solidFill>
-                <a:latin typeface="Arial"/>
-                <a:ea typeface="Arial"/>
-                <a:cs typeface="Arial"/>
+                <a:latin typeface="Arial" panose="020B0604020202090204"/>
+                <a:ea typeface="Arial" panose="020B0604020202090204"/>
+                <a:cs typeface="Arial" panose="020B0604020202090204"/>
               </a:rPr>
               <a:t>EVIDENCE · BASELINE · CONTROL · METRIC</a:t>
             </a:r>
+            <a:endParaRPr lang="en-US" sz="980" b="1" dirty="0">
+              <a:solidFill>
+                <a:srgbClr val="181C62"/>
+              </a:solidFill>
+              <a:latin typeface="Arial" panose="020B0604020202090204"/>
+              <a:ea typeface="Arial" panose="020B0604020202090204"/>
+              <a:cs typeface="Arial" panose="020B0604020202090204"/>
+            </a:endParaRPr>
           </a:p>
         </p:txBody>
       </p:sp>
@@ -4933,12 +5502,20 @@
                 <a:solidFill>
                   <a:srgbClr val="FFFFFF"/>
                 </a:solidFill>
-                <a:latin typeface="Arial"/>
-                <a:ea typeface="Arial"/>
-                <a:cs typeface="Arial"/>
+                <a:latin typeface="Arial" panose="020B0604020202090204"/>
+                <a:ea typeface="Arial" panose="020B0604020202090204"/>
+                <a:cs typeface="Arial" panose="020B0604020202090204"/>
               </a:rPr>
               <a:t>KEY FINDINGS</a:t>
             </a:r>
+            <a:endParaRPr lang="en-US" sz="1050" b="1" dirty="0">
+              <a:solidFill>
+                <a:srgbClr val="FFFFFF"/>
+              </a:solidFill>
+              <a:latin typeface="Arial" panose="020B0604020202090204"/>
+              <a:ea typeface="Arial" panose="020B0604020202090204"/>
+              <a:cs typeface="Arial" panose="020B0604020202090204"/>
+            </a:endParaRPr>
           </a:p>
         </p:txBody>
       </p:sp>
@@ -4973,12 +5550,20 @@
                 <a:solidFill>
                   <a:srgbClr val="20243A"/>
                 </a:solidFill>
-                <a:latin typeface="Arial"/>
-                <a:ea typeface="Arial"/>
-                <a:cs typeface="Arial"/>
+                <a:latin typeface="Arial" panose="020B0604020202090204"/>
+                <a:ea typeface="Arial" panose="020B0604020202090204"/>
+                <a:cs typeface="Arial" panose="020B0604020202090204"/>
               </a:rPr>
               <a:t>Experimental Evidence</a:t>
             </a:r>
+            <a:endParaRPr lang="en-US" sz="2550" b="1" dirty="0">
+              <a:solidFill>
+                <a:srgbClr val="20243A"/>
+              </a:solidFill>
+              <a:latin typeface="Arial" panose="020B0604020202090204"/>
+              <a:ea typeface="Arial" panose="020B0604020202090204"/>
+              <a:cs typeface="Arial" panose="020B0604020202090204"/>
+            </a:endParaRPr>
           </a:p>
         </p:txBody>
       </p:sp>
@@ -5013,12 +5598,20 @@
                 <a:solidFill>
                   <a:srgbClr val="D71440"/>
                 </a:solidFill>
-                <a:latin typeface="Arial"/>
-                <a:ea typeface="Arial"/>
-                <a:cs typeface="Arial"/>
+                <a:latin typeface="Arial" panose="020B0604020202090204"/>
+                <a:ea typeface="Arial" panose="020B0604020202090204"/>
+                <a:cs typeface="Arial" panose="020B0604020202090204"/>
               </a:rPr>
               <a:t>{{KEY_MESSAGE}}</a:t>
             </a:r>
+            <a:endParaRPr lang="en-US" sz="1580" b="1" dirty="0">
+              <a:solidFill>
+                <a:srgbClr val="D71440"/>
+              </a:solidFill>
+              <a:latin typeface="Arial" panose="020B0604020202090204"/>
+              <a:ea typeface="Arial" panose="020B0604020202090204"/>
+              <a:cs typeface="Arial" panose="020B0604020202090204"/>
+            </a:endParaRPr>
           </a:p>
         </p:txBody>
       </p:sp>
@@ -5057,12 +5650,20 @@
                 <a:solidFill>
                   <a:srgbClr val="5E6478"/>
                 </a:solidFill>
-                <a:latin typeface="Arial"/>
-                <a:ea typeface="Arial"/>
-                <a:cs typeface="Arial"/>
+                <a:latin typeface="Arial" panose="020B0604020202090204"/>
+                <a:ea typeface="Arial" panose="020B0604020202090204"/>
+                <a:cs typeface="Arial" panose="020B0604020202090204"/>
               </a:rPr>
               <a:t>{{CONTENT_AREA}}</a:t>
             </a:r>
+            <a:endParaRPr lang="en-US" sz="1420" dirty="0">
+              <a:solidFill>
+                <a:srgbClr val="5E6478"/>
+              </a:solidFill>
+              <a:latin typeface="Arial" panose="020B0604020202090204"/>
+              <a:ea typeface="Arial" panose="020B0604020202090204"/>
+              <a:cs typeface="Arial" panose="020B0604020202090204"/>
+            </a:endParaRPr>
           </a:p>
           <a:p>
             <a:pPr algn="l">
@@ -5078,24 +5679,41 @@
                 <a:solidFill>
                   <a:srgbClr val="5E6478"/>
                 </a:solidFill>
-                <a:latin typeface="Arial"/>
-                <a:ea typeface="Arial"/>
-                <a:cs typeface="Arial"/>
+                <a:latin typeface="Arial" panose="020B0604020202090204"/>
+                <a:ea typeface="Arial" panose="020B0604020202090204"/>
+                <a:cs typeface="Arial" panose="020B0604020202090204"/>
               </a:rPr>
               <a:t>Insert one chart, table, confusion matrix, or controlled comparison.</a:t>
             </a:r>
-            <a:br/>
-            <a:r>
+            <a:br>
               <a:rPr lang="en-US" sz="1050" dirty="0">
                 <a:solidFill>
                   <a:srgbClr val="5E6478"/>
                 </a:solidFill>
-                <a:latin typeface="Arial"/>
-                <a:ea typeface="Arial"/>
-                <a:cs typeface="Arial"/>
+                <a:latin typeface="Arial" panose="020B0604020202090204"/>
+                <a:ea typeface="Arial" panose="020B0604020202090204"/>
+                <a:cs typeface="Arial" panose="020B0604020202090204"/>
+              </a:rPr>
+            </a:br>
+            <a:r>
+              <a:rPr lang="en-US" sz="1050" dirty="0">
+                <a:solidFill>
+                  <a:srgbClr val="5E6478"/>
+                </a:solidFill>
+                <a:latin typeface="Arial" panose="020B0604020202090204"/>
+                <a:ea typeface="Arial" panose="020B0604020202090204"/>
+                <a:cs typeface="Arial" panose="020B0604020202090204"/>
               </a:rPr>
               <a:t>Label the baseline, evaluation split, metric, and uncertainty.</a:t>
             </a:r>
+            <a:endParaRPr lang="en-US" sz="1050" dirty="0">
+              <a:solidFill>
+                <a:srgbClr val="5E6478"/>
+              </a:solidFill>
+              <a:latin typeface="Arial" panose="020B0604020202090204"/>
+              <a:ea typeface="Arial" panose="020B0604020202090204"/>
+              <a:cs typeface="Arial" panose="020B0604020202090204"/>
+            </a:endParaRPr>
           </a:p>
         </p:txBody>
       </p:sp>
@@ -5134,12 +5752,20 @@
                 <a:solidFill>
                   <a:srgbClr val="20243A"/>
                 </a:solidFill>
-                <a:latin typeface="Arial"/>
-                <a:ea typeface="Arial"/>
-                <a:cs typeface="Arial"/>
+                <a:latin typeface="Arial" panose="020B0604020202090204"/>
+                <a:ea typeface="Arial" panose="020B0604020202090204"/>
+                <a:cs typeface="Arial" panose="020B0604020202090204"/>
               </a:rPr>
               <a:t>{{FINDINGS}}</a:t>
             </a:r>
+            <a:endParaRPr lang="en-US" sz="1500" dirty="0">
+              <a:solidFill>
+                <a:srgbClr val="20243A"/>
+              </a:solidFill>
+              <a:latin typeface="Arial" panose="020B0604020202090204"/>
+              <a:ea typeface="Arial" panose="020B0604020202090204"/>
+              <a:cs typeface="Arial" panose="020B0604020202090204"/>
+            </a:endParaRPr>
           </a:p>
           <a:p>
             <a:pPr algn="l">
@@ -5155,36 +5781,62 @@
                 <a:solidFill>
                   <a:srgbClr val="5E6478"/>
                 </a:solidFill>
-                <a:latin typeface="Arial"/>
-                <a:ea typeface="Arial"/>
-                <a:cs typeface="Arial"/>
+                <a:latin typeface="Arial" panose="020B0604020202090204"/>
+                <a:ea typeface="Arial" panose="020B0604020202090204"/>
+                <a:cs typeface="Arial" panose="020B0604020202090204"/>
               </a:rPr>
               <a:t>1 · What changed versus baseline?</a:t>
             </a:r>
-            <a:br/>
-            <a:r>
+            <a:br>
               <a:rPr lang="en-US" sz="1120" dirty="0">
                 <a:solidFill>
                   <a:srgbClr val="5E6478"/>
                 </a:solidFill>
-                <a:latin typeface="Arial"/>
-                <a:ea typeface="Arial"/>
-                <a:cs typeface="Arial"/>
+                <a:latin typeface="Arial" panose="020B0604020202090204"/>
+                <a:ea typeface="Arial" panose="020B0604020202090204"/>
+                <a:cs typeface="Arial" panose="020B0604020202090204"/>
+              </a:rPr>
+            </a:br>
+            <a:r>
+              <a:rPr lang="en-US" sz="1120" dirty="0">
+                <a:solidFill>
+                  <a:srgbClr val="5E6478"/>
+                </a:solidFill>
+                <a:latin typeface="Arial" panose="020B0604020202090204"/>
+                <a:ea typeface="Arial" panose="020B0604020202090204"/>
+                <a:cs typeface="Arial" panose="020B0604020202090204"/>
               </a:rPr>
               <a:t>2 · Which class or case still fails?</a:t>
             </a:r>
-            <a:br/>
-            <a:r>
+            <a:br>
               <a:rPr lang="en-US" sz="1120" dirty="0">
                 <a:solidFill>
                   <a:srgbClr val="5E6478"/>
                 </a:solidFill>
-                <a:latin typeface="Arial"/>
-                <a:ea typeface="Arial"/>
-                <a:cs typeface="Arial"/>
+                <a:latin typeface="Arial" panose="020B0604020202090204"/>
+                <a:ea typeface="Arial" panose="020B0604020202090204"/>
+                <a:cs typeface="Arial" panose="020B0604020202090204"/>
+              </a:rPr>
+            </a:br>
+            <a:r>
+              <a:rPr lang="en-US" sz="1120" dirty="0">
+                <a:solidFill>
+                  <a:srgbClr val="5E6478"/>
+                </a:solidFill>
+                <a:latin typeface="Arial" panose="020B0604020202090204"/>
+                <a:ea typeface="Arial" panose="020B0604020202090204"/>
+                <a:cs typeface="Arial" panose="020B0604020202090204"/>
               </a:rPr>
               <a:t>3 · What experiment comes next?</a:t>
             </a:r>
+            <a:endParaRPr lang="en-US" sz="1120" dirty="0">
+              <a:solidFill>
+                <a:srgbClr val="5E6478"/>
+              </a:solidFill>
+              <a:latin typeface="Arial" panose="020B0604020202090204"/>
+              <a:ea typeface="Arial" panose="020B0604020202090204"/>
+              <a:cs typeface="Arial" panose="020B0604020202090204"/>
+            </a:endParaRPr>
           </a:p>
         </p:txBody>
       </p:sp>
@@ -5219,12 +5871,20 @@
                 <a:solidFill>
                   <a:srgbClr val="FFFFFF"/>
                 </a:solidFill>
-                <a:latin typeface="Arial"/>
-                <a:ea typeface="Arial"/>
-                <a:cs typeface="Arial"/>
+                <a:latin typeface="Arial" panose="020B0604020202090204"/>
+                <a:ea typeface="Arial" panose="020B0604020202090204"/>
+                <a:cs typeface="Arial" panose="020B0604020202090204"/>
               </a:rPr>
               <a:t>{{SOURCE}}</a:t>
             </a:r>
+            <a:endParaRPr lang="en-US" sz="900" dirty="0">
+              <a:solidFill>
+                <a:srgbClr val="FFFFFF"/>
+              </a:solidFill>
+              <a:latin typeface="Arial" panose="020B0604020202090204"/>
+              <a:ea typeface="Arial" panose="020B0604020202090204"/>
+              <a:cs typeface="Arial" panose="020B0604020202090204"/>
+            </a:endParaRPr>
           </a:p>
         </p:txBody>
       </p:sp>
@@ -5259,12 +5919,20 @@
                 <a:solidFill>
                   <a:srgbClr val="FFFFFF"/>
                 </a:solidFill>
-                <a:latin typeface="Arial"/>
-                <a:ea typeface="Arial"/>
-                <a:cs typeface="Arial"/>
+                <a:latin typeface="Arial" panose="020B0604020202090204"/>
+                <a:ea typeface="Arial" panose="020B0604020202090204"/>
+                <a:cs typeface="Arial" panose="020B0604020202090204"/>
               </a:rPr>
               <a:t>{{PAGE_NUM}}</a:t>
             </a:r>
+            <a:endParaRPr lang="en-US" sz="900" dirty="0">
+              <a:solidFill>
+                <a:srgbClr val="FFFFFF"/>
+              </a:solidFill>
+              <a:latin typeface="Arial" panose="020B0604020202090204"/>
+              <a:ea typeface="Arial" panose="020B0604020202090204"/>
+              <a:cs typeface="Arial" panose="020B0604020202090204"/>
+            </a:endParaRPr>
           </a:p>
         </p:txBody>
       </p:sp>
@@ -5332,7 +6000,7 @@
           <p:nvPr/>
         </p:nvPicPr>
         <p:blipFill>
-          <a:blip r:embed="rId2"/>
+          <a:blip r:embed="rId1"/>
           <a:stretch>
             <a:fillRect/>
           </a:stretch>
@@ -5400,12 +6068,20 @@
                 <a:solidFill>
                   <a:srgbClr val="FFFFFF"/>
                 </a:solidFill>
-                <a:latin typeface="Arial"/>
-                <a:ea typeface="Arial"/>
-                <a:cs typeface="Arial"/>
+                <a:latin typeface="Arial" panose="020B0604020202090204"/>
+                <a:ea typeface="Arial" panose="020B0604020202090204"/>
+                <a:cs typeface="Arial" panose="020B0604020202090204"/>
               </a:rPr>
               <a:t>EE6008 · HUMAN POSE ANALYTICS</a:t>
             </a:r>
+            <a:endParaRPr lang="en-US" sz="980" dirty="0">
+              <a:solidFill>
+                <a:srgbClr val="FFFFFF"/>
+              </a:solidFill>
+              <a:latin typeface="Arial" panose="020B0604020202090204"/>
+              <a:ea typeface="Arial" panose="020B0604020202090204"/>
+              <a:cs typeface="Arial" panose="020B0604020202090204"/>
+            </a:endParaRPr>
           </a:p>
         </p:txBody>
       </p:sp>
@@ -5558,12 +6234,20 @@
                 <a:solidFill>
                   <a:srgbClr val="D71440"/>
                 </a:solidFill>
-                <a:latin typeface="Arial"/>
-                <a:ea typeface="Arial"/>
-                <a:cs typeface="Arial"/>
+                <a:latin typeface="Arial" panose="020B0604020202090204"/>
+                <a:ea typeface="Arial" panose="020B0604020202090204"/>
+                <a:cs typeface="Arial" panose="020B0604020202090204"/>
               </a:rPr>
               <a:t>THIS WEEK</a:t>
             </a:r>
+            <a:endParaRPr lang="en-US" sz="980" b="1" dirty="0">
+              <a:solidFill>
+                <a:srgbClr val="D71440"/>
+              </a:solidFill>
+              <a:latin typeface="Arial" panose="020B0604020202090204"/>
+              <a:ea typeface="Arial" panose="020B0604020202090204"/>
+              <a:cs typeface="Arial" panose="020B0604020202090204"/>
+            </a:endParaRPr>
           </a:p>
         </p:txBody>
       </p:sp>
@@ -5598,12 +6282,20 @@
                 <a:solidFill>
                   <a:srgbClr val="181C62"/>
                 </a:solidFill>
-                <a:latin typeface="Arial"/>
-                <a:ea typeface="Arial"/>
-                <a:cs typeface="Arial"/>
+                <a:latin typeface="Arial" panose="020B0604020202090204"/>
+                <a:ea typeface="Arial" panose="020B0604020202090204"/>
+                <a:cs typeface="Arial" panose="020B0604020202090204"/>
               </a:rPr>
               <a:t>WHY IT CANNOT SERVE AS OUR BACKBONE</a:t>
             </a:r>
+            <a:endParaRPr lang="en-US" sz="980" b="1" dirty="0">
+              <a:solidFill>
+                <a:srgbClr val="181C62"/>
+              </a:solidFill>
+              <a:latin typeface="Arial" panose="020B0604020202090204"/>
+              <a:ea typeface="Arial" panose="020B0604020202090204"/>
+              <a:cs typeface="Arial" panose="020B0604020202090204"/>
+            </a:endParaRPr>
           </a:p>
         </p:txBody>
       </p:sp>
@@ -5638,12 +6330,20 @@
                 <a:solidFill>
                   <a:srgbClr val="FFFFFF"/>
                 </a:solidFill>
-                <a:latin typeface="Arial"/>
-                <a:ea typeface="Arial"/>
-                <a:cs typeface="Arial"/>
+                <a:latin typeface="Arial" panose="020B0604020202090204"/>
+                <a:ea typeface="Arial" panose="020B0604020202090204"/>
+                <a:cs typeface="Arial" panose="020B0604020202090204"/>
               </a:rPr>
               <a:t>TECHNICAL TAKEAWAY</a:t>
             </a:r>
+            <a:endParaRPr lang="en-US" sz="980" b="1" dirty="0">
+              <a:solidFill>
+                <a:srgbClr val="FFFFFF"/>
+              </a:solidFill>
+              <a:latin typeface="Arial" panose="020B0604020202090204"/>
+              <a:ea typeface="Arial" panose="020B0604020202090204"/>
+              <a:cs typeface="Arial" panose="020B0604020202090204"/>
+            </a:endParaRPr>
           </a:p>
         </p:txBody>
       </p:sp>
@@ -5678,12 +6378,20 @@
                 <a:solidFill>
                   <a:srgbClr val="20243A"/>
                 </a:solidFill>
-                <a:latin typeface="Arial"/>
-                <a:ea typeface="Arial"/>
-                <a:cs typeface="Arial"/>
+                <a:latin typeface="Arial" panose="020B0604020202090204"/>
+                <a:ea typeface="Arial" panose="020B0604020202090204"/>
+                <a:cs typeface="Arial" panose="020B0604020202090204"/>
               </a:rPr>
               <a:t>Baseline Selection</a:t>
             </a:r>
+            <a:endParaRPr lang="en-US" sz="2550" b="1" dirty="0">
+              <a:solidFill>
+                <a:srgbClr val="20243A"/>
+              </a:solidFill>
+              <a:latin typeface="Arial" panose="020B0604020202090204"/>
+              <a:ea typeface="Arial" panose="020B0604020202090204"/>
+              <a:cs typeface="Arial" panose="020B0604020202090204"/>
+            </a:endParaRPr>
           </a:p>
         </p:txBody>
       </p:sp>
@@ -5696,7 +6404,7 @@
         <p:spPr>
           <a:xfrm>
             <a:off x="753999" y="2154079"/>
-            <a:ext cx="3356420" cy="850964"/>
+            <a:ext cx="2120900" cy="2952750"/>
           </a:xfrm>
           <a:prstGeom prst="rect">
             <a:avLst/>
@@ -5722,12 +6430,20 @@
                 <a:solidFill>
                   <a:srgbClr val="20243A"/>
                 </a:solidFill>
-                <a:latin typeface="Arial"/>
-                <a:ea typeface="Arial"/>
-                <a:cs typeface="Arial"/>
+                <a:latin typeface="Arial" panose="020B0604020202090204"/>
+                <a:ea typeface="Arial" panose="020B0604020202090204"/>
+                <a:cs typeface="Arial" panose="020B0604020202090204"/>
               </a:rPr>
               <a:t>SkeletonX reviewed</a:t>
             </a:r>
+            <a:endParaRPr lang="en-US" sz="1580" dirty="0">
+              <a:solidFill>
+                <a:srgbClr val="20243A"/>
+              </a:solidFill>
+              <a:latin typeface="Arial" panose="020B0604020202090204"/>
+              <a:ea typeface="Arial" panose="020B0604020202090204"/>
+              <a:cs typeface="Arial" panose="020B0604020202090204"/>
+            </a:endParaRPr>
           </a:p>
           <a:p>
             <a:pPr algn="l">
@@ -5743,9 +6459,9 @@
                 <a:solidFill>
                   <a:srgbClr val="5E6478"/>
                 </a:solidFill>
-                <a:latin typeface="Arial"/>
-                <a:ea typeface="Arial"/>
-                <a:cs typeface="Arial"/>
+                <a:latin typeface="Arial" panose="020B0604020202090204"/>
+                <a:ea typeface="Arial" panose="020B0604020202090204"/>
+                <a:cs typeface="Arial" panose="020B0604020202090204"/>
               </a:rPr>
               <a:t>Mentor suggested SkeletonX as our</a:t>
             </a:r>
@@ -5754,9 +6470,9 @@
                 <a:solidFill>
                   <a:srgbClr val="5E6478"/>
                 </a:solidFill>
-                <a:latin typeface="Arial"/>
-                <a:ea typeface="Arial"/>
-                <a:cs typeface="Arial"/>
+                <a:latin typeface="Arial" panose="020B0604020202090204"/>
+                <a:ea typeface="Arial" panose="020B0604020202090204"/>
+                <a:cs typeface="Arial" panose="020B0604020202090204"/>
               </a:rPr>
             </a:br>
             <a:r>
@@ -5764,20 +6480,31 @@
                 <a:solidFill>
                   <a:srgbClr val="5E6478"/>
                 </a:solidFill>
-                <a:latin typeface="Arial"/>
-                <a:ea typeface="Arial"/>
-                <a:cs typeface="Arial"/>
-              </a:rPr>
-              <a:t>starting point. I went through the</a:t>
+                <a:latin typeface="Arial" panose="020B0604020202090204"/>
+                <a:ea typeface="Arial" panose="020B0604020202090204"/>
+                <a:cs typeface="Arial" panose="020B0604020202090204"/>
+              </a:rPr>
+              <a:t>starting point. W</a:t>
+            </a:r>
+            <a:r>
+              <a:rPr lang="en-US" sz="1050" dirty="0">
+                <a:solidFill>
+                  <a:srgbClr val="5E6478"/>
+                </a:solidFill>
+                <a:latin typeface="Arial" panose="020B0604020202090204"/>
+                <a:ea typeface="Arial" panose="020B0604020202090204"/>
+                <a:cs typeface="Arial" panose="020B0604020202090204"/>
+              </a:rPr>
+              <a:t>e went through the</a:t>
             </a:r>
             <a:br>
               <a:rPr lang="en-US" sz="1050" dirty="0">
                 <a:solidFill>
                   <a:srgbClr val="5E6478"/>
                 </a:solidFill>
-                <a:latin typeface="Arial"/>
-                <a:ea typeface="Arial"/>
-                <a:cs typeface="Arial"/>
+                <a:latin typeface="Arial" panose="020B0604020202090204"/>
+                <a:ea typeface="Arial" panose="020B0604020202090204"/>
+                <a:cs typeface="Arial" panose="020B0604020202090204"/>
               </a:rPr>
             </a:br>
             <a:r>
@@ -5785,9 +6512,9 @@
                 <a:solidFill>
                   <a:srgbClr val="5E6478"/>
                 </a:solidFill>
-                <a:latin typeface="Arial"/>
-                <a:ea typeface="Arial"/>
-                <a:cs typeface="Arial"/>
+                <a:latin typeface="Arial" panose="020B0604020202090204"/>
+                <a:ea typeface="Arial" panose="020B0604020202090204"/>
+                <a:cs typeface="Arial" panose="020B0604020202090204"/>
               </a:rPr>
               <a:t>paper and the released code:</a:t>
             </a:r>
@@ -5796,9 +6523,9 @@
                 <a:solidFill>
                   <a:srgbClr val="5E6478"/>
                 </a:solidFill>
-                <a:latin typeface="Arial"/>
-                <a:ea typeface="Arial"/>
-                <a:cs typeface="Arial"/>
+                <a:latin typeface="Arial" panose="020B0604020202090204"/>
+                <a:ea typeface="Arial" panose="020B0604020202090204"/>
+                <a:cs typeface="Arial" panose="020B0604020202090204"/>
               </a:rPr>
             </a:br>
             <a:r>
@@ -5806,9 +6533,9 @@
                 <a:solidFill>
                   <a:srgbClr val="5E6478"/>
                 </a:solidFill>
-                <a:latin typeface="Arial"/>
-                <a:ea typeface="Arial"/>
-                <a:cs typeface="Arial"/>
+                <a:latin typeface="Arial" panose="020B0604020202090204"/>
+                <a:ea typeface="Arial" panose="020B0604020202090204"/>
+                <a:cs typeface="Arial" panose="020B0604020202090204"/>
               </a:rPr>
               <a:t>sample pairing, decoupled pooling,</a:t>
             </a:r>
@@ -5817,9 +6544,9 @@
                 <a:solidFill>
                   <a:srgbClr val="5E6478"/>
                 </a:solidFill>
-                <a:latin typeface="Arial"/>
-                <a:ea typeface="Arial"/>
-                <a:cs typeface="Arial"/>
+                <a:latin typeface="Arial" panose="020B0604020202090204"/>
+                <a:ea typeface="Arial" panose="020B0604020202090204"/>
+                <a:cs typeface="Arial" panose="020B0604020202090204"/>
               </a:rPr>
             </a:br>
             <a:r>
@@ -5827,9 +6554,9 @@
                 <a:solidFill>
                   <a:srgbClr val="5E6478"/>
                 </a:solidFill>
-                <a:latin typeface="Arial"/>
-                <a:ea typeface="Arial"/>
-                <a:cs typeface="Arial"/>
+                <a:latin typeface="Arial" panose="020B0604020202090204"/>
+                <a:ea typeface="Arial" panose="020B0604020202090204"/>
+                <a:cs typeface="Arial" panose="020B0604020202090204"/>
               </a:rPr>
               <a:t>the loss set, the feeders and</a:t>
             </a:r>
@@ -5838,9 +6565,9 @@
                 <a:solidFill>
                   <a:srgbClr val="5E6478"/>
                 </a:solidFill>
-                <a:latin typeface="Arial"/>
-                <a:ea typeface="Arial"/>
-                <a:cs typeface="Arial"/>
+                <a:latin typeface="Arial" panose="020B0604020202090204"/>
+                <a:ea typeface="Arial" panose="020B0604020202090204"/>
+                <a:cs typeface="Arial" panose="020B0604020202090204"/>
               </a:rPr>
             </a:br>
             <a:r>
@@ -5848,9 +6575,9 @@
                 <a:solidFill>
                   <a:srgbClr val="5E6478"/>
                 </a:solidFill>
-                <a:latin typeface="Arial"/>
-                <a:ea typeface="Arial"/>
-                <a:cs typeface="Arial"/>
+                <a:latin typeface="Arial" panose="020B0604020202090204"/>
+                <a:ea typeface="Arial" panose="020B0604020202090204"/>
+                <a:cs typeface="Arial" panose="020B0604020202090204"/>
               </a:rPr>
               <a:t>both evaluation settings.</a:t>
             </a:r>
@@ -5859,30 +6586,19 @@
                 <a:solidFill>
                   <a:srgbClr val="5E6478"/>
                 </a:solidFill>
-                <a:latin typeface="Arial"/>
-                <a:ea typeface="Arial"/>
-                <a:cs typeface="Arial"/>
+                <a:latin typeface="Arial" panose="020B0604020202090204"/>
+                <a:ea typeface="Arial" panose="020B0604020202090204"/>
+                <a:cs typeface="Arial" panose="020B0604020202090204"/>
               </a:rPr>
             </a:br>
-            <a:r>
-              <a:rPr lang="en-US" sz="1050" dirty="0">
-                <a:solidFill>
-                  <a:srgbClr val="5E6478"/>
-                </a:solidFill>
-                <a:latin typeface="Arial"/>
-                <a:ea typeface="Arial"/>
-                <a:cs typeface="Arial"/>
-              </a:rPr>
-              <a:t xml:space="preserve"/>
-            </a:r>
             <a:br>
               <a:rPr lang="en-US" sz="1050" dirty="0">
                 <a:solidFill>
                   <a:srgbClr val="5E6478"/>
                 </a:solidFill>
-                <a:latin typeface="Arial"/>
-                <a:ea typeface="Arial"/>
-                <a:cs typeface="Arial"/>
+                <a:latin typeface="Arial" panose="020B0604020202090204"/>
+                <a:ea typeface="Arial" panose="020B0604020202090204"/>
+                <a:cs typeface="Arial" panose="020B0604020202090204"/>
               </a:rPr>
             </a:br>
             <a:r>
@@ -5890,9 +6606,9 @@
                 <a:solidFill>
                   <a:srgbClr val="5E6478"/>
                 </a:solidFill>
-                <a:latin typeface="Arial"/>
-                <a:ea typeface="Arial"/>
-                <a:cs typeface="Arial"/>
+                <a:latin typeface="Arial" panose="020B0604020202090204"/>
+                <a:ea typeface="Arial" panose="020B0604020202090204"/>
+                <a:cs typeface="Arial" panose="020B0604020202090204"/>
               </a:rPr>
               <a:t>Finding: it is a training strategy</a:t>
             </a:r>
@@ -5901,9 +6617,9 @@
                 <a:solidFill>
                   <a:srgbClr val="5E6478"/>
                 </a:solidFill>
-                <a:latin typeface="Arial"/>
-                <a:ea typeface="Arial"/>
-                <a:cs typeface="Arial"/>
+                <a:latin typeface="Arial" panose="020B0604020202090204"/>
+                <a:ea typeface="Arial" panose="020B0604020202090204"/>
+                <a:cs typeface="Arial" panose="020B0604020202090204"/>
               </a:rPr>
             </a:br>
             <a:r>
@@ -5911,9 +6627,9 @@
                 <a:solidFill>
                   <a:srgbClr val="5E6478"/>
                 </a:solidFill>
-                <a:latin typeface="Arial"/>
-                <a:ea typeface="Arial"/>
-                <a:cs typeface="Arial"/>
+                <a:latin typeface="Arial" panose="020B0604020202090204"/>
+                <a:ea typeface="Arial" panose="020B0604020202090204"/>
+                <a:cs typeface="Arial" panose="020B0604020202090204"/>
               </a:rPr>
               <a:t>that wraps a backbone — not a</a:t>
             </a:r>
@@ -5922,9 +6638,9 @@
                 <a:solidFill>
                   <a:srgbClr val="5E6478"/>
                 </a:solidFill>
-                <a:latin typeface="Arial"/>
-                <a:ea typeface="Arial"/>
-                <a:cs typeface="Arial"/>
+                <a:latin typeface="Arial" panose="020B0604020202090204"/>
+                <a:ea typeface="Arial" panose="020B0604020202090204"/>
+                <a:cs typeface="Arial" panose="020B0604020202090204"/>
               </a:rPr>
             </a:br>
             <a:r>
@@ -5932,9 +6648,9 @@
                 <a:solidFill>
                   <a:srgbClr val="5E6478"/>
                 </a:solidFill>
-                <a:latin typeface="Arial"/>
-                <a:ea typeface="Arial"/>
-                <a:cs typeface="Arial"/>
+                <a:latin typeface="Arial" panose="020B0604020202090204"/>
+                <a:ea typeface="Arial" panose="020B0604020202090204"/>
+                <a:cs typeface="Arial" panose="020B0604020202090204"/>
               </a:rPr>
               <a:t>backbone, and therefore not a</a:t>
             </a:r>
@@ -5943,9 +6659,9 @@
                 <a:solidFill>
                   <a:srgbClr val="5E6478"/>
                 </a:solidFill>
-                <a:latin typeface="Arial"/>
-                <a:ea typeface="Arial"/>
-                <a:cs typeface="Arial"/>
+                <a:latin typeface="Arial" panose="020B0604020202090204"/>
+                <a:ea typeface="Arial" panose="020B0604020202090204"/>
+                <a:cs typeface="Arial" panose="020B0604020202090204"/>
               </a:rPr>
             </a:br>
             <a:r>
@@ -5953,12 +6669,20 @@
                 <a:solidFill>
                   <a:srgbClr val="5E6478"/>
                 </a:solidFill>
-                <a:latin typeface="Arial"/>
-                <a:ea typeface="Arial"/>
-                <a:cs typeface="Arial"/>
+                <a:latin typeface="Arial" panose="020B0604020202090204"/>
+                <a:ea typeface="Arial" panose="020B0604020202090204"/>
+                <a:cs typeface="Arial" panose="020B0604020202090204"/>
               </a:rPr>
               <a:t>baseline on its own.</a:t>
             </a:r>
+            <a:endParaRPr lang="en-US" sz="1050" dirty="0">
+              <a:solidFill>
+                <a:srgbClr val="5E6478"/>
+              </a:solidFill>
+              <a:latin typeface="Arial" panose="020B0604020202090204"/>
+              <a:ea typeface="Arial" panose="020B0604020202090204"/>
+              <a:cs typeface="Arial" panose="020B0604020202090204"/>
+            </a:endParaRPr>
           </a:p>
         </p:txBody>
       </p:sp>
@@ -5997,12 +6721,20 @@
                 <a:solidFill>
                   <a:srgbClr val="5E6478"/>
                 </a:solidFill>
-                <a:latin typeface="Arial"/>
-                <a:ea typeface="Arial"/>
-                <a:cs typeface="Arial"/>
+                <a:latin typeface="Arial" panose="020B0604020202090204"/>
+                <a:ea typeface="Arial" panose="020B0604020202090204"/>
+                <a:cs typeface="Arial" panose="020B0604020202090204"/>
               </a:rPr>
               <a:t>A strategy, not a network</a:t>
             </a:r>
+            <a:endParaRPr lang="en-US" sz="1420" dirty="0">
+              <a:solidFill>
+                <a:srgbClr val="5E6478"/>
+              </a:solidFill>
+              <a:latin typeface="Arial" panose="020B0604020202090204"/>
+              <a:ea typeface="Arial" panose="020B0604020202090204"/>
+              <a:cs typeface="Arial" panose="020B0604020202090204"/>
+            </a:endParaRPr>
           </a:p>
           <a:p>
             <a:pPr algn="l">
@@ -6018,9 +6750,9 @@
                 <a:solidFill>
                   <a:srgbClr val="5E6478"/>
                 </a:solidFill>
-                <a:latin typeface="Arial"/>
-                <a:ea typeface="Arial"/>
-                <a:cs typeface="Arial"/>
+                <a:latin typeface="Arial" panose="020B0604020202090204"/>
+                <a:ea typeface="Arial" panose="020B0604020202090204"/>
+                <a:cs typeface="Arial" panose="020B0604020202090204"/>
               </a:rPr>
               <a:t>Its own experiments plug the same pipeline into several</a:t>
             </a:r>
@@ -6029,9 +6761,9 @@
                 <a:solidFill>
                   <a:srgbClr val="5E6478"/>
                 </a:solidFill>
-                <a:latin typeface="Arial"/>
-                <a:ea typeface="Arial"/>
-                <a:cs typeface="Arial"/>
+                <a:latin typeface="Arial" panose="020B0604020202090204"/>
+                <a:ea typeface="Arial" panose="020B0604020202090204"/>
+                <a:cs typeface="Arial" panose="020B0604020202090204"/>
               </a:rPr>
             </a:br>
             <a:r>
@@ -6039,12 +6771,20 @@
                 <a:solidFill>
                   <a:srgbClr val="5E6478"/>
                 </a:solidFill>
-                <a:latin typeface="Arial"/>
-                <a:ea typeface="Arial"/>
-                <a:cs typeface="Arial"/>
+                <a:latin typeface="Arial" panose="020B0604020202090204"/>
+                <a:ea typeface="Arial" panose="020B0604020202090204"/>
+                <a:cs typeface="Arial" panose="020B0604020202090204"/>
               </a:rPr>
               <a:t>backbones to show the gain transfers.</a:t>
             </a:r>
+            <a:endParaRPr lang="en-US" sz="1050" dirty="0">
+              <a:solidFill>
+                <a:srgbClr val="5E6478"/>
+              </a:solidFill>
+              <a:latin typeface="Arial" panose="020B0604020202090204"/>
+              <a:ea typeface="Arial" panose="020B0604020202090204"/>
+              <a:cs typeface="Arial" panose="020B0604020202090204"/>
+            </a:endParaRPr>
           </a:p>
         </p:txBody>
       </p:sp>
@@ -6083,9 +6823,9 @@
                 <a:solidFill>
                   <a:srgbClr val="FFFFFF"/>
                 </a:solidFill>
-                <a:latin typeface="Arial"/>
-                <a:ea typeface="Arial"/>
-                <a:cs typeface="Arial"/>
+                <a:latin typeface="Arial" panose="020B0604020202090204"/>
+                <a:ea typeface="Arial" panose="020B0604020202090204"/>
+                <a:cs typeface="Arial" panose="020B0604020202090204"/>
               </a:rPr>
               <a:t>Two different</a:t>
             </a:r>
@@ -6094,9 +6834,9 @@
                 <a:solidFill>
                   <a:srgbClr val="FFFFFF"/>
                 </a:solidFill>
-                <a:latin typeface="Arial"/>
-                <a:ea typeface="Arial"/>
-                <a:cs typeface="Arial"/>
+                <a:latin typeface="Arial" panose="020B0604020202090204"/>
+                <a:ea typeface="Arial" panose="020B0604020202090204"/>
+                <a:cs typeface="Arial" panose="020B0604020202090204"/>
               </a:rPr>
             </a:br>
             <a:r>
@@ -6104,12 +6844,20 @@
                 <a:solidFill>
                   <a:srgbClr val="FFFFFF"/>
                 </a:solidFill>
-                <a:latin typeface="Arial"/>
-                <a:ea typeface="Arial"/>
-                <a:cs typeface="Arial"/>
+                <a:latin typeface="Arial" panose="020B0604020202090204"/>
+                <a:ea typeface="Arial" panose="020B0604020202090204"/>
+                <a:cs typeface="Arial" panose="020B0604020202090204"/>
               </a:rPr>
               <a:t>"identities"</a:t>
             </a:r>
+            <a:endParaRPr lang="en-US" sz="1580" b="1" dirty="0">
+              <a:solidFill>
+                <a:srgbClr val="FFFFFF"/>
+              </a:solidFill>
+              <a:latin typeface="Arial" panose="020B0604020202090204"/>
+              <a:ea typeface="Arial" panose="020B0604020202090204"/>
+              <a:cs typeface="Arial" panose="020B0604020202090204"/>
+            </a:endParaRPr>
           </a:p>
           <a:p>
             <a:pPr algn="l">
@@ -6125,12 +6873,20 @@
                 <a:solidFill>
                   <a:srgbClr val="C8C8C8"/>
                 </a:solidFill>
-                <a:latin typeface="Arial"/>
-                <a:ea typeface="Arial"/>
-                <a:cs typeface="Arial"/>
+                <a:latin typeface="Arial" panose="020B0604020202090204"/>
+                <a:ea typeface="Arial" panose="020B0604020202090204"/>
+                <a:cs typeface="Arial" panose="020B0604020202090204"/>
               </a:rPr>
               <a:t>Why it matters:</a:t>
             </a:r>
+            <a:endParaRPr lang="en-US" sz="1050" dirty="0">
+              <a:solidFill>
+                <a:srgbClr val="C8C8C8"/>
+              </a:solidFill>
+              <a:latin typeface="Arial" panose="020B0604020202090204"/>
+              <a:ea typeface="Arial" panose="020B0604020202090204"/>
+              <a:cs typeface="Arial" panose="020B0604020202090204"/>
+            </a:endParaRPr>
           </a:p>
           <a:p>
             <a:pPr algn="l">
@@ -6146,9 +6902,9 @@
                 <a:solidFill>
                   <a:srgbClr val="FFFFFF"/>
                 </a:solidFill>
-                <a:latin typeface="Arial"/>
-                <a:ea typeface="Arial"/>
-                <a:cs typeface="Arial"/>
+                <a:latin typeface="Arial" panose="020B0604020202090204"/>
+                <a:ea typeface="Arial" panose="020B0604020202090204"/>
+                <a:cs typeface="Arial" panose="020B0604020202090204"/>
               </a:rPr>
               <a:t>SkeletonX "subject" = who performed</a:t>
             </a:r>
@@ -6157,9 +6913,9 @@
                 <a:solidFill>
                   <a:srgbClr val="FFFFFF"/>
                 </a:solidFill>
-                <a:latin typeface="Arial"/>
-                <a:ea typeface="Arial"/>
-                <a:cs typeface="Arial"/>
+                <a:latin typeface="Arial" panose="020B0604020202090204"/>
+                <a:ea typeface="Arial" panose="020B0604020202090204"/>
+                <a:cs typeface="Arial" panose="020B0604020202090204"/>
               </a:rPr>
             </a:br>
             <a:r>
@@ -6167,20 +6923,20 @@
                 <a:solidFill>
                   <a:srgbClr val="FFFFFF"/>
                 </a:solidFill>
-                <a:latin typeface="Arial"/>
-                <a:ea typeface="Arial"/>
-                <a:cs typeface="Arial"/>
-              </a:rPr>
-              <a:t>the clip. Sample level, aimed at</a:t>
+                <a:latin typeface="Arial" panose="020B0604020202090204"/>
+                <a:ea typeface="Arial" panose="020B0604020202090204"/>
+                <a:cs typeface="Arial" panose="020B0604020202090204"/>
+              </a:rPr>
+              <a:t>the clip. A sample-level attribute,</a:t>
             </a:r>
             <a:br>
               <a:rPr lang="en-US" sz="1120" dirty="0">
                 <a:solidFill>
                   <a:srgbClr val="FFFFFF"/>
                 </a:solidFill>
-                <a:latin typeface="Arial"/>
-                <a:ea typeface="Arial"/>
-                <a:cs typeface="Arial"/>
+                <a:latin typeface="Arial" panose="020B0604020202090204"/>
+                <a:ea typeface="Arial" panose="020B0604020202090204"/>
+                <a:cs typeface="Arial" panose="020B0604020202090204"/>
               </a:rPr>
             </a:br>
             <a:r>
@@ -6188,20 +6944,20 @@
                 <a:solidFill>
                   <a:srgbClr val="FFFFFF"/>
                 </a:solidFill>
-                <a:latin typeface="Arial"/>
-                <a:ea typeface="Arial"/>
-                <a:cs typeface="Arial"/>
-              </a:rPr>
-              <a:t>generalising to unseen performers.</a:t>
+                <a:latin typeface="Arial" panose="020B0604020202090204"/>
+                <a:ea typeface="Arial" panose="020B0604020202090204"/>
+                <a:cs typeface="Arial" panose="020B0604020202090204"/>
+              </a:rPr>
+              <a:t>separated so the prediction does</a:t>
             </a:r>
             <a:br>
               <a:rPr lang="en-US" sz="1120" dirty="0">
                 <a:solidFill>
                   <a:srgbClr val="FFFFFF"/>
                 </a:solidFill>
-                <a:latin typeface="Arial"/>
-                <a:ea typeface="Arial"/>
-                <a:cs typeface="Arial"/>
+                <a:latin typeface="Arial" panose="020B0604020202090204"/>
+                <a:ea typeface="Arial" panose="020B0604020202090204"/>
+                <a:cs typeface="Arial" panose="020B0604020202090204"/>
               </a:rPr>
             </a:br>
             <a:r>
@@ -6209,41 +6965,30 @@
                 <a:solidFill>
                   <a:srgbClr val="FFFFFF"/>
                 </a:solidFill>
-                <a:latin typeface="Arial"/>
-                <a:ea typeface="Arial"/>
-                <a:cs typeface="Arial"/>
-              </a:rPr>
-              <a:t xml:space="preserve"/>
+                <a:latin typeface="Arial" panose="020B0604020202090204"/>
+                <a:ea typeface="Arial" panose="020B0604020202090204"/>
+                <a:cs typeface="Arial" panose="020B0604020202090204"/>
+              </a:rPr>
+              <a:t>not depend on who performs it.</a:t>
             </a:r>
             <a:br>
               <a:rPr lang="en-US" sz="1120" dirty="0">
                 <a:solidFill>
                   <a:srgbClr val="FFFFFF"/>
                 </a:solidFill>
-                <a:latin typeface="Arial"/>
-                <a:ea typeface="Arial"/>
-                <a:cs typeface="Arial"/>
+                <a:latin typeface="Arial" panose="020B0604020202090204"/>
+                <a:ea typeface="Arial" panose="020B0604020202090204"/>
+                <a:cs typeface="Arial" panose="020B0604020202090204"/>
               </a:rPr>
             </a:br>
-            <a:r>
-              <a:rPr lang="en-US" sz="1120" dirty="0">
-                <a:solidFill>
-                  <a:srgbClr val="FFFFFF"/>
-                </a:solidFill>
-                <a:latin typeface="Arial"/>
-                <a:ea typeface="Arial"/>
-                <a:cs typeface="Arial"/>
-              </a:rPr>
-              <a:t>Ours = who is who inside a single</a:t>
-            </a:r>
             <a:br>
               <a:rPr lang="en-US" sz="1120" dirty="0">
                 <a:solidFill>
                   <a:srgbClr val="FFFFFF"/>
                 </a:solidFill>
-                <a:latin typeface="Arial"/>
-                <a:ea typeface="Arial"/>
-                <a:cs typeface="Arial"/>
+                <a:latin typeface="Arial" panose="020B0604020202090204"/>
+                <a:ea typeface="Arial" panose="020B0604020202090204"/>
+                <a:cs typeface="Arial" panose="020B0604020202090204"/>
               </a:rPr>
             </a:br>
             <a:r>
@@ -6251,20 +6996,20 @@
                 <a:solidFill>
                   <a:srgbClr val="FFFFFF"/>
                 </a:solidFill>
-                <a:latin typeface="Arial"/>
-                <a:ea typeface="Arial"/>
-                <a:cs typeface="Arial"/>
-              </a:rPr>
-              <a:t>sequence, i.e. the role each person</a:t>
+                <a:latin typeface="Arial" panose="020B0604020202090204"/>
+                <a:ea typeface="Arial" panose="020B0604020202090204"/>
+                <a:cs typeface="Arial" panose="020B0604020202090204"/>
+              </a:rPr>
+              <a:t>Ours = who is who inside a single</a:t>
             </a:r>
             <a:br>
               <a:rPr lang="en-US" sz="1120" dirty="0">
                 <a:solidFill>
                   <a:srgbClr val="FFFFFF"/>
                 </a:solidFill>
-                <a:latin typeface="Arial"/>
-                <a:ea typeface="Arial"/>
-                <a:cs typeface="Arial"/>
+                <a:latin typeface="Arial" panose="020B0604020202090204"/>
+                <a:ea typeface="Arial" panose="020B0604020202090204"/>
+                <a:cs typeface="Arial" panose="020B0604020202090204"/>
               </a:rPr>
             </a:br>
             <a:r>
@@ -6272,20 +7017,20 @@
                 <a:solidFill>
                   <a:srgbClr val="FFFFFF"/>
                 </a:solidFill>
-                <a:latin typeface="Arial"/>
-                <a:ea typeface="Arial"/>
-                <a:cs typeface="Arial"/>
-              </a:rPr>
-              <a:t>plays in the interaction.</a:t>
+                <a:latin typeface="Arial" panose="020B0604020202090204"/>
+                <a:ea typeface="Arial" panose="020B0604020202090204"/>
+                <a:cs typeface="Arial" panose="020B0604020202090204"/>
+              </a:rPr>
+              <a:t>sequence, i.e. the role each person</a:t>
             </a:r>
             <a:br>
               <a:rPr lang="en-US" sz="1120" dirty="0">
                 <a:solidFill>
                   <a:srgbClr val="FFFFFF"/>
                 </a:solidFill>
-                <a:latin typeface="Arial"/>
-                <a:ea typeface="Arial"/>
-                <a:cs typeface="Arial"/>
+                <a:latin typeface="Arial" panose="020B0604020202090204"/>
+                <a:ea typeface="Arial" panose="020B0604020202090204"/>
+                <a:cs typeface="Arial" panose="020B0604020202090204"/>
               </a:rPr>
             </a:br>
             <a:r>
@@ -6293,41 +7038,30 @@
                 <a:solidFill>
                   <a:srgbClr val="FFFFFF"/>
                 </a:solidFill>
-                <a:latin typeface="Arial"/>
-                <a:ea typeface="Arial"/>
-                <a:cs typeface="Arial"/>
-              </a:rPr>
-              <a:t xml:space="preserve"/>
+                <a:latin typeface="Arial" panose="020B0604020202090204"/>
+                <a:ea typeface="Arial" panose="020B0604020202090204"/>
+                <a:cs typeface="Arial" panose="020B0604020202090204"/>
+              </a:rPr>
+              <a:t>plays in the interaction.</a:t>
             </a:r>
             <a:br>
               <a:rPr lang="en-US" sz="1120" dirty="0">
                 <a:solidFill>
                   <a:srgbClr val="FFFFFF"/>
                 </a:solidFill>
-                <a:latin typeface="Arial"/>
-                <a:ea typeface="Arial"/>
-                <a:cs typeface="Arial"/>
+                <a:latin typeface="Arial" panose="020B0604020202090204"/>
+                <a:ea typeface="Arial" panose="020B0604020202090204"/>
+                <a:cs typeface="Arial" panose="020B0604020202090204"/>
               </a:rPr>
             </a:br>
-            <a:r>
-              <a:rPr lang="en-US" sz="1120" dirty="0">
-                <a:solidFill>
-                  <a:srgbClr val="FFFFFF"/>
-                </a:solidFill>
-                <a:latin typeface="Arial"/>
-                <a:ea typeface="Arial"/>
-                <a:cs typeface="Arial"/>
-              </a:rPr>
-              <a:t>Same word, different problem. So it</a:t>
-            </a:r>
             <a:br>
               <a:rPr lang="en-US" sz="1120" dirty="0">
                 <a:solidFill>
                   <a:srgbClr val="FFFFFF"/>
                 </a:solidFill>
-                <a:latin typeface="Arial"/>
-                <a:ea typeface="Arial"/>
-                <a:cs typeface="Arial"/>
+                <a:latin typeface="Arial" panose="020B0604020202090204"/>
+                <a:ea typeface="Arial" panose="020B0604020202090204"/>
+                <a:cs typeface="Arial" panose="020B0604020202090204"/>
               </a:rPr>
             </a:br>
             <a:r>
@@ -6335,12 +7069,41 @@
                 <a:solidFill>
                   <a:srgbClr val="FFFFFF"/>
                 </a:solidFill>
-                <a:latin typeface="Arial"/>
-                <a:ea typeface="Arial"/>
-                <a:cs typeface="Arial"/>
+                <a:latin typeface="Arial" panose="020B0604020202090204"/>
+                <a:ea typeface="Arial" panose="020B0604020202090204"/>
+                <a:cs typeface="Arial" panose="020B0604020202090204"/>
+              </a:rPr>
+              <a:t>Same word, different problem. So it</a:t>
+            </a:r>
+            <a:br>
+              <a:rPr lang="en-US" sz="1120" dirty="0">
+                <a:solidFill>
+                  <a:srgbClr val="FFFFFF"/>
+                </a:solidFill>
+                <a:latin typeface="Arial" panose="020B0604020202090204"/>
+                <a:ea typeface="Arial" panose="020B0604020202090204"/>
+                <a:cs typeface="Arial" panose="020B0604020202090204"/>
+              </a:rPr>
+            </a:br>
+            <a:r>
+              <a:rPr lang="en-US" sz="1120" dirty="0">
+                <a:solidFill>
+                  <a:srgbClr val="FFFFFF"/>
+                </a:solidFill>
+                <a:latin typeface="Arial" panose="020B0604020202090204"/>
+                <a:ea typeface="Arial" panose="020B0604020202090204"/>
+                <a:cs typeface="Arial" panose="020B0604020202090204"/>
               </a:rPr>
               <a:t>is related work, not our baseline.</a:t>
             </a:r>
+            <a:endParaRPr lang="en-US" sz="1120" dirty="0">
+              <a:solidFill>
+                <a:srgbClr val="FFFFFF"/>
+              </a:solidFill>
+              <a:latin typeface="Arial" panose="020B0604020202090204"/>
+              <a:ea typeface="Arial" panose="020B0604020202090204"/>
+              <a:cs typeface="Arial" panose="020B0604020202090204"/>
+            </a:endParaRPr>
           </a:p>
         </p:txBody>
       </p:sp>
@@ -6375,12 +7138,20 @@
                 <a:solidFill>
                   <a:srgbClr val="FFFFFF"/>
                 </a:solidFill>
-                <a:latin typeface="Arial"/>
-                <a:ea typeface="Arial"/>
-                <a:cs typeface="Arial"/>
+                <a:latin typeface="Arial" panose="020B0604020202090204"/>
+                <a:ea typeface="Arial" panose="020B0604020202090204"/>
+                <a:cs typeface="Arial" panose="020B0604020202090204"/>
               </a:rPr>
               <a:t>SkeletonX · IEEE TMM 2025 · arXiv:2504.11749</a:t>
             </a:r>
+            <a:endParaRPr lang="en-US" sz="900" dirty="0">
+              <a:solidFill>
+                <a:srgbClr val="FFFFFF"/>
+              </a:solidFill>
+              <a:latin typeface="Arial" panose="020B0604020202090204"/>
+              <a:ea typeface="Arial" panose="020B0604020202090204"/>
+              <a:cs typeface="Arial" panose="020B0604020202090204"/>
+            </a:endParaRPr>
           </a:p>
         </p:txBody>
       </p:sp>
@@ -6415,12 +7186,20 @@
                 <a:solidFill>
                   <a:srgbClr val="FFFFFF"/>
                 </a:solidFill>
-                <a:latin typeface="Arial"/>
-                <a:ea typeface="Arial"/>
-                <a:cs typeface="Arial"/>
+                <a:latin typeface="Arial" panose="020B0604020202090204"/>
+                <a:ea typeface="Arial" panose="020B0604020202090204"/>
+                <a:cs typeface="Arial" panose="020B0604020202090204"/>
               </a:rPr>
               <a:t>05</a:t>
             </a:r>
+            <a:endParaRPr lang="en-US" sz="900" dirty="0">
+              <a:solidFill>
+                <a:srgbClr val="FFFFFF"/>
+              </a:solidFill>
+              <a:latin typeface="Arial" panose="020B0604020202090204"/>
+              <a:ea typeface="Arial" panose="020B0604020202090204"/>
+              <a:cs typeface="Arial" panose="020B0604020202090204"/>
+            </a:endParaRPr>
           </a:p>
         </p:txBody>
       </p:sp>
@@ -6465,7 +7244,7 @@
           </a:fontRef>
         </p:style>
         <p:txBody>
-          <a:bodyPr rtlCol="0" anchor="ctr" wrap="square" lIns="54864" rIns="54864" tIns="27432" bIns="27432"/>
+          <a:bodyPr wrap="square" lIns="54864" tIns="27432" rIns="54864" bIns="27432" rtlCol="0" anchor="ctr"/>
           <a:lstStyle/>
           <a:p>
             <a:pPr algn="ctr"/>
@@ -6474,10 +7253,16 @@
                 <a:solidFill>
                   <a:srgbClr val="D71440"/>
                 </a:solidFill>
-                <a:latin typeface="Arial"/>
+                <a:latin typeface="Arial" panose="020B0604020202090204"/>
               </a:rPr>
               <a:t>SkeletonX  ·  training strategy</a:t>
             </a:r>
+            <a:endParaRPr sz="1200" b="1">
+              <a:solidFill>
+                <a:srgbClr val="D71440"/>
+              </a:solidFill>
+              <a:latin typeface="Arial" panose="020B0604020202090204"/>
+            </a:endParaRPr>
           </a:p>
         </p:txBody>
       </p:sp>
@@ -6542,7 +7327,7 @@
           <a:noFill/>
         </p:spPr>
         <p:txBody>
-          <a:bodyPr wrap="square" lIns="0" rIns="0" tIns="0" bIns="0">
+          <a:bodyPr wrap="square" lIns="0" tIns="0" rIns="0" bIns="0">
             <a:spAutoFit/>
           </a:bodyPr>
           <a:lstStyle/>
@@ -6553,10 +7338,16 @@
                 <a:solidFill>
                   <a:srgbClr val="5E6478"/>
                 </a:solidFill>
-                <a:latin typeface="Arial"/>
+                <a:latin typeface="Arial" panose="020B0604020202090204"/>
               </a:rPr>
               <a:t>plugs into</a:t>
             </a:r>
+            <a:endParaRPr sz="1000" b="0">
+              <a:solidFill>
+                <a:srgbClr val="5E6478"/>
+              </a:solidFill>
+              <a:latin typeface="Arial" panose="020B0604020202090204"/>
+            </a:endParaRPr>
           </a:p>
         </p:txBody>
       </p:sp>
@@ -6601,7 +7392,7 @@
           </a:fontRef>
         </p:style>
         <p:txBody>
-          <a:bodyPr rtlCol="0" anchor="ctr" wrap="square" lIns="54864" rIns="54864" tIns="27432" bIns="27432"/>
+          <a:bodyPr wrap="square" lIns="54864" tIns="27432" rIns="54864" bIns="27432" rtlCol="0" anchor="ctr"/>
           <a:lstStyle/>
           <a:p>
             <a:pPr algn="ctr"/>
@@ -6610,10 +7401,16 @@
                 <a:solidFill>
                   <a:srgbClr val="20243A"/>
                 </a:solidFill>
-                <a:latin typeface="Arial"/>
+                <a:latin typeface="Arial" panose="020B0604020202090204"/>
               </a:rPr>
               <a:t>ST-GCN</a:t>
             </a:r>
+            <a:endParaRPr sz="1200" b="1">
+              <a:solidFill>
+                <a:srgbClr val="20243A"/>
+              </a:solidFill>
+              <a:latin typeface="Arial" panose="020B0604020202090204"/>
+            </a:endParaRPr>
           </a:p>
         </p:txBody>
       </p:sp>
@@ -6656,7 +7453,7 @@
           </a:fontRef>
         </p:style>
         <p:txBody>
-          <a:bodyPr rtlCol="0" anchor="ctr" wrap="square" lIns="54864" rIns="54864" tIns="27432" bIns="27432"/>
+          <a:bodyPr wrap="square" lIns="54864" tIns="27432" rIns="54864" bIns="27432" rtlCol="0" anchor="ctr"/>
           <a:lstStyle/>
           <a:p>
             <a:pPr algn="ctr"/>
@@ -6665,10 +7462,16 @@
                 <a:solidFill>
                   <a:srgbClr val="FFFFFF"/>
                 </a:solidFill>
-                <a:latin typeface="Arial"/>
+                <a:latin typeface="Arial" panose="020B0604020202090204"/>
               </a:rPr>
               <a:t>CTR-GCN</a:t>
             </a:r>
+            <a:endParaRPr sz="1200" b="1">
+              <a:solidFill>
+                <a:srgbClr val="FFFFFF"/>
+              </a:solidFill>
+              <a:latin typeface="Arial" panose="020B0604020202090204"/>
+            </a:endParaRPr>
           </a:p>
         </p:txBody>
       </p:sp>
@@ -6713,7 +7516,7 @@
           </a:fontRef>
         </p:style>
         <p:txBody>
-          <a:bodyPr rtlCol="0" anchor="ctr" wrap="square" lIns="54864" rIns="54864" tIns="27432" bIns="27432"/>
+          <a:bodyPr wrap="square" lIns="54864" tIns="27432" rIns="54864" bIns="27432" rtlCol="0" anchor="ctr"/>
           <a:lstStyle/>
           <a:p>
             <a:pPr algn="ctr"/>
@@ -6722,10 +7525,16 @@
                 <a:solidFill>
                   <a:srgbClr val="20243A"/>
                 </a:solidFill>
-                <a:latin typeface="Arial"/>
+                <a:latin typeface="Arial" panose="020B0604020202090204"/>
               </a:rPr>
               <a:t>TCA-GCN</a:t>
             </a:r>
+            <a:endParaRPr sz="1200" b="1">
+              <a:solidFill>
+                <a:srgbClr val="20243A"/>
+              </a:solidFill>
+              <a:latin typeface="Arial" panose="020B0604020202090204"/>
+            </a:endParaRPr>
           </a:p>
         </p:txBody>
       </p:sp>
@@ -6790,7 +7599,7 @@
           <a:noFill/>
         </p:spPr>
         <p:txBody>
-          <a:bodyPr wrap="square" lIns="0" rIns="0" tIns="0" bIns="0">
+          <a:bodyPr wrap="square" lIns="0" tIns="0" rIns="0" bIns="0">
             <a:spAutoFit/>
           </a:bodyPr>
           <a:lstStyle/>
@@ -6801,10 +7610,16 @@
                 <a:solidFill>
                   <a:srgbClr val="D71440"/>
                 </a:solidFill>
-                <a:latin typeface="Arial"/>
+                <a:latin typeface="Arial" panose="020B0604020202090204"/>
               </a:rPr>
               <a:t>our backbone and baseline</a:t>
             </a:r>
+            <a:endParaRPr sz="1100" b="1">
+              <a:solidFill>
+                <a:srgbClr val="D71440"/>
+              </a:solidFill>
+              <a:latin typeface="Arial" panose="020B0604020202090204"/>
+            </a:endParaRPr>
           </a:p>
         </p:txBody>
       </p:sp>
@@ -6825,7 +7640,7 @@
           <a:noFill/>
         </p:spPr>
         <p:txBody>
-          <a:bodyPr wrap="square" lIns="0" rIns="0" tIns="0" bIns="0">
+          <a:bodyPr wrap="square" lIns="0" tIns="0" rIns="0" bIns="0">
             <a:spAutoFit/>
           </a:bodyPr>
           <a:lstStyle/>
@@ -6836,10 +7651,16 @@
                 <a:solidFill>
                   <a:srgbClr val="5E6478"/>
                 </a:solidFill>
-                <a:latin typeface="Arial"/>
+                <a:latin typeface="Arial" panose="020B0604020202090204"/>
               </a:rPr>
               <a:t>The backbone is an argument to the method, so</a:t>
             </a:r>
+            <a:endParaRPr sz="1050" b="0">
+              <a:solidFill>
+                <a:srgbClr val="5E6478"/>
+              </a:solidFill>
+              <a:latin typeface="Arial" panose="020B0604020202090204"/>
+            </a:endParaRPr>
           </a:p>
           <a:p>
             <a:pPr algn="l"/>
@@ -6848,10 +7669,16 @@
                 <a:solidFill>
                   <a:srgbClr val="5E6478"/>
                 </a:solidFill>
-                <a:latin typeface="Arial"/>
+                <a:latin typeface="Arial" panose="020B0604020202090204"/>
               </a:rPr>
               <a:t>"SkeletonX" alone does not define a runnable system.</a:t>
             </a:r>
+            <a:endParaRPr sz="1050" b="0">
+              <a:solidFill>
+                <a:srgbClr val="5E6478"/>
+              </a:solidFill>
+              <a:latin typeface="Arial" panose="020B0604020202090204"/>
+            </a:endParaRPr>
           </a:p>
         </p:txBody>
       </p:sp>
@@ -6919,7 +7746,7 @@
           <p:nvPr/>
         </p:nvPicPr>
         <p:blipFill>
-          <a:blip r:embed="rId2"/>
+          <a:blip r:embed="rId1"/>
           <a:stretch>
             <a:fillRect/>
           </a:stretch>
@@ -6987,12 +7814,20 @@
                 <a:solidFill>
                   <a:srgbClr val="FFFFFF"/>
                 </a:solidFill>
-                <a:latin typeface="Arial"/>
-                <a:ea typeface="Arial"/>
-                <a:cs typeface="Arial"/>
+                <a:latin typeface="Arial" panose="020B0604020202090204"/>
+                <a:ea typeface="Arial" panose="020B0604020202090204"/>
+                <a:cs typeface="Arial" panose="020B0604020202090204"/>
               </a:rPr>
               <a:t>EE6008 · HUMAN POSE ANALYTICS</a:t>
             </a:r>
+            <a:endParaRPr lang="en-US" sz="980" dirty="0">
+              <a:solidFill>
+                <a:srgbClr val="FFFFFF"/>
+              </a:solidFill>
+              <a:latin typeface="Arial" panose="020B0604020202090204"/>
+              <a:ea typeface="Arial" panose="020B0604020202090204"/>
+              <a:cs typeface="Arial" panose="020B0604020202090204"/>
+            </a:endParaRPr>
           </a:p>
         </p:txBody>
       </p:sp>
@@ -7145,12 +7980,20 @@
                 <a:solidFill>
                   <a:srgbClr val="D71440"/>
                 </a:solidFill>
-                <a:latin typeface="Arial"/>
-                <a:ea typeface="Arial"/>
-                <a:cs typeface="Arial"/>
+                <a:latin typeface="Arial" panose="020B0604020202090204"/>
+                <a:ea typeface="Arial" panose="020B0604020202090204"/>
+                <a:cs typeface="Arial" panose="020B0604020202090204"/>
               </a:rPr>
               <a:t>BASELINE DEFINITION</a:t>
             </a:r>
+            <a:endParaRPr lang="en-US" sz="900" b="1" dirty="0">
+              <a:solidFill>
+                <a:srgbClr val="D71440"/>
+              </a:solidFill>
+              <a:latin typeface="Arial" panose="020B0604020202090204"/>
+              <a:ea typeface="Arial" panose="020B0604020202090204"/>
+              <a:cs typeface="Arial" panose="020B0604020202090204"/>
+            </a:endParaRPr>
           </a:p>
         </p:txBody>
       </p:sp>
@@ -7185,12 +8028,20 @@
                 <a:solidFill>
                   <a:srgbClr val="181C62"/>
                 </a:solidFill>
-                <a:latin typeface="Arial"/>
-                <a:ea typeface="Arial"/>
-                <a:cs typeface="Arial"/>
+                <a:latin typeface="Arial" panose="020B0604020202090204"/>
+                <a:ea typeface="Arial" panose="020B0604020202090204"/>
+                <a:cs typeface="Arial" panose="020B0604020202090204"/>
               </a:rPr>
               <a:t>CODEBASE · DATA · TRAINING · EVALUATION</a:t>
             </a:r>
+            <a:endParaRPr lang="en-US" sz="980" b="1" dirty="0">
+              <a:solidFill>
+                <a:srgbClr val="181C62"/>
+              </a:solidFill>
+              <a:latin typeface="Arial" panose="020B0604020202090204"/>
+              <a:ea typeface="Arial" panose="020B0604020202090204"/>
+              <a:cs typeface="Arial" panose="020B0604020202090204"/>
+            </a:endParaRPr>
           </a:p>
         </p:txBody>
       </p:sp>
@@ -7225,12 +8076,20 @@
                 <a:solidFill>
                   <a:srgbClr val="FFFFFF"/>
                 </a:solidFill>
-                <a:latin typeface="Arial"/>
-                <a:ea typeface="Arial"/>
-                <a:cs typeface="Arial"/>
+                <a:latin typeface="Arial" panose="020B0604020202090204"/>
+                <a:ea typeface="Arial" panose="020B0604020202090204"/>
+                <a:cs typeface="Arial" panose="020B0604020202090204"/>
               </a:rPr>
               <a:t>KEY FINDINGS</a:t>
             </a:r>
+            <a:endParaRPr lang="en-US" sz="1050" b="1" dirty="0">
+              <a:solidFill>
+                <a:srgbClr val="FFFFFF"/>
+              </a:solidFill>
+              <a:latin typeface="Arial" panose="020B0604020202090204"/>
+              <a:ea typeface="Arial" panose="020B0604020202090204"/>
+              <a:cs typeface="Arial" panose="020B0604020202090204"/>
+            </a:endParaRPr>
           </a:p>
         </p:txBody>
       </p:sp>
@@ -7265,12 +8124,20 @@
                 <a:solidFill>
                   <a:srgbClr val="20243A"/>
                 </a:solidFill>
-                <a:latin typeface="Arial"/>
-                <a:ea typeface="Arial"/>
-                <a:cs typeface="Arial"/>
+                <a:latin typeface="Arial" panose="020B0604020202090204"/>
+                <a:ea typeface="Arial" panose="020B0604020202090204"/>
+                <a:cs typeface="Arial" panose="020B0604020202090204"/>
               </a:rPr>
               <a:t>CTR-GCN Baseline · Setup</a:t>
             </a:r>
+            <a:endParaRPr lang="en-US" sz="2550" b="1" dirty="0">
+              <a:solidFill>
+                <a:srgbClr val="20243A"/>
+              </a:solidFill>
+              <a:latin typeface="Arial" panose="020B0604020202090204"/>
+              <a:ea typeface="Arial" panose="020B0604020202090204"/>
+              <a:cs typeface="Arial" panose="020B0604020202090204"/>
+            </a:endParaRPr>
           </a:p>
         </p:txBody>
       </p:sp>
@@ -7305,12 +8172,20 @@
                 <a:solidFill>
                   <a:srgbClr val="D71440"/>
                 </a:solidFill>
-                <a:latin typeface="Arial"/>
-                <a:ea typeface="Arial"/>
-                <a:cs typeface="Arial"/>
+                <a:latin typeface="Arial" panose="020B0604020202090204"/>
+                <a:ea typeface="Arial" panose="020B0604020202090204"/>
+                <a:cs typeface="Arial" panose="020B0604020202090204"/>
               </a:rPr>
               <a:t>CTR-GCN · joint stream only · NTU RGB+D 120 mutual subset (26 classes) · X-Sub</a:t>
             </a:r>
+            <a:endParaRPr lang="en-US" sz="1580" b="1" dirty="0">
+              <a:solidFill>
+                <a:srgbClr val="D71440"/>
+              </a:solidFill>
+              <a:latin typeface="Arial" panose="020B0604020202090204"/>
+              <a:ea typeface="Arial" panose="020B0604020202090204"/>
+              <a:cs typeface="Arial" panose="020B0604020202090204"/>
+            </a:endParaRPr>
           </a:p>
         </p:txBody>
       </p:sp>
@@ -7349,12 +8224,20 @@
                 <a:solidFill>
                   <a:srgbClr val="5E6478"/>
                 </a:solidFill>
-                <a:latin typeface="Arial"/>
-                <a:ea typeface="Arial"/>
-                <a:cs typeface="Arial"/>
+                <a:latin typeface="Arial" panose="020B0604020202090204"/>
+                <a:ea typeface="Arial" panose="020B0604020202090204"/>
+                <a:cs typeface="Arial" panose="020B0604020202090204"/>
               </a:rPr>
               <a:t>Repository already mapped</a:t>
             </a:r>
+            <a:endParaRPr lang="en-US" sz="1420" dirty="0">
+              <a:solidFill>
+                <a:srgbClr val="5E6478"/>
+              </a:solidFill>
+              <a:latin typeface="Arial" panose="020B0604020202090204"/>
+              <a:ea typeface="Arial" panose="020B0604020202090204"/>
+              <a:cs typeface="Arial" panose="020B0604020202090204"/>
+            </a:endParaRPr>
           </a:p>
           <a:p>
             <a:pPr algn="l">
@@ -7370,9 +8253,9 @@
                 <a:solidFill>
                   <a:srgbClr val="5E6478"/>
                 </a:solidFill>
-                <a:latin typeface="Arial"/>
-                <a:ea typeface="Arial"/>
-                <a:cs typeface="Arial"/>
+                <a:latin typeface="Arial" panose="020B0604020202090204"/>
+                <a:ea typeface="Arial" panose="020B0604020202090204"/>
+                <a:cs typeface="Arial" panose="020B0604020202090204"/>
               </a:rPr>
               <a:t>main.py (train / test entry)  ·  config/ (per-dataset yaml)  ·  model/ (CTR-GCN)  ·  feeders/ (data loading)</a:t>
             </a:r>
@@ -7381,9 +8264,9 @@
                 <a:solidFill>
                   <a:srgbClr val="5E6478"/>
                 </a:solidFill>
-                <a:latin typeface="Arial"/>
-                <a:ea typeface="Arial"/>
-                <a:cs typeface="Arial"/>
+                <a:latin typeface="Arial" panose="020B0604020202090204"/>
+                <a:ea typeface="Arial" panose="020B0604020202090204"/>
+                <a:cs typeface="Arial" panose="020B0604020202090204"/>
               </a:rPr>
             </a:br>
             <a:r>
@@ -7391,12 +8274,20 @@
                 <a:solidFill>
                   <a:srgbClr val="5E6478"/>
                 </a:solidFill>
-                <a:latin typeface="Arial"/>
-                <a:ea typeface="Arial"/>
-                <a:cs typeface="Arial"/>
+                <a:latin typeface="Arial" panose="020B0604020202090204"/>
+                <a:ea typeface="Arial" panose="020B0604020202090204"/>
+                <a:cs typeface="Arial" panose="020B0604020202090204"/>
               </a:rPr>
               <a:t>graph/ (skeleton topology)  ·  data/ (preprocessing scripts)  ·  ensemble.py (multi-stream late fusion)</a:t>
             </a:r>
+            <a:endParaRPr lang="en-US" sz="1050" dirty="0">
+              <a:solidFill>
+                <a:srgbClr val="5E6478"/>
+              </a:solidFill>
+              <a:latin typeface="Arial" panose="020B0604020202090204"/>
+              <a:ea typeface="Arial" panose="020B0604020202090204"/>
+              <a:cs typeface="Arial" panose="020B0604020202090204"/>
+            </a:endParaRPr>
           </a:p>
         </p:txBody>
       </p:sp>
@@ -7408,7 +8299,7 @@
         </p:nvSpPr>
         <p:spPr>
           <a:xfrm>
-            <a:off x="8469630" y="3076575"/>
+            <a:off x="8469630" y="2945130"/>
             <a:ext cx="2376424" cy="1112520"/>
           </a:xfrm>
           <a:prstGeom prst="rect">
@@ -7435,12 +8326,20 @@
                 <a:solidFill>
                   <a:srgbClr val="20243A"/>
                 </a:solidFill>
-                <a:latin typeface="Arial"/>
-                <a:ea typeface="Arial"/>
-                <a:cs typeface="Arial"/>
+                <a:latin typeface="Arial" panose="020B0604020202090204"/>
+                <a:ea typeface="Arial" panose="020B0604020202090204"/>
+                <a:cs typeface="Arial" panose="020B0604020202090204"/>
               </a:rPr>
               <a:t>Reproduction risks</a:t>
             </a:r>
+            <a:endParaRPr lang="en-US" sz="1500" dirty="0">
+              <a:solidFill>
+                <a:srgbClr val="20243A"/>
+              </a:solidFill>
+              <a:latin typeface="Arial" panose="020B0604020202090204"/>
+              <a:ea typeface="Arial" panose="020B0604020202090204"/>
+              <a:cs typeface="Arial" panose="020B0604020202090204"/>
+            </a:endParaRPr>
           </a:p>
           <a:p>
             <a:pPr algn="l">
@@ -7456,9 +8355,9 @@
                 <a:solidFill>
                   <a:srgbClr val="5E6478"/>
                 </a:solidFill>
-                <a:latin typeface="Arial"/>
-                <a:ea typeface="Arial"/>
-                <a:cs typeface="Arial"/>
+                <a:latin typeface="Arial" panose="020B0604020202090204"/>
+                <a:ea typeface="Arial" panose="020B0604020202090204"/>
+                <a:cs typeface="Arial" panose="020B0604020202090204"/>
               </a:rPr>
               <a:t>1 · Headline numbers use four-</a:t>
             </a:r>
@@ -7467,9 +8366,9 @@
                 <a:solidFill>
                   <a:srgbClr val="5E6478"/>
                 </a:solidFill>
-                <a:latin typeface="Arial"/>
-                <a:ea typeface="Arial"/>
-                <a:cs typeface="Arial"/>
+                <a:latin typeface="Arial" panose="020B0604020202090204"/>
+                <a:ea typeface="Arial" panose="020B0604020202090204"/>
+                <a:cs typeface="Arial" panose="020B0604020202090204"/>
               </a:rPr>
             </a:br>
             <a:r>
@@ -7477,9 +8376,9 @@
                 <a:solidFill>
                   <a:srgbClr val="5E6478"/>
                 </a:solidFill>
-                <a:latin typeface="Arial"/>
-                <a:ea typeface="Arial"/>
-                <a:cs typeface="Arial"/>
+                <a:latin typeface="Arial" panose="020B0604020202090204"/>
+                <a:ea typeface="Arial" panose="020B0604020202090204"/>
+                <a:cs typeface="Arial" panose="020B0604020202090204"/>
               </a:rPr>
               <a:t>stream fusion; single stream is</a:t>
             </a:r>
@@ -7488,9 +8387,9 @@
                 <a:solidFill>
                   <a:srgbClr val="5E6478"/>
                 </a:solidFill>
-                <a:latin typeface="Arial"/>
-                <a:ea typeface="Arial"/>
-                <a:cs typeface="Arial"/>
+                <a:latin typeface="Arial" panose="020B0604020202090204"/>
+                <a:ea typeface="Arial" panose="020B0604020202090204"/>
+                <a:cs typeface="Arial" panose="020B0604020202090204"/>
               </a:rPr>
             </a:br>
             <a:r>
@@ -7498,9 +8397,9 @@
                 <a:solidFill>
                   <a:srgbClr val="5E6478"/>
                 </a:solidFill>
-                <a:latin typeface="Arial"/>
-                <a:ea typeface="Arial"/>
-                <a:cs typeface="Arial"/>
+                <a:latin typeface="Arial" panose="020B0604020202090204"/>
+                <a:ea typeface="Arial" panose="020B0604020202090204"/>
+                <a:cs typeface="Arial" panose="020B0604020202090204"/>
               </a:rPr>
               <a:t>lower. We state which we ran.</a:t>
             </a:r>
@@ -7509,30 +8408,19 @@
                 <a:solidFill>
                   <a:srgbClr val="5E6478"/>
                 </a:solidFill>
-                <a:latin typeface="Arial"/>
-                <a:ea typeface="Arial"/>
-                <a:cs typeface="Arial"/>
+                <a:latin typeface="Arial" panose="020B0604020202090204"/>
+                <a:ea typeface="Arial" panose="020B0604020202090204"/>
+                <a:cs typeface="Arial" panose="020B0604020202090204"/>
               </a:rPr>
             </a:br>
-            <a:r>
-              <a:rPr lang="en-US" sz="1120" dirty="0">
-                <a:solidFill>
-                  <a:srgbClr val="5E6478"/>
-                </a:solidFill>
-                <a:latin typeface="Arial"/>
-                <a:ea typeface="Arial"/>
-                <a:cs typeface="Arial"/>
-              </a:rPr>
-              <a:t xml:space="preserve"/>
-            </a:r>
             <a:br>
               <a:rPr lang="en-US" sz="1120" dirty="0">
                 <a:solidFill>
                   <a:srgbClr val="5E6478"/>
                 </a:solidFill>
-                <a:latin typeface="Arial"/>
-                <a:ea typeface="Arial"/>
-                <a:cs typeface="Arial"/>
+                <a:latin typeface="Arial" panose="020B0604020202090204"/>
+                <a:ea typeface="Arial" panose="020B0604020202090204"/>
+                <a:cs typeface="Arial" panose="020B0604020202090204"/>
               </a:rPr>
             </a:br>
             <a:r>
@@ -7540,9 +8428,9 @@
                 <a:solidFill>
                   <a:srgbClr val="5E6478"/>
                 </a:solidFill>
-                <a:latin typeface="Arial"/>
-                <a:ea typeface="Arial"/>
-                <a:cs typeface="Arial"/>
+                <a:latin typeface="Arial" panose="020B0604020202090204"/>
+                <a:ea typeface="Arial" panose="020B0604020202090204"/>
+                <a:cs typeface="Arial" panose="020B0604020202090204"/>
               </a:rPr>
               <a:t>2 · ensemble.py aligns streams</a:t>
             </a:r>
@@ -7551,9 +8439,9 @@
                 <a:solidFill>
                   <a:srgbClr val="5E6478"/>
                 </a:solidFill>
-                <a:latin typeface="Arial"/>
-                <a:ea typeface="Arial"/>
-                <a:cs typeface="Arial"/>
+                <a:latin typeface="Arial" panose="020B0604020202090204"/>
+                <a:ea typeface="Arial" panose="020B0604020202090204"/>
+                <a:cs typeface="Arial" panose="020B0604020202090204"/>
               </a:rPr>
             </a:br>
             <a:r>
@@ -7561,9 +8449,9 @@
                 <a:solidFill>
                   <a:srgbClr val="5E6478"/>
                 </a:solidFill>
-                <a:latin typeface="Arial"/>
-                <a:ea typeface="Arial"/>
-                <a:cs typeface="Arial"/>
+                <a:latin typeface="Arial" panose="020B0604020202090204"/>
+                <a:ea typeface="Arial" panose="020B0604020202090204"/>
+                <a:cs typeface="Arial" panose="020B0604020202090204"/>
               </a:rPr>
               <a:t>by row index, not sample name.</a:t>
             </a:r>
@@ -7572,9 +8460,9 @@
                 <a:solidFill>
                   <a:srgbClr val="5E6478"/>
                 </a:solidFill>
-                <a:latin typeface="Arial"/>
-                <a:ea typeface="Arial"/>
-                <a:cs typeface="Arial"/>
+                <a:latin typeface="Arial" panose="020B0604020202090204"/>
+                <a:ea typeface="Arial" panose="020B0604020202090204"/>
+                <a:cs typeface="Arial" panose="020B0604020202090204"/>
               </a:rPr>
             </a:br>
             <a:r>
@@ -7582,9 +8470,9 @@
                 <a:solidFill>
                   <a:srgbClr val="5E6478"/>
                 </a:solidFill>
-                <a:latin typeface="Arial"/>
-                <a:ea typeface="Arial"/>
-                <a:cs typeface="Arial"/>
+                <a:latin typeface="Arial" panose="020B0604020202090204"/>
+                <a:ea typeface="Arial" panose="020B0604020202090204"/>
+                <a:cs typeface="Arial" panose="020B0604020202090204"/>
               </a:rPr>
               <a:t>Test order must never change.</a:t>
             </a:r>
@@ -7593,30 +8481,19 @@
                 <a:solidFill>
                   <a:srgbClr val="5E6478"/>
                 </a:solidFill>
-                <a:latin typeface="Arial"/>
-                <a:ea typeface="Arial"/>
-                <a:cs typeface="Arial"/>
+                <a:latin typeface="Arial" panose="020B0604020202090204"/>
+                <a:ea typeface="Arial" panose="020B0604020202090204"/>
+                <a:cs typeface="Arial" panose="020B0604020202090204"/>
               </a:rPr>
             </a:br>
-            <a:r>
-              <a:rPr lang="en-US" sz="1120" dirty="0">
-                <a:solidFill>
-                  <a:srgbClr val="5E6478"/>
-                </a:solidFill>
-                <a:latin typeface="Arial"/>
-                <a:ea typeface="Arial"/>
-                <a:cs typeface="Arial"/>
-              </a:rPr>
-              <a:t xml:space="preserve"/>
-            </a:r>
             <a:br>
               <a:rPr lang="en-US" sz="1120" dirty="0">
                 <a:solidFill>
                   <a:srgbClr val="5E6478"/>
                 </a:solidFill>
-                <a:latin typeface="Arial"/>
-                <a:ea typeface="Arial"/>
-                <a:cs typeface="Arial"/>
+                <a:latin typeface="Arial" panose="020B0604020202090204"/>
+                <a:ea typeface="Arial" panose="020B0604020202090204"/>
+                <a:cs typeface="Arial" panose="020B0604020202090204"/>
               </a:rPr>
             </a:br>
             <a:r>
@@ -7624,9 +8501,9 @@
                 <a:solidFill>
                   <a:srgbClr val="5E6478"/>
                 </a:solidFill>
-                <a:latin typeface="Arial"/>
-                <a:ea typeface="Arial"/>
-                <a:cs typeface="Arial"/>
+                <a:latin typeface="Arial" panose="020B0604020202090204"/>
+                <a:ea typeface="Arial" panose="020B0604020202090204"/>
+                <a:cs typeface="Arial" panose="020B0604020202090204"/>
               </a:rPr>
               <a:t>3 · No official mutual subset —</a:t>
             </a:r>
@@ -7635,9 +8512,9 @@
                 <a:solidFill>
                   <a:srgbClr val="5E6478"/>
                 </a:solidFill>
-                <a:latin typeface="Arial"/>
-                <a:ea typeface="Arial"/>
-                <a:cs typeface="Arial"/>
+                <a:latin typeface="Arial" panose="020B0604020202090204"/>
+                <a:ea typeface="Arial" panose="020B0604020202090204"/>
+                <a:cs typeface="Arial" panose="020B0604020202090204"/>
               </a:rPr>
             </a:br>
             <a:r>
@@ -7645,12 +8522,20 @@
                 <a:solidFill>
                   <a:srgbClr val="5E6478"/>
                 </a:solidFill>
-                <a:latin typeface="Arial"/>
-                <a:ea typeface="Arial"/>
-                <a:cs typeface="Arial"/>
+                <a:latin typeface="Arial" panose="020B0604020202090204"/>
+                <a:ea typeface="Arial" panose="020B0604020202090204"/>
+                <a:cs typeface="Arial" panose="020B0604020202090204"/>
               </a:rPr>
               <a:t>our filter rule goes in report.</a:t>
             </a:r>
+            <a:endParaRPr lang="en-US" sz="1120" dirty="0">
+              <a:solidFill>
+                <a:srgbClr val="5E6478"/>
+              </a:solidFill>
+              <a:latin typeface="Arial" panose="020B0604020202090204"/>
+              <a:ea typeface="Arial" panose="020B0604020202090204"/>
+              <a:cs typeface="Arial" panose="020B0604020202090204"/>
+            </a:endParaRPr>
           </a:p>
         </p:txBody>
       </p:sp>
@@ -7685,12 +8570,20 @@
                 <a:solidFill>
                   <a:srgbClr val="FFFFFF"/>
                 </a:solidFill>
-                <a:latin typeface="Arial"/>
-                <a:ea typeface="Arial"/>
-                <a:cs typeface="Arial"/>
+                <a:latin typeface="Arial" panose="020B0604020202090204"/>
+                <a:ea typeface="Arial" panose="020B0604020202090204"/>
+                <a:cs typeface="Arial" panose="020B0604020202090204"/>
               </a:rPr>
               <a:t>CTR-GCN · Chen et al., ICCV 2021</a:t>
             </a:r>
+            <a:endParaRPr lang="en-US" sz="900" dirty="0">
+              <a:solidFill>
+                <a:srgbClr val="FFFFFF"/>
+              </a:solidFill>
+              <a:latin typeface="Arial" panose="020B0604020202090204"/>
+              <a:ea typeface="Arial" panose="020B0604020202090204"/>
+              <a:cs typeface="Arial" panose="020B0604020202090204"/>
+            </a:endParaRPr>
           </a:p>
         </p:txBody>
       </p:sp>
@@ -7725,12 +8618,20 @@
                 <a:solidFill>
                   <a:srgbClr val="FFFFFF"/>
                 </a:solidFill>
-                <a:latin typeface="Arial"/>
-                <a:ea typeface="Arial"/>
-                <a:cs typeface="Arial"/>
+                <a:latin typeface="Arial" panose="020B0604020202090204"/>
+                <a:ea typeface="Arial" panose="020B0604020202090204"/>
+                <a:cs typeface="Arial" panose="020B0604020202090204"/>
               </a:rPr>
               <a:t>06</a:t>
             </a:r>
+            <a:endParaRPr lang="en-US" sz="900" dirty="0">
+              <a:solidFill>
+                <a:srgbClr val="FFFFFF"/>
+              </a:solidFill>
+              <a:latin typeface="Arial" panose="020B0604020202090204"/>
+              <a:ea typeface="Arial" panose="020B0604020202090204"/>
+              <a:cs typeface="Arial" panose="020B0604020202090204"/>
+            </a:endParaRPr>
           </a:p>
         </p:txBody>
       </p:sp>
@@ -7773,7 +8674,7 @@
           </a:fontRef>
         </p:style>
         <p:txBody>
-          <a:bodyPr rtlCol="0" anchor="ctr" wrap="square" lIns="54864" rIns="54864" tIns="27432" bIns="27432"/>
+          <a:bodyPr wrap="square" lIns="54864" tIns="27432" rIns="54864" bIns="27432" rtlCol="0" anchor="ctr"/>
           <a:lstStyle/>
           <a:p>
             <a:pPr algn="ctr"/>
@@ -7782,10 +8683,16 @@
                 <a:solidFill>
                   <a:srgbClr val="20243A"/>
                 </a:solidFill>
-                <a:latin typeface="Arial"/>
+                <a:latin typeface="Arial" panose="020B0604020202090204"/>
               </a:rPr>
               <a:t>data/</a:t>
             </a:r>
+            <a:endParaRPr sz="1150" b="1">
+              <a:solidFill>
+                <a:srgbClr val="20243A"/>
+              </a:solidFill>
+              <a:latin typeface="Arial" panose="020B0604020202090204"/>
+            </a:endParaRPr>
           </a:p>
           <a:p>
             <a:pPr algn="ctr"/>
@@ -7794,10 +8701,16 @@
                 <a:solidFill>
                   <a:srgbClr val="5E6478"/>
                 </a:solidFill>
-                <a:latin typeface="Arial"/>
+                <a:latin typeface="Arial" panose="020B0604020202090204"/>
               </a:rPr>
               <a:t>.skeleton → denoise</a:t>
             </a:r>
+            <a:endParaRPr sz="900" b="0">
+              <a:solidFill>
+                <a:srgbClr val="5E6478"/>
+              </a:solidFill>
+              <a:latin typeface="Arial" panose="020B0604020202090204"/>
+            </a:endParaRPr>
           </a:p>
           <a:p>
             <a:pPr algn="ctr"/>
@@ -7806,10 +8719,16 @@
                 <a:solidFill>
                   <a:srgbClr val="5E6478"/>
                 </a:solidFill>
-                <a:latin typeface="Arial"/>
+                <a:latin typeface="Arial" panose="020B0604020202090204"/>
               </a:rPr>
               <a:t>→ .npz</a:t>
             </a:r>
+            <a:endParaRPr sz="900" b="0">
+              <a:solidFill>
+                <a:srgbClr val="5E6478"/>
+              </a:solidFill>
+              <a:latin typeface="Arial" panose="020B0604020202090204"/>
+            </a:endParaRPr>
           </a:p>
         </p:txBody>
       </p:sp>
@@ -7898,7 +8817,7 @@
           </a:fontRef>
         </p:style>
         <p:txBody>
-          <a:bodyPr rtlCol="0" anchor="ctr" wrap="square" lIns="54864" rIns="54864" tIns="27432" bIns="27432"/>
+          <a:bodyPr wrap="square" lIns="54864" tIns="27432" rIns="54864" bIns="27432" rtlCol="0" anchor="ctr"/>
           <a:lstStyle/>
           <a:p>
             <a:pPr algn="ctr"/>
@@ -7907,10 +8826,16 @@
                 <a:solidFill>
                   <a:srgbClr val="20243A"/>
                 </a:solidFill>
-                <a:latin typeface="Arial"/>
+                <a:latin typeface="Arial" panose="020B0604020202090204"/>
               </a:rPr>
               <a:t>feeders/</a:t>
             </a:r>
+            <a:endParaRPr sz="1150" b="1">
+              <a:solidFill>
+                <a:srgbClr val="20243A"/>
+              </a:solidFill>
+              <a:latin typeface="Arial" panose="020B0604020202090204"/>
+            </a:endParaRPr>
           </a:p>
           <a:p>
             <a:pPr algn="ctr"/>
@@ -7919,10 +8844,16 @@
                 <a:solidFill>
                   <a:srgbClr val="5E6478"/>
                 </a:solidFill>
-                <a:latin typeface="Arial"/>
+                <a:latin typeface="Arial" panose="020B0604020202090204"/>
               </a:rPr>
               <a:t>joint | bone</a:t>
             </a:r>
+            <a:endParaRPr sz="900" b="0">
+              <a:solidFill>
+                <a:srgbClr val="5E6478"/>
+              </a:solidFill>
+              <a:latin typeface="Arial" panose="020B0604020202090204"/>
+            </a:endParaRPr>
           </a:p>
           <a:p>
             <a:pPr algn="ctr"/>
@@ -7931,10 +8862,16 @@
                 <a:solidFill>
                   <a:srgbClr val="5E6478"/>
                 </a:solidFill>
-                <a:latin typeface="Arial"/>
+                <a:latin typeface="Arial" panose="020B0604020202090204"/>
               </a:rPr>
               <a:t>joint-mot. | bone-mot.</a:t>
             </a:r>
+            <a:endParaRPr sz="900" b="0">
+              <a:solidFill>
+                <a:srgbClr val="5E6478"/>
+              </a:solidFill>
+              <a:latin typeface="Arial" panose="020B0604020202090204"/>
+            </a:endParaRPr>
           </a:p>
         </p:txBody>
       </p:sp>
@@ -8021,7 +8958,7 @@
           </a:fontRef>
         </p:style>
         <p:txBody>
-          <a:bodyPr rtlCol="0" anchor="ctr" wrap="square" lIns="54864" rIns="54864" tIns="27432" bIns="27432"/>
+          <a:bodyPr wrap="square" lIns="54864" tIns="27432" rIns="54864" bIns="27432" rtlCol="0" anchor="ctr"/>
           <a:lstStyle/>
           <a:p>
             <a:pPr algn="ctr"/>
@@ -8030,10 +8967,16 @@
                 <a:solidFill>
                   <a:srgbClr val="20243A"/>
                 </a:solidFill>
-                <a:latin typeface="Arial"/>
+                <a:latin typeface="Arial" panose="020B0604020202090204"/>
               </a:rPr>
               <a:t>model/ + main.py</a:t>
             </a:r>
+            <a:endParaRPr sz="1150" b="1">
+              <a:solidFill>
+                <a:srgbClr val="20243A"/>
+              </a:solidFill>
+              <a:latin typeface="Arial" panose="020B0604020202090204"/>
+            </a:endParaRPr>
           </a:p>
           <a:p>
             <a:pPr algn="ctr"/>
@@ -8042,10 +8985,16 @@
                 <a:solidFill>
                   <a:srgbClr val="5E6478"/>
                 </a:solidFill>
-                <a:latin typeface="Arial"/>
+                <a:latin typeface="Arial" panose="020B0604020202090204"/>
               </a:rPr>
               <a:t>CTR-GCN, SGD+Nesterov</a:t>
             </a:r>
+            <a:endParaRPr sz="900" b="0">
+              <a:solidFill>
+                <a:srgbClr val="5E6478"/>
+              </a:solidFill>
+              <a:latin typeface="Arial" panose="020B0604020202090204"/>
+            </a:endParaRPr>
           </a:p>
           <a:p>
             <a:pPr algn="ctr"/>
@@ -8054,10 +9003,16 @@
                 <a:solidFill>
                   <a:srgbClr val="5E6478"/>
                 </a:solidFill>
-                <a:latin typeface="Arial"/>
+                <a:latin typeface="Arial" panose="020B0604020202090204"/>
               </a:rPr>
               <a:t>65 epochs, lr 0.1</a:t>
             </a:r>
+            <a:endParaRPr sz="900" b="0">
+              <a:solidFill>
+                <a:srgbClr val="5E6478"/>
+              </a:solidFill>
+              <a:latin typeface="Arial" panose="020B0604020202090204"/>
+            </a:endParaRPr>
           </a:p>
         </p:txBody>
       </p:sp>
@@ -8146,7 +9101,7 @@
           </a:fontRef>
         </p:style>
         <p:txBody>
-          <a:bodyPr rtlCol="0" anchor="ctr" wrap="square" lIns="54864" rIns="54864" tIns="27432" bIns="27432"/>
+          <a:bodyPr wrap="square" lIns="54864" tIns="27432" rIns="54864" bIns="27432" rtlCol="0" anchor="ctr"/>
           <a:lstStyle/>
           <a:p>
             <a:pPr algn="ctr"/>
@@ -8155,10 +9110,16 @@
                 <a:solidFill>
                   <a:srgbClr val="5E6478"/>
                 </a:solidFill>
-                <a:latin typeface="Arial"/>
+                <a:latin typeface="Arial" panose="020B0604020202090204"/>
               </a:rPr>
               <a:t>ensemble.py</a:t>
             </a:r>
+            <a:endParaRPr sz="1150" b="1">
+              <a:solidFill>
+                <a:srgbClr val="5E6478"/>
+              </a:solidFill>
+              <a:latin typeface="Arial" panose="020B0604020202090204"/>
+            </a:endParaRPr>
           </a:p>
           <a:p>
             <a:pPr algn="ctr"/>
@@ -8167,10 +9128,16 @@
                 <a:solidFill>
                   <a:srgbClr val="5E6478"/>
                 </a:solidFill>
-                <a:latin typeface="Arial"/>
+                <a:latin typeface="Arial" panose="020B0604020202090204"/>
               </a:rPr>
               <a:t>weighted late fusion</a:t>
             </a:r>
+            <a:endParaRPr sz="900" b="0">
+              <a:solidFill>
+                <a:srgbClr val="5E6478"/>
+              </a:solidFill>
+              <a:latin typeface="Arial" panose="020B0604020202090204"/>
+            </a:endParaRPr>
           </a:p>
           <a:p>
             <a:pPr algn="ctr"/>
@@ -8179,10 +9146,16 @@
                 <a:solidFill>
                   <a:srgbClr val="5E6478"/>
                 </a:solidFill>
-                <a:latin typeface="Arial"/>
+                <a:latin typeface="Arial" panose="020B0604020202090204"/>
               </a:rPr>
               <a:t>0.6 / 0.6 / 0.4 / 0.4</a:t>
             </a:r>
+            <a:endParaRPr sz="900" b="0">
+              <a:solidFill>
+                <a:srgbClr val="5E6478"/>
+              </a:solidFill>
+              <a:latin typeface="Arial" panose="020B0604020202090204"/>
+            </a:endParaRPr>
           </a:p>
         </p:txBody>
       </p:sp>
@@ -8203,7 +9176,7 @@
           <a:noFill/>
         </p:spPr>
         <p:txBody>
-          <a:bodyPr wrap="square" lIns="0" rIns="0" tIns="0" bIns="0">
+          <a:bodyPr wrap="square" lIns="0" tIns="0" rIns="0" bIns="0">
             <a:spAutoFit/>
           </a:bodyPr>
           <a:lstStyle/>
@@ -8214,10 +9187,16 @@
                 <a:solidFill>
                   <a:srgbClr val="D71440"/>
                 </a:solidFill>
-                <a:latin typeface="Arial"/>
+                <a:latin typeface="Arial" panose="020B0604020202090204"/>
               </a:rPr>
               <a:t>Week 4: joint only</a:t>
             </a:r>
+            <a:endParaRPr sz="1000" b="1">
+              <a:solidFill>
+                <a:srgbClr val="D71440"/>
+              </a:solidFill>
+              <a:latin typeface="Arial" panose="020B0604020202090204"/>
+            </a:endParaRPr>
           </a:p>
         </p:txBody>
       </p:sp>
@@ -8238,7 +9217,7 @@
           <a:noFill/>
         </p:spPr>
         <p:txBody>
-          <a:bodyPr wrap="square" lIns="0" rIns="0" tIns="0" bIns="0">
+          <a:bodyPr wrap="square" lIns="0" tIns="0" rIns="0" bIns="0">
             <a:spAutoFit/>
           </a:bodyPr>
           <a:lstStyle/>
@@ -8249,10 +9228,16 @@
                 <a:solidFill>
                   <a:srgbClr val="5E6478"/>
                 </a:solidFill>
-                <a:latin typeface="Arial"/>
+                <a:latin typeface="Arial" panose="020B0604020202090204"/>
               </a:rPr>
               <a:t>Four-stream fusion is how CTR-GCN reports its SOTA numbers; we defer it and state the</a:t>
             </a:r>
+            <a:endParaRPr sz="1050" b="0">
+              <a:solidFill>
+                <a:srgbClr val="5E6478"/>
+              </a:solidFill>
+              <a:latin typeface="Arial" panose="020B0604020202090204"/>
+            </a:endParaRPr>
           </a:p>
           <a:p>
             <a:pPr algn="l">
@@ -8265,13 +9250,43 @@
                 <a:solidFill>
                   <a:srgbClr val="5E6478"/>
                 </a:solidFill>
-                <a:latin typeface="Arial"/>
+                <a:latin typeface="Arial" panose="020B0604020202090204"/>
               </a:rPr>
               <a:t>single-stream setting explicitly so our results stay internally comparable.</a:t>
             </a:r>
-          </a:p>
-        </p:txBody>
-      </p:sp>
+            <a:endParaRPr sz="1050" b="0">
+              <a:solidFill>
+                <a:srgbClr val="5E6478"/>
+              </a:solidFill>
+              <a:latin typeface="Arial" panose="020B0604020202090204"/>
+            </a:endParaRPr>
+          </a:p>
+        </p:txBody>
+      </p:sp>
+      <p:pic>
+        <p:nvPicPr>
+          <p:cNvPr id="29" name="图片 28" descr="截屏2026-09-07 11.11.31"/>
+          <p:cNvPicPr>
+            <a:picLocks noChangeAspect="1"/>
+          </p:cNvPicPr>
+          <p:nvPr/>
+        </p:nvPicPr>
+        <p:blipFill>
+          <a:blip r:embed="rId2"/>
+          <a:stretch>
+            <a:fillRect/>
+          </a:stretch>
+        </p:blipFill>
+        <p:spPr>
+          <a:xfrm>
+            <a:off x="6153785" y="4991100"/>
+            <a:ext cx="1524000" cy="887730"/>
+          </a:xfrm>
+          <a:prstGeom prst="rect">
+            <a:avLst/>
+          </a:prstGeom>
+        </p:spPr>
+      </p:pic>
     </p:spTree>
   </p:cSld>
   <p:clrMapOvr>
@@ -8336,7 +9351,7 @@
           <p:nvPr/>
         </p:nvPicPr>
         <p:blipFill>
-          <a:blip r:embed="rId2"/>
+          <a:blip r:embed="rId1"/>
           <a:stretch>
             <a:fillRect/>
           </a:stretch>
@@ -8404,12 +9419,20 @@
                 <a:solidFill>
                   <a:srgbClr val="FFFFFF"/>
                 </a:solidFill>
-                <a:latin typeface="Arial"/>
-                <a:ea typeface="Arial"/>
-                <a:cs typeface="Arial"/>
+                <a:latin typeface="Arial" panose="020B0604020202090204"/>
+                <a:ea typeface="Arial" panose="020B0604020202090204"/>
+                <a:cs typeface="Arial" panose="020B0604020202090204"/>
               </a:rPr>
               <a:t>EE6008 · HUMAN POSE ANALYTICS</a:t>
             </a:r>
+            <a:endParaRPr lang="en-US" sz="980" dirty="0">
+              <a:solidFill>
+                <a:srgbClr val="FFFFFF"/>
+              </a:solidFill>
+              <a:latin typeface="Arial" panose="020B0604020202090204"/>
+              <a:ea typeface="Arial" panose="020B0604020202090204"/>
+              <a:cs typeface="Arial" panose="020B0604020202090204"/>
+            </a:endParaRPr>
           </a:p>
         </p:txBody>
       </p:sp>
@@ -8608,12 +9631,20 @@
                 <a:solidFill>
                   <a:srgbClr val="D71440"/>
                 </a:solidFill>
-                <a:latin typeface="Arial"/>
-                <a:ea typeface="Arial"/>
-                <a:cs typeface="Arial"/>
+                <a:latin typeface="Arial" panose="020B0604020202090204"/>
+                <a:ea typeface="Arial" panose="020B0604020202090204"/>
+                <a:cs typeface="Arial" panose="020B0604020202090204"/>
               </a:rPr>
               <a:t>RISK / BLOCKER</a:t>
             </a:r>
+            <a:endParaRPr lang="en-US" sz="1050" b="1" dirty="0">
+              <a:solidFill>
+                <a:srgbClr val="D71440"/>
+              </a:solidFill>
+              <a:latin typeface="Arial" panose="020B0604020202090204"/>
+              <a:ea typeface="Arial" panose="020B0604020202090204"/>
+              <a:cs typeface="Arial" panose="020B0604020202090204"/>
+            </a:endParaRPr>
           </a:p>
         </p:txBody>
       </p:sp>
@@ -8648,12 +9679,20 @@
                 <a:solidFill>
                   <a:srgbClr val="D71440"/>
                 </a:solidFill>
-                <a:latin typeface="Arial"/>
-                <a:ea typeface="Arial"/>
-                <a:cs typeface="Arial"/>
+                <a:latin typeface="Arial" panose="020B0604020202090204"/>
+                <a:ea typeface="Arial" panose="020B0604020202090204"/>
+                <a:cs typeface="Arial" panose="020B0604020202090204"/>
               </a:rPr>
               <a:t>IMPACT ON SCOPE, EVIDENCE, OR TIMELINE</a:t>
             </a:r>
+            <a:endParaRPr lang="en-US" sz="1050" b="1" dirty="0">
+              <a:solidFill>
+                <a:srgbClr val="D71440"/>
+              </a:solidFill>
+              <a:latin typeface="Arial" panose="020B0604020202090204"/>
+              <a:ea typeface="Arial" panose="020B0604020202090204"/>
+              <a:cs typeface="Arial" panose="020B0604020202090204"/>
+            </a:endParaRPr>
           </a:p>
         </p:txBody>
       </p:sp>
@@ -8688,12 +9727,20 @@
                 <a:solidFill>
                   <a:srgbClr val="181C62"/>
                 </a:solidFill>
-                <a:latin typeface="Arial"/>
-                <a:ea typeface="Arial"/>
-                <a:cs typeface="Arial"/>
+                <a:latin typeface="Arial" panose="020B0604020202090204"/>
+                <a:ea typeface="Arial" panose="020B0604020202090204"/>
+                <a:cs typeface="Arial" panose="020B0604020202090204"/>
               </a:rPr>
               <a:t>MITIGATION / OWNER / CHECK DATE</a:t>
             </a:r>
+            <a:endParaRPr lang="en-US" sz="1050" b="1" dirty="0">
+              <a:solidFill>
+                <a:srgbClr val="181C62"/>
+              </a:solidFill>
+              <a:latin typeface="Arial" panose="020B0604020202090204"/>
+              <a:ea typeface="Arial" panose="020B0604020202090204"/>
+              <a:cs typeface="Arial" panose="020B0604020202090204"/>
+            </a:endParaRPr>
           </a:p>
         </p:txBody>
       </p:sp>
@@ -8728,12 +9775,20 @@
                 <a:solidFill>
                   <a:srgbClr val="FFFFFF"/>
                 </a:solidFill>
-                <a:latin typeface="Arial"/>
-                <a:ea typeface="Arial"/>
-                <a:cs typeface="Arial"/>
+                <a:latin typeface="Arial" panose="020B0604020202090204"/>
+                <a:ea typeface="Arial" panose="020B0604020202090204"/>
+                <a:cs typeface="Arial" panose="020B0604020202090204"/>
               </a:rPr>
               <a:t>DECISION OR SUPPORT NEEDED</a:t>
             </a:r>
+            <a:endParaRPr lang="en-US" sz="1050" b="1" dirty="0">
+              <a:solidFill>
+                <a:srgbClr val="FFFFFF"/>
+              </a:solidFill>
+              <a:latin typeface="Arial" panose="020B0604020202090204"/>
+              <a:ea typeface="Arial" panose="020B0604020202090204"/>
+              <a:cs typeface="Arial" panose="020B0604020202090204"/>
+            </a:endParaRPr>
           </a:p>
         </p:txBody>
       </p:sp>
@@ -8768,12 +9823,20 @@
                 <a:solidFill>
                   <a:srgbClr val="20243A"/>
                 </a:solidFill>
-                <a:latin typeface="Arial"/>
-                <a:ea typeface="Arial"/>
-                <a:cs typeface="Arial"/>
+                <a:latin typeface="Arial" panose="020B0604020202090204"/>
+                <a:ea typeface="Arial" panose="020B0604020202090204"/>
+                <a:cs typeface="Arial" panose="020B0604020202090204"/>
               </a:rPr>
               <a:t>Risks &amp; Decisions</a:t>
             </a:r>
+            <a:endParaRPr lang="en-US" sz="2550" b="1" dirty="0">
+              <a:solidFill>
+                <a:srgbClr val="20243A"/>
+              </a:solidFill>
+              <a:latin typeface="Arial" panose="020B0604020202090204"/>
+              <a:ea typeface="Arial" panose="020B0604020202090204"/>
+              <a:cs typeface="Arial" panose="020B0604020202090204"/>
+            </a:endParaRPr>
           </a:p>
         </p:txBody>
       </p:sp>
@@ -8812,12 +9875,20 @@
                 <a:solidFill>
                   <a:srgbClr val="D71440"/>
                 </a:solidFill>
-                <a:latin typeface="Arial"/>
-                <a:ea typeface="Arial"/>
-                <a:cs typeface="Arial"/>
+                <a:latin typeface="Arial" panose="020B0604020202090204"/>
+                <a:ea typeface="Arial" panose="020B0604020202090204"/>
+                <a:cs typeface="Arial" panose="020B0604020202090204"/>
               </a:rPr>
               <a:t>{{RISKS}}</a:t>
             </a:r>
+            <a:endParaRPr lang="en-US" sz="1580" b="1" dirty="0">
+              <a:solidFill>
+                <a:srgbClr val="D71440"/>
+              </a:solidFill>
+              <a:latin typeface="Arial" panose="020B0604020202090204"/>
+              <a:ea typeface="Arial" panose="020B0604020202090204"/>
+              <a:cs typeface="Arial" panose="020B0604020202090204"/>
+            </a:endParaRPr>
           </a:p>
           <a:p>
             <a:pPr algn="l">
@@ -8830,12 +9901,20 @@
                 <a:solidFill>
                   <a:srgbClr val="5E6478"/>
                 </a:solidFill>
-                <a:latin typeface="Arial"/>
-                <a:ea typeface="Arial"/>
-                <a:cs typeface="Arial"/>
+                <a:latin typeface="Arial" panose="020B0604020202090204"/>
+                <a:ea typeface="Arial" panose="020B0604020202090204"/>
+                <a:cs typeface="Arial" panose="020B0604020202090204"/>
               </a:rPr>
               <a:t>Describe the failure mode, trigger, and evidence.</a:t>
             </a:r>
+            <a:endParaRPr lang="en-US" sz="1050" dirty="0">
+              <a:solidFill>
+                <a:srgbClr val="5E6478"/>
+              </a:solidFill>
+              <a:latin typeface="Arial" panose="020B0604020202090204"/>
+              <a:ea typeface="Arial" panose="020B0604020202090204"/>
+              <a:cs typeface="Arial" panose="020B0604020202090204"/>
+            </a:endParaRPr>
           </a:p>
         </p:txBody>
       </p:sp>
@@ -8874,12 +9953,20 @@
                 <a:solidFill>
                   <a:srgbClr val="20243A"/>
                 </a:solidFill>
-                <a:latin typeface="Arial"/>
-                <a:ea typeface="Arial"/>
-                <a:cs typeface="Arial"/>
+                <a:latin typeface="Arial" panose="020B0604020202090204"/>
+                <a:ea typeface="Arial" panose="020B0604020202090204"/>
+                <a:cs typeface="Arial" panose="020B0604020202090204"/>
               </a:rPr>
               <a:t>{{IMPACT}}</a:t>
             </a:r>
+            <a:endParaRPr lang="en-US" sz="1580" dirty="0">
+              <a:solidFill>
+                <a:srgbClr val="20243A"/>
+              </a:solidFill>
+              <a:latin typeface="Arial" panose="020B0604020202090204"/>
+              <a:ea typeface="Arial" panose="020B0604020202090204"/>
+              <a:cs typeface="Arial" panose="020B0604020202090204"/>
+            </a:endParaRPr>
           </a:p>
           <a:p>
             <a:pPr algn="l">
@@ -8892,12 +9979,20 @@
                 <a:solidFill>
                   <a:srgbClr val="5E6478"/>
                 </a:solidFill>
-                <a:latin typeface="Arial"/>
-                <a:ea typeface="Arial"/>
-                <a:cs typeface="Arial"/>
+                <a:latin typeface="Arial" panose="020B0604020202090204"/>
+                <a:ea typeface="Arial" panose="020B0604020202090204"/>
+                <a:cs typeface="Arial" panose="020B0604020202090204"/>
               </a:rPr>
               <a:t>Quantify delay, compute cost, metric risk, or lost scope.</a:t>
             </a:r>
+            <a:endParaRPr lang="en-US" sz="1050" dirty="0">
+              <a:solidFill>
+                <a:srgbClr val="5E6478"/>
+              </a:solidFill>
+              <a:latin typeface="Arial" panose="020B0604020202090204"/>
+              <a:ea typeface="Arial" panose="020B0604020202090204"/>
+              <a:cs typeface="Arial" panose="020B0604020202090204"/>
+            </a:endParaRPr>
           </a:p>
         </p:txBody>
       </p:sp>
@@ -8936,12 +10031,20 @@
                 <a:solidFill>
                   <a:srgbClr val="181C62"/>
                 </a:solidFill>
-                <a:latin typeface="Arial"/>
-                <a:ea typeface="Arial"/>
-                <a:cs typeface="Arial"/>
+                <a:latin typeface="Arial" panose="020B0604020202090204"/>
+                <a:ea typeface="Arial" panose="020B0604020202090204"/>
+                <a:cs typeface="Arial" panose="020B0604020202090204"/>
               </a:rPr>
               <a:t>{{MITIGATION}}</a:t>
             </a:r>
+            <a:endParaRPr lang="en-US" sz="1580" dirty="0">
+              <a:solidFill>
+                <a:srgbClr val="181C62"/>
+              </a:solidFill>
+              <a:latin typeface="Arial" panose="020B0604020202090204"/>
+              <a:ea typeface="Arial" panose="020B0604020202090204"/>
+              <a:cs typeface="Arial" panose="020B0604020202090204"/>
+            </a:endParaRPr>
           </a:p>
           <a:p>
             <a:pPr algn="l">
@@ -8954,12 +10057,20 @@
                 <a:solidFill>
                   <a:srgbClr val="5E6478"/>
                 </a:solidFill>
-                <a:latin typeface="Arial"/>
-                <a:ea typeface="Arial"/>
-                <a:cs typeface="Arial"/>
+                <a:latin typeface="Arial" panose="020B0604020202090204"/>
+                <a:ea typeface="Arial" panose="020B0604020202090204"/>
+                <a:cs typeface="Arial" panose="020B0604020202090204"/>
               </a:rPr>
               <a:t>Owner: … | Check date: … | Fallback: …</a:t>
             </a:r>
+            <a:endParaRPr lang="en-US" sz="1050" dirty="0">
+              <a:solidFill>
+                <a:srgbClr val="5E6478"/>
+              </a:solidFill>
+              <a:latin typeface="Arial" panose="020B0604020202090204"/>
+              <a:ea typeface="Arial" panose="020B0604020202090204"/>
+              <a:cs typeface="Arial" panose="020B0604020202090204"/>
+            </a:endParaRPr>
           </a:p>
         </p:txBody>
       </p:sp>
@@ -8998,12 +10109,20 @@
                 <a:solidFill>
                   <a:srgbClr val="FFFFFF"/>
                 </a:solidFill>
-                <a:latin typeface="Arial"/>
-                <a:ea typeface="Arial"/>
-                <a:cs typeface="Arial"/>
+                <a:latin typeface="Arial" panose="020B0604020202090204"/>
+                <a:ea typeface="Arial" panose="020B0604020202090204"/>
+                <a:cs typeface="Arial" panose="020B0604020202090204"/>
               </a:rPr>
               <a:t>{{DECISION_NEEDED}}</a:t>
             </a:r>
+            <a:endParaRPr lang="en-US" sz="1580" b="1" dirty="0">
+              <a:solidFill>
+                <a:srgbClr val="FFFFFF"/>
+              </a:solidFill>
+              <a:latin typeface="Arial" panose="020B0604020202090204"/>
+              <a:ea typeface="Arial" panose="020B0604020202090204"/>
+              <a:cs typeface="Arial" panose="020B0604020202090204"/>
+            </a:endParaRPr>
           </a:p>
           <a:p>
             <a:pPr algn="l">
@@ -9016,12 +10135,20 @@
                 <a:solidFill>
                   <a:srgbClr val="C8C8C8"/>
                 </a:solidFill>
-                <a:latin typeface="Arial"/>
-                <a:ea typeface="Arial"/>
-                <a:cs typeface="Arial"/>
+                <a:latin typeface="Arial" panose="020B0604020202090204"/>
+                <a:ea typeface="Arial" panose="020B0604020202090204"/>
+                <a:cs typeface="Arial" panose="020B0604020202090204"/>
               </a:rPr>
               <a:t>State the choice, approver, and latest useful date.</a:t>
             </a:r>
+            <a:endParaRPr lang="en-US" sz="1050" dirty="0">
+              <a:solidFill>
+                <a:srgbClr val="C8C8C8"/>
+              </a:solidFill>
+              <a:latin typeface="Arial" panose="020B0604020202090204"/>
+              <a:ea typeface="Arial" panose="020B0604020202090204"/>
+              <a:cs typeface="Arial" panose="020B0604020202090204"/>
+            </a:endParaRPr>
           </a:p>
         </p:txBody>
       </p:sp>
@@ -9056,12 +10183,20 @@
                 <a:solidFill>
                   <a:srgbClr val="FFFFFF"/>
                 </a:solidFill>
-                <a:latin typeface="Arial"/>
-                <a:ea typeface="Arial"/>
-                <a:cs typeface="Arial"/>
+                <a:latin typeface="Arial" panose="020B0604020202090204"/>
+                <a:ea typeface="Arial" panose="020B0604020202090204"/>
+                <a:cs typeface="Arial" panose="020B0604020202090204"/>
               </a:rPr>
               <a:t>{{PAGE_NUM}}</a:t>
             </a:r>
+            <a:endParaRPr lang="en-US" sz="900" dirty="0">
+              <a:solidFill>
+                <a:srgbClr val="FFFFFF"/>
+              </a:solidFill>
+              <a:latin typeface="Arial" panose="020B0604020202090204"/>
+              <a:ea typeface="Arial" panose="020B0604020202090204"/>
+              <a:cs typeface="Arial" panose="020B0604020202090204"/>
+            </a:endParaRPr>
           </a:p>
         </p:txBody>
       </p:sp>
@@ -9129,7 +10264,7 @@
           <p:nvPr/>
         </p:nvPicPr>
         <p:blipFill>
-          <a:blip r:embed="rId2"/>
+          <a:blip r:embed="rId1"/>
           <a:stretch>
             <a:fillRect/>
           </a:stretch>
@@ -9197,12 +10332,20 @@
                 <a:solidFill>
                   <a:srgbClr val="FFFFFF"/>
                 </a:solidFill>
-                <a:latin typeface="Arial"/>
-                <a:ea typeface="Arial"/>
-                <a:cs typeface="Arial"/>
+                <a:latin typeface="Arial" panose="020B0604020202090204"/>
+                <a:ea typeface="Arial" panose="020B0604020202090204"/>
+                <a:cs typeface="Arial" panose="020B0604020202090204"/>
               </a:rPr>
               <a:t>EE6008 · HUMAN POSE ANALYTICS</a:t>
             </a:r>
+            <a:endParaRPr lang="en-US" sz="980" dirty="0">
+              <a:solidFill>
+                <a:srgbClr val="FFFFFF"/>
+              </a:solidFill>
+              <a:latin typeface="Arial" panose="020B0604020202090204"/>
+              <a:ea typeface="Arial" panose="020B0604020202090204"/>
+              <a:cs typeface="Arial" panose="020B0604020202090204"/>
+            </a:endParaRPr>
           </a:p>
         </p:txBody>
       </p:sp>
@@ -9457,12 +10600,20 @@
                 <a:solidFill>
                   <a:srgbClr val="FFFFFF"/>
                 </a:solidFill>
-                <a:latin typeface="Arial"/>
-                <a:ea typeface="Arial"/>
-                <a:cs typeface="Arial"/>
+                <a:latin typeface="Arial" panose="020B0604020202090204"/>
+                <a:ea typeface="Arial" panose="020B0604020202090204"/>
+                <a:cs typeface="Arial" panose="020B0604020202090204"/>
               </a:rPr>
               <a:t>1</a:t>
             </a:r>
+            <a:endParaRPr lang="en-US" sz="1350" b="1" dirty="0">
+              <a:solidFill>
+                <a:srgbClr val="FFFFFF"/>
+              </a:solidFill>
+              <a:latin typeface="Arial" panose="020B0604020202090204"/>
+              <a:ea typeface="Arial" panose="020B0604020202090204"/>
+              <a:cs typeface="Arial" panose="020B0604020202090204"/>
+            </a:endParaRPr>
           </a:p>
         </p:txBody>
       </p:sp>
@@ -9497,12 +10648,20 @@
                 <a:solidFill>
                   <a:srgbClr val="FFFFFF"/>
                 </a:solidFill>
-                <a:latin typeface="Arial"/>
-                <a:ea typeface="Arial"/>
-                <a:cs typeface="Arial"/>
+                <a:latin typeface="Arial" panose="020B0604020202090204"/>
+                <a:ea typeface="Arial" panose="020B0604020202090204"/>
+                <a:cs typeface="Arial" panose="020B0604020202090204"/>
               </a:rPr>
               <a:t>2</a:t>
             </a:r>
+            <a:endParaRPr lang="en-US" sz="1350" b="1" dirty="0">
+              <a:solidFill>
+                <a:srgbClr val="FFFFFF"/>
+              </a:solidFill>
+              <a:latin typeface="Arial" panose="020B0604020202090204"/>
+              <a:ea typeface="Arial" panose="020B0604020202090204"/>
+              <a:cs typeface="Arial" panose="020B0604020202090204"/>
+            </a:endParaRPr>
           </a:p>
         </p:txBody>
       </p:sp>
@@ -9537,12 +10696,20 @@
                 <a:solidFill>
                   <a:srgbClr val="FFFFFF"/>
                 </a:solidFill>
-                <a:latin typeface="Arial"/>
-                <a:ea typeface="Arial"/>
-                <a:cs typeface="Arial"/>
+                <a:latin typeface="Arial" panose="020B0604020202090204"/>
+                <a:ea typeface="Arial" panose="020B0604020202090204"/>
+                <a:cs typeface="Arial" panose="020B0604020202090204"/>
               </a:rPr>
               <a:t>3</a:t>
             </a:r>
+            <a:endParaRPr lang="en-US" sz="1350" b="1" dirty="0">
+              <a:solidFill>
+                <a:srgbClr val="FFFFFF"/>
+              </a:solidFill>
+              <a:latin typeface="Arial" panose="020B0604020202090204"/>
+              <a:ea typeface="Arial" panose="020B0604020202090204"/>
+              <a:cs typeface="Arial" panose="020B0604020202090204"/>
+            </a:endParaRPr>
           </a:p>
         </p:txBody>
       </p:sp>
@@ -9577,12 +10744,20 @@
                 <a:solidFill>
                   <a:srgbClr val="D71440"/>
                 </a:solidFill>
-                <a:latin typeface="Arial"/>
-                <a:ea typeface="Arial"/>
-                <a:cs typeface="Arial"/>
+                <a:latin typeface="Arial" panose="020B0604020202090204"/>
+                <a:ea typeface="Arial" panose="020B0604020202090204"/>
+                <a:cs typeface="Arial" panose="020B0604020202090204"/>
               </a:rPr>
               <a:t>DELIVERABLE 1 · BUILD</a:t>
             </a:r>
+            <a:endParaRPr lang="en-US" sz="980" b="1" dirty="0">
+              <a:solidFill>
+                <a:srgbClr val="D71440"/>
+              </a:solidFill>
+              <a:latin typeface="Arial" panose="020B0604020202090204"/>
+              <a:ea typeface="Arial" panose="020B0604020202090204"/>
+              <a:cs typeface="Arial" panose="020B0604020202090204"/>
+            </a:endParaRPr>
           </a:p>
         </p:txBody>
       </p:sp>
@@ -9617,12 +10792,20 @@
                 <a:solidFill>
                   <a:srgbClr val="181C62"/>
                 </a:solidFill>
-                <a:latin typeface="Arial"/>
-                <a:ea typeface="Arial"/>
-                <a:cs typeface="Arial"/>
+                <a:latin typeface="Arial" panose="020B0604020202090204"/>
+                <a:ea typeface="Arial" panose="020B0604020202090204"/>
+                <a:cs typeface="Arial" panose="020B0604020202090204"/>
               </a:rPr>
               <a:t>DELIVERABLE 2 · VALIDATE</a:t>
             </a:r>
+            <a:endParaRPr lang="en-US" sz="980" b="1" dirty="0">
+              <a:solidFill>
+                <a:srgbClr val="181C62"/>
+              </a:solidFill>
+              <a:latin typeface="Arial" panose="020B0604020202090204"/>
+              <a:ea typeface="Arial" panose="020B0604020202090204"/>
+              <a:cs typeface="Arial" panose="020B0604020202090204"/>
+            </a:endParaRPr>
           </a:p>
         </p:txBody>
       </p:sp>
@@ -9657,12 +10840,20 @@
                 <a:solidFill>
                   <a:srgbClr val="D71440"/>
                 </a:solidFill>
-                <a:latin typeface="Arial"/>
-                <a:ea typeface="Arial"/>
-                <a:cs typeface="Arial"/>
+                <a:latin typeface="Arial" panose="020B0604020202090204"/>
+                <a:ea typeface="Arial" panose="020B0604020202090204"/>
+                <a:cs typeface="Arial" panose="020B0604020202090204"/>
               </a:rPr>
               <a:t>DELIVERABLE 3 · DOCUMENT</a:t>
             </a:r>
+            <a:endParaRPr lang="en-US" sz="980" b="1" dirty="0">
+              <a:solidFill>
+                <a:srgbClr val="D71440"/>
+              </a:solidFill>
+              <a:latin typeface="Arial" panose="020B0604020202090204"/>
+              <a:ea typeface="Arial" panose="020B0604020202090204"/>
+              <a:cs typeface="Arial" panose="020B0604020202090204"/>
+            </a:endParaRPr>
           </a:p>
         </p:txBody>
       </p:sp>
@@ -9697,12 +10888,20 @@
                 <a:solidFill>
                   <a:srgbClr val="FFFFFF"/>
                 </a:solidFill>
-                <a:latin typeface="Arial"/>
-                <a:ea typeface="Arial"/>
-                <a:cs typeface="Arial"/>
+                <a:latin typeface="Arial" panose="020B0604020202090204"/>
+                <a:ea typeface="Arial" panose="020B0604020202090204"/>
+                <a:cs typeface="Arial" panose="020B0604020202090204"/>
               </a:rPr>
               <a:t>OWNER · DUE DATE · SUCCESS CHECK</a:t>
             </a:r>
+            <a:endParaRPr lang="en-US" sz="1050" b="1" dirty="0">
+              <a:solidFill>
+                <a:srgbClr val="FFFFFF"/>
+              </a:solidFill>
+              <a:latin typeface="Arial" panose="020B0604020202090204"/>
+              <a:ea typeface="Arial" panose="020B0604020202090204"/>
+              <a:cs typeface="Arial" panose="020B0604020202090204"/>
+            </a:endParaRPr>
           </a:p>
         </p:txBody>
       </p:sp>
@@ -9737,12 +10936,20 @@
                 <a:solidFill>
                   <a:srgbClr val="20243A"/>
                 </a:solidFill>
-                <a:latin typeface="Arial"/>
-                <a:ea typeface="Arial"/>
-                <a:cs typeface="Arial"/>
+                <a:latin typeface="Arial" panose="020B0604020202090204"/>
+                <a:ea typeface="Arial" panose="020B0604020202090204"/>
+                <a:cs typeface="Arial" panose="020B0604020202090204"/>
               </a:rPr>
               <a:t>Next-Week Commitments</a:t>
             </a:r>
+            <a:endParaRPr lang="en-US" sz="2550" b="1" dirty="0">
+              <a:solidFill>
+                <a:srgbClr val="20243A"/>
+              </a:solidFill>
+              <a:latin typeface="Arial" panose="020B0604020202090204"/>
+              <a:ea typeface="Arial" panose="020B0604020202090204"/>
+              <a:cs typeface="Arial" panose="020B0604020202090204"/>
+            </a:endParaRPr>
           </a:p>
         </p:txBody>
       </p:sp>
@@ -9781,12 +10988,20 @@
                 <a:solidFill>
                   <a:srgbClr val="20243A"/>
                 </a:solidFill>
-                <a:latin typeface="Arial"/>
-                <a:ea typeface="Arial"/>
-                <a:cs typeface="Arial"/>
+                <a:latin typeface="Arial" panose="020B0604020202090204"/>
+                <a:ea typeface="Arial" panose="020B0604020202090204"/>
+                <a:cs typeface="Arial" panose="020B0604020202090204"/>
               </a:rPr>
               <a:t>{{NEXT_ACTION_1}}</a:t>
             </a:r>
+            <a:endParaRPr lang="en-US" sz="1580" b="1" dirty="0">
+              <a:solidFill>
+                <a:srgbClr val="20243A"/>
+              </a:solidFill>
+              <a:latin typeface="Arial" panose="020B0604020202090204"/>
+              <a:ea typeface="Arial" panose="020B0604020202090204"/>
+              <a:cs typeface="Arial" panose="020B0604020202090204"/>
+            </a:endParaRPr>
           </a:p>
           <a:p>
             <a:pPr algn="l">
@@ -9799,12 +11014,20 @@
                 <a:solidFill>
                   <a:srgbClr val="5E6478"/>
                 </a:solidFill>
-                <a:latin typeface="Arial"/>
-                <a:ea typeface="Arial"/>
-                <a:cs typeface="Arial"/>
+                <a:latin typeface="Arial" panose="020B0604020202090204"/>
+                <a:ea typeface="Arial" panose="020B0604020202090204"/>
+                <a:cs typeface="Arial" panose="020B0604020202090204"/>
               </a:rPr>
               <a:t>Output: code, dataset, or runnable module.</a:t>
             </a:r>
+            <a:endParaRPr lang="en-US" sz="1050" dirty="0">
+              <a:solidFill>
+                <a:srgbClr val="5E6478"/>
+              </a:solidFill>
+              <a:latin typeface="Arial" panose="020B0604020202090204"/>
+              <a:ea typeface="Arial" panose="020B0604020202090204"/>
+              <a:cs typeface="Arial" panose="020B0604020202090204"/>
+            </a:endParaRPr>
           </a:p>
         </p:txBody>
       </p:sp>
@@ -9843,12 +11066,20 @@
                 <a:solidFill>
                   <a:srgbClr val="20243A"/>
                 </a:solidFill>
-                <a:latin typeface="Arial"/>
-                <a:ea typeface="Arial"/>
-                <a:cs typeface="Arial"/>
+                <a:latin typeface="Arial" panose="020B0604020202090204"/>
+                <a:ea typeface="Arial" panose="020B0604020202090204"/>
+                <a:cs typeface="Arial" panose="020B0604020202090204"/>
               </a:rPr>
               <a:t>{{NEXT_ACTION_2}}</a:t>
             </a:r>
+            <a:endParaRPr lang="en-US" sz="1580" b="1" dirty="0">
+              <a:solidFill>
+                <a:srgbClr val="20243A"/>
+              </a:solidFill>
+              <a:latin typeface="Arial" panose="020B0604020202090204"/>
+              <a:ea typeface="Arial" panose="020B0604020202090204"/>
+              <a:cs typeface="Arial" panose="020B0604020202090204"/>
+            </a:endParaRPr>
           </a:p>
           <a:p>
             <a:pPr algn="l">
@@ -9861,12 +11092,20 @@
                 <a:solidFill>
                   <a:srgbClr val="5E6478"/>
                 </a:solidFill>
-                <a:latin typeface="Arial"/>
-                <a:ea typeface="Arial"/>
-                <a:cs typeface="Arial"/>
+                <a:latin typeface="Arial" panose="020B0604020202090204"/>
+                <a:ea typeface="Arial" panose="020B0604020202090204"/>
+                <a:cs typeface="Arial" panose="020B0604020202090204"/>
               </a:rPr>
               <a:t>Output: metric table, control, or ablation result.</a:t>
             </a:r>
+            <a:endParaRPr lang="en-US" sz="1050" dirty="0">
+              <a:solidFill>
+                <a:srgbClr val="5E6478"/>
+              </a:solidFill>
+              <a:latin typeface="Arial" panose="020B0604020202090204"/>
+              <a:ea typeface="Arial" panose="020B0604020202090204"/>
+              <a:cs typeface="Arial" panose="020B0604020202090204"/>
+            </a:endParaRPr>
           </a:p>
         </p:txBody>
       </p:sp>
@@ -9905,12 +11144,20 @@
                 <a:solidFill>
                   <a:srgbClr val="20243A"/>
                 </a:solidFill>
-                <a:latin typeface="Arial"/>
-                <a:ea typeface="Arial"/>
-                <a:cs typeface="Arial"/>
+                <a:latin typeface="Arial" panose="020B0604020202090204"/>
+                <a:ea typeface="Arial" panose="020B0604020202090204"/>
+                <a:cs typeface="Arial" panose="020B0604020202090204"/>
               </a:rPr>
               <a:t>{{NEXT_ACTION_3}}</a:t>
             </a:r>
+            <a:endParaRPr lang="en-US" sz="1580" b="1" dirty="0">
+              <a:solidFill>
+                <a:srgbClr val="20243A"/>
+              </a:solidFill>
+              <a:latin typeface="Arial" panose="020B0604020202090204"/>
+              <a:ea typeface="Arial" panose="020B0604020202090204"/>
+              <a:cs typeface="Arial" panose="020B0604020202090204"/>
+            </a:endParaRPr>
           </a:p>
           <a:p>
             <a:pPr algn="l">
@@ -9923,12 +11170,20 @@
                 <a:solidFill>
                   <a:srgbClr val="5E6478"/>
                 </a:solidFill>
-                <a:latin typeface="Arial"/>
-                <a:ea typeface="Arial"/>
-                <a:cs typeface="Arial"/>
+                <a:latin typeface="Arial" panose="020B0604020202090204"/>
+                <a:ea typeface="Arial" panose="020B0604020202090204"/>
+                <a:cs typeface="Arial" panose="020B0604020202090204"/>
               </a:rPr>
               <a:t>Output: updated figure, notes, or report section.</a:t>
             </a:r>
+            <a:endParaRPr lang="en-US" sz="1050" dirty="0">
+              <a:solidFill>
+                <a:srgbClr val="5E6478"/>
+              </a:solidFill>
+              <a:latin typeface="Arial" panose="020B0604020202090204"/>
+              <a:ea typeface="Arial" panose="020B0604020202090204"/>
+              <a:cs typeface="Arial" panose="020B0604020202090204"/>
+            </a:endParaRPr>
           </a:p>
         </p:txBody>
       </p:sp>
@@ -9967,12 +11222,20 @@
                 <a:solidFill>
                   <a:srgbClr val="FFFFFF"/>
                 </a:solidFill>
-                <a:latin typeface="Arial"/>
-                <a:ea typeface="Arial"/>
-                <a:cs typeface="Arial"/>
+                <a:latin typeface="Arial" panose="020B0604020202090204"/>
+                <a:ea typeface="Arial" panose="020B0604020202090204"/>
+                <a:cs typeface="Arial" panose="020B0604020202090204"/>
               </a:rPr>
               <a:t>{{OWNER_AND_DEADLINE}}</a:t>
             </a:r>
+            <a:endParaRPr lang="en-US" sz="1580" dirty="0">
+              <a:solidFill>
+                <a:srgbClr val="FFFFFF"/>
+              </a:solidFill>
+              <a:latin typeface="Arial" panose="020B0604020202090204"/>
+              <a:ea typeface="Arial" panose="020B0604020202090204"/>
+              <a:cs typeface="Arial" panose="020B0604020202090204"/>
+            </a:endParaRPr>
           </a:p>
           <a:p>
             <a:pPr algn="l">
@@ -9988,48 +11251,83 @@
                 <a:solidFill>
                   <a:srgbClr val="C8C8C8"/>
                 </a:solidFill>
-                <a:latin typeface="Arial"/>
-                <a:ea typeface="Arial"/>
-                <a:cs typeface="Arial"/>
+                <a:latin typeface="Arial" panose="020B0604020202090204"/>
+                <a:ea typeface="Arial" panose="020B0604020202090204"/>
+                <a:cs typeface="Arial" panose="020B0604020202090204"/>
               </a:rPr>
               <a:t>Owner: …</a:t>
             </a:r>
-            <a:br/>
-            <a:r>
+            <a:br>
               <a:rPr lang="en-US" sz="1050" dirty="0">
                 <a:solidFill>
                   <a:srgbClr val="C8C8C8"/>
                 </a:solidFill>
-                <a:latin typeface="Arial"/>
-                <a:ea typeface="Arial"/>
-                <a:cs typeface="Arial"/>
+                <a:latin typeface="Arial" panose="020B0604020202090204"/>
+                <a:ea typeface="Arial" panose="020B0604020202090204"/>
+                <a:cs typeface="Arial" panose="020B0604020202090204"/>
+              </a:rPr>
+            </a:br>
+            <a:r>
+              <a:rPr lang="en-US" sz="1050" dirty="0">
+                <a:solidFill>
+                  <a:srgbClr val="C8C8C8"/>
+                </a:solidFill>
+                <a:latin typeface="Arial" panose="020B0604020202090204"/>
+                <a:ea typeface="Arial" panose="020B0604020202090204"/>
+                <a:cs typeface="Arial" panose="020B0604020202090204"/>
               </a:rPr>
               <a:t>Due: …</a:t>
             </a:r>
-            <a:br/>
-            <a:r>
+            <a:br>
               <a:rPr lang="en-US" sz="1050" dirty="0">
                 <a:solidFill>
                   <a:srgbClr val="C8C8C8"/>
                 </a:solidFill>
-                <a:latin typeface="Arial"/>
-                <a:ea typeface="Arial"/>
-                <a:cs typeface="Arial"/>
+                <a:latin typeface="Arial" panose="020B0604020202090204"/>
+                <a:ea typeface="Arial" panose="020B0604020202090204"/>
+                <a:cs typeface="Arial" panose="020B0604020202090204"/>
+              </a:rPr>
+            </a:br>
+            <a:r>
+              <a:rPr lang="en-US" sz="1050" dirty="0">
+                <a:solidFill>
+                  <a:srgbClr val="C8C8C8"/>
+                </a:solidFill>
+                <a:latin typeface="Arial" panose="020B0604020202090204"/>
+                <a:ea typeface="Arial" panose="020B0604020202090204"/>
+                <a:cs typeface="Arial" panose="020B0604020202090204"/>
               </a:rPr>
               <a:t>Success check: observable output</a:t>
             </a:r>
-            <a:br/>
-            <a:r>
+            <a:br>
               <a:rPr lang="en-US" sz="1050" dirty="0">
                 <a:solidFill>
                   <a:srgbClr val="C8C8C8"/>
                 </a:solidFill>
-                <a:latin typeface="Arial"/>
-                <a:ea typeface="Arial"/>
-                <a:cs typeface="Arial"/>
+                <a:latin typeface="Arial" panose="020B0604020202090204"/>
+                <a:ea typeface="Arial" panose="020B0604020202090204"/>
+                <a:cs typeface="Arial" panose="020B0604020202090204"/>
+              </a:rPr>
+            </a:br>
+            <a:r>
+              <a:rPr lang="en-US" sz="1050" dirty="0">
+                <a:solidFill>
+                  <a:srgbClr val="C8C8C8"/>
+                </a:solidFill>
+                <a:latin typeface="Arial" panose="020B0604020202090204"/>
+                <a:ea typeface="Arial" panose="020B0604020202090204"/>
+                <a:cs typeface="Arial" panose="020B0604020202090204"/>
               </a:rPr>
               <a:t>or agreed metric threshold.</a:t>
             </a:r>
+            <a:endParaRPr lang="en-US" sz="1050" dirty="0">
+              <a:solidFill>
+                <a:srgbClr val="C8C8C8"/>
+              </a:solidFill>
+              <a:latin typeface="Arial" panose="020B0604020202090204"/>
+              <a:ea typeface="Arial" panose="020B0604020202090204"/>
+              <a:cs typeface="Arial" panose="020B0604020202090204"/>
+            </a:endParaRPr>
           </a:p>
         </p:txBody>
       </p:sp>
@@ -10064,12 +11362,20 @@
                 <a:solidFill>
                   <a:srgbClr val="FFFFFF"/>
                 </a:solidFill>
-                <a:latin typeface="Arial"/>
-                <a:ea typeface="Arial"/>
-                <a:cs typeface="Arial"/>
+                <a:latin typeface="Arial" panose="020B0604020202090204"/>
+                <a:ea typeface="Arial" panose="020B0604020202090204"/>
+                <a:cs typeface="Arial" panose="020B0604020202090204"/>
               </a:rPr>
               <a:t>{{PAGE_NUM}}</a:t>
             </a:r>
+            <a:endParaRPr lang="en-US" sz="900" dirty="0">
+              <a:solidFill>
+                <a:srgbClr val="FFFFFF"/>
+              </a:solidFill>
+              <a:latin typeface="Arial" panose="020B0604020202090204"/>
+              <a:ea typeface="Arial" panose="020B0604020202090204"/>
+              <a:cs typeface="Arial" panose="020B0604020202090204"/>
+            </a:endParaRPr>
           </a:p>
         </p:txBody>
       </p:sp>
@@ -10137,7 +11443,7 @@
           <p:nvPr/>
         </p:nvPicPr>
         <p:blipFill>
-          <a:blip r:embed="rId2"/>
+          <a:blip r:embed="rId1"/>
           <a:stretch>
             <a:fillRect/>
           </a:stretch>
@@ -10205,12 +11511,20 @@
                 <a:solidFill>
                   <a:srgbClr val="FFFFFF"/>
                 </a:solidFill>
-                <a:latin typeface="Arial"/>
-                <a:ea typeface="Arial"/>
-                <a:cs typeface="Arial"/>
+                <a:latin typeface="Arial" panose="020B0604020202090204"/>
+                <a:ea typeface="Arial" panose="020B0604020202090204"/>
+                <a:cs typeface="Arial" panose="020B0604020202090204"/>
               </a:rPr>
               <a:t>EE6008 · HUMAN POSE ANALYTICS</a:t>
             </a:r>
+            <a:endParaRPr lang="en-US" sz="980" dirty="0">
+              <a:solidFill>
+                <a:srgbClr val="FFFFFF"/>
+              </a:solidFill>
+              <a:latin typeface="Arial" panose="020B0604020202090204"/>
+              <a:ea typeface="Arial" panose="020B0604020202090204"/>
+              <a:cs typeface="Arial" panose="020B0604020202090204"/>
+            </a:endParaRPr>
           </a:p>
         </p:txBody>
       </p:sp>
@@ -10293,12 +11607,20 @@
                 <a:solidFill>
                   <a:srgbClr val="20243A"/>
                 </a:solidFill>
-                <a:latin typeface="Arial"/>
-                <a:ea typeface="Arial"/>
-                <a:cs typeface="Arial"/>
+                <a:latin typeface="Arial" panose="020B0604020202090204"/>
+                <a:ea typeface="Arial" panose="020B0604020202090204"/>
+                <a:cs typeface="Arial" panose="020B0604020202090204"/>
               </a:rPr>
               <a:t>Open Canvas</a:t>
             </a:r>
+            <a:endParaRPr lang="en-US" sz="2550" b="1" dirty="0">
+              <a:solidFill>
+                <a:srgbClr val="20243A"/>
+              </a:solidFill>
+              <a:latin typeface="Arial" panose="020B0604020202090204"/>
+              <a:ea typeface="Arial" panose="020B0604020202090204"/>
+              <a:cs typeface="Arial" panose="020B0604020202090204"/>
+            </a:endParaRPr>
           </a:p>
         </p:txBody>
       </p:sp>
@@ -10333,12 +11655,20 @@
                 <a:solidFill>
                   <a:srgbClr val="FFFFFF"/>
                 </a:solidFill>
-                <a:latin typeface="Arial"/>
-                <a:ea typeface="Arial"/>
-                <a:cs typeface="Arial"/>
+                <a:latin typeface="Arial" panose="020B0604020202090204"/>
+                <a:ea typeface="Arial" panose="020B0604020202090204"/>
+                <a:cs typeface="Arial" panose="020B0604020202090204"/>
               </a:rPr>
               <a:t>{{SOURCE}}</a:t>
             </a:r>
+            <a:endParaRPr lang="en-US" sz="900" dirty="0">
+              <a:solidFill>
+                <a:srgbClr val="FFFFFF"/>
+              </a:solidFill>
+              <a:latin typeface="Arial" panose="020B0604020202090204"/>
+              <a:ea typeface="Arial" panose="020B0604020202090204"/>
+              <a:cs typeface="Arial" panose="020B0604020202090204"/>
+            </a:endParaRPr>
           </a:p>
         </p:txBody>
       </p:sp>
@@ -10373,12 +11703,20 @@
                 <a:solidFill>
                   <a:srgbClr val="FFFFFF"/>
                 </a:solidFill>
-                <a:latin typeface="Arial"/>
-                <a:ea typeface="Arial"/>
-                <a:cs typeface="Arial"/>
+                <a:latin typeface="Arial" panose="020B0604020202090204"/>
+                <a:ea typeface="Arial" panose="020B0604020202090204"/>
+                <a:cs typeface="Arial" panose="020B0604020202090204"/>
               </a:rPr>
               <a:t>{{PAGE_NUM}}</a:t>
             </a:r>
+            <a:endParaRPr lang="en-US" sz="900" dirty="0">
+              <a:solidFill>
+                <a:srgbClr val="FFFFFF"/>
+              </a:solidFill>
+              <a:latin typeface="Arial" panose="020B0604020202090204"/>
+              <a:ea typeface="Arial" panose="020B0604020202090204"/>
+              <a:cs typeface="Arial" panose="020B0604020202090204"/>
+            </a:endParaRPr>
           </a:p>
         </p:txBody>
       </p:sp>
@@ -10706,6 +12044,10 @@
       </a:style>
     </a:lnDef>
   </a:objectDefaults>
-  <a:extraClrSchemeLst/>
+  <a:extLst>
+    <a:ext uri="{05A4C25C-085E-4340-85A3-A5531E510DB2}">
+      <thm15:themeFamily xmlns:thm15="http://schemas.microsoft.com/office/thememl/2012/main" name="Office Theme" id="{62F939B6-93AF-4DB8-9C6B-D6C7DFDC589F}" vid="{4A3C46E8-61CC-4603-A589-7422A47A8E4A}"/>
+    </a:ext>
+  </a:extLst>
 </a:theme>
 </file>
--- a/reports/WeeklyPre/week4_pre.pptx
+++ b/reports/WeeklyPre/week4_pre.pptx
@@ -11,12 +11,13 @@
     <p:sldId id="259" r:id="rId6"/>
     <p:sldId id="266" r:id="rId7"/>
     <p:sldId id="267" r:id="rId8"/>
-    <p:sldId id="260" r:id="rId9"/>
-    <p:sldId id="261" r:id="rId10"/>
-    <p:sldId id="262" r:id="rId11"/>
-    <p:sldId id="263" r:id="rId12"/>
-    <p:sldId id="264" r:id="rId13"/>
-    <p:sldId id="265" r:id="rId14"/>
+    <p:sldId id="268" r:id="rId9"/>
+    <p:sldId id="260" r:id="rId10"/>
+    <p:sldId id="261" r:id="rId11"/>
+    <p:sldId id="262" r:id="rId12"/>
+    <p:sldId id="263" r:id="rId13"/>
+    <p:sldId id="264" r:id="rId14"/>
+    <p:sldId id="265" r:id="rId15"/>
   </p:sldIdLst>
   <p:sldSz cx="12192000" cy="6858000" type="screen4x3"/>
   <p:notesSz cx="6858000" cy="9144000"/>
@@ -1264,7 +1265,7 @@
         <p:spPr>
           <a:xfrm>
             <a:off x="514350" y="1304925"/>
-            <a:ext cx="7810500" cy="4772025"/>
+            <a:ext cx="11106150" cy="4772025"/>
           </a:xfrm>
           <a:prstGeom prst="roundRect">
             <a:avLst>
@@ -1283,60 +1284,14 @@
       </p:sp>
       <p:sp>
         <p:nvSpPr>
-          <p:cNvPr id="8" name="Rectangle 8"/>
-          <p:cNvSpPr/>
-          <p:nvPr/>
-        </p:nvSpPr>
-        <p:spPr>
-          <a:xfrm>
-            <a:off x="8572500" y="1304925"/>
-            <a:ext cx="3048000" cy="4772025"/>
-          </a:xfrm>
-          <a:prstGeom prst="roundRect">
-            <a:avLst>
-              <a:gd name="adj" fmla="val 3125"/>
-            </a:avLst>
-          </a:prstGeom>
-          <a:solidFill>
-            <a:srgbClr val="EEF1FA"/>
-          </a:solidFill>
-          <a:ln>
-            <a:noFill/>
-          </a:ln>
-        </p:spPr>
-      </p:sp>
-      <p:sp>
-        <p:nvSpPr>
-          <p:cNvPr id="9" name="Rectangle 9"/>
-          <p:cNvSpPr/>
-          <p:nvPr/>
-        </p:nvSpPr>
-        <p:spPr>
-          <a:xfrm>
-            <a:off x="8572500" y="1304925"/>
-            <a:ext cx="3048000" cy="114300"/>
-          </a:xfrm>
-          <a:prstGeom prst="rect">
-            <a:avLst/>
-          </a:prstGeom>
-          <a:solidFill>
-            <a:srgbClr val="D71440"/>
-          </a:solidFill>
-          <a:ln>
-            <a:noFill/>
-          </a:ln>
-        </p:spPr>
-      </p:sp>
-      <p:sp>
-        <p:nvSpPr>
-          <p:cNvPr id="10" name="TextBox 10"/>
+          <p:cNvPr id="8" name="TextBox 8"/>
           <p:cNvSpPr txBox="1"/>
           <p:nvPr/>
         </p:nvSpPr>
         <p:spPr>
           <a:xfrm>
-            <a:off x="8815197" y="1647349"/>
-            <a:ext cx="1290599" cy="190690"/>
+            <a:off x="501396" y="543878"/>
+            <a:ext cx="2213061" cy="498729"/>
           </a:xfrm>
           <a:prstGeom prst="rect">
             <a:avLst/>
@@ -1354,37 +1309,37 @@
           <a:p>
             <a:pPr algn="l"/>
             <a:r>
-              <a:rPr lang="en-US" sz="980" b="1" dirty="0">
-                <a:solidFill>
-                  <a:srgbClr val="181C62"/>
-                </a:solidFill>
-                <a:latin typeface="Arial" panose="020B0604020202090204"/>
-                <a:ea typeface="Arial" panose="020B0604020202090204"/>
-                <a:cs typeface="Arial" panose="020B0604020202090204"/>
-              </a:rPr>
-              <a:t>IMAGE DESCRIPTION</a:t>
-            </a:r>
-            <a:endParaRPr lang="en-US" sz="980" b="1" dirty="0">
-              <a:solidFill>
-                <a:srgbClr val="181C62"/>
-              </a:solidFill>
-              <a:latin typeface="Arial" panose="020B0604020202090204"/>
-              <a:ea typeface="Arial" panose="020B0604020202090204"/>
-              <a:cs typeface="Arial" panose="020B0604020202090204"/>
-            </a:endParaRPr>
-          </a:p>
-        </p:txBody>
-      </p:sp>
-      <p:sp>
-        <p:nvSpPr>
-          <p:cNvPr id="11" name="TextBox 11"/>
+              <a:rPr lang="en-US" sz="2550" b="1" dirty="0">
+                <a:solidFill>
+                  <a:srgbClr val="20243A"/>
+                </a:solidFill>
+                <a:latin typeface="Arial" panose="020B0604020202090204"/>
+                <a:ea typeface="Arial" panose="020B0604020202090204"/>
+                <a:cs typeface="Arial" panose="020B0604020202090204"/>
+              </a:rPr>
+              <a:t>Open Canvas</a:t>
+            </a:r>
+            <a:endParaRPr lang="en-US" sz="2550" b="1" dirty="0">
+              <a:solidFill>
+                <a:srgbClr val="20243A"/>
+              </a:solidFill>
+              <a:latin typeface="Arial" panose="020B0604020202090204"/>
+              <a:ea typeface="Arial" panose="020B0604020202090204"/>
+              <a:cs typeface="Arial" panose="020B0604020202090204"/>
+            </a:endParaRPr>
+          </a:p>
+        </p:txBody>
+      </p:sp>
+      <p:sp>
+        <p:nvSpPr>
+          <p:cNvPr id="9" name="TextBox 9"/>
           <p:cNvSpPr txBox="1"/>
           <p:nvPr/>
         </p:nvSpPr>
         <p:spPr>
           <a:xfrm>
-            <a:off x="501396" y="543878"/>
-            <a:ext cx="3340770" cy="498729"/>
+            <a:off x="4218546" y="6665595"/>
+            <a:ext cx="739216" cy="176212"/>
           </a:xfrm>
           <a:prstGeom prst="rect">
             <a:avLst/>
@@ -1400,318 +1355,6 @@
           </a:bodyPr>
           <a:lstStyle/>
           <a:p>
-            <a:pPr algn="l"/>
-            <a:r>
-              <a:rPr lang="en-US" sz="2550" b="1" dirty="0">
-                <a:solidFill>
-                  <a:srgbClr val="20243A"/>
-                </a:solidFill>
-                <a:latin typeface="Arial" panose="020B0604020202090204"/>
-                <a:ea typeface="Arial" panose="020B0604020202090204"/>
-                <a:cs typeface="Arial" panose="020B0604020202090204"/>
-              </a:rPr>
-              <a:t>Single-Image Story</a:t>
-            </a:r>
-            <a:endParaRPr lang="en-US" sz="2550" b="1" dirty="0">
-              <a:solidFill>
-                <a:srgbClr val="20243A"/>
-              </a:solidFill>
-              <a:latin typeface="Arial" panose="020B0604020202090204"/>
-              <a:ea typeface="Arial" panose="020B0604020202090204"/>
-              <a:cs typeface="Arial" panose="020B0604020202090204"/>
-            </a:endParaRPr>
-          </a:p>
-        </p:txBody>
-      </p:sp>
-      <p:pic>
-        <p:nvPicPr>
-          <p:cNvPr id="12" name="Image 12"/>
-          <p:cNvPicPr>
-            <a:picLocks noChangeAspect="1"/>
-          </p:cNvPicPr>
-          <p:nvPr/>
-        </p:nvPicPr>
-        <p:blipFill>
-          <a:blip r:embed="rId2"/>
-          <a:srcRect l="4974" r="4973"/>
-          <a:stretch>
-            <a:fillRect/>
-          </a:stretch>
-        </p:blipFill>
-        <p:spPr>
-          <a:xfrm>
-            <a:off x="552450" y="1343025"/>
-            <a:ext cx="7734300" cy="4695825"/>
-          </a:xfrm>
-          <a:prstGeom prst="rect">
-            <a:avLst/>
-          </a:prstGeom>
-        </p:spPr>
-      </p:pic>
-      <p:sp>
-        <p:nvSpPr>
-          <p:cNvPr id="13" name="TextBox 13"/>
-          <p:cNvSpPr txBox="1"/>
-          <p:nvPr/>
-        </p:nvSpPr>
-        <p:spPr>
-          <a:xfrm>
-            <a:off x="8812149" y="2173129"/>
-            <a:ext cx="2298954" cy="2146364"/>
-          </a:xfrm>
-          <a:prstGeom prst="rect">
-            <a:avLst/>
-          </a:prstGeom>
-          <a:noFill/>
-          <a:ln>
-            <a:noFill/>
-          </a:ln>
-        </p:spPr>
-        <p:txBody>
-          <a:bodyPr wrap="none" lIns="0" tIns="0" rIns="0" bIns="0" anchor="t" anchorCtr="0">
-            <a:spAutoFit/>
-          </a:bodyPr>
-          <a:lstStyle/>
-          <a:p>
-            <a:pPr algn="l">
-              <a:lnSpc>
-                <a:spcPts val="1650"/>
-              </a:lnSpc>
-            </a:pPr>
-            <a:r>
-              <a:rPr lang="en-US" sz="1580" dirty="0">
-                <a:solidFill>
-                  <a:srgbClr val="20243A"/>
-                </a:solidFill>
-                <a:latin typeface="Arial" panose="020B0604020202090204"/>
-                <a:ea typeface="Arial" panose="020B0604020202090204"/>
-                <a:cs typeface="Arial" panose="020B0604020202090204"/>
-              </a:rPr>
-              <a:t>{{IMAGE_DESCRIPTION}}</a:t>
-            </a:r>
-            <a:endParaRPr lang="en-US" sz="1580" dirty="0">
-              <a:solidFill>
-                <a:srgbClr val="20243A"/>
-              </a:solidFill>
-              <a:latin typeface="Arial" panose="020B0604020202090204"/>
-              <a:ea typeface="Arial" panose="020B0604020202090204"/>
-              <a:cs typeface="Arial" panose="020B0604020202090204"/>
-            </a:endParaRPr>
-          </a:p>
-          <a:p>
-            <a:pPr algn="l">
-              <a:lnSpc>
-                <a:spcPts val="1650"/>
-              </a:lnSpc>
-              <a:spcBef>
-                <a:spcPts val="900"/>
-              </a:spcBef>
-            </a:pPr>
-            <a:r>
-              <a:rPr lang="en-US" sz="1120" dirty="0">
-                <a:solidFill>
-                  <a:srgbClr val="5E6478"/>
-                </a:solidFill>
-                <a:latin typeface="Arial" panose="020B0604020202090204"/>
-                <a:ea typeface="Arial" panose="020B0604020202090204"/>
-                <a:cs typeface="Arial" panose="020B0604020202090204"/>
-              </a:rPr>
-              <a:t>What does the image show?</a:t>
-            </a:r>
-            <a:endParaRPr lang="en-US" sz="1120" dirty="0">
-              <a:solidFill>
-                <a:srgbClr val="5E6478"/>
-              </a:solidFill>
-              <a:latin typeface="Arial" panose="020B0604020202090204"/>
-              <a:ea typeface="Arial" panose="020B0604020202090204"/>
-              <a:cs typeface="Arial" panose="020B0604020202090204"/>
-            </a:endParaRPr>
-          </a:p>
-          <a:p>
-            <a:pPr algn="l">
-              <a:lnSpc>
-                <a:spcPts val="1650"/>
-              </a:lnSpc>
-              <a:spcBef>
-                <a:spcPts val="375"/>
-              </a:spcBef>
-            </a:pPr>
-            <a:r>
-              <a:rPr lang="en-US" sz="1120" dirty="0">
-                <a:solidFill>
-                  <a:srgbClr val="5E6478"/>
-                </a:solidFill>
-                <a:latin typeface="Arial" panose="020B0604020202090204"/>
-                <a:ea typeface="Arial" panose="020B0604020202090204"/>
-                <a:cs typeface="Arial" panose="020B0604020202090204"/>
-              </a:rPr>
-              <a:t>Why is it relevant this week?</a:t>
-            </a:r>
-            <a:endParaRPr lang="en-US" sz="1120" dirty="0">
-              <a:solidFill>
-                <a:srgbClr val="5E6478"/>
-              </a:solidFill>
-              <a:latin typeface="Arial" panose="020B0604020202090204"/>
-              <a:ea typeface="Arial" panose="020B0604020202090204"/>
-              <a:cs typeface="Arial" panose="020B0604020202090204"/>
-            </a:endParaRPr>
-          </a:p>
-          <a:p>
-            <a:pPr algn="l">
-              <a:lnSpc>
-                <a:spcPts val="1650"/>
-              </a:lnSpc>
-              <a:spcBef>
-                <a:spcPts val="375"/>
-              </a:spcBef>
-            </a:pPr>
-            <a:r>
-              <a:rPr lang="en-US" sz="1120" dirty="0">
-                <a:solidFill>
-                  <a:srgbClr val="5E6478"/>
-                </a:solidFill>
-                <a:latin typeface="Arial" panose="020B0604020202090204"/>
-                <a:ea typeface="Arial" panose="020B0604020202090204"/>
-                <a:cs typeface="Arial" panose="020B0604020202090204"/>
-              </a:rPr>
-              <a:t>What should the audience notice?</a:t>
-            </a:r>
-            <a:endParaRPr lang="en-US" sz="1120" dirty="0">
-              <a:solidFill>
-                <a:srgbClr val="5E6478"/>
-              </a:solidFill>
-              <a:latin typeface="Arial" panose="020B0604020202090204"/>
-              <a:ea typeface="Arial" panose="020B0604020202090204"/>
-              <a:cs typeface="Arial" panose="020B0604020202090204"/>
-            </a:endParaRPr>
-          </a:p>
-          <a:p>
-            <a:pPr algn="l">
-              <a:lnSpc>
-                <a:spcPts val="1650"/>
-              </a:lnSpc>
-              <a:spcBef>
-                <a:spcPts val="1050"/>
-              </a:spcBef>
-            </a:pPr>
-            <a:r>
-              <a:rPr lang="en-US" sz="1050" b="1" dirty="0">
-                <a:solidFill>
-                  <a:srgbClr val="D71440"/>
-                </a:solidFill>
-                <a:latin typeface="Arial" panose="020B0604020202090204"/>
-                <a:ea typeface="Arial" panose="020B0604020202090204"/>
-                <a:cs typeface="Arial" panose="020B0604020202090204"/>
-              </a:rPr>
-              <a:t>TIP</a:t>
-            </a:r>
-            <a:endParaRPr lang="en-US" sz="1050" b="1" dirty="0">
-              <a:solidFill>
-                <a:srgbClr val="D71440"/>
-              </a:solidFill>
-              <a:latin typeface="Arial" panose="020B0604020202090204"/>
-              <a:ea typeface="Arial" panose="020B0604020202090204"/>
-              <a:cs typeface="Arial" panose="020B0604020202090204"/>
-            </a:endParaRPr>
-          </a:p>
-          <a:p>
-            <a:pPr algn="l">
-              <a:lnSpc>
-                <a:spcPts val="1650"/>
-              </a:lnSpc>
-              <a:spcBef>
-                <a:spcPts val="225"/>
-              </a:spcBef>
-            </a:pPr>
-            <a:r>
-              <a:rPr lang="en-US" sz="1050" dirty="0">
-                <a:solidFill>
-                  <a:srgbClr val="5E6478"/>
-                </a:solidFill>
-                <a:latin typeface="Arial" panose="020B0604020202090204"/>
-                <a:ea typeface="Arial" panose="020B0604020202090204"/>
-                <a:cs typeface="Arial" panose="020B0604020202090204"/>
-              </a:rPr>
-              <a:t>Use one annotated result, system</a:t>
-            </a:r>
-            <a:br>
-              <a:rPr lang="en-US" sz="1050" dirty="0">
-                <a:solidFill>
-                  <a:srgbClr val="5E6478"/>
-                </a:solidFill>
-                <a:latin typeface="Arial" panose="020B0604020202090204"/>
-                <a:ea typeface="Arial" panose="020B0604020202090204"/>
-                <a:cs typeface="Arial" panose="020B0604020202090204"/>
-              </a:rPr>
-            </a:br>
-            <a:r>
-              <a:rPr lang="en-US" sz="1050" dirty="0">
-                <a:solidFill>
-                  <a:srgbClr val="5E6478"/>
-                </a:solidFill>
-                <a:latin typeface="Arial" panose="020B0604020202090204"/>
-                <a:ea typeface="Arial" panose="020B0604020202090204"/>
-                <a:cs typeface="Arial" panose="020B0604020202090204"/>
-              </a:rPr>
-              <a:t>overview, qualitative example,</a:t>
-            </a:r>
-            <a:br>
-              <a:rPr lang="en-US" sz="1050" dirty="0">
-                <a:solidFill>
-                  <a:srgbClr val="5E6478"/>
-                </a:solidFill>
-                <a:latin typeface="Arial" panose="020B0604020202090204"/>
-                <a:ea typeface="Arial" panose="020B0604020202090204"/>
-                <a:cs typeface="Arial" panose="020B0604020202090204"/>
-              </a:rPr>
-            </a:br>
-            <a:r>
-              <a:rPr lang="en-US" sz="1050" dirty="0">
-                <a:solidFill>
-                  <a:srgbClr val="5E6478"/>
-                </a:solidFill>
-                <a:latin typeface="Arial" panose="020B0604020202090204"/>
-                <a:ea typeface="Arial" panose="020B0604020202090204"/>
-                <a:cs typeface="Arial" panose="020B0604020202090204"/>
-              </a:rPr>
-              <a:t>or implementation photograph.</a:t>
-            </a:r>
-            <a:endParaRPr lang="en-US" sz="1050" dirty="0">
-              <a:solidFill>
-                <a:srgbClr val="5E6478"/>
-              </a:solidFill>
-              <a:latin typeface="Arial" panose="020B0604020202090204"/>
-              <a:ea typeface="Arial" panose="020B0604020202090204"/>
-              <a:cs typeface="Arial" panose="020B0604020202090204"/>
-            </a:endParaRPr>
-          </a:p>
-        </p:txBody>
-      </p:sp>
-      <p:sp>
-        <p:nvSpPr>
-          <p:cNvPr id="14" name="TextBox 14"/>
-          <p:cNvSpPr txBox="1"/>
-          <p:nvPr/>
-        </p:nvSpPr>
-        <p:spPr>
-          <a:xfrm>
-            <a:off x="4218546" y="6665595"/>
-            <a:ext cx="739216" cy="176212"/>
-          </a:xfrm>
-          <a:prstGeom prst="rect">
-            <a:avLst/>
-          </a:prstGeom>
-          <a:noFill/>
-          <a:ln>
-            <a:noFill/>
-          </a:ln>
-        </p:spPr>
-        <p:txBody>
-          <a:bodyPr wrap="none" lIns="0" tIns="0" rIns="0" bIns="0" anchor="t" anchorCtr="0">
-            <a:spAutoFit/>
-          </a:bodyPr>
-          <a:lstStyle/>
-          <a:p>
             <a:pPr algn="r"/>
             <a:r>
               <a:rPr lang="en-US" sz="900" dirty="0">
@@ -1737,7 +1380,7 @@
       </p:sp>
       <p:sp>
         <p:nvSpPr>
-          <p:cNvPr id="15" name="TextBox 15"/>
+          <p:cNvPr id="10" name="TextBox 10"/>
           <p:cNvSpPr txBox="1"/>
           <p:nvPr/>
         </p:nvSpPr>
@@ -1956,66 +1599,18 @@
       </p:sp>
       <p:sp>
         <p:nvSpPr>
-          <p:cNvPr id="7" name="TextBox 7"/>
-          <p:cNvSpPr txBox="1"/>
-          <p:nvPr/>
-        </p:nvSpPr>
-        <p:spPr>
-          <a:xfrm>
-            <a:off x="8416388" y="713899"/>
-            <a:ext cx="1056415" cy="190690"/>
-          </a:xfrm>
-          <a:prstGeom prst="rect">
-            <a:avLst/>
-          </a:prstGeom>
-          <a:noFill/>
-          <a:ln>
-            <a:noFill/>
-          </a:ln>
-        </p:spPr>
-        <p:txBody>
-          <a:bodyPr wrap="none" lIns="0" tIns="0" rIns="0" bIns="0" anchor="t" anchorCtr="0">
-            <a:spAutoFit/>
-          </a:bodyPr>
-          <a:lstStyle/>
-          <a:p>
-            <a:pPr algn="r"/>
-            <a:r>
-              <a:rPr lang="en-US" sz="980" b="1" dirty="0">
-                <a:solidFill>
-                  <a:srgbClr val="5E6478"/>
-                </a:solidFill>
-                <a:latin typeface="Arial" panose="020B0604020202090204"/>
-                <a:ea typeface="Arial" panose="020B0604020202090204"/>
-                <a:cs typeface="Arial" panose="020B0604020202090204"/>
-              </a:rPr>
-              <a:t>USE 2–4 IMAGES</a:t>
-            </a:r>
-            <a:endParaRPr lang="en-US" sz="980" b="1" dirty="0">
-              <a:solidFill>
-                <a:srgbClr val="5E6478"/>
-              </a:solidFill>
-              <a:latin typeface="Arial" panose="020B0604020202090204"/>
-              <a:ea typeface="Arial" panose="020B0604020202090204"/>
-              <a:cs typeface="Arial" panose="020B0604020202090204"/>
-            </a:endParaRPr>
-          </a:p>
-        </p:txBody>
-      </p:sp>
-      <p:sp>
-        <p:nvSpPr>
-          <p:cNvPr id="8" name="Rectangle 8"/>
+          <p:cNvPr id="7" name="Rectangle 7"/>
           <p:cNvSpPr/>
           <p:nvPr/>
         </p:nvSpPr>
         <p:spPr>
           <a:xfrm>
             <a:off x="514350" y="1304925"/>
-            <a:ext cx="5391150" cy="2209800"/>
+            <a:ext cx="7810500" cy="4772025"/>
           </a:xfrm>
           <a:prstGeom prst="roundRect">
             <a:avLst>
-              <a:gd name="adj" fmla="val 3448"/>
+              <a:gd name="adj" fmla="val 1996"/>
             </a:avLst>
           </a:prstGeom>
           <a:solidFill>
@@ -2030,180 +1625,60 @@
       </p:sp>
       <p:sp>
         <p:nvSpPr>
+          <p:cNvPr id="8" name="Rectangle 8"/>
+          <p:cNvSpPr/>
+          <p:nvPr/>
+        </p:nvSpPr>
+        <p:spPr>
+          <a:xfrm>
+            <a:off x="8572500" y="1304925"/>
+            <a:ext cx="3048000" cy="4772025"/>
+          </a:xfrm>
+          <a:prstGeom prst="roundRect">
+            <a:avLst>
+              <a:gd name="adj" fmla="val 3125"/>
+            </a:avLst>
+          </a:prstGeom>
+          <a:solidFill>
+            <a:srgbClr val="EEF1FA"/>
+          </a:solidFill>
+          <a:ln>
+            <a:noFill/>
+          </a:ln>
+        </p:spPr>
+      </p:sp>
+      <p:sp>
+        <p:nvSpPr>
           <p:cNvPr id="9" name="Rectangle 9"/>
           <p:cNvSpPr/>
           <p:nvPr/>
         </p:nvSpPr>
         <p:spPr>
           <a:xfrm>
-            <a:off x="514350" y="3152775"/>
-            <a:ext cx="5391150" cy="361950"/>
-          </a:xfrm>
-          <a:prstGeom prst="rect">
-            <a:avLst/>
-          </a:prstGeom>
-          <a:solidFill>
-            <a:srgbClr val="EEF1FA"/>
-          </a:solidFill>
-          <a:ln>
-            <a:noFill/>
-          </a:ln>
-        </p:spPr>
-      </p:sp>
-      <p:sp>
-        <p:nvSpPr>
-          <p:cNvPr id="10" name="Rectangle 10"/>
-          <p:cNvSpPr/>
-          <p:nvPr/>
-        </p:nvSpPr>
-        <p:spPr>
-          <a:xfrm>
-            <a:off x="6229350" y="1304925"/>
-            <a:ext cx="5391150" cy="2209800"/>
-          </a:xfrm>
-          <a:prstGeom prst="roundRect">
-            <a:avLst>
-              <a:gd name="adj" fmla="val 3448"/>
-            </a:avLst>
-          </a:prstGeom>
-          <a:solidFill>
-            <a:srgbClr val="FFFFFF"/>
-          </a:solidFill>
-          <a:ln w="19050">
-            <a:solidFill>
-              <a:srgbClr val="C8C8C8"/>
-            </a:solidFill>
-          </a:ln>
-        </p:spPr>
-      </p:sp>
-      <p:sp>
-        <p:nvSpPr>
-          <p:cNvPr id="11" name="Rectangle 11"/>
-          <p:cNvSpPr/>
-          <p:nvPr/>
-        </p:nvSpPr>
-        <p:spPr>
-          <a:xfrm>
-            <a:off x="6229350" y="3152775"/>
-            <a:ext cx="5391150" cy="361950"/>
-          </a:xfrm>
-          <a:prstGeom prst="rect">
-            <a:avLst/>
-          </a:prstGeom>
-          <a:solidFill>
-            <a:srgbClr val="EEF1FA"/>
-          </a:solidFill>
-          <a:ln>
-            <a:noFill/>
-          </a:ln>
-        </p:spPr>
-      </p:sp>
-      <p:sp>
-        <p:nvSpPr>
-          <p:cNvPr id="12" name="Rectangle 12"/>
-          <p:cNvSpPr/>
-          <p:nvPr/>
-        </p:nvSpPr>
-        <p:spPr>
-          <a:xfrm>
-            <a:off x="514350" y="3686175"/>
-            <a:ext cx="5391150" cy="2209800"/>
-          </a:xfrm>
-          <a:prstGeom prst="roundRect">
-            <a:avLst>
-              <a:gd name="adj" fmla="val 3448"/>
-            </a:avLst>
-          </a:prstGeom>
-          <a:solidFill>
-            <a:srgbClr val="FFFFFF"/>
-          </a:solidFill>
-          <a:ln w="19050">
-            <a:solidFill>
-              <a:srgbClr val="C8C8C8"/>
-            </a:solidFill>
-          </a:ln>
-        </p:spPr>
-      </p:sp>
-      <p:sp>
-        <p:nvSpPr>
-          <p:cNvPr id="13" name="Rectangle 13"/>
-          <p:cNvSpPr/>
-          <p:nvPr/>
-        </p:nvSpPr>
-        <p:spPr>
-          <a:xfrm>
-            <a:off x="514350" y="5534025"/>
-            <a:ext cx="5391150" cy="361950"/>
-          </a:xfrm>
-          <a:prstGeom prst="rect">
-            <a:avLst/>
-          </a:prstGeom>
-          <a:solidFill>
-            <a:srgbClr val="EEF1FA"/>
-          </a:solidFill>
-          <a:ln>
-            <a:noFill/>
-          </a:ln>
-        </p:spPr>
-      </p:sp>
-      <p:sp>
-        <p:nvSpPr>
-          <p:cNvPr id="14" name="Rectangle 14"/>
-          <p:cNvSpPr/>
-          <p:nvPr/>
-        </p:nvSpPr>
-        <p:spPr>
-          <a:xfrm>
-            <a:off x="6229350" y="3686175"/>
-            <a:ext cx="5391150" cy="2209800"/>
-          </a:xfrm>
-          <a:prstGeom prst="roundRect">
-            <a:avLst>
-              <a:gd name="adj" fmla="val 3448"/>
-            </a:avLst>
-          </a:prstGeom>
-          <a:solidFill>
-            <a:srgbClr val="FFFFFF"/>
-          </a:solidFill>
-          <a:ln w="19050">
-            <a:solidFill>
-              <a:srgbClr val="C8C8C8"/>
-            </a:solidFill>
-          </a:ln>
-        </p:spPr>
-      </p:sp>
-      <p:sp>
-        <p:nvSpPr>
-          <p:cNvPr id="15" name="Rectangle 15"/>
-          <p:cNvSpPr/>
-          <p:nvPr/>
-        </p:nvSpPr>
-        <p:spPr>
-          <a:xfrm>
-            <a:off x="6229350" y="5534025"/>
-            <a:ext cx="5391150" cy="361950"/>
-          </a:xfrm>
-          <a:prstGeom prst="rect">
-            <a:avLst/>
-          </a:prstGeom>
-          <a:solidFill>
-            <a:srgbClr val="EEF1FA"/>
-          </a:solidFill>
-          <a:ln>
-            <a:noFill/>
-          </a:ln>
-        </p:spPr>
-      </p:sp>
-      <p:sp>
-        <p:nvSpPr>
-          <p:cNvPr id="16" name="TextBox 16"/>
+            <a:off x="8572500" y="1304925"/>
+            <a:ext cx="3048000" cy="114300"/>
+          </a:xfrm>
+          <a:prstGeom prst="rect">
+            <a:avLst/>
+          </a:prstGeom>
+          <a:solidFill>
+            <a:srgbClr val="D71440"/>
+          </a:solidFill>
+          <a:ln>
+            <a:noFill/>
+          </a:ln>
+        </p:spPr>
+      </p:sp>
+      <p:sp>
+        <p:nvSpPr>
+          <p:cNvPr id="10" name="TextBox 10"/>
           <p:cNvSpPr txBox="1"/>
           <p:nvPr/>
         </p:nvSpPr>
         <p:spPr>
           <a:xfrm>
-            <a:off x="501396" y="543878"/>
-            <a:ext cx="3215507" cy="498729"/>
+            <a:off x="8815197" y="1647349"/>
+            <a:ext cx="1290599" cy="190690"/>
           </a:xfrm>
           <a:prstGeom prst="rect">
             <a:avLst/>
@@ -2221,6 +1696,54 @@
           <a:p>
             <a:pPr algn="l"/>
             <a:r>
+              <a:rPr lang="en-US" sz="980" b="1" dirty="0">
+                <a:solidFill>
+                  <a:srgbClr val="181C62"/>
+                </a:solidFill>
+                <a:latin typeface="Arial" panose="020B0604020202090204"/>
+                <a:ea typeface="Arial" panose="020B0604020202090204"/>
+                <a:cs typeface="Arial" panose="020B0604020202090204"/>
+              </a:rPr>
+              <a:t>IMAGE DESCRIPTION</a:t>
+            </a:r>
+            <a:endParaRPr lang="en-US" sz="980" b="1" dirty="0">
+              <a:solidFill>
+                <a:srgbClr val="181C62"/>
+              </a:solidFill>
+              <a:latin typeface="Arial" panose="020B0604020202090204"/>
+              <a:ea typeface="Arial" panose="020B0604020202090204"/>
+              <a:cs typeface="Arial" panose="020B0604020202090204"/>
+            </a:endParaRPr>
+          </a:p>
+        </p:txBody>
+      </p:sp>
+      <p:sp>
+        <p:nvSpPr>
+          <p:cNvPr id="11" name="TextBox 11"/>
+          <p:cNvSpPr txBox="1"/>
+          <p:nvPr/>
+        </p:nvSpPr>
+        <p:spPr>
+          <a:xfrm>
+            <a:off x="501396" y="543878"/>
+            <a:ext cx="3340770" cy="498729"/>
+          </a:xfrm>
+          <a:prstGeom prst="rect">
+            <a:avLst/>
+          </a:prstGeom>
+          <a:noFill/>
+          <a:ln>
+            <a:noFill/>
+          </a:ln>
+        </p:spPr>
+        <p:txBody>
+          <a:bodyPr wrap="none" lIns="0" tIns="0" rIns="0" bIns="0" anchor="t" anchorCtr="0">
+            <a:spAutoFit/>
+          </a:bodyPr>
+          <a:lstStyle/>
+          <a:p>
+            <a:pPr algn="l"/>
+            <a:r>
               <a:rPr lang="en-US" sz="2550" b="1" dirty="0">
                 <a:solidFill>
                   <a:srgbClr val="20243A"/>
@@ -2229,7 +1752,7 @@
                 <a:ea typeface="Arial" panose="020B0604020202090204"/>
                 <a:cs typeface="Arial" panose="020B0604020202090204"/>
               </a:rPr>
-              <a:t>Multi-Image Story</a:t>
+              <a:t>Single-Image Story</a:t>
             </a:r>
             <a:endParaRPr lang="en-US" sz="2550" b="1" dirty="0">
               <a:solidFill>
@@ -2244,7 +1767,7 @@
       </p:sp>
       <p:pic>
         <p:nvPicPr>
-          <p:cNvPr id="17" name="Image 17"/>
+          <p:cNvPr id="12" name="Image 12"/>
           <p:cNvPicPr>
             <a:picLocks noChangeAspect="1"/>
           </p:cNvPicPr>
@@ -2252,7 +1775,7 @@
         </p:nvPicPr>
         <p:blipFill>
           <a:blip r:embed="rId2"/>
-          <a:srcRect t="19517" b="19517"/>
+          <a:srcRect l="4974" r="4973"/>
           <a:stretch>
             <a:fillRect/>
           </a:stretch>
@@ -2260,98 +1783,23 @@
         <p:spPr>
           <a:xfrm>
             <a:off x="552450" y="1343025"/>
-            <a:ext cx="5314950" cy="1771650"/>
+            <a:ext cx="7734300" cy="4695825"/>
           </a:xfrm>
           <a:prstGeom prst="rect">
             <a:avLst/>
           </a:prstGeom>
         </p:spPr>
       </p:pic>
-      <p:pic>
-        <p:nvPicPr>
-          <p:cNvPr id="18" name="Image 18"/>
-          <p:cNvPicPr>
-            <a:picLocks noChangeAspect="1"/>
-          </p:cNvPicPr>
-          <p:nvPr/>
-        </p:nvPicPr>
-        <p:blipFill>
-          <a:blip r:embed="rId3"/>
-          <a:srcRect t="14228" b="14227"/>
-          <a:stretch>
-            <a:fillRect/>
-          </a:stretch>
-        </p:blipFill>
-        <p:spPr>
-          <a:xfrm>
-            <a:off x="6267450" y="1343025"/>
-            <a:ext cx="5314950" cy="1771650"/>
-          </a:xfrm>
-          <a:prstGeom prst="rect">
-            <a:avLst/>
-          </a:prstGeom>
-        </p:spPr>
-      </p:pic>
-      <p:pic>
-        <p:nvPicPr>
-          <p:cNvPr id="19" name="Image 19"/>
-          <p:cNvPicPr>
-            <a:picLocks noChangeAspect="1"/>
-          </p:cNvPicPr>
-          <p:nvPr/>
-        </p:nvPicPr>
-        <p:blipFill>
-          <a:blip r:embed="rId4"/>
-          <a:srcRect t="25000" b="25000"/>
-          <a:stretch>
-            <a:fillRect/>
-          </a:stretch>
-        </p:blipFill>
-        <p:spPr>
-          <a:xfrm>
-            <a:off x="552450" y="3724275"/>
-            <a:ext cx="5314950" cy="1771650"/>
-          </a:xfrm>
-          <a:prstGeom prst="rect">
-            <a:avLst/>
-          </a:prstGeom>
-        </p:spPr>
-      </p:pic>
-      <p:pic>
-        <p:nvPicPr>
-          <p:cNvPr id="20" name="Image 20"/>
-          <p:cNvPicPr>
-            <a:picLocks noChangeAspect="1"/>
-          </p:cNvPicPr>
-          <p:nvPr/>
-        </p:nvPicPr>
-        <p:blipFill>
-          <a:blip r:embed="rId5"/>
-          <a:srcRect t="28986" b="28987"/>
-          <a:stretch>
-            <a:fillRect/>
-          </a:stretch>
-        </p:blipFill>
-        <p:spPr>
-          <a:xfrm>
-            <a:off x="6267450" y="3724275"/>
-            <a:ext cx="5314950" cy="1771650"/>
-          </a:xfrm>
-          <a:prstGeom prst="rect">
-            <a:avLst/>
-          </a:prstGeom>
-        </p:spPr>
-      </p:pic>
-      <p:sp>
-        <p:nvSpPr>
-          <p:cNvPr id="21" name="TextBox 21"/>
+      <p:sp>
+        <p:nvSpPr>
+          <p:cNvPr id="13" name="TextBox 13"/>
           <p:cNvSpPr txBox="1"/>
           <p:nvPr/>
         </p:nvSpPr>
         <p:spPr>
           <a:xfrm>
-            <a:off x="680085" y="3269456"/>
-            <a:ext cx="1142522" cy="220028"/>
+            <a:off x="8812149" y="2173129"/>
+            <a:ext cx="2298954" cy="2146364"/>
           </a:xfrm>
           <a:prstGeom prst="rect">
             <a:avLst/>
@@ -2367,39 +1815,230 @@
           </a:bodyPr>
           <a:lstStyle/>
           <a:p>
-            <a:pPr algn="l"/>
+            <a:pPr algn="l">
+              <a:lnSpc>
+                <a:spcPts val="1650"/>
+              </a:lnSpc>
+            </a:pPr>
+            <a:r>
+              <a:rPr lang="en-US" sz="1580" dirty="0">
+                <a:solidFill>
+                  <a:srgbClr val="20243A"/>
+                </a:solidFill>
+                <a:latin typeface="Arial" panose="020B0604020202090204"/>
+                <a:ea typeface="Arial" panose="020B0604020202090204"/>
+                <a:cs typeface="Arial" panose="020B0604020202090204"/>
+              </a:rPr>
+              <a:t>{{IMAGE_DESCRIPTION}}</a:t>
+            </a:r>
+            <a:endParaRPr lang="en-US" sz="1580" dirty="0">
+              <a:solidFill>
+                <a:srgbClr val="20243A"/>
+              </a:solidFill>
+              <a:latin typeface="Arial" panose="020B0604020202090204"/>
+              <a:ea typeface="Arial" panose="020B0604020202090204"/>
+              <a:cs typeface="Arial" panose="020B0604020202090204"/>
+            </a:endParaRPr>
+          </a:p>
+          <a:p>
+            <a:pPr algn="l">
+              <a:lnSpc>
+                <a:spcPts val="1650"/>
+              </a:lnSpc>
+              <a:spcBef>
+                <a:spcPts val="900"/>
+              </a:spcBef>
+            </a:pPr>
             <a:r>
               <a:rPr lang="en-US" sz="1120" dirty="0">
                 <a:solidFill>
-                  <a:srgbClr val="20243A"/>
-                </a:solidFill>
-                <a:latin typeface="Arial" panose="020B0604020202090204"/>
-                <a:ea typeface="Arial" panose="020B0604020202090204"/>
-                <a:cs typeface="Arial" panose="020B0604020202090204"/>
-              </a:rPr>
-              <a:t>{{CAPTION_1}}</a:t>
+                  <a:srgbClr val="5E6478"/>
+                </a:solidFill>
+                <a:latin typeface="Arial" panose="020B0604020202090204"/>
+                <a:ea typeface="Arial" panose="020B0604020202090204"/>
+                <a:cs typeface="Arial" panose="020B0604020202090204"/>
+              </a:rPr>
+              <a:t>What does the image show?</a:t>
             </a:r>
             <a:endParaRPr lang="en-US" sz="1120" dirty="0">
               <a:solidFill>
-                <a:srgbClr val="20243A"/>
-              </a:solidFill>
-              <a:latin typeface="Arial" panose="020B0604020202090204"/>
-              <a:ea typeface="Arial" panose="020B0604020202090204"/>
-              <a:cs typeface="Arial" panose="020B0604020202090204"/>
-            </a:endParaRPr>
-          </a:p>
-        </p:txBody>
-      </p:sp>
-      <p:sp>
-        <p:nvSpPr>
-          <p:cNvPr id="22" name="TextBox 22"/>
+                <a:srgbClr val="5E6478"/>
+              </a:solidFill>
+              <a:latin typeface="Arial" panose="020B0604020202090204"/>
+              <a:ea typeface="Arial" panose="020B0604020202090204"/>
+              <a:cs typeface="Arial" panose="020B0604020202090204"/>
+            </a:endParaRPr>
+          </a:p>
+          <a:p>
+            <a:pPr algn="l">
+              <a:lnSpc>
+                <a:spcPts val="1650"/>
+              </a:lnSpc>
+              <a:spcBef>
+                <a:spcPts val="375"/>
+              </a:spcBef>
+            </a:pPr>
+            <a:r>
+              <a:rPr lang="en-US" sz="1120" dirty="0">
+                <a:solidFill>
+                  <a:srgbClr val="5E6478"/>
+                </a:solidFill>
+                <a:latin typeface="Arial" panose="020B0604020202090204"/>
+                <a:ea typeface="Arial" panose="020B0604020202090204"/>
+                <a:cs typeface="Arial" panose="020B0604020202090204"/>
+              </a:rPr>
+              <a:t>Why is it relevant this week?</a:t>
+            </a:r>
+            <a:endParaRPr lang="en-US" sz="1120" dirty="0">
+              <a:solidFill>
+                <a:srgbClr val="5E6478"/>
+              </a:solidFill>
+              <a:latin typeface="Arial" panose="020B0604020202090204"/>
+              <a:ea typeface="Arial" panose="020B0604020202090204"/>
+              <a:cs typeface="Arial" panose="020B0604020202090204"/>
+            </a:endParaRPr>
+          </a:p>
+          <a:p>
+            <a:pPr algn="l">
+              <a:lnSpc>
+                <a:spcPts val="1650"/>
+              </a:lnSpc>
+              <a:spcBef>
+                <a:spcPts val="375"/>
+              </a:spcBef>
+            </a:pPr>
+            <a:r>
+              <a:rPr lang="en-US" sz="1120" dirty="0">
+                <a:solidFill>
+                  <a:srgbClr val="5E6478"/>
+                </a:solidFill>
+                <a:latin typeface="Arial" panose="020B0604020202090204"/>
+                <a:ea typeface="Arial" panose="020B0604020202090204"/>
+                <a:cs typeface="Arial" panose="020B0604020202090204"/>
+              </a:rPr>
+              <a:t>What should the audience notice?</a:t>
+            </a:r>
+            <a:endParaRPr lang="en-US" sz="1120" dirty="0">
+              <a:solidFill>
+                <a:srgbClr val="5E6478"/>
+              </a:solidFill>
+              <a:latin typeface="Arial" panose="020B0604020202090204"/>
+              <a:ea typeface="Arial" panose="020B0604020202090204"/>
+              <a:cs typeface="Arial" panose="020B0604020202090204"/>
+            </a:endParaRPr>
+          </a:p>
+          <a:p>
+            <a:pPr algn="l">
+              <a:lnSpc>
+                <a:spcPts val="1650"/>
+              </a:lnSpc>
+              <a:spcBef>
+                <a:spcPts val="1050"/>
+              </a:spcBef>
+            </a:pPr>
+            <a:r>
+              <a:rPr lang="en-US" sz="1050" b="1" dirty="0">
+                <a:solidFill>
+                  <a:srgbClr val="D71440"/>
+                </a:solidFill>
+                <a:latin typeface="Arial" panose="020B0604020202090204"/>
+                <a:ea typeface="Arial" panose="020B0604020202090204"/>
+                <a:cs typeface="Arial" panose="020B0604020202090204"/>
+              </a:rPr>
+              <a:t>TIP</a:t>
+            </a:r>
+            <a:endParaRPr lang="en-US" sz="1050" b="1" dirty="0">
+              <a:solidFill>
+                <a:srgbClr val="D71440"/>
+              </a:solidFill>
+              <a:latin typeface="Arial" panose="020B0604020202090204"/>
+              <a:ea typeface="Arial" panose="020B0604020202090204"/>
+              <a:cs typeface="Arial" panose="020B0604020202090204"/>
+            </a:endParaRPr>
+          </a:p>
+          <a:p>
+            <a:pPr algn="l">
+              <a:lnSpc>
+                <a:spcPts val="1650"/>
+              </a:lnSpc>
+              <a:spcBef>
+                <a:spcPts val="225"/>
+              </a:spcBef>
+            </a:pPr>
+            <a:r>
+              <a:rPr lang="en-US" sz="1050" dirty="0">
+                <a:solidFill>
+                  <a:srgbClr val="5E6478"/>
+                </a:solidFill>
+                <a:latin typeface="Arial" panose="020B0604020202090204"/>
+                <a:ea typeface="Arial" panose="020B0604020202090204"/>
+                <a:cs typeface="Arial" panose="020B0604020202090204"/>
+              </a:rPr>
+              <a:t>Use one annotated result, system</a:t>
+            </a:r>
+            <a:br>
+              <a:rPr lang="en-US" sz="1050" dirty="0">
+                <a:solidFill>
+                  <a:srgbClr val="5E6478"/>
+                </a:solidFill>
+                <a:latin typeface="Arial" panose="020B0604020202090204"/>
+                <a:ea typeface="Arial" panose="020B0604020202090204"/>
+                <a:cs typeface="Arial" panose="020B0604020202090204"/>
+              </a:rPr>
+            </a:br>
+            <a:r>
+              <a:rPr lang="en-US" sz="1050" dirty="0">
+                <a:solidFill>
+                  <a:srgbClr val="5E6478"/>
+                </a:solidFill>
+                <a:latin typeface="Arial" panose="020B0604020202090204"/>
+                <a:ea typeface="Arial" panose="020B0604020202090204"/>
+                <a:cs typeface="Arial" panose="020B0604020202090204"/>
+              </a:rPr>
+              <a:t>overview, qualitative example,</a:t>
+            </a:r>
+            <a:br>
+              <a:rPr lang="en-US" sz="1050" dirty="0">
+                <a:solidFill>
+                  <a:srgbClr val="5E6478"/>
+                </a:solidFill>
+                <a:latin typeface="Arial" panose="020B0604020202090204"/>
+                <a:ea typeface="Arial" panose="020B0604020202090204"/>
+                <a:cs typeface="Arial" panose="020B0604020202090204"/>
+              </a:rPr>
+            </a:br>
+            <a:r>
+              <a:rPr lang="en-US" sz="1050" dirty="0">
+                <a:solidFill>
+                  <a:srgbClr val="5E6478"/>
+                </a:solidFill>
+                <a:latin typeface="Arial" panose="020B0604020202090204"/>
+                <a:ea typeface="Arial" panose="020B0604020202090204"/>
+                <a:cs typeface="Arial" panose="020B0604020202090204"/>
+              </a:rPr>
+              <a:t>or implementation photograph.</a:t>
+            </a:r>
+            <a:endParaRPr lang="en-US" sz="1050" dirty="0">
+              <a:solidFill>
+                <a:srgbClr val="5E6478"/>
+              </a:solidFill>
+              <a:latin typeface="Arial" panose="020B0604020202090204"/>
+              <a:ea typeface="Arial" panose="020B0604020202090204"/>
+              <a:cs typeface="Arial" panose="020B0604020202090204"/>
+            </a:endParaRPr>
+          </a:p>
+        </p:txBody>
+      </p:sp>
+      <p:sp>
+        <p:nvSpPr>
+          <p:cNvPr id="14" name="TextBox 14"/>
           <p:cNvSpPr txBox="1"/>
           <p:nvPr/>
         </p:nvSpPr>
         <p:spPr>
           <a:xfrm>
-            <a:off x="6395085" y="3269456"/>
-            <a:ext cx="1142522" cy="220028"/>
+            <a:off x="4218546" y="6665595"/>
+            <a:ext cx="739216" cy="176212"/>
           </a:xfrm>
           <a:prstGeom prst="rect">
             <a:avLst/>
@@ -2415,150 +2054,6 @@
           </a:bodyPr>
           <a:lstStyle/>
           <a:p>
-            <a:pPr algn="l"/>
-            <a:r>
-              <a:rPr lang="en-US" sz="1120" dirty="0">
-                <a:solidFill>
-                  <a:srgbClr val="20243A"/>
-                </a:solidFill>
-                <a:latin typeface="Arial" panose="020B0604020202090204"/>
-                <a:ea typeface="Arial" panose="020B0604020202090204"/>
-                <a:cs typeface="Arial" panose="020B0604020202090204"/>
-              </a:rPr>
-              <a:t>{{CAPTION_2}}</a:t>
-            </a:r>
-            <a:endParaRPr lang="en-US" sz="1120" dirty="0">
-              <a:solidFill>
-                <a:srgbClr val="20243A"/>
-              </a:solidFill>
-              <a:latin typeface="Arial" panose="020B0604020202090204"/>
-              <a:ea typeface="Arial" panose="020B0604020202090204"/>
-              <a:cs typeface="Arial" panose="020B0604020202090204"/>
-            </a:endParaRPr>
-          </a:p>
-        </p:txBody>
-      </p:sp>
-      <p:sp>
-        <p:nvSpPr>
-          <p:cNvPr id="23" name="TextBox 23"/>
-          <p:cNvSpPr txBox="1"/>
-          <p:nvPr/>
-        </p:nvSpPr>
-        <p:spPr>
-          <a:xfrm>
-            <a:off x="680085" y="5650706"/>
-            <a:ext cx="1142522" cy="220028"/>
-          </a:xfrm>
-          <a:prstGeom prst="rect">
-            <a:avLst/>
-          </a:prstGeom>
-          <a:noFill/>
-          <a:ln>
-            <a:noFill/>
-          </a:ln>
-        </p:spPr>
-        <p:txBody>
-          <a:bodyPr wrap="none" lIns="0" tIns="0" rIns="0" bIns="0" anchor="t" anchorCtr="0">
-            <a:spAutoFit/>
-          </a:bodyPr>
-          <a:lstStyle/>
-          <a:p>
-            <a:pPr algn="l"/>
-            <a:r>
-              <a:rPr lang="en-US" sz="1120" dirty="0">
-                <a:solidFill>
-                  <a:srgbClr val="20243A"/>
-                </a:solidFill>
-                <a:latin typeface="Arial" panose="020B0604020202090204"/>
-                <a:ea typeface="Arial" panose="020B0604020202090204"/>
-                <a:cs typeface="Arial" panose="020B0604020202090204"/>
-              </a:rPr>
-              <a:t>{{CAPTION_3}}</a:t>
-            </a:r>
-            <a:endParaRPr lang="en-US" sz="1120" dirty="0">
-              <a:solidFill>
-                <a:srgbClr val="20243A"/>
-              </a:solidFill>
-              <a:latin typeface="Arial" panose="020B0604020202090204"/>
-              <a:ea typeface="Arial" panose="020B0604020202090204"/>
-              <a:cs typeface="Arial" panose="020B0604020202090204"/>
-            </a:endParaRPr>
-          </a:p>
-        </p:txBody>
-      </p:sp>
-      <p:sp>
-        <p:nvSpPr>
-          <p:cNvPr id="24" name="TextBox 24"/>
-          <p:cNvSpPr txBox="1"/>
-          <p:nvPr/>
-        </p:nvSpPr>
-        <p:spPr>
-          <a:xfrm>
-            <a:off x="6395085" y="5650706"/>
-            <a:ext cx="1142522" cy="220028"/>
-          </a:xfrm>
-          <a:prstGeom prst="rect">
-            <a:avLst/>
-          </a:prstGeom>
-          <a:noFill/>
-          <a:ln>
-            <a:noFill/>
-          </a:ln>
-        </p:spPr>
-        <p:txBody>
-          <a:bodyPr wrap="none" lIns="0" tIns="0" rIns="0" bIns="0" anchor="t" anchorCtr="0">
-            <a:spAutoFit/>
-          </a:bodyPr>
-          <a:lstStyle/>
-          <a:p>
-            <a:pPr algn="l"/>
-            <a:r>
-              <a:rPr lang="en-US" sz="1120" dirty="0">
-                <a:solidFill>
-                  <a:srgbClr val="20243A"/>
-                </a:solidFill>
-                <a:latin typeface="Arial" panose="020B0604020202090204"/>
-                <a:ea typeface="Arial" panose="020B0604020202090204"/>
-                <a:cs typeface="Arial" panose="020B0604020202090204"/>
-              </a:rPr>
-              <a:t>{{CAPTION_4}}</a:t>
-            </a:r>
-            <a:endParaRPr lang="en-US" sz="1120" dirty="0">
-              <a:solidFill>
-                <a:srgbClr val="20243A"/>
-              </a:solidFill>
-              <a:latin typeface="Arial" panose="020B0604020202090204"/>
-              <a:ea typeface="Arial" panose="020B0604020202090204"/>
-              <a:cs typeface="Arial" panose="020B0604020202090204"/>
-            </a:endParaRPr>
-          </a:p>
-        </p:txBody>
-      </p:sp>
-      <p:sp>
-        <p:nvSpPr>
-          <p:cNvPr id="25" name="TextBox 25"/>
-          <p:cNvSpPr txBox="1"/>
-          <p:nvPr/>
-        </p:nvSpPr>
-        <p:spPr>
-          <a:xfrm>
-            <a:off x="4218546" y="6665595"/>
-            <a:ext cx="739216" cy="176212"/>
-          </a:xfrm>
-          <a:prstGeom prst="rect">
-            <a:avLst/>
-          </a:prstGeom>
-          <a:noFill/>
-          <a:ln>
-            <a:noFill/>
-          </a:ln>
-        </p:spPr>
-        <p:txBody>
-          <a:bodyPr wrap="none" lIns="0" tIns="0" rIns="0" bIns="0" anchor="t" anchorCtr="0">
-            <a:spAutoFit/>
-          </a:bodyPr>
-          <a:lstStyle/>
-          <a:p>
             <a:pPr algn="r"/>
             <a:r>
               <a:rPr lang="en-US" sz="900" dirty="0">
@@ -2584,7 +2079,7 @@
       </p:sp>
       <p:sp>
         <p:nvSpPr>
-          <p:cNvPr id="26" name="TextBox 26"/>
+          <p:cNvPr id="15" name="TextBox 15"/>
           <p:cNvSpPr txBox="1"/>
           <p:nvPr/>
         </p:nvSpPr>
@@ -2779,6 +2274,853 @@
           </a:p>
         </p:txBody>
       </p:sp>
+      <p:sp>
+        <p:nvSpPr>
+          <p:cNvPr id="6" name="Rectangle 6"/>
+          <p:cNvSpPr/>
+          <p:nvPr/>
+        </p:nvSpPr>
+        <p:spPr>
+          <a:xfrm>
+            <a:off x="514350" y="1000125"/>
+            <a:ext cx="1524000" cy="47625"/>
+          </a:xfrm>
+          <a:prstGeom prst="rect">
+            <a:avLst/>
+          </a:prstGeom>
+          <a:solidFill>
+            <a:srgbClr val="D71440"/>
+          </a:solidFill>
+          <a:ln>
+            <a:noFill/>
+          </a:ln>
+        </p:spPr>
+      </p:sp>
+      <p:sp>
+        <p:nvSpPr>
+          <p:cNvPr id="7" name="TextBox 7"/>
+          <p:cNvSpPr txBox="1"/>
+          <p:nvPr/>
+        </p:nvSpPr>
+        <p:spPr>
+          <a:xfrm>
+            <a:off x="8416388" y="713899"/>
+            <a:ext cx="1056415" cy="190690"/>
+          </a:xfrm>
+          <a:prstGeom prst="rect">
+            <a:avLst/>
+          </a:prstGeom>
+          <a:noFill/>
+          <a:ln>
+            <a:noFill/>
+          </a:ln>
+        </p:spPr>
+        <p:txBody>
+          <a:bodyPr wrap="none" lIns="0" tIns="0" rIns="0" bIns="0" anchor="t" anchorCtr="0">
+            <a:spAutoFit/>
+          </a:bodyPr>
+          <a:lstStyle/>
+          <a:p>
+            <a:pPr algn="r"/>
+            <a:r>
+              <a:rPr lang="en-US" sz="980" b="1" dirty="0">
+                <a:solidFill>
+                  <a:srgbClr val="5E6478"/>
+                </a:solidFill>
+                <a:latin typeface="Arial" panose="020B0604020202090204"/>
+                <a:ea typeface="Arial" panose="020B0604020202090204"/>
+                <a:cs typeface="Arial" panose="020B0604020202090204"/>
+              </a:rPr>
+              <a:t>USE 2–4 IMAGES</a:t>
+            </a:r>
+            <a:endParaRPr lang="en-US" sz="980" b="1" dirty="0">
+              <a:solidFill>
+                <a:srgbClr val="5E6478"/>
+              </a:solidFill>
+              <a:latin typeface="Arial" panose="020B0604020202090204"/>
+              <a:ea typeface="Arial" panose="020B0604020202090204"/>
+              <a:cs typeface="Arial" panose="020B0604020202090204"/>
+            </a:endParaRPr>
+          </a:p>
+        </p:txBody>
+      </p:sp>
+      <p:sp>
+        <p:nvSpPr>
+          <p:cNvPr id="8" name="Rectangle 8"/>
+          <p:cNvSpPr/>
+          <p:nvPr/>
+        </p:nvSpPr>
+        <p:spPr>
+          <a:xfrm>
+            <a:off x="514350" y="1304925"/>
+            <a:ext cx="5391150" cy="2209800"/>
+          </a:xfrm>
+          <a:prstGeom prst="roundRect">
+            <a:avLst>
+              <a:gd name="adj" fmla="val 3448"/>
+            </a:avLst>
+          </a:prstGeom>
+          <a:solidFill>
+            <a:srgbClr val="FFFFFF"/>
+          </a:solidFill>
+          <a:ln w="19050">
+            <a:solidFill>
+              <a:srgbClr val="C8C8C8"/>
+            </a:solidFill>
+          </a:ln>
+        </p:spPr>
+      </p:sp>
+      <p:sp>
+        <p:nvSpPr>
+          <p:cNvPr id="9" name="Rectangle 9"/>
+          <p:cNvSpPr/>
+          <p:nvPr/>
+        </p:nvSpPr>
+        <p:spPr>
+          <a:xfrm>
+            <a:off x="514350" y="3152775"/>
+            <a:ext cx="5391150" cy="361950"/>
+          </a:xfrm>
+          <a:prstGeom prst="rect">
+            <a:avLst/>
+          </a:prstGeom>
+          <a:solidFill>
+            <a:srgbClr val="EEF1FA"/>
+          </a:solidFill>
+          <a:ln>
+            <a:noFill/>
+          </a:ln>
+        </p:spPr>
+      </p:sp>
+      <p:sp>
+        <p:nvSpPr>
+          <p:cNvPr id="10" name="Rectangle 10"/>
+          <p:cNvSpPr/>
+          <p:nvPr/>
+        </p:nvSpPr>
+        <p:spPr>
+          <a:xfrm>
+            <a:off x="6229350" y="1304925"/>
+            <a:ext cx="5391150" cy="2209800"/>
+          </a:xfrm>
+          <a:prstGeom prst="roundRect">
+            <a:avLst>
+              <a:gd name="adj" fmla="val 3448"/>
+            </a:avLst>
+          </a:prstGeom>
+          <a:solidFill>
+            <a:srgbClr val="FFFFFF"/>
+          </a:solidFill>
+          <a:ln w="19050">
+            <a:solidFill>
+              <a:srgbClr val="C8C8C8"/>
+            </a:solidFill>
+          </a:ln>
+        </p:spPr>
+      </p:sp>
+      <p:sp>
+        <p:nvSpPr>
+          <p:cNvPr id="11" name="Rectangle 11"/>
+          <p:cNvSpPr/>
+          <p:nvPr/>
+        </p:nvSpPr>
+        <p:spPr>
+          <a:xfrm>
+            <a:off x="6229350" y="3152775"/>
+            <a:ext cx="5391150" cy="361950"/>
+          </a:xfrm>
+          <a:prstGeom prst="rect">
+            <a:avLst/>
+          </a:prstGeom>
+          <a:solidFill>
+            <a:srgbClr val="EEF1FA"/>
+          </a:solidFill>
+          <a:ln>
+            <a:noFill/>
+          </a:ln>
+        </p:spPr>
+      </p:sp>
+      <p:sp>
+        <p:nvSpPr>
+          <p:cNvPr id="12" name="Rectangle 12"/>
+          <p:cNvSpPr/>
+          <p:nvPr/>
+        </p:nvSpPr>
+        <p:spPr>
+          <a:xfrm>
+            <a:off x="514350" y="3686175"/>
+            <a:ext cx="5391150" cy="2209800"/>
+          </a:xfrm>
+          <a:prstGeom prst="roundRect">
+            <a:avLst>
+              <a:gd name="adj" fmla="val 3448"/>
+            </a:avLst>
+          </a:prstGeom>
+          <a:solidFill>
+            <a:srgbClr val="FFFFFF"/>
+          </a:solidFill>
+          <a:ln w="19050">
+            <a:solidFill>
+              <a:srgbClr val="C8C8C8"/>
+            </a:solidFill>
+          </a:ln>
+        </p:spPr>
+      </p:sp>
+      <p:sp>
+        <p:nvSpPr>
+          <p:cNvPr id="13" name="Rectangle 13"/>
+          <p:cNvSpPr/>
+          <p:nvPr/>
+        </p:nvSpPr>
+        <p:spPr>
+          <a:xfrm>
+            <a:off x="514350" y="5534025"/>
+            <a:ext cx="5391150" cy="361950"/>
+          </a:xfrm>
+          <a:prstGeom prst="rect">
+            <a:avLst/>
+          </a:prstGeom>
+          <a:solidFill>
+            <a:srgbClr val="EEF1FA"/>
+          </a:solidFill>
+          <a:ln>
+            <a:noFill/>
+          </a:ln>
+        </p:spPr>
+      </p:sp>
+      <p:sp>
+        <p:nvSpPr>
+          <p:cNvPr id="14" name="Rectangle 14"/>
+          <p:cNvSpPr/>
+          <p:nvPr/>
+        </p:nvSpPr>
+        <p:spPr>
+          <a:xfrm>
+            <a:off x="6229350" y="3686175"/>
+            <a:ext cx="5391150" cy="2209800"/>
+          </a:xfrm>
+          <a:prstGeom prst="roundRect">
+            <a:avLst>
+              <a:gd name="adj" fmla="val 3448"/>
+            </a:avLst>
+          </a:prstGeom>
+          <a:solidFill>
+            <a:srgbClr val="FFFFFF"/>
+          </a:solidFill>
+          <a:ln w="19050">
+            <a:solidFill>
+              <a:srgbClr val="C8C8C8"/>
+            </a:solidFill>
+          </a:ln>
+        </p:spPr>
+      </p:sp>
+      <p:sp>
+        <p:nvSpPr>
+          <p:cNvPr id="15" name="Rectangle 15"/>
+          <p:cNvSpPr/>
+          <p:nvPr/>
+        </p:nvSpPr>
+        <p:spPr>
+          <a:xfrm>
+            <a:off x="6229350" y="5534025"/>
+            <a:ext cx="5391150" cy="361950"/>
+          </a:xfrm>
+          <a:prstGeom prst="rect">
+            <a:avLst/>
+          </a:prstGeom>
+          <a:solidFill>
+            <a:srgbClr val="EEF1FA"/>
+          </a:solidFill>
+          <a:ln>
+            <a:noFill/>
+          </a:ln>
+        </p:spPr>
+      </p:sp>
+      <p:sp>
+        <p:nvSpPr>
+          <p:cNvPr id="16" name="TextBox 16"/>
+          <p:cNvSpPr txBox="1"/>
+          <p:nvPr/>
+        </p:nvSpPr>
+        <p:spPr>
+          <a:xfrm>
+            <a:off x="501396" y="543878"/>
+            <a:ext cx="3215507" cy="498729"/>
+          </a:xfrm>
+          <a:prstGeom prst="rect">
+            <a:avLst/>
+          </a:prstGeom>
+          <a:noFill/>
+          <a:ln>
+            <a:noFill/>
+          </a:ln>
+        </p:spPr>
+        <p:txBody>
+          <a:bodyPr wrap="none" lIns="0" tIns="0" rIns="0" bIns="0" anchor="t" anchorCtr="0">
+            <a:spAutoFit/>
+          </a:bodyPr>
+          <a:lstStyle/>
+          <a:p>
+            <a:pPr algn="l"/>
+            <a:r>
+              <a:rPr lang="en-US" sz="2550" b="1" dirty="0">
+                <a:solidFill>
+                  <a:srgbClr val="20243A"/>
+                </a:solidFill>
+                <a:latin typeface="Arial" panose="020B0604020202090204"/>
+                <a:ea typeface="Arial" panose="020B0604020202090204"/>
+                <a:cs typeface="Arial" panose="020B0604020202090204"/>
+              </a:rPr>
+              <a:t>Multi-Image Story</a:t>
+            </a:r>
+            <a:endParaRPr lang="en-US" sz="2550" b="1" dirty="0">
+              <a:solidFill>
+                <a:srgbClr val="20243A"/>
+              </a:solidFill>
+              <a:latin typeface="Arial" panose="020B0604020202090204"/>
+              <a:ea typeface="Arial" panose="020B0604020202090204"/>
+              <a:cs typeface="Arial" panose="020B0604020202090204"/>
+            </a:endParaRPr>
+          </a:p>
+        </p:txBody>
+      </p:sp>
+      <p:pic>
+        <p:nvPicPr>
+          <p:cNvPr id="17" name="Image 17"/>
+          <p:cNvPicPr>
+            <a:picLocks noChangeAspect="1"/>
+          </p:cNvPicPr>
+          <p:nvPr/>
+        </p:nvPicPr>
+        <p:blipFill>
+          <a:blip r:embed="rId2"/>
+          <a:srcRect t="19517" b="19517"/>
+          <a:stretch>
+            <a:fillRect/>
+          </a:stretch>
+        </p:blipFill>
+        <p:spPr>
+          <a:xfrm>
+            <a:off x="552450" y="1343025"/>
+            <a:ext cx="5314950" cy="1771650"/>
+          </a:xfrm>
+          <a:prstGeom prst="rect">
+            <a:avLst/>
+          </a:prstGeom>
+        </p:spPr>
+      </p:pic>
+      <p:pic>
+        <p:nvPicPr>
+          <p:cNvPr id="18" name="Image 18"/>
+          <p:cNvPicPr>
+            <a:picLocks noChangeAspect="1"/>
+          </p:cNvPicPr>
+          <p:nvPr/>
+        </p:nvPicPr>
+        <p:blipFill>
+          <a:blip r:embed="rId3"/>
+          <a:srcRect t="14228" b="14227"/>
+          <a:stretch>
+            <a:fillRect/>
+          </a:stretch>
+        </p:blipFill>
+        <p:spPr>
+          <a:xfrm>
+            <a:off x="6267450" y="1343025"/>
+            <a:ext cx="5314950" cy="1771650"/>
+          </a:xfrm>
+          <a:prstGeom prst="rect">
+            <a:avLst/>
+          </a:prstGeom>
+        </p:spPr>
+      </p:pic>
+      <p:pic>
+        <p:nvPicPr>
+          <p:cNvPr id="19" name="Image 19"/>
+          <p:cNvPicPr>
+            <a:picLocks noChangeAspect="1"/>
+          </p:cNvPicPr>
+          <p:nvPr/>
+        </p:nvPicPr>
+        <p:blipFill>
+          <a:blip r:embed="rId4"/>
+          <a:srcRect t="25000" b="25000"/>
+          <a:stretch>
+            <a:fillRect/>
+          </a:stretch>
+        </p:blipFill>
+        <p:spPr>
+          <a:xfrm>
+            <a:off x="552450" y="3724275"/>
+            <a:ext cx="5314950" cy="1771650"/>
+          </a:xfrm>
+          <a:prstGeom prst="rect">
+            <a:avLst/>
+          </a:prstGeom>
+        </p:spPr>
+      </p:pic>
+      <p:pic>
+        <p:nvPicPr>
+          <p:cNvPr id="20" name="Image 20"/>
+          <p:cNvPicPr>
+            <a:picLocks noChangeAspect="1"/>
+          </p:cNvPicPr>
+          <p:nvPr/>
+        </p:nvPicPr>
+        <p:blipFill>
+          <a:blip r:embed="rId5"/>
+          <a:srcRect t="28986" b="28987"/>
+          <a:stretch>
+            <a:fillRect/>
+          </a:stretch>
+        </p:blipFill>
+        <p:spPr>
+          <a:xfrm>
+            <a:off x="6267450" y="3724275"/>
+            <a:ext cx="5314950" cy="1771650"/>
+          </a:xfrm>
+          <a:prstGeom prst="rect">
+            <a:avLst/>
+          </a:prstGeom>
+        </p:spPr>
+      </p:pic>
+      <p:sp>
+        <p:nvSpPr>
+          <p:cNvPr id="21" name="TextBox 21"/>
+          <p:cNvSpPr txBox="1"/>
+          <p:nvPr/>
+        </p:nvSpPr>
+        <p:spPr>
+          <a:xfrm>
+            <a:off x="680085" y="3269456"/>
+            <a:ext cx="1142522" cy="220028"/>
+          </a:xfrm>
+          <a:prstGeom prst="rect">
+            <a:avLst/>
+          </a:prstGeom>
+          <a:noFill/>
+          <a:ln>
+            <a:noFill/>
+          </a:ln>
+        </p:spPr>
+        <p:txBody>
+          <a:bodyPr wrap="none" lIns="0" tIns="0" rIns="0" bIns="0" anchor="t" anchorCtr="0">
+            <a:spAutoFit/>
+          </a:bodyPr>
+          <a:lstStyle/>
+          <a:p>
+            <a:pPr algn="l"/>
+            <a:r>
+              <a:rPr lang="en-US" sz="1120" dirty="0">
+                <a:solidFill>
+                  <a:srgbClr val="20243A"/>
+                </a:solidFill>
+                <a:latin typeface="Arial" panose="020B0604020202090204"/>
+                <a:ea typeface="Arial" panose="020B0604020202090204"/>
+                <a:cs typeface="Arial" panose="020B0604020202090204"/>
+              </a:rPr>
+              <a:t>{{CAPTION_1}}</a:t>
+            </a:r>
+            <a:endParaRPr lang="en-US" sz="1120" dirty="0">
+              <a:solidFill>
+                <a:srgbClr val="20243A"/>
+              </a:solidFill>
+              <a:latin typeface="Arial" panose="020B0604020202090204"/>
+              <a:ea typeface="Arial" panose="020B0604020202090204"/>
+              <a:cs typeface="Arial" panose="020B0604020202090204"/>
+            </a:endParaRPr>
+          </a:p>
+        </p:txBody>
+      </p:sp>
+      <p:sp>
+        <p:nvSpPr>
+          <p:cNvPr id="22" name="TextBox 22"/>
+          <p:cNvSpPr txBox="1"/>
+          <p:nvPr/>
+        </p:nvSpPr>
+        <p:spPr>
+          <a:xfrm>
+            <a:off x="6395085" y="3269456"/>
+            <a:ext cx="1142522" cy="220028"/>
+          </a:xfrm>
+          <a:prstGeom prst="rect">
+            <a:avLst/>
+          </a:prstGeom>
+          <a:noFill/>
+          <a:ln>
+            <a:noFill/>
+          </a:ln>
+        </p:spPr>
+        <p:txBody>
+          <a:bodyPr wrap="none" lIns="0" tIns="0" rIns="0" bIns="0" anchor="t" anchorCtr="0">
+            <a:spAutoFit/>
+          </a:bodyPr>
+          <a:lstStyle/>
+          <a:p>
+            <a:pPr algn="l"/>
+            <a:r>
+              <a:rPr lang="en-US" sz="1120" dirty="0">
+                <a:solidFill>
+                  <a:srgbClr val="20243A"/>
+                </a:solidFill>
+                <a:latin typeface="Arial" panose="020B0604020202090204"/>
+                <a:ea typeface="Arial" panose="020B0604020202090204"/>
+                <a:cs typeface="Arial" panose="020B0604020202090204"/>
+              </a:rPr>
+              <a:t>{{CAPTION_2}}</a:t>
+            </a:r>
+            <a:endParaRPr lang="en-US" sz="1120" dirty="0">
+              <a:solidFill>
+                <a:srgbClr val="20243A"/>
+              </a:solidFill>
+              <a:latin typeface="Arial" panose="020B0604020202090204"/>
+              <a:ea typeface="Arial" panose="020B0604020202090204"/>
+              <a:cs typeface="Arial" panose="020B0604020202090204"/>
+            </a:endParaRPr>
+          </a:p>
+        </p:txBody>
+      </p:sp>
+      <p:sp>
+        <p:nvSpPr>
+          <p:cNvPr id="23" name="TextBox 23"/>
+          <p:cNvSpPr txBox="1"/>
+          <p:nvPr/>
+        </p:nvSpPr>
+        <p:spPr>
+          <a:xfrm>
+            <a:off x="680085" y="5650706"/>
+            <a:ext cx="1142522" cy="220028"/>
+          </a:xfrm>
+          <a:prstGeom prst="rect">
+            <a:avLst/>
+          </a:prstGeom>
+          <a:noFill/>
+          <a:ln>
+            <a:noFill/>
+          </a:ln>
+        </p:spPr>
+        <p:txBody>
+          <a:bodyPr wrap="none" lIns="0" tIns="0" rIns="0" bIns="0" anchor="t" anchorCtr="0">
+            <a:spAutoFit/>
+          </a:bodyPr>
+          <a:lstStyle/>
+          <a:p>
+            <a:pPr algn="l"/>
+            <a:r>
+              <a:rPr lang="en-US" sz="1120" dirty="0">
+                <a:solidFill>
+                  <a:srgbClr val="20243A"/>
+                </a:solidFill>
+                <a:latin typeface="Arial" panose="020B0604020202090204"/>
+                <a:ea typeface="Arial" panose="020B0604020202090204"/>
+                <a:cs typeface="Arial" panose="020B0604020202090204"/>
+              </a:rPr>
+              <a:t>{{CAPTION_3}}</a:t>
+            </a:r>
+            <a:endParaRPr lang="en-US" sz="1120" dirty="0">
+              <a:solidFill>
+                <a:srgbClr val="20243A"/>
+              </a:solidFill>
+              <a:latin typeface="Arial" panose="020B0604020202090204"/>
+              <a:ea typeface="Arial" panose="020B0604020202090204"/>
+              <a:cs typeface="Arial" panose="020B0604020202090204"/>
+            </a:endParaRPr>
+          </a:p>
+        </p:txBody>
+      </p:sp>
+      <p:sp>
+        <p:nvSpPr>
+          <p:cNvPr id="24" name="TextBox 24"/>
+          <p:cNvSpPr txBox="1"/>
+          <p:nvPr/>
+        </p:nvSpPr>
+        <p:spPr>
+          <a:xfrm>
+            <a:off x="6395085" y="5650706"/>
+            <a:ext cx="1142522" cy="220028"/>
+          </a:xfrm>
+          <a:prstGeom prst="rect">
+            <a:avLst/>
+          </a:prstGeom>
+          <a:noFill/>
+          <a:ln>
+            <a:noFill/>
+          </a:ln>
+        </p:spPr>
+        <p:txBody>
+          <a:bodyPr wrap="none" lIns="0" tIns="0" rIns="0" bIns="0" anchor="t" anchorCtr="0">
+            <a:spAutoFit/>
+          </a:bodyPr>
+          <a:lstStyle/>
+          <a:p>
+            <a:pPr algn="l"/>
+            <a:r>
+              <a:rPr lang="en-US" sz="1120" dirty="0">
+                <a:solidFill>
+                  <a:srgbClr val="20243A"/>
+                </a:solidFill>
+                <a:latin typeface="Arial" panose="020B0604020202090204"/>
+                <a:ea typeface="Arial" panose="020B0604020202090204"/>
+                <a:cs typeface="Arial" panose="020B0604020202090204"/>
+              </a:rPr>
+              <a:t>{{CAPTION_4}}</a:t>
+            </a:r>
+            <a:endParaRPr lang="en-US" sz="1120" dirty="0">
+              <a:solidFill>
+                <a:srgbClr val="20243A"/>
+              </a:solidFill>
+              <a:latin typeface="Arial" panose="020B0604020202090204"/>
+              <a:ea typeface="Arial" panose="020B0604020202090204"/>
+              <a:cs typeface="Arial" panose="020B0604020202090204"/>
+            </a:endParaRPr>
+          </a:p>
+        </p:txBody>
+      </p:sp>
+      <p:sp>
+        <p:nvSpPr>
+          <p:cNvPr id="25" name="TextBox 25"/>
+          <p:cNvSpPr txBox="1"/>
+          <p:nvPr/>
+        </p:nvSpPr>
+        <p:spPr>
+          <a:xfrm>
+            <a:off x="4218546" y="6665595"/>
+            <a:ext cx="739216" cy="176212"/>
+          </a:xfrm>
+          <a:prstGeom prst="rect">
+            <a:avLst/>
+          </a:prstGeom>
+          <a:noFill/>
+          <a:ln>
+            <a:noFill/>
+          </a:ln>
+        </p:spPr>
+        <p:txBody>
+          <a:bodyPr wrap="none" lIns="0" tIns="0" rIns="0" bIns="0" anchor="t" anchorCtr="0">
+            <a:spAutoFit/>
+          </a:bodyPr>
+          <a:lstStyle/>
+          <a:p>
+            <a:pPr algn="r"/>
+            <a:r>
+              <a:rPr lang="en-US" sz="900" dirty="0">
+                <a:solidFill>
+                  <a:srgbClr val="FFFFFF"/>
+                </a:solidFill>
+                <a:latin typeface="Arial" panose="020B0604020202090204"/>
+                <a:ea typeface="Arial" panose="020B0604020202090204"/>
+                <a:cs typeface="Arial" panose="020B0604020202090204"/>
+              </a:rPr>
+              <a:t>{{SOURCE}}</a:t>
+            </a:r>
+            <a:endParaRPr lang="en-US" sz="900" dirty="0">
+              <a:solidFill>
+                <a:srgbClr val="FFFFFF"/>
+              </a:solidFill>
+              <a:latin typeface="Arial" panose="020B0604020202090204"/>
+              <a:ea typeface="Arial" panose="020B0604020202090204"/>
+              <a:cs typeface="Arial" panose="020B0604020202090204"/>
+            </a:endParaRPr>
+          </a:p>
+        </p:txBody>
+      </p:sp>
+      <p:sp>
+        <p:nvSpPr>
+          <p:cNvPr id="26" name="TextBox 26"/>
+          <p:cNvSpPr txBox="1"/>
+          <p:nvPr/>
+        </p:nvSpPr>
+        <p:spPr>
+          <a:xfrm>
+            <a:off x="11085233" y="6665595"/>
+            <a:ext cx="880034" cy="176212"/>
+          </a:xfrm>
+          <a:prstGeom prst="rect">
+            <a:avLst/>
+          </a:prstGeom>
+          <a:noFill/>
+          <a:ln>
+            <a:noFill/>
+          </a:ln>
+        </p:spPr>
+        <p:txBody>
+          <a:bodyPr wrap="none" lIns="0" tIns="0" rIns="0" bIns="0" anchor="t" anchorCtr="0">
+            <a:spAutoFit/>
+          </a:bodyPr>
+          <a:lstStyle/>
+          <a:p>
+            <a:pPr algn="ctr"/>
+            <a:r>
+              <a:rPr lang="en-US" sz="900" dirty="0">
+                <a:solidFill>
+                  <a:srgbClr val="FFFFFF"/>
+                </a:solidFill>
+                <a:latin typeface="Arial" panose="020B0604020202090204"/>
+                <a:ea typeface="Arial" panose="020B0604020202090204"/>
+                <a:cs typeface="Arial" panose="020B0604020202090204"/>
+              </a:rPr>
+              <a:t>{{PAGE_NUM}}</a:t>
+            </a:r>
+            <a:endParaRPr lang="en-US" sz="900" dirty="0">
+              <a:solidFill>
+                <a:srgbClr val="FFFFFF"/>
+              </a:solidFill>
+              <a:latin typeface="Arial" panose="020B0604020202090204"/>
+              <a:ea typeface="Arial" panose="020B0604020202090204"/>
+              <a:cs typeface="Arial" panose="020B0604020202090204"/>
+            </a:endParaRPr>
+          </a:p>
+        </p:txBody>
+      </p:sp>
+    </p:spTree>
+  </p:cSld>
+  <p:clrMapOvr>
+    <a:masterClrMapping/>
+  </p:clrMapOvr>
+</p:sld>
+</file>
+
+<file path=ppt/slides/slide13.xml><?xml version="1.0" encoding="utf-8"?>
+<p:sld xmlns:a="http://schemas.openxmlformats.org/drawingml/2006/main" xmlns:r="http://schemas.openxmlformats.org/officeDocument/2006/relationships" xmlns:p="http://schemas.openxmlformats.org/presentationml/2006/main">
+  <p:cSld>
+    <p:bg>
+      <p:bgPr>
+        <a:solidFill>
+          <a:srgbClr val="FFFFFF"/>
+        </a:solidFill>
+        <a:effectLst/>
+      </p:bgPr>
+    </p:bg>
+    <p:spTree>
+      <p:nvGrpSpPr>
+        <p:cNvPr id="1" name=""/>
+        <p:cNvGrpSpPr/>
+        <p:nvPr/>
+      </p:nvGrpSpPr>
+      <p:grpSpPr>
+        <a:xfrm>
+          <a:off x="0" y="0"/>
+          <a:ext cx="0" cy="0"/>
+          <a:chOff x="0" y="0"/>
+          <a:chExt cx="0" cy="0"/>
+        </a:xfrm>
+      </p:grpSpPr>
+      <p:sp>
+        <p:nvSpPr>
+          <p:cNvPr id="2" name="Rectangle 2"/>
+          <p:cNvSpPr/>
+          <p:nvPr/>
+        </p:nvSpPr>
+        <p:spPr>
+          <a:xfrm>
+            <a:off x="0" y="0"/>
+            <a:ext cx="171450" cy="6858000"/>
+          </a:xfrm>
+          <a:prstGeom prst="rect">
+            <a:avLst/>
+          </a:prstGeom>
+          <a:solidFill>
+            <a:srgbClr val="D71440"/>
+          </a:solidFill>
+          <a:ln>
+            <a:noFill/>
+          </a:ln>
+        </p:spPr>
+      </p:sp>
+      <p:pic>
+        <p:nvPicPr>
+          <p:cNvPr id="3" name="Image 3"/>
+          <p:cNvPicPr>
+            <a:picLocks noChangeAspect="1"/>
+          </p:cNvPicPr>
+          <p:nvPr/>
+        </p:nvPicPr>
+        <p:blipFill>
+          <a:blip r:embed="rId1"/>
+          <a:stretch>
+            <a:fillRect/>
+          </a:stretch>
+        </p:blipFill>
+        <p:spPr>
+          <a:xfrm>
+            <a:off x="9810750" y="228600"/>
+            <a:ext cx="1905000" cy="685800"/>
+          </a:xfrm>
+          <a:prstGeom prst="rect">
+            <a:avLst/>
+          </a:prstGeom>
+        </p:spPr>
+      </p:pic>
+      <p:sp>
+        <p:nvSpPr>
+          <p:cNvPr id="4" name="Rectangle 4"/>
+          <p:cNvSpPr/>
+          <p:nvPr/>
+        </p:nvSpPr>
+        <p:spPr>
+          <a:xfrm>
+            <a:off x="171450" y="6572250"/>
+            <a:ext cx="12020550" cy="285750"/>
+          </a:xfrm>
+          <a:prstGeom prst="rect">
+            <a:avLst/>
+          </a:prstGeom>
+          <a:solidFill>
+            <a:srgbClr val="181C62"/>
+          </a:solidFill>
+          <a:ln>
+            <a:noFill/>
+          </a:ln>
+        </p:spPr>
+      </p:sp>
+      <p:sp>
+        <p:nvSpPr>
+          <p:cNvPr id="5" name="TextBox 5"/>
+          <p:cNvSpPr txBox="1"/>
+          <p:nvPr/>
+        </p:nvSpPr>
+        <p:spPr>
+          <a:xfrm>
+            <a:off x="471297" y="6667024"/>
+            <a:ext cx="2114774" cy="190690"/>
+          </a:xfrm>
+          <a:prstGeom prst="rect">
+            <a:avLst/>
+          </a:prstGeom>
+          <a:noFill/>
+          <a:ln>
+            <a:noFill/>
+          </a:ln>
+        </p:spPr>
+        <p:txBody>
+          <a:bodyPr wrap="none" lIns="0" tIns="0" rIns="0" bIns="0" anchor="t" anchorCtr="0">
+            <a:spAutoFit/>
+          </a:bodyPr>
+          <a:lstStyle/>
+          <a:p>
+            <a:pPr algn="l"/>
+            <a:r>
+              <a:rPr lang="en-US" sz="980" dirty="0">
+                <a:solidFill>
+                  <a:srgbClr val="FFFFFF"/>
+                </a:solidFill>
+                <a:latin typeface="Arial" panose="020B0604020202090204"/>
+                <a:ea typeface="Arial" panose="020B0604020202090204"/>
+                <a:cs typeface="Arial" panose="020B0604020202090204"/>
+              </a:rPr>
+              <a:t>EE6008 · HUMAN POSE ANALYTICS</a:t>
+            </a:r>
+            <a:endParaRPr lang="en-US" sz="980" dirty="0">
+              <a:solidFill>
+                <a:srgbClr val="FFFFFF"/>
+              </a:solidFill>
+              <a:latin typeface="Arial" panose="020B0604020202090204"/>
+              <a:ea typeface="Arial" panose="020B0604020202090204"/>
+              <a:cs typeface="Arial" panose="020B0604020202090204"/>
+            </a:endParaRPr>
+          </a:p>
+        </p:txBody>
+      </p:sp>
       <p:pic>
         <p:nvPicPr>
           <p:cNvPr id="6" name="Image 6"/>
@@ -9263,30 +9605,6 @@
           </a:p>
         </p:txBody>
       </p:sp>
-      <p:pic>
-        <p:nvPicPr>
-          <p:cNvPr id="29" name="图片 28" descr="截屏2026-09-07 11.11.31"/>
-          <p:cNvPicPr>
-            <a:picLocks noChangeAspect="1"/>
-          </p:cNvPicPr>
-          <p:nvPr/>
-        </p:nvPicPr>
-        <p:blipFill>
-          <a:blip r:embed="rId2"/>
-          <a:stretch>
-            <a:fillRect/>
-          </a:stretch>
-        </p:blipFill>
-        <p:spPr>
-          <a:xfrm>
-            <a:off x="6153785" y="4991100"/>
-            <a:ext cx="1524000" cy="887730"/>
-          </a:xfrm>
-          <a:prstGeom prst="rect">
-            <a:avLst/>
-          </a:prstGeom>
-        </p:spPr>
-      </p:pic>
     </p:spTree>
   </p:cSld>
   <p:clrMapOvr>
@@ -9466,736 +9784,1456 @@
         </p:nvSpPr>
         <p:spPr>
           <a:xfrm>
-            <a:off x="514350" y="1428750"/>
-            <a:ext cx="5286375" cy="2057400"/>
+            <a:off x="514350" y="1304925"/>
+            <a:ext cx="11106150" cy="4772025"/>
           </a:xfrm>
           <a:prstGeom prst="roundRect">
             <a:avLst>
-              <a:gd name="adj" fmla="val 5556"/>
+              <a:gd name="adj" fmla="val 1996"/>
             </a:avLst>
           </a:prstGeom>
           <a:solidFill>
-            <a:srgbClr val="FCE9EE"/>
-          </a:solidFill>
-          <a:ln>
-            <a:noFill/>
-          </a:ln>
-        </p:spPr>
-      </p:sp>
-      <p:sp>
-        <p:nvSpPr>
-          <p:cNvPr id="8" name="Rectangle 8"/>
+            <a:srgbClr val="FFFFFF"/>
+          </a:solidFill>
+          <a:ln w="19050">
+            <a:solidFill>
+              <a:srgbClr val="C8C8C8"/>
+            </a:solidFill>
+          </a:ln>
+        </p:spPr>
+      </p:sp>
+      <p:sp>
+        <p:nvSpPr>
+          <p:cNvPr id="8" name="TextBox 8"/>
+          <p:cNvSpPr txBox="1"/>
+          <p:nvPr/>
+        </p:nvSpPr>
+        <p:spPr>
+          <a:xfrm>
+            <a:off x="501396" y="543878"/>
+            <a:ext cx="7315200" cy="498729"/>
+          </a:xfrm>
+          <a:prstGeom prst="rect">
+            <a:avLst/>
+          </a:prstGeom>
+          <a:noFill/>
+          <a:ln>
+            <a:noFill/>
+          </a:ln>
+        </p:spPr>
+        <p:txBody>
+          <a:bodyPr wrap="none" lIns="0" tIns="0" rIns="0" bIns="0" anchor="t" anchorCtr="0">
+            <a:spAutoFit/>
+          </a:bodyPr>
+          <a:lstStyle/>
+          <a:p>
+            <a:pPr algn="l"/>
+            <a:r>
+              <a:rPr lang="en-US" sz="2550" b="1" dirty="0">
+                <a:solidFill>
+                  <a:srgbClr val="20243A"/>
+                </a:solidFill>
+                <a:latin typeface="Arial" panose="020B0604020202090204"/>
+                <a:ea typeface="Arial" panose="020B0604020202090204"/>
+                <a:cs typeface="Arial" panose="020B0604020202090204"/>
+              </a:rPr>
+              <a:t>Where the person axis disappears</a:t>
+            </a:r>
+            <a:endParaRPr lang="en-US" sz="2550" b="1" dirty="0">
+              <a:solidFill>
+                <a:srgbClr val="20243A"/>
+              </a:solidFill>
+              <a:latin typeface="Arial" panose="020B0604020202090204"/>
+              <a:ea typeface="Arial" panose="020B0604020202090204"/>
+              <a:cs typeface="Arial" panose="020B0604020202090204"/>
+            </a:endParaRPr>
+          </a:p>
+        </p:txBody>
+      </p:sp>
+      <p:sp>
+        <p:nvSpPr>
+          <p:cNvPr id="9" name="TextBox 9"/>
+          <p:cNvSpPr txBox="1"/>
+          <p:nvPr/>
+        </p:nvSpPr>
+        <p:spPr>
+          <a:xfrm>
+            <a:off x="3657600" y="6665595"/>
+            <a:ext cx="3840480" cy="176212"/>
+          </a:xfrm>
+          <a:prstGeom prst="rect">
+            <a:avLst/>
+          </a:prstGeom>
+          <a:noFill/>
+          <a:ln>
+            <a:noFill/>
+          </a:ln>
+        </p:spPr>
+        <p:txBody>
+          <a:bodyPr wrap="none" lIns="0" tIns="0" rIns="0" bIns="0" anchor="t" anchorCtr="0">
+            <a:spAutoFit/>
+          </a:bodyPr>
+          <a:lstStyle/>
+          <a:p>
+            <a:pPr algn="r"/>
+            <a:r>
+              <a:rPr lang="en-US" sz="900" dirty="0">
+                <a:solidFill>
+                  <a:srgbClr val="FFFFFF"/>
+                </a:solidFill>
+                <a:latin typeface="Arial" panose="020B0604020202090204"/>
+                <a:ea typeface="Arial" panose="020B0604020202090204"/>
+                <a:cs typeface="Arial" panose="020B0604020202090204"/>
+              </a:rPr>
+              <a:t>CTR-GCN model/ctrgcn.py · SkeletonX model/stdecouple.py</a:t>
+            </a:r>
+            <a:endParaRPr lang="en-US" sz="900" dirty="0">
+              <a:solidFill>
+                <a:srgbClr val="FFFFFF"/>
+              </a:solidFill>
+              <a:latin typeface="Arial" panose="020B0604020202090204"/>
+              <a:ea typeface="Arial" panose="020B0604020202090204"/>
+              <a:cs typeface="Arial" panose="020B0604020202090204"/>
+            </a:endParaRPr>
+          </a:p>
+        </p:txBody>
+      </p:sp>
+      <p:sp>
+        <p:nvSpPr>
+          <p:cNvPr id="10" name="TextBox 10"/>
+          <p:cNvSpPr txBox="1"/>
+          <p:nvPr/>
+        </p:nvSpPr>
+        <p:spPr>
+          <a:xfrm>
+            <a:off x="11085233" y="6665595"/>
+            <a:ext cx="880034" cy="176212"/>
+          </a:xfrm>
+          <a:prstGeom prst="rect">
+            <a:avLst/>
+          </a:prstGeom>
+          <a:noFill/>
+          <a:ln>
+            <a:noFill/>
+          </a:ln>
+        </p:spPr>
+        <p:txBody>
+          <a:bodyPr wrap="none" lIns="0" tIns="0" rIns="0" bIns="0" anchor="t" anchorCtr="0">
+            <a:spAutoFit/>
+          </a:bodyPr>
+          <a:lstStyle/>
+          <a:p>
+            <a:pPr algn="ctr"/>
+            <a:r>
+              <a:rPr lang="en-US" sz="900" dirty="0">
+                <a:solidFill>
+                  <a:srgbClr val="FFFFFF"/>
+                </a:solidFill>
+                <a:latin typeface="Arial" panose="020B0604020202090204"/>
+                <a:ea typeface="Arial" panose="020B0604020202090204"/>
+                <a:cs typeface="Arial" panose="020B0604020202090204"/>
+              </a:rPr>
+              <a:t>07</a:t>
+            </a:r>
+            <a:endParaRPr lang="en-US" sz="900" dirty="0">
+              <a:solidFill>
+                <a:srgbClr val="FFFFFF"/>
+              </a:solidFill>
+              <a:latin typeface="Arial" panose="020B0604020202090204"/>
+              <a:ea typeface="Arial" panose="020B0604020202090204"/>
+              <a:cs typeface="Arial" panose="020B0604020202090204"/>
+            </a:endParaRPr>
+          </a:p>
+        </p:txBody>
+      </p:sp>
+      <p:sp>
+        <p:nvSpPr>
+          <p:cNvPr id="11" name="Rounded Rectangle 10"/>
           <p:cNvSpPr/>
           <p:nvPr/>
         </p:nvSpPr>
         <p:spPr>
           <a:xfrm>
-            <a:off x="6048375" y="1428750"/>
-            <a:ext cx="5572125" cy="2057400"/>
+            <a:off x="2788920" y="1572768"/>
+            <a:ext cx="2103120" cy="475488"/>
           </a:xfrm>
           <a:prstGeom prst="roundRect">
             <a:avLst>
-              <a:gd name="adj" fmla="val 5556"/>
+              <a:gd name="adj" fmla="val 14000"/>
             </a:avLst>
           </a:prstGeom>
           <a:solidFill>
             <a:srgbClr val="FFFFFF"/>
+          </a:solidFill>
+          <a:ln w="12700">
+            <a:solidFill>
+              <a:srgbClr val="C8C8C8"/>
+            </a:solidFill>
+          </a:ln>
+          <a:effectLst/>
+        </p:spPr>
+        <p:style>
+          <a:lnRef idx="1">
+            <a:schemeClr val="accent1"/>
+          </a:lnRef>
+          <a:fillRef idx="3">
+            <a:schemeClr val="accent1"/>
+          </a:fillRef>
+          <a:effectRef idx="2">
+            <a:schemeClr val="accent1"/>
+          </a:effectRef>
+          <a:fontRef idx="minor">
+            <a:schemeClr val="lt1"/>
+          </a:fontRef>
+        </p:style>
+        <p:txBody>
+          <a:bodyPr wrap="square" lIns="73152" tIns="36576" rIns="73152" bIns="36576" rtlCol="0" anchor="ctr"/>
+          <a:lstStyle/>
+          <a:p>
+            <a:pPr algn="ctr"/>
+            <a:r>
+              <a:rPr sz="1150" b="1">
+                <a:solidFill>
+                  <a:srgbClr val="20243A"/>
+                </a:solidFill>
+                <a:latin typeface="Arial" panose="020B0604020202090204"/>
+              </a:rPr>
+              <a:t>GCN backbone</a:t>
+            </a:r>
+            <a:endParaRPr sz="1150" b="1">
+              <a:solidFill>
+                <a:srgbClr val="20243A"/>
+              </a:solidFill>
+              <a:latin typeface="Arial" panose="020B0604020202090204"/>
+            </a:endParaRPr>
+          </a:p>
+        </p:txBody>
+      </p:sp>
+      <p:sp>
+        <p:nvSpPr>
+          <p:cNvPr id="12" name="Right Arrow 11"/>
+          <p:cNvSpPr/>
+          <p:nvPr/>
+        </p:nvSpPr>
+        <p:spPr>
+          <a:xfrm>
+            <a:off x="4946903" y="1719072"/>
+            <a:ext cx="201168" cy="182880"/>
+          </a:xfrm>
+          <a:prstGeom prst="rightArrow">
+            <a:avLst/>
+          </a:prstGeom>
+          <a:solidFill>
+            <a:srgbClr val="B9C0D4"/>
+          </a:solidFill>
+          <a:ln>
+            <a:noFill/>
+          </a:ln>
+          <a:effectLst/>
+        </p:spPr>
+        <p:style>
+          <a:lnRef idx="1">
+            <a:schemeClr val="accent1"/>
+          </a:lnRef>
+          <a:fillRef idx="3">
+            <a:schemeClr val="accent1"/>
+          </a:fillRef>
+          <a:effectRef idx="2">
+            <a:schemeClr val="accent1"/>
+          </a:effectRef>
+          <a:fontRef idx="minor">
+            <a:schemeClr val="lt1"/>
+          </a:fontRef>
+        </p:style>
+        <p:txBody>
+          <a:bodyPr rtlCol="0" anchor="ctr"/>
+          <a:lstStyle/>
+          <a:p>
+            <a:pPr algn="ctr"/>
+          </a:p>
+        </p:txBody>
+      </p:sp>
+      <p:sp>
+        <p:nvSpPr>
+          <p:cNvPr id="13" name="Rounded Rectangle 12"/>
+          <p:cNvSpPr/>
+          <p:nvPr/>
+        </p:nvSpPr>
+        <p:spPr>
+          <a:xfrm>
+            <a:off x="5202936" y="1572768"/>
+            <a:ext cx="2377440" cy="475488"/>
+          </a:xfrm>
+          <a:prstGeom prst="roundRect">
+            <a:avLst>
+              <a:gd name="adj" fmla="val 14000"/>
+            </a:avLst>
+          </a:prstGeom>
+          <a:solidFill>
+            <a:srgbClr val="FCE9EE"/>
           </a:solidFill>
           <a:ln w="19050">
             <a:solidFill>
               <a:srgbClr val="D71440"/>
             </a:solidFill>
           </a:ln>
-        </p:spPr>
-      </p:sp>
-      <p:sp>
-        <p:nvSpPr>
-          <p:cNvPr id="9" name="Rectangle 9"/>
+          <a:effectLst/>
+        </p:spPr>
+        <p:style>
+          <a:lnRef idx="1">
+            <a:schemeClr val="accent1"/>
+          </a:lnRef>
+          <a:fillRef idx="3">
+            <a:schemeClr val="accent1"/>
+          </a:fillRef>
+          <a:effectRef idx="2">
+            <a:schemeClr val="accent1"/>
+          </a:effectRef>
+          <a:fontRef idx="minor">
+            <a:schemeClr val="lt1"/>
+          </a:fontRef>
+        </p:style>
+        <p:txBody>
+          <a:bodyPr wrap="square" lIns="73152" tIns="36576" rIns="73152" bIns="36576" rtlCol="0" anchor="ctr"/>
+          <a:lstStyle/>
+          <a:p>
+            <a:pPr algn="ctr"/>
+            <a:r>
+              <a:rPr sz="1150" b="1">
+                <a:solidFill>
+                  <a:srgbClr val="D71440"/>
+                </a:solidFill>
+                <a:latin typeface="Arial" panose="020B0604020202090204"/>
+              </a:rPr>
+              <a:t>pool  T · V · M  →  vector</a:t>
+            </a:r>
+            <a:endParaRPr sz="1150" b="1">
+              <a:solidFill>
+                <a:srgbClr val="D71440"/>
+              </a:solidFill>
+              <a:latin typeface="Arial" panose="020B0604020202090204"/>
+            </a:endParaRPr>
+          </a:p>
+        </p:txBody>
+      </p:sp>
+      <p:sp>
+        <p:nvSpPr>
+          <p:cNvPr id="14" name="Right Arrow 13"/>
           <p:cNvSpPr/>
           <p:nvPr/>
         </p:nvSpPr>
         <p:spPr>
           <a:xfrm>
-            <a:off x="514350" y="3714750"/>
-            <a:ext cx="5286375" cy="2362200"/>
+            <a:off x="7635240" y="1719072"/>
+            <a:ext cx="201168" cy="182880"/>
+          </a:xfrm>
+          <a:prstGeom prst="rightArrow">
+            <a:avLst/>
+          </a:prstGeom>
+          <a:solidFill>
+            <a:srgbClr val="B9C0D4"/>
+          </a:solidFill>
+          <a:ln>
+            <a:noFill/>
+          </a:ln>
+          <a:effectLst/>
+        </p:spPr>
+        <p:style>
+          <a:lnRef idx="1">
+            <a:schemeClr val="accent1"/>
+          </a:lnRef>
+          <a:fillRef idx="3">
+            <a:schemeClr val="accent1"/>
+          </a:fillRef>
+          <a:effectRef idx="2">
+            <a:schemeClr val="accent1"/>
+          </a:effectRef>
+          <a:fontRef idx="minor">
+            <a:schemeClr val="lt1"/>
+          </a:fontRef>
+        </p:style>
+        <p:txBody>
+          <a:bodyPr rtlCol="0" anchor="ctr"/>
+          <a:lstStyle/>
+          <a:p>
+            <a:pPr algn="ctr"/>
+          </a:p>
+        </p:txBody>
+      </p:sp>
+      <p:sp>
+        <p:nvSpPr>
+          <p:cNvPr id="15" name="Rounded Rectangle 14"/>
+          <p:cNvSpPr/>
+          <p:nvPr/>
+        </p:nvSpPr>
+        <p:spPr>
+          <a:xfrm>
+            <a:off x="7891271" y="1572768"/>
+            <a:ext cx="1920240" cy="475488"/>
           </a:xfrm>
           <a:prstGeom prst="roundRect">
             <a:avLst>
-              <a:gd name="adj" fmla="val 4839"/>
+              <a:gd name="adj" fmla="val 14000"/>
             </a:avLst>
           </a:prstGeom>
           <a:solidFill>
-            <a:srgbClr val="EEF1FA"/>
-          </a:solidFill>
-          <a:ln>
-            <a:noFill/>
-          </a:ln>
-        </p:spPr>
-      </p:sp>
-      <p:sp>
-        <p:nvSpPr>
-          <p:cNvPr id="10" name="Rectangle 10"/>
+            <a:srgbClr val="FFFFFF"/>
+          </a:solidFill>
+          <a:ln w="12700">
+            <a:solidFill>
+              <a:srgbClr val="C8C8C8"/>
+            </a:solidFill>
+          </a:ln>
+          <a:effectLst/>
+        </p:spPr>
+        <p:style>
+          <a:lnRef idx="1">
+            <a:schemeClr val="accent1"/>
+          </a:lnRef>
+          <a:fillRef idx="3">
+            <a:schemeClr val="accent1"/>
+          </a:fillRef>
+          <a:effectRef idx="2">
+            <a:schemeClr val="accent1"/>
+          </a:effectRef>
+          <a:fontRef idx="minor">
+            <a:schemeClr val="lt1"/>
+          </a:fontRef>
+        </p:style>
+        <p:txBody>
+          <a:bodyPr wrap="square" lIns="73152" tIns="36576" rIns="73152" bIns="36576" rtlCol="0" anchor="ctr"/>
+          <a:lstStyle/>
+          <a:p>
+            <a:pPr algn="ctr"/>
+            <a:r>
+              <a:rPr sz="1150" b="1">
+                <a:solidFill>
+                  <a:srgbClr val="20243A"/>
+                </a:solidFill>
+                <a:latin typeface="Arial" panose="020B0604020202090204"/>
+              </a:rPr>
+              <a:t>FC classifier</a:t>
+            </a:r>
+            <a:endParaRPr sz="1150" b="1">
+              <a:solidFill>
+                <a:srgbClr val="20243A"/>
+              </a:solidFill>
+              <a:latin typeface="Arial" panose="020B0604020202090204"/>
+            </a:endParaRPr>
+          </a:p>
+        </p:txBody>
+      </p:sp>
+      <p:sp>
+        <p:nvSpPr>
+          <p:cNvPr id="16" name="TextBox 15"/>
+          <p:cNvSpPr txBox="1"/>
+          <p:nvPr/>
+        </p:nvSpPr>
+        <p:spPr>
+          <a:xfrm>
+            <a:off x="777240" y="1645920"/>
+            <a:ext cx="1874519" cy="365760"/>
+          </a:xfrm>
+          <a:prstGeom prst="rect">
+            <a:avLst/>
+          </a:prstGeom>
+          <a:noFill/>
+        </p:spPr>
+        <p:txBody>
+          <a:bodyPr wrap="square" lIns="0" tIns="0" rIns="0" bIns="0">
+            <a:spAutoFit/>
+          </a:bodyPr>
+          <a:lstStyle/>
+          <a:p>
+            <a:pPr algn="r"/>
+            <a:r>
+              <a:rPr sz="1050" b="0">
+                <a:solidFill>
+                  <a:srgbClr val="5E6478"/>
+                </a:solidFill>
+                <a:latin typeface="Arial" panose="020B0604020202090204"/>
+              </a:rPr>
+              <a:t>Both methods act</a:t>
+            </a:r>
+            <a:endParaRPr sz="1050" b="0">
+              <a:solidFill>
+                <a:srgbClr val="5E6478"/>
+              </a:solidFill>
+              <a:latin typeface="Arial" panose="020B0604020202090204"/>
+            </a:endParaRPr>
+          </a:p>
+          <a:p>
+            <a:pPr algn="r"/>
+            <a:r>
+              <a:rPr sz="1050" b="0">
+                <a:solidFill>
+                  <a:srgbClr val="5E6478"/>
+                </a:solidFill>
+                <a:latin typeface="Arial" panose="020B0604020202090204"/>
+              </a:rPr>
+              <a:t>at this one step</a:t>
+            </a:r>
+            <a:endParaRPr sz="1050" b="0">
+              <a:solidFill>
+                <a:srgbClr val="5E6478"/>
+              </a:solidFill>
+              <a:latin typeface="Arial" panose="020B0604020202090204"/>
+            </a:endParaRPr>
+          </a:p>
+        </p:txBody>
+      </p:sp>
+      <p:sp>
+        <p:nvSpPr>
+          <p:cNvPr id="17" name="Rounded Rectangle 16"/>
           <p:cNvSpPr/>
           <p:nvPr/>
         </p:nvSpPr>
         <p:spPr>
           <a:xfrm>
-            <a:off x="6048375" y="3714750"/>
-            <a:ext cx="5572125" cy="2362200"/>
+            <a:off x="777240" y="2359152"/>
+            <a:ext cx="3383280" cy="3566160"/>
           </a:xfrm>
           <a:prstGeom prst="roundRect">
             <a:avLst>
-              <a:gd name="adj" fmla="val 4839"/>
+              <a:gd name="adj" fmla="val 14000"/>
             </a:avLst>
           </a:prstGeom>
           <a:solidFill>
-            <a:srgbClr val="181C62"/>
-          </a:solidFill>
-          <a:ln>
-            <a:noFill/>
-          </a:ln>
-        </p:spPr>
-      </p:sp>
-      <p:sp>
-        <p:nvSpPr>
-          <p:cNvPr id="11" name="Rectangle 11"/>
-          <p:cNvSpPr/>
-          <p:nvPr/>
-        </p:nvSpPr>
-        <p:spPr>
-          <a:xfrm>
-            <a:off x="514350" y="1428750"/>
-            <a:ext cx="95250" cy="2057400"/>
-          </a:xfrm>
-          <a:prstGeom prst="rect">
-            <a:avLst/>
-          </a:prstGeom>
-          <a:solidFill>
-            <a:srgbClr val="D71440"/>
-          </a:solidFill>
-          <a:ln>
-            <a:noFill/>
-          </a:ln>
-        </p:spPr>
-      </p:sp>
-      <p:sp>
-        <p:nvSpPr>
-          <p:cNvPr id="12" name="Rectangle 12"/>
-          <p:cNvSpPr/>
-          <p:nvPr/>
-        </p:nvSpPr>
-        <p:spPr>
-          <a:xfrm>
-            <a:off x="6048375" y="3714750"/>
-            <a:ext cx="95250" cy="2362200"/>
-          </a:xfrm>
-          <a:prstGeom prst="rect">
-            <a:avLst/>
-          </a:prstGeom>
-          <a:solidFill>
-            <a:srgbClr val="D71440"/>
-          </a:solidFill>
-          <a:ln>
-            <a:noFill/>
-          </a:ln>
-        </p:spPr>
-      </p:sp>
-      <p:sp>
-        <p:nvSpPr>
-          <p:cNvPr id="13" name="TextBox 13"/>
+            <a:srgbClr val="FFFFFF"/>
+          </a:solidFill>
+          <a:ln w="12700">
+            <a:solidFill>
+              <a:srgbClr val="C8C8C8"/>
+            </a:solidFill>
+          </a:ln>
+          <a:effectLst/>
+        </p:spPr>
+        <p:style>
+          <a:lnRef idx="1">
+            <a:schemeClr val="accent1"/>
+          </a:lnRef>
+          <a:fillRef idx="3">
+            <a:schemeClr val="accent1"/>
+          </a:fillRef>
+          <a:effectRef idx="2">
+            <a:schemeClr val="accent1"/>
+          </a:effectRef>
+          <a:fontRef idx="minor">
+            <a:schemeClr val="lt1"/>
+          </a:fontRef>
+        </p:style>
+        <p:txBody>
+          <a:bodyPr wrap="square" lIns="73152" tIns="36576" rIns="73152" bIns="36576" rtlCol="0" anchor="ctr"/>
+          <a:lstStyle/>
+          <a:p>
+            <a:pPr algn="ctr"/>
+          </a:p>
+        </p:txBody>
+      </p:sp>
+      <p:sp>
+        <p:nvSpPr>
+          <p:cNvPr id="18" name="TextBox 17"/>
           <p:cNvSpPr txBox="1"/>
           <p:nvPr/>
         </p:nvSpPr>
         <p:spPr>
           <a:xfrm>
-            <a:off x="794766" y="1639252"/>
-            <a:ext cx="1131928" cy="205359"/>
+            <a:off x="978408" y="2542032"/>
+            <a:ext cx="2980944" cy="237744"/>
           </a:xfrm>
           <a:prstGeom prst="rect">
             <a:avLst/>
           </a:prstGeom>
           <a:noFill/>
-          <a:ln>
-            <a:noFill/>
-          </a:ln>
-        </p:spPr>
-        <p:txBody>
-          <a:bodyPr wrap="none" lIns="0" tIns="0" rIns="0" bIns="0" anchor="t" anchorCtr="0">
+        </p:spPr>
+        <p:txBody>
+          <a:bodyPr wrap="square" lIns="0" tIns="0" rIns="0" bIns="0">
             <a:spAutoFit/>
           </a:bodyPr>
           <a:lstStyle/>
           <a:p>
             <a:pPr algn="l"/>
             <a:r>
-              <a:rPr lang="en-US" sz="1050" b="1" dirty="0">
+              <a:rPr sz="1000" b="1">
                 <a:solidFill>
                   <a:srgbClr val="D71440"/>
                 </a:solidFill>
                 <a:latin typeface="Arial" panose="020B0604020202090204"/>
-                <a:ea typeface="Arial" panose="020B0604020202090204"/>
-                <a:cs typeface="Arial" panose="020B0604020202090204"/>
-              </a:rPr>
-              <a:t>RISK / BLOCKER</a:t>
-            </a:r>
-            <a:endParaRPr lang="en-US" sz="1050" b="1" dirty="0">
+              </a:rPr>
+              <a:t>CTR-GCN  ·  OUR BASELINE</a:t>
+            </a:r>
+            <a:endParaRPr sz="1000" b="1">
               <a:solidFill>
                 <a:srgbClr val="D71440"/>
               </a:solidFill>
               <a:latin typeface="Arial" panose="020B0604020202090204"/>
-              <a:ea typeface="Arial" panose="020B0604020202090204"/>
-              <a:cs typeface="Arial" panose="020B0604020202090204"/>
-            </a:endParaRPr>
-          </a:p>
-        </p:txBody>
-      </p:sp>
-      <p:sp>
-        <p:nvSpPr>
-          <p:cNvPr id="14" name="TextBox 14"/>
+            </a:endParaRPr>
+          </a:p>
+        </p:txBody>
+      </p:sp>
+      <p:sp>
+        <p:nvSpPr>
+          <p:cNvPr id="19" name="Rounded Rectangle 18"/>
+          <p:cNvSpPr/>
+          <p:nvPr/>
+        </p:nvSpPr>
+        <p:spPr>
+          <a:xfrm>
+            <a:off x="978408" y="2889504"/>
+            <a:ext cx="2980944" cy="896112"/>
+          </a:xfrm>
+          <a:prstGeom prst="roundRect">
+            <a:avLst>
+              <a:gd name="adj" fmla="val 14000"/>
+            </a:avLst>
+          </a:prstGeom>
+          <a:solidFill>
+            <a:srgbClr val="F4F6FB"/>
+          </a:solidFill>
+          <a:ln>
+            <a:noFill/>
+          </a:ln>
+          <a:effectLst/>
+        </p:spPr>
+        <p:style>
+          <a:lnRef idx="1">
+            <a:schemeClr val="accent1"/>
+          </a:lnRef>
+          <a:fillRef idx="3">
+            <a:schemeClr val="accent1"/>
+          </a:fillRef>
+          <a:effectRef idx="2">
+            <a:schemeClr val="accent1"/>
+          </a:effectRef>
+          <a:fontRef idx="minor">
+            <a:schemeClr val="lt1"/>
+          </a:fontRef>
+        </p:style>
+        <p:txBody>
+          <a:bodyPr wrap="square" lIns="73152" tIns="36576" rIns="73152" bIns="36576" rtlCol="0" anchor="ctr"/>
+          <a:lstStyle/>
+          <a:p>
+            <a:pPr algn="l"/>
+            <a:r>
+              <a:rPr sz="950" b="0">
+                <a:solidFill>
+                  <a:srgbClr val="20243A"/>
+                </a:solidFill>
+                <a:latin typeface="Courier New" panose="02070409020205090404"/>
+              </a:rPr>
+              <a:t>x = x.view(N, M, c_new, -1)</a:t>
+            </a:r>
+            <a:endParaRPr sz="950" b="0">
+              <a:solidFill>
+                <a:srgbClr val="20243A"/>
+              </a:solidFill>
+              <a:latin typeface="Courier New" panose="02070409020205090404"/>
+            </a:endParaRPr>
+          </a:p>
+          <a:p>
+            <a:pPr algn="l"/>
+            <a:r>
+              <a:rPr sz="950" b="1">
+                <a:solidFill>
+                  <a:srgbClr val="D71440"/>
+                </a:solidFill>
+                <a:latin typeface="Courier New" panose="02070409020205090404"/>
+              </a:rPr>
+              <a:t>x = x.mean(3).mean(1)</a:t>
+            </a:r>
+            <a:endParaRPr sz="950" b="1">
+              <a:solidFill>
+                <a:srgbClr val="D71440"/>
+              </a:solidFill>
+              <a:latin typeface="Courier New" panose="02070409020205090404"/>
+            </a:endParaRPr>
+          </a:p>
+          <a:p>
+            <a:pPr algn="l"/>
+            <a:r>
+              <a:rPr sz="950" b="0">
+                <a:solidFill>
+                  <a:srgbClr val="20243A"/>
+                </a:solidFill>
+                <a:latin typeface="Courier New" panose="02070409020205090404"/>
+              </a:rPr>
+              <a:t>return self.fc(x)</a:t>
+            </a:r>
+            <a:endParaRPr sz="950" b="0">
+              <a:solidFill>
+                <a:srgbClr val="20243A"/>
+              </a:solidFill>
+              <a:latin typeface="Courier New" panose="02070409020205090404"/>
+            </a:endParaRPr>
+          </a:p>
+        </p:txBody>
+      </p:sp>
+      <p:sp>
+        <p:nvSpPr>
+          <p:cNvPr id="20" name="TextBox 19"/>
           <p:cNvSpPr txBox="1"/>
           <p:nvPr/>
         </p:nvSpPr>
         <p:spPr>
           <a:xfrm>
-            <a:off x="6328791" y="1639252"/>
-            <a:ext cx="3092173" cy="205359"/>
+            <a:off x="978408" y="3931920"/>
+            <a:ext cx="2980944" cy="1737360"/>
           </a:xfrm>
           <a:prstGeom prst="rect">
             <a:avLst/>
           </a:prstGeom>
           <a:noFill/>
-          <a:ln>
-            <a:noFill/>
-          </a:ln>
-        </p:spPr>
-        <p:txBody>
-          <a:bodyPr wrap="none" lIns="0" tIns="0" rIns="0" bIns="0" anchor="t" anchorCtr="0">
+        </p:spPr>
+        <p:txBody>
+          <a:bodyPr wrap="square" lIns="0" tIns="0" rIns="0" bIns="0">
             <a:spAutoFit/>
           </a:bodyPr>
           <a:lstStyle/>
           <a:p>
             <a:pPr algn="l"/>
             <a:r>
-              <a:rPr lang="en-US" sz="1050" b="1" dirty="0">
-                <a:solidFill>
-                  <a:srgbClr val="D71440"/>
-                </a:solidFill>
-                <a:latin typeface="Arial" panose="020B0604020202090204"/>
-                <a:ea typeface="Arial" panose="020B0604020202090204"/>
-                <a:cs typeface="Arial" panose="020B0604020202090204"/>
-              </a:rPr>
-              <a:t>IMPACT ON SCOPE, EVIDENCE, OR TIMELINE</a:t>
-            </a:r>
-            <a:endParaRPr lang="en-US" sz="1050" b="1" dirty="0">
-              <a:solidFill>
-                <a:srgbClr val="D71440"/>
-              </a:solidFill>
-              <a:latin typeface="Arial" panose="020B0604020202090204"/>
-              <a:ea typeface="Arial" panose="020B0604020202090204"/>
-              <a:cs typeface="Arial" panose="020B0604020202090204"/>
-            </a:endParaRPr>
-          </a:p>
-        </p:txBody>
-      </p:sp>
-      <p:sp>
-        <p:nvSpPr>
-          <p:cNvPr id="15" name="TextBox 15"/>
+              <a:rPr sz="1100" b="0">
+                <a:solidFill>
+                  <a:srgbClr val="5E6478"/>
+                </a:solidFill>
+                <a:latin typeface="Arial" panose="020B0604020202090204"/>
+              </a:rPr>
+              <a:t>mean(3)  collapses time and joints.</a:t>
+            </a:r>
+            <a:endParaRPr sz="1100" b="0">
+              <a:solidFill>
+                <a:srgbClr val="5E6478"/>
+              </a:solidFill>
+              <a:latin typeface="Arial" panose="020B0604020202090204"/>
+            </a:endParaRPr>
+          </a:p>
+          <a:p>
+            <a:pPr algn="l">
+              <a:spcBef>
+                <a:spcPts val="600"/>
+              </a:spcBef>
+            </a:pPr>
+            <a:r>
+              <a:rPr sz="1100" b="0">
+                <a:solidFill>
+                  <a:srgbClr val="5E6478"/>
+                </a:solidFill>
+                <a:latin typeface="Arial" panose="020B0604020202090204"/>
+              </a:rPr>
+              <a:t>mean(1)  collapses M, the person axis.</a:t>
+            </a:r>
+            <a:endParaRPr sz="1100" b="0">
+              <a:solidFill>
+                <a:srgbClr val="5E6478"/>
+              </a:solidFill>
+              <a:latin typeface="Arial" panose="020B0604020202090204"/>
+            </a:endParaRPr>
+          </a:p>
+          <a:p>
+            <a:pPr algn="l">
+              <a:spcBef>
+                <a:spcPts val="600"/>
+              </a:spcBef>
+            </a:pPr>
+            <a:r>
+              <a:rPr sz="1100" b="0">
+                <a:solidFill>
+                  <a:srgbClr val="20243A"/>
+                </a:solidFill>
+                <a:latin typeface="Arial" panose="020B0604020202090204"/>
+              </a:rPr>
+              <a:t>Each person is encoded separately, then</a:t>
+            </a:r>
+            <a:endParaRPr sz="1100" b="0">
+              <a:solidFill>
+                <a:srgbClr val="20243A"/>
+              </a:solidFill>
+              <a:latin typeface="Arial" panose="020B0604020202090204"/>
+            </a:endParaRPr>
+          </a:p>
+          <a:p>
+            <a:pPr algn="l">
+              <a:spcBef>
+                <a:spcPts val="600"/>
+              </a:spcBef>
+            </a:pPr>
+            <a:r>
+              <a:rPr sz="1100" b="0">
+                <a:solidFill>
+                  <a:srgbClr val="20243A"/>
+                </a:solidFill>
+                <a:latin typeface="Arial" panose="020B0604020202090204"/>
+              </a:rPr>
+              <a:t>the two feature vectors are averaged.</a:t>
+            </a:r>
+            <a:endParaRPr sz="1100" b="0">
+              <a:solidFill>
+                <a:srgbClr val="20243A"/>
+              </a:solidFill>
+              <a:latin typeface="Arial" panose="020B0604020202090204"/>
+            </a:endParaRPr>
+          </a:p>
+          <a:p>
+            <a:pPr algn="l">
+              <a:spcBef>
+                <a:spcPts val="600"/>
+              </a:spcBef>
+            </a:pPr>
+            <a:r>
+              <a:rPr sz="1100" b="1">
+                <a:solidFill>
+                  <a:srgbClr val="20243A"/>
+                </a:solidFill>
+                <a:latin typeface="Arial" panose="020B0604020202090204"/>
+              </a:rPr>
+              <a:t>The network never compares them.</a:t>
+            </a:r>
+            <a:endParaRPr sz="1100" b="1">
+              <a:solidFill>
+                <a:srgbClr val="20243A"/>
+              </a:solidFill>
+              <a:latin typeface="Arial" panose="020B0604020202090204"/>
+            </a:endParaRPr>
+          </a:p>
+        </p:txBody>
+      </p:sp>
+      <p:sp>
+        <p:nvSpPr>
+          <p:cNvPr id="21" name="Rounded Rectangle 20"/>
+          <p:cNvSpPr/>
+          <p:nvPr/>
+        </p:nvSpPr>
+        <p:spPr>
+          <a:xfrm>
+            <a:off x="4526280" y="2359152"/>
+            <a:ext cx="3383280" cy="3566160"/>
+          </a:xfrm>
+          <a:prstGeom prst="roundRect">
+            <a:avLst>
+              <a:gd name="adj" fmla="val 14000"/>
+            </a:avLst>
+          </a:prstGeom>
+          <a:solidFill>
+            <a:srgbClr val="FFFFFF"/>
+          </a:solidFill>
+          <a:ln w="12700">
+            <a:solidFill>
+              <a:srgbClr val="C8C8C8"/>
+            </a:solidFill>
+          </a:ln>
+          <a:effectLst/>
+        </p:spPr>
+        <p:style>
+          <a:lnRef idx="1">
+            <a:schemeClr val="accent1"/>
+          </a:lnRef>
+          <a:fillRef idx="3">
+            <a:schemeClr val="accent1"/>
+          </a:fillRef>
+          <a:effectRef idx="2">
+            <a:schemeClr val="accent1"/>
+          </a:effectRef>
+          <a:fontRef idx="minor">
+            <a:schemeClr val="lt1"/>
+          </a:fontRef>
+        </p:style>
+        <p:txBody>
+          <a:bodyPr wrap="square" lIns="73152" tIns="36576" rIns="73152" bIns="36576" rtlCol="0" anchor="ctr"/>
+          <a:lstStyle/>
+          <a:p>
+            <a:pPr algn="ctr"/>
+          </a:p>
+        </p:txBody>
+      </p:sp>
+      <p:sp>
+        <p:nvSpPr>
+          <p:cNvPr id="22" name="TextBox 21"/>
           <p:cNvSpPr txBox="1"/>
           <p:nvPr/>
         </p:nvSpPr>
         <p:spPr>
           <a:xfrm>
-            <a:off x="794766" y="3925252"/>
-            <a:ext cx="2496259" cy="205359"/>
+            <a:off x="4727448" y="2542032"/>
+            <a:ext cx="2980944" cy="237744"/>
           </a:xfrm>
           <a:prstGeom prst="rect">
             <a:avLst/>
           </a:prstGeom>
           <a:noFill/>
-          <a:ln>
-            <a:noFill/>
-          </a:ln>
-        </p:spPr>
-        <p:txBody>
-          <a:bodyPr wrap="none" lIns="0" tIns="0" rIns="0" bIns="0" anchor="t" anchorCtr="0">
+        </p:spPr>
+        <p:txBody>
+          <a:bodyPr wrap="square" lIns="0" tIns="0" rIns="0" bIns="0">
             <a:spAutoFit/>
           </a:bodyPr>
           <a:lstStyle/>
           <a:p>
             <a:pPr algn="l"/>
             <a:r>
-              <a:rPr lang="en-US" sz="1050" b="1" dirty="0">
-                <a:solidFill>
-                  <a:srgbClr val="181C62"/>
-                </a:solidFill>
-                <a:latin typeface="Arial" panose="020B0604020202090204"/>
-                <a:ea typeface="Arial" panose="020B0604020202090204"/>
-                <a:cs typeface="Arial" panose="020B0604020202090204"/>
-              </a:rPr>
-              <a:t>MITIGATION / OWNER / CHECK DATE</a:t>
-            </a:r>
-            <a:endParaRPr lang="en-US" sz="1050" b="1" dirty="0">
-              <a:solidFill>
-                <a:srgbClr val="181C62"/>
-              </a:solidFill>
-              <a:latin typeface="Arial" panose="020B0604020202090204"/>
-              <a:ea typeface="Arial" panose="020B0604020202090204"/>
-              <a:cs typeface="Arial" panose="020B0604020202090204"/>
-            </a:endParaRPr>
-          </a:p>
-        </p:txBody>
-      </p:sp>
-      <p:sp>
-        <p:nvSpPr>
-          <p:cNvPr id="16" name="TextBox 16"/>
+              <a:rPr sz="1000" b="1">
+                <a:solidFill>
+                  <a:srgbClr val="D71440"/>
+                </a:solidFill>
+                <a:latin typeface="Arial" panose="020B0604020202090204"/>
+              </a:rPr>
+              <a:t>SKELETONX  ·  RELATED WORK</a:t>
+            </a:r>
+            <a:endParaRPr sz="1000" b="1">
+              <a:solidFill>
+                <a:srgbClr val="D71440"/>
+              </a:solidFill>
+              <a:latin typeface="Arial" panose="020B0604020202090204"/>
+            </a:endParaRPr>
+          </a:p>
+        </p:txBody>
+      </p:sp>
+      <p:sp>
+        <p:nvSpPr>
+          <p:cNvPr id="23" name="Rounded Rectangle 22"/>
+          <p:cNvSpPr/>
+          <p:nvPr/>
+        </p:nvSpPr>
+        <p:spPr>
+          <a:xfrm>
+            <a:off x="4727448" y="2889504"/>
+            <a:ext cx="2980944" cy="896112"/>
+          </a:xfrm>
+          <a:prstGeom prst="roundRect">
+            <a:avLst>
+              <a:gd name="adj" fmla="val 14000"/>
+            </a:avLst>
+          </a:prstGeom>
+          <a:solidFill>
+            <a:srgbClr val="F4F6FB"/>
+          </a:solidFill>
+          <a:ln>
+            <a:noFill/>
+          </a:ln>
+          <a:effectLst/>
+        </p:spPr>
+        <p:style>
+          <a:lnRef idx="1">
+            <a:schemeClr val="accent1"/>
+          </a:lnRef>
+          <a:fillRef idx="3">
+            <a:schemeClr val="accent1"/>
+          </a:fillRef>
+          <a:effectRef idx="2">
+            <a:schemeClr val="accent1"/>
+          </a:effectRef>
+          <a:fontRef idx="minor">
+            <a:schemeClr val="lt1"/>
+          </a:fontRef>
+        </p:style>
+        <p:txBody>
+          <a:bodyPr wrap="square" lIns="73152" tIns="36576" rIns="73152" bIns="36576" rtlCol="0" anchor="ctr"/>
+          <a:lstStyle/>
+          <a:p>
+            <a:pPr algn="l"/>
+            <a:r>
+              <a:rPr sz="950" b="1">
+                <a:solidFill>
+                  <a:srgbClr val="D71440"/>
+                </a:solidFill>
+                <a:latin typeface="Courier New" panose="02070409020205090404"/>
+              </a:rPr>
+              <a:t>x = ST_DecoupleNet(x)</a:t>
+            </a:r>
+            <a:endParaRPr sz="950" b="1">
+              <a:solidFill>
+                <a:srgbClr val="D71440"/>
+              </a:solidFill>
+              <a:latin typeface="Courier New" panose="02070409020205090404"/>
+            </a:endParaRPr>
+          </a:p>
+          <a:p>
+            <a:pPr algn="l"/>
+            <a:r>
+              <a:rPr sz="950" b="0">
+                <a:solidFill>
+                  <a:srgbClr val="20243A"/>
+                </a:solidFill>
+                <a:latin typeface="Courier New" panose="02070409020205090404"/>
+              </a:rPr>
+              <a:t>  mean over T -&gt; F_s  "subject"</a:t>
+            </a:r>
+            <a:endParaRPr sz="950" b="0">
+              <a:solidFill>
+                <a:srgbClr val="20243A"/>
+              </a:solidFill>
+              <a:latin typeface="Courier New" panose="02070409020205090404"/>
+            </a:endParaRPr>
+          </a:p>
+          <a:p>
+            <a:pPr algn="l"/>
+            <a:r>
+              <a:rPr sz="950" b="0">
+                <a:solidFill>
+                  <a:srgbClr val="20243A"/>
+                </a:solidFill>
+                <a:latin typeface="Courier New" panose="02070409020205090404"/>
+              </a:rPr>
+              <a:t>  mean over V -&gt; F_t  "action"</a:t>
+            </a:r>
+            <a:endParaRPr sz="950" b="0">
+              <a:solidFill>
+                <a:srgbClr val="20243A"/>
+              </a:solidFill>
+              <a:latin typeface="Courier New" panose="02070409020205090404"/>
+            </a:endParaRPr>
+          </a:p>
+        </p:txBody>
+      </p:sp>
+      <p:sp>
+        <p:nvSpPr>
+          <p:cNvPr id="24" name="TextBox 23"/>
           <p:cNvSpPr txBox="1"/>
           <p:nvPr/>
         </p:nvSpPr>
         <p:spPr>
           <a:xfrm>
-            <a:off x="6328791" y="3925252"/>
-            <a:ext cx="2151256" cy="205359"/>
+            <a:off x="4727448" y="3931920"/>
+            <a:ext cx="2980944" cy="1737360"/>
           </a:xfrm>
           <a:prstGeom prst="rect">
             <a:avLst/>
           </a:prstGeom>
           <a:noFill/>
-          <a:ln>
-            <a:noFill/>
-          </a:ln>
-        </p:spPr>
-        <p:txBody>
-          <a:bodyPr wrap="none" lIns="0" tIns="0" rIns="0" bIns="0" anchor="t" anchorCtr="0">
+        </p:spPr>
+        <p:txBody>
+          <a:bodyPr wrap="square" lIns="0" tIns="0" rIns="0" bIns="0">
             <a:spAutoFit/>
           </a:bodyPr>
           <a:lstStyle/>
           <a:p>
             <a:pPr algn="l"/>
             <a:r>
-              <a:rPr lang="en-US" sz="1050" b="1" dirty="0">
-                <a:solidFill>
-                  <a:srgbClr val="FFFFFF"/>
-                </a:solidFill>
-                <a:latin typeface="Arial" panose="020B0604020202090204"/>
-                <a:ea typeface="Arial" panose="020B0604020202090204"/>
-                <a:cs typeface="Arial" panose="020B0604020202090204"/>
-              </a:rPr>
-              <a:t>DECISION OR SUPPORT NEEDED</a:t>
-            </a:r>
-            <a:endParaRPr lang="en-US" sz="1050" b="1" dirty="0">
-              <a:solidFill>
-                <a:srgbClr val="FFFFFF"/>
-              </a:solidFill>
-              <a:latin typeface="Arial" panose="020B0604020202090204"/>
-              <a:ea typeface="Arial" panose="020B0604020202090204"/>
-              <a:cs typeface="Arial" panose="020B0604020202090204"/>
-            </a:endParaRPr>
-          </a:p>
-        </p:txBody>
-      </p:sp>
-      <p:sp>
-        <p:nvSpPr>
-          <p:cNvPr id="17" name="TextBox 17"/>
+              <a:rPr sz="1100" b="0">
+                <a:solidFill>
+                  <a:srgbClr val="5E6478"/>
+                </a:solidFill>
+                <a:latin typeface="Arial" panose="020B0604020202090204"/>
+              </a:rPr>
+              <a:t>The same step, replaced by a learnable</a:t>
+            </a:r>
+            <a:endParaRPr sz="1100" b="0">
+              <a:solidFill>
+                <a:srgbClr val="5E6478"/>
+              </a:solidFill>
+              <a:latin typeface="Arial" panose="020B0604020202090204"/>
+            </a:endParaRPr>
+          </a:p>
+          <a:p>
+            <a:pPr algn="l">
+              <a:spcBef>
+                <a:spcPts val="600"/>
+              </a:spcBef>
+            </a:pPr>
+            <a:r>
+              <a:rPr sz="1100" b="0">
+                <a:solidFill>
+                  <a:srgbClr val="5E6478"/>
+                </a:solidFill>
+                <a:latin typeface="Arial" panose="020B0604020202090204"/>
+              </a:rPr>
+              <a:t>pooling that splits the feature in two.</a:t>
+            </a:r>
+            <a:endParaRPr sz="1100" b="0">
+              <a:solidFill>
+                <a:srgbClr val="5E6478"/>
+              </a:solidFill>
+              <a:latin typeface="Arial" panose="020B0604020202090204"/>
+            </a:endParaRPr>
+          </a:p>
+          <a:p>
+            <a:pPr algn="l">
+              <a:spcBef>
+                <a:spcPts val="600"/>
+              </a:spcBef>
+            </a:pPr>
+            <a:r>
+              <a:rPr sz="1100" b="0">
+                <a:solidFill>
+                  <a:srgbClr val="20243A"/>
+                </a:solidFill>
+                <a:latin typeface="Arial" panose="020B0604020202090204"/>
+              </a:rPr>
+              <a:t>It separates who from what — but "who"</a:t>
+            </a:r>
+            <a:endParaRPr sz="1100" b="0">
+              <a:solidFill>
+                <a:srgbClr val="20243A"/>
+              </a:solidFill>
+              <a:latin typeface="Arial" panose="020B0604020202090204"/>
+            </a:endParaRPr>
+          </a:p>
+          <a:p>
+            <a:pPr algn="l">
+              <a:spcBef>
+                <a:spcPts val="600"/>
+              </a:spcBef>
+            </a:pPr>
+            <a:r>
+              <a:rPr sz="1100" b="0">
+                <a:solidFill>
+                  <a:srgbClr val="20243A"/>
+                </a:solidFill>
+                <a:latin typeface="Arial" panose="020B0604020202090204"/>
+              </a:rPr>
+              <a:t>means which performer recorded the clip.</a:t>
+            </a:r>
+            <a:endParaRPr sz="1100" b="0">
+              <a:solidFill>
+                <a:srgbClr val="20243A"/>
+              </a:solidFill>
+              <a:latin typeface="Arial" panose="020B0604020202090204"/>
+            </a:endParaRPr>
+          </a:p>
+          <a:p>
+            <a:pPr algn="l">
+              <a:spcBef>
+                <a:spcPts val="600"/>
+              </a:spcBef>
+            </a:pPr>
+            <a:r>
+              <a:rPr sz="1100" b="1">
+                <a:solidFill>
+                  <a:srgbClr val="20243A"/>
+                </a:solidFill>
+                <a:latin typeface="Arial" panose="020B0604020202090204"/>
+              </a:rPr>
+              <a:t>Still one label per sample.</a:t>
+            </a:r>
+            <a:endParaRPr sz="1100" b="1">
+              <a:solidFill>
+                <a:srgbClr val="20243A"/>
+              </a:solidFill>
+              <a:latin typeface="Arial" panose="020B0604020202090204"/>
+            </a:endParaRPr>
+          </a:p>
+        </p:txBody>
+      </p:sp>
+      <p:sp>
+        <p:nvSpPr>
+          <p:cNvPr id="25" name="Rounded Rectangle 24"/>
+          <p:cNvSpPr/>
+          <p:nvPr/>
+        </p:nvSpPr>
+        <p:spPr>
+          <a:xfrm>
+            <a:off x="8183879" y="2359152"/>
+            <a:ext cx="3383280" cy="3566160"/>
+          </a:xfrm>
+          <a:prstGeom prst="roundRect">
+            <a:avLst>
+              <a:gd name="adj" fmla="val 14000"/>
+            </a:avLst>
+          </a:prstGeom>
+          <a:solidFill>
+            <a:srgbClr val="181C62"/>
+          </a:solidFill>
+          <a:ln>
+            <a:noFill/>
+          </a:ln>
+          <a:effectLst/>
+        </p:spPr>
+        <p:style>
+          <a:lnRef idx="1">
+            <a:schemeClr val="accent1"/>
+          </a:lnRef>
+          <a:fillRef idx="3">
+            <a:schemeClr val="accent1"/>
+          </a:fillRef>
+          <a:effectRef idx="2">
+            <a:schemeClr val="accent1"/>
+          </a:effectRef>
+          <a:fontRef idx="minor">
+            <a:schemeClr val="lt1"/>
+          </a:fontRef>
+        </p:style>
+        <p:txBody>
+          <a:bodyPr wrap="square" lIns="73152" tIns="36576" rIns="73152" bIns="36576" rtlCol="0" anchor="ctr"/>
+          <a:lstStyle/>
+          <a:p>
+            <a:pPr algn="ctr"/>
+          </a:p>
+        </p:txBody>
+      </p:sp>
+      <p:sp>
+        <p:nvSpPr>
+          <p:cNvPr id="26" name="TextBox 25"/>
           <p:cNvSpPr txBox="1"/>
           <p:nvPr/>
         </p:nvSpPr>
         <p:spPr>
           <a:xfrm>
-            <a:off x="501396" y="543878"/>
-            <a:ext cx="2969122" cy="498729"/>
+            <a:off x="8385048" y="2542032"/>
+            <a:ext cx="2980944" cy="237744"/>
           </a:xfrm>
           <a:prstGeom prst="rect">
             <a:avLst/>
           </a:prstGeom>
           <a:noFill/>
-          <a:ln>
-            <a:noFill/>
-          </a:ln>
-        </p:spPr>
-        <p:txBody>
-          <a:bodyPr wrap="none" lIns="0" tIns="0" rIns="0" bIns="0" anchor="t" anchorCtr="0">
+        </p:spPr>
+        <p:txBody>
+          <a:bodyPr wrap="square" lIns="0" tIns="0" rIns="0" bIns="0">
             <a:spAutoFit/>
           </a:bodyPr>
           <a:lstStyle/>
           <a:p>
             <a:pPr algn="l"/>
             <a:r>
-              <a:rPr lang="en-US" sz="2550" b="1" dirty="0">
-                <a:solidFill>
-                  <a:srgbClr val="20243A"/>
-                </a:solidFill>
-                <a:latin typeface="Arial" panose="020B0604020202090204"/>
-                <a:ea typeface="Arial" panose="020B0604020202090204"/>
-                <a:cs typeface="Arial" panose="020B0604020202090204"/>
-              </a:rPr>
-              <a:t>Risks &amp; Decisions</a:t>
-            </a:r>
-            <a:endParaRPr lang="en-US" sz="2550" b="1" dirty="0">
-              <a:solidFill>
-                <a:srgbClr val="20243A"/>
-              </a:solidFill>
-              <a:latin typeface="Arial" panose="020B0604020202090204"/>
-              <a:ea typeface="Arial" panose="020B0604020202090204"/>
-              <a:cs typeface="Arial" panose="020B0604020202090204"/>
-            </a:endParaRPr>
-          </a:p>
-        </p:txBody>
-      </p:sp>
-      <p:sp>
-        <p:nvSpPr>
-          <p:cNvPr id="18" name="TextBox 18"/>
+              <a:rPr sz="1000" b="1">
+                <a:solidFill>
+                  <a:srgbClr val="FFFFFF"/>
+                </a:solidFill>
+                <a:latin typeface="Arial" panose="020B0604020202090204"/>
+              </a:rPr>
+              <a:t>OUR QUESTION</a:t>
+            </a:r>
+            <a:endParaRPr sz="1000" b="1">
+              <a:solidFill>
+                <a:srgbClr val="FFFFFF"/>
+              </a:solidFill>
+              <a:latin typeface="Arial" panose="020B0604020202090204"/>
+            </a:endParaRPr>
+          </a:p>
+        </p:txBody>
+      </p:sp>
+      <p:sp>
+        <p:nvSpPr>
+          <p:cNvPr id="27" name="TextBox 26"/>
           <p:cNvSpPr txBox="1"/>
           <p:nvPr/>
         </p:nvSpPr>
         <p:spPr>
           <a:xfrm>
-            <a:off x="792099" y="2077879"/>
-            <a:ext cx="3269742" cy="603314"/>
+            <a:off x="8385048" y="2926080"/>
+            <a:ext cx="2980944" cy="2743200"/>
           </a:xfrm>
           <a:prstGeom prst="rect">
             <a:avLst/>
           </a:prstGeom>
           <a:noFill/>
-          <a:ln>
-            <a:noFill/>
-          </a:ln>
-        </p:spPr>
-        <p:txBody>
-          <a:bodyPr wrap="none" lIns="0" tIns="0" rIns="0" bIns="0" anchor="t" anchorCtr="0">
+        </p:spPr>
+        <p:txBody>
+          <a:bodyPr wrap="square" lIns="0" tIns="0" rIns="0" bIns="0">
             <a:spAutoFit/>
           </a:bodyPr>
           <a:lstStyle/>
           <a:p>
+            <a:pPr algn="l"/>
+            <a:r>
+              <a:rPr sz="1250" b="1">
+                <a:solidFill>
+                  <a:srgbClr val="FFFFFF"/>
+                </a:solidFill>
+                <a:latin typeface="Arial" panose="020B0604020202090204"/>
+              </a:rPr>
+              <a:t>M is where instance identity lives.</a:t>
+            </a:r>
+            <a:endParaRPr sz="1250" b="1">
+              <a:solidFill>
+                <a:srgbClr val="FFFFFF"/>
+              </a:solidFill>
+              <a:latin typeface="Arial" panose="020B0604020202090204"/>
+            </a:endParaRPr>
+          </a:p>
+          <a:p>
             <a:pPr algn="l">
-              <a:lnSpc>
-                <a:spcPts val="2325"/>
-              </a:lnSpc>
+              <a:spcBef>
+                <a:spcPts val="500"/>
+              </a:spcBef>
             </a:pPr>
             <a:r>
-              <a:rPr lang="en-US" sz="1580" b="1" dirty="0">
-                <a:solidFill>
-                  <a:srgbClr val="D71440"/>
-                </a:solidFill>
-                <a:latin typeface="Arial" panose="020B0604020202090204"/>
-                <a:ea typeface="Arial" panose="020B0604020202090204"/>
-                <a:cs typeface="Arial" panose="020B0604020202090204"/>
-              </a:rPr>
-              <a:t>{{RISKS}}</a:t>
-            </a:r>
-            <a:endParaRPr lang="en-US" sz="1580" b="1" dirty="0">
-              <a:solidFill>
-                <a:srgbClr val="D71440"/>
-              </a:solidFill>
-              <a:latin typeface="Arial" panose="020B0604020202090204"/>
-              <a:ea typeface="Arial" panose="020B0604020202090204"/>
-              <a:cs typeface="Arial" panose="020B0604020202090204"/>
+              <a:rPr sz="1100" b="0">
+                <a:solidFill>
+                  <a:srgbClr val="FFFFFF"/>
+                </a:solidFill>
+                <a:latin typeface="Arial" panose="020B0604020202090204"/>
+              </a:rPr>
+              <a:t>Averaging over M is a symmetric</a:t>
+            </a:r>
+            <a:endParaRPr sz="1100" b="0">
+              <a:solidFill>
+                <a:srgbClr val="FFFFFF"/>
+              </a:solidFill>
+              <a:latin typeface="Arial" panose="020B0604020202090204"/>
             </a:endParaRPr>
           </a:p>
           <a:p>
             <a:pPr algn="l">
-              <a:lnSpc>
-                <a:spcPts val="2325"/>
-              </a:lnSpc>
+              <a:spcBef>
+                <a:spcPts val="500"/>
+              </a:spcBef>
             </a:pPr>
             <a:r>
-              <a:rPr lang="en-US" sz="1050" dirty="0">
-                <a:solidFill>
-                  <a:srgbClr val="5E6478"/>
-                </a:solidFill>
-                <a:latin typeface="Arial" panose="020B0604020202090204"/>
-                <a:ea typeface="Arial" panose="020B0604020202090204"/>
-                <a:cs typeface="Arial" panose="020B0604020202090204"/>
-              </a:rPr>
-              <a:t>Describe the failure mode, trigger, and evidence.</a:t>
-            </a:r>
-            <a:endParaRPr lang="en-US" sz="1050" dirty="0">
-              <a:solidFill>
-                <a:srgbClr val="5E6478"/>
-              </a:solidFill>
-              <a:latin typeface="Arial" panose="020B0604020202090204"/>
-              <a:ea typeface="Arial" panose="020B0604020202090204"/>
-              <a:cs typeface="Arial" panose="020B0604020202090204"/>
-            </a:endParaRPr>
-          </a:p>
-        </p:txBody>
-      </p:sp>
-      <p:sp>
-        <p:nvSpPr>
-          <p:cNvPr id="19" name="TextBox 19"/>
-          <p:cNvSpPr txBox="1"/>
-          <p:nvPr/>
-        </p:nvSpPr>
-        <p:spPr>
-          <a:xfrm>
-            <a:off x="6326124" y="2077879"/>
-            <a:ext cx="3843147" cy="603314"/>
-          </a:xfrm>
-          <a:prstGeom prst="rect">
-            <a:avLst/>
-          </a:prstGeom>
-          <a:noFill/>
-          <a:ln>
-            <a:noFill/>
-          </a:ln>
-        </p:spPr>
-        <p:txBody>
-          <a:bodyPr wrap="none" lIns="0" tIns="0" rIns="0" bIns="0" anchor="t" anchorCtr="0">
-            <a:spAutoFit/>
-          </a:bodyPr>
-          <a:lstStyle/>
+              <a:rPr sz="1100" b="0">
+                <a:solidFill>
+                  <a:srgbClr val="FFFFFF"/>
+                </a:solidFill>
+                <a:latin typeface="Arial" panose="020B0604020202090204"/>
+              </a:rPr>
+              <a:t>operation: swap the two people and</a:t>
+            </a:r>
+            <a:endParaRPr sz="1100" b="0">
+              <a:solidFill>
+                <a:srgbClr val="FFFFFF"/>
+              </a:solidFill>
+              <a:latin typeface="Arial" panose="020B0604020202090204"/>
+            </a:endParaRPr>
+          </a:p>
           <a:p>
             <a:pPr algn="l">
-              <a:lnSpc>
-                <a:spcPts val="2325"/>
-              </a:lnSpc>
+              <a:spcBef>
+                <a:spcPts val="500"/>
+              </a:spcBef>
             </a:pPr>
             <a:r>
-              <a:rPr lang="en-US" sz="1580" dirty="0">
-                <a:solidFill>
-                  <a:srgbClr val="20243A"/>
-                </a:solidFill>
-                <a:latin typeface="Arial" panose="020B0604020202090204"/>
-                <a:ea typeface="Arial" panose="020B0604020202090204"/>
-                <a:cs typeface="Arial" panose="020B0604020202090204"/>
-              </a:rPr>
-              <a:t>{{IMPACT}}</a:t>
-            </a:r>
-            <a:endParaRPr lang="en-US" sz="1580" dirty="0">
-              <a:solidFill>
-                <a:srgbClr val="20243A"/>
-              </a:solidFill>
-              <a:latin typeface="Arial" panose="020B0604020202090204"/>
-              <a:ea typeface="Arial" panose="020B0604020202090204"/>
-              <a:cs typeface="Arial" panose="020B0604020202090204"/>
+              <a:rPr sz="1100" b="0">
+                <a:solidFill>
+                  <a:srgbClr val="FFFFFF"/>
+                </a:solidFill>
+                <a:latin typeface="Arial" panose="020B0604020202090204"/>
+              </a:rPr>
+              <a:t>the pooled vector is unchanged.</a:t>
+            </a:r>
+            <a:endParaRPr sz="1100" b="0">
+              <a:solidFill>
+                <a:srgbClr val="FFFFFF"/>
+              </a:solidFill>
+              <a:latin typeface="Arial" panose="020B0604020202090204"/>
             </a:endParaRPr>
           </a:p>
           <a:p>
             <a:pPr algn="l">
-              <a:lnSpc>
-                <a:spcPts val="2325"/>
-              </a:lnSpc>
+              <a:spcBef>
+                <a:spcPts val="500"/>
+              </a:spcBef>
             </a:pPr>
             <a:r>
-              <a:rPr lang="en-US" sz="1050" dirty="0">
-                <a:solidFill>
-                  <a:srgbClr val="5E6478"/>
-                </a:solidFill>
-                <a:latin typeface="Arial" panose="020B0604020202090204"/>
-                <a:ea typeface="Arial" panose="020B0604020202090204"/>
-                <a:cs typeface="Arial" panose="020B0604020202090204"/>
-              </a:rPr>
-              <a:t>Quantify delay, compute cost, metric risk, or lost scope.</a:t>
-            </a:r>
-            <a:endParaRPr lang="en-US" sz="1050" dirty="0">
-              <a:solidFill>
-                <a:srgbClr val="5E6478"/>
-              </a:solidFill>
-              <a:latin typeface="Arial" panose="020B0604020202090204"/>
-              <a:ea typeface="Arial" panose="020B0604020202090204"/>
-              <a:cs typeface="Arial" panose="020B0604020202090204"/>
-            </a:endParaRPr>
-          </a:p>
-        </p:txBody>
-      </p:sp>
-      <p:sp>
-        <p:nvSpPr>
-          <p:cNvPr id="20" name="TextBox 20"/>
-          <p:cNvSpPr txBox="1"/>
-          <p:nvPr/>
-        </p:nvSpPr>
-        <p:spPr>
-          <a:xfrm>
-            <a:off x="792099" y="4363879"/>
-            <a:ext cx="2456307" cy="603314"/>
-          </a:xfrm>
-          <a:prstGeom prst="rect">
-            <a:avLst/>
-          </a:prstGeom>
-          <a:noFill/>
-          <a:ln>
-            <a:noFill/>
-          </a:ln>
-        </p:spPr>
-        <p:txBody>
-          <a:bodyPr wrap="none" lIns="0" tIns="0" rIns="0" bIns="0" anchor="t" anchorCtr="0">
-            <a:spAutoFit/>
-          </a:bodyPr>
-          <a:lstStyle/>
+              <a:rPr sz="1100" b="1">
+                <a:solidFill>
+                  <a:srgbClr val="FFB3C4"/>
+                </a:solidFill>
+                <a:latin typeface="Arial" panose="020B0604020202090204"/>
+              </a:rPr>
+              <a:t>So "A punches B" and "B punches A"</a:t>
+            </a:r>
+            <a:endParaRPr sz="1100" b="1">
+              <a:solidFill>
+                <a:srgbClr val="FFB3C4"/>
+              </a:solidFill>
+              <a:latin typeface="Arial" panose="020B0604020202090204"/>
+            </a:endParaRPr>
+          </a:p>
           <a:p>
             <a:pPr algn="l">
-              <a:lnSpc>
-                <a:spcPts val="2325"/>
-              </a:lnSpc>
+              <a:spcBef>
+                <a:spcPts val="500"/>
+              </a:spcBef>
             </a:pPr>
             <a:r>
-              <a:rPr lang="en-US" sz="1580" dirty="0">
-                <a:solidFill>
-                  <a:srgbClr val="181C62"/>
-                </a:solidFill>
-                <a:latin typeface="Arial" panose="020B0604020202090204"/>
-                <a:ea typeface="Arial" panose="020B0604020202090204"/>
-                <a:cs typeface="Arial" panose="020B0604020202090204"/>
-              </a:rPr>
-              <a:t>{{MITIGATION}}</a:t>
-            </a:r>
-            <a:endParaRPr lang="en-US" sz="1580" dirty="0">
-              <a:solidFill>
-                <a:srgbClr val="181C62"/>
-              </a:solidFill>
-              <a:latin typeface="Arial" panose="020B0604020202090204"/>
-              <a:ea typeface="Arial" panose="020B0604020202090204"/>
-              <a:cs typeface="Arial" panose="020B0604020202090204"/>
+              <a:rPr sz="1100" b="1">
+                <a:solidFill>
+                  <a:srgbClr val="FFB3C4"/>
+                </a:solidFill>
+                <a:latin typeface="Arial" panose="020B0604020202090204"/>
+              </a:rPr>
+              <a:t>cannot be told apart at this point,</a:t>
+            </a:r>
+            <a:endParaRPr sz="1100" b="1">
+              <a:solidFill>
+                <a:srgbClr val="FFB3C4"/>
+              </a:solidFill>
+              <a:latin typeface="Arial" panose="020B0604020202090204"/>
             </a:endParaRPr>
           </a:p>
           <a:p>
             <a:pPr algn="l">
-              <a:lnSpc>
-                <a:spcPts val="2325"/>
-              </a:lnSpc>
+              <a:spcBef>
+                <a:spcPts val="500"/>
+              </a:spcBef>
             </a:pPr>
             <a:r>
-              <a:rPr lang="en-US" sz="1050" dirty="0">
-                <a:solidFill>
-                  <a:srgbClr val="5E6478"/>
-                </a:solidFill>
-                <a:latin typeface="Arial" panose="020B0604020202090204"/>
-                <a:ea typeface="Arial" panose="020B0604020202090204"/>
-                <a:cs typeface="Arial" panose="020B0604020202090204"/>
-              </a:rPr>
-              <a:t>Owner: … | Check date: … | Fallback: …</a:t>
-            </a:r>
-            <a:endParaRPr lang="en-US" sz="1050" dirty="0">
-              <a:solidFill>
-                <a:srgbClr val="5E6478"/>
-              </a:solidFill>
-              <a:latin typeface="Arial" panose="020B0604020202090204"/>
-              <a:ea typeface="Arial" panose="020B0604020202090204"/>
-              <a:cs typeface="Arial" panose="020B0604020202090204"/>
-            </a:endParaRPr>
-          </a:p>
-        </p:txBody>
-      </p:sp>
-      <p:sp>
-        <p:nvSpPr>
-          <p:cNvPr id="21" name="TextBox 21"/>
-          <p:cNvSpPr txBox="1"/>
-          <p:nvPr/>
-        </p:nvSpPr>
-        <p:spPr>
-          <a:xfrm>
-            <a:off x="6326124" y="4363879"/>
-            <a:ext cx="3423095" cy="603314"/>
-          </a:xfrm>
-          <a:prstGeom prst="rect">
-            <a:avLst/>
-          </a:prstGeom>
-          <a:noFill/>
-          <a:ln>
-            <a:noFill/>
-          </a:ln>
-        </p:spPr>
-        <p:txBody>
-          <a:bodyPr wrap="none" lIns="0" tIns="0" rIns="0" bIns="0" anchor="t" anchorCtr="0">
-            <a:spAutoFit/>
-          </a:bodyPr>
-          <a:lstStyle/>
+              <a:rPr sz="1100" b="1">
+                <a:solidFill>
+                  <a:srgbClr val="FFB3C4"/>
+                </a:solidFill>
+                <a:latin typeface="Arial" panose="020B0604020202090204"/>
+              </a:rPr>
+              <a:t>by construction.</a:t>
+            </a:r>
+            <a:endParaRPr sz="1100" b="1">
+              <a:solidFill>
+                <a:srgbClr val="FFB3C4"/>
+              </a:solidFill>
+              <a:latin typeface="Arial" panose="020B0604020202090204"/>
+            </a:endParaRPr>
+          </a:p>
           <a:p>
             <a:pPr algn="l">
-              <a:lnSpc>
-                <a:spcPts val="2325"/>
-              </a:lnSpc>
+              <a:spcBef>
+                <a:spcPts val="500"/>
+              </a:spcBef>
             </a:pPr>
             <a:r>
-              <a:rPr lang="en-US" sz="1580" b="1" dirty="0">
-                <a:solidFill>
-                  <a:srgbClr val="FFFFFF"/>
-                </a:solidFill>
-                <a:latin typeface="Arial" panose="020B0604020202090204"/>
-                <a:ea typeface="Arial" panose="020B0604020202090204"/>
-                <a:cs typeface="Arial" panose="020B0604020202090204"/>
-              </a:rPr>
-              <a:t>{{DECISION_NEEDED}}</a:t>
-            </a:r>
-            <a:endParaRPr lang="en-US" sz="1580" b="1" dirty="0">
-              <a:solidFill>
-                <a:srgbClr val="FFFFFF"/>
-              </a:solidFill>
-              <a:latin typeface="Arial" panose="020B0604020202090204"/>
-              <a:ea typeface="Arial" panose="020B0604020202090204"/>
-              <a:cs typeface="Arial" panose="020B0604020202090204"/>
+              <a:rPr sz="1100" b="0">
+                <a:solidFill>
+                  <a:srgbClr val="C8C8C8"/>
+                </a:solidFill>
+                <a:latin typeface="Arial" panose="020B0604020202090204"/>
+              </a:rPr>
+              <a:t>Next: measure how much identity even</a:t>
+            </a:r>
+            <a:endParaRPr sz="1100" b="0">
+              <a:solidFill>
+                <a:srgbClr val="C8C8C8"/>
+              </a:solidFill>
+              <a:latin typeface="Arial" panose="020B0604020202090204"/>
             </a:endParaRPr>
           </a:p>
           <a:p>
             <a:pPr algn="l">
-              <a:lnSpc>
-                <a:spcPts val="2325"/>
-              </a:lnSpc>
+              <a:spcBef>
+                <a:spcPts val="500"/>
+              </a:spcBef>
             </a:pPr>
             <a:r>
-              <a:rPr lang="en-US" sz="1050" dirty="0">
+              <a:rPr sz="1100" b="0">
                 <a:solidFill>
                   <a:srgbClr val="C8C8C8"/>
                 </a:solidFill>
                 <a:latin typeface="Arial" panose="020B0604020202090204"/>
-                <a:ea typeface="Arial" panose="020B0604020202090204"/>
-                <a:cs typeface="Arial" panose="020B0604020202090204"/>
-              </a:rPr>
-              <a:t>State the choice, approver, and latest useful date.</a:t>
-            </a:r>
-            <a:endParaRPr lang="en-US" sz="1050" dirty="0">
+              </a:rPr>
+              <a:t>survives preprocessing (ID switches),</a:t>
+            </a:r>
+            <a:endParaRPr sz="1100" b="0">
               <a:solidFill>
                 <a:srgbClr val="C8C8C8"/>
               </a:solidFill>
               <a:latin typeface="Arial" panose="020B0604020202090204"/>
-              <a:ea typeface="Arial" panose="020B0604020202090204"/>
-              <a:cs typeface="Arial" panose="020B0604020202090204"/>
-            </a:endParaRPr>
-          </a:p>
-        </p:txBody>
-      </p:sp>
-      <p:sp>
-        <p:nvSpPr>
-          <p:cNvPr id="22" name="TextBox 22"/>
-          <p:cNvSpPr txBox="1"/>
-          <p:nvPr/>
-        </p:nvSpPr>
-        <p:spPr>
-          <a:xfrm>
-            <a:off x="11085233" y="6665595"/>
-            <a:ext cx="880034" cy="176212"/>
-          </a:xfrm>
-          <a:prstGeom prst="rect">
-            <a:avLst/>
-          </a:prstGeom>
-          <a:noFill/>
-          <a:ln>
-            <a:noFill/>
-          </a:ln>
-        </p:spPr>
-        <p:txBody>
-          <a:bodyPr wrap="none" lIns="0" tIns="0" rIns="0" bIns="0" anchor="t" anchorCtr="0">
-            <a:spAutoFit/>
-          </a:bodyPr>
-          <a:lstStyle/>
-          <a:p>
-            <a:pPr algn="ctr"/>
-            <a:r>
-              <a:rPr lang="en-US" sz="900" dirty="0">
-                <a:solidFill>
-                  <a:srgbClr val="FFFFFF"/>
-                </a:solidFill>
-                <a:latin typeface="Arial" panose="020B0604020202090204"/>
-                <a:ea typeface="Arial" panose="020B0604020202090204"/>
-                <a:cs typeface="Arial" panose="020B0604020202090204"/>
-              </a:rPr>
-              <a:t>{{PAGE_NUM}}</a:t>
-            </a:r>
-            <a:endParaRPr lang="en-US" sz="900" dirty="0">
-              <a:solidFill>
-                <a:srgbClr val="FFFFFF"/>
-              </a:solidFill>
-              <a:latin typeface="Arial" panose="020B0604020202090204"/>
-              <a:ea typeface="Arial" panose="020B0604020202090204"/>
-              <a:cs typeface="Arial" panose="020B0604020202090204"/>
+            </a:endParaRPr>
+          </a:p>
+          <a:p>
+            <a:pPr algn="l">
+              <a:spcBef>
+                <a:spcPts val="500"/>
+              </a:spcBef>
+            </a:pPr>
+            <a:r>
+              <a:rPr sz="1100" b="0">
+                <a:solidFill>
+                  <a:srgbClr val="C8C8C8"/>
+                </a:solidFill>
+                <a:latin typeface="Arial" panose="020B0604020202090204"/>
+              </a:rPr>
+              <a:t>then decide what to do at this step.</a:t>
+            </a:r>
+            <a:endParaRPr sz="1100" b="0">
+              <a:solidFill>
+                <a:srgbClr val="C8C8C8"/>
+              </a:solidFill>
+              <a:latin typeface="Arial" panose="020B0604020202090204"/>
             </a:endParaRPr>
           </a:p>
         </p:txBody>
@@ -10373,100 +11411,96 @@
       </p:sp>
       <p:sp>
         <p:nvSpPr>
-          <p:cNvPr id="7" name="Line 7"/>
+          <p:cNvPr id="7" name="Rectangle 7"/>
           <p:cNvSpPr/>
           <p:nvPr/>
         </p:nvSpPr>
         <p:spPr>
           <a:xfrm>
-            <a:off x="1009650" y="2238375"/>
-            <a:ext cx="9525" cy="3076575"/>
-          </a:xfrm>
-          <a:custGeom>
-            <a:avLst/>
-            <a:gdLst/>
-            <a:ahLst/>
-            <a:cxnLst/>
-            <a:rect l="l" t="t" r="r" b="b"/>
-            <a:pathLst>
-              <a:path w="9525" h="3076575">
-                <a:moveTo>
-                  <a:pt x="0" y="0"/>
-                </a:moveTo>
-                <a:lnTo>
-                  <a:pt x="0" y="3076575"/>
-                </a:lnTo>
-              </a:path>
-            </a:pathLst>
-          </a:custGeom>
-          <a:noFill/>
-          <a:ln w="47625">
+            <a:off x="514350" y="1428750"/>
+            <a:ext cx="5286375" cy="2057400"/>
+          </a:xfrm>
+          <a:prstGeom prst="roundRect">
+            <a:avLst>
+              <a:gd name="adj" fmla="val 5556"/>
+            </a:avLst>
+          </a:prstGeom>
+          <a:solidFill>
+            <a:srgbClr val="FCE9EE"/>
+          </a:solidFill>
+          <a:ln>
+            <a:noFill/>
+          </a:ln>
+        </p:spPr>
+      </p:sp>
+      <p:sp>
+        <p:nvSpPr>
+          <p:cNvPr id="8" name="Rectangle 8"/>
+          <p:cNvSpPr/>
+          <p:nvPr/>
+        </p:nvSpPr>
+        <p:spPr>
+          <a:xfrm>
+            <a:off x="6048375" y="1428750"/>
+            <a:ext cx="5572125" cy="2057400"/>
+          </a:xfrm>
+          <a:prstGeom prst="roundRect">
+            <a:avLst>
+              <a:gd name="adj" fmla="val 5556"/>
+            </a:avLst>
+          </a:prstGeom>
+          <a:solidFill>
+            <a:srgbClr val="FFFFFF"/>
+          </a:solidFill>
+          <a:ln w="19050">
             <a:solidFill>
-              <a:srgbClr val="C8C8C8"/>
+              <a:srgbClr val="D71440"/>
             </a:solidFill>
           </a:ln>
         </p:spPr>
       </p:sp>
       <p:sp>
         <p:nvSpPr>
-          <p:cNvPr id="8" name="Ellipse 8"/>
+          <p:cNvPr id="9" name="Rectangle 9"/>
           <p:cNvSpPr/>
           <p:nvPr/>
         </p:nvSpPr>
         <p:spPr>
           <a:xfrm>
-            <a:off x="819150" y="2047875"/>
-            <a:ext cx="381000" cy="381000"/>
-          </a:xfrm>
-          <a:prstGeom prst="ellipse">
-            <a:avLst/>
-          </a:prstGeom>
-          <a:solidFill>
-            <a:srgbClr val="D71440"/>
-          </a:solidFill>
-          <a:ln>
-            <a:noFill/>
-          </a:ln>
-        </p:spPr>
-      </p:sp>
-      <p:sp>
-        <p:nvSpPr>
-          <p:cNvPr id="9" name="Ellipse 9"/>
+            <a:off x="514350" y="3714750"/>
+            <a:ext cx="5286375" cy="2362200"/>
+          </a:xfrm>
+          <a:prstGeom prst="roundRect">
+            <a:avLst>
+              <a:gd name="adj" fmla="val 4839"/>
+            </a:avLst>
+          </a:prstGeom>
+          <a:solidFill>
+            <a:srgbClr val="EEF1FA"/>
+          </a:solidFill>
+          <a:ln>
+            <a:noFill/>
+          </a:ln>
+        </p:spPr>
+      </p:sp>
+      <p:sp>
+        <p:nvSpPr>
+          <p:cNvPr id="10" name="Rectangle 10"/>
           <p:cNvSpPr/>
           <p:nvPr/>
         </p:nvSpPr>
         <p:spPr>
           <a:xfrm>
-            <a:off x="819150" y="3590925"/>
-            <a:ext cx="381000" cy="381000"/>
-          </a:xfrm>
-          <a:prstGeom prst="ellipse">
-            <a:avLst/>
+            <a:off x="6048375" y="3714750"/>
+            <a:ext cx="5572125" cy="2362200"/>
+          </a:xfrm>
+          <a:prstGeom prst="roundRect">
+            <a:avLst>
+              <a:gd name="adj" fmla="val 4839"/>
+            </a:avLst>
           </a:prstGeom>
           <a:solidFill>
             <a:srgbClr val="181C62"/>
-          </a:solidFill>
-          <a:ln>
-            <a:noFill/>
-          </a:ln>
-        </p:spPr>
-      </p:sp>
-      <p:sp>
-        <p:nvSpPr>
-          <p:cNvPr id="10" name="Ellipse 10"/>
-          <p:cNvSpPr/>
-          <p:nvPr/>
-        </p:nvSpPr>
-        <p:spPr>
-          <a:xfrm>
-            <a:off x="819150" y="5124450"/>
-            <a:ext cx="381000" cy="381000"/>
-          </a:xfrm>
-          <a:prstGeom prst="ellipse">
-            <a:avLst/>
-          </a:prstGeom>
-          <a:solidFill>
-            <a:srgbClr val="D71440"/>
           </a:solidFill>
           <a:ln>
             <a:noFill/>
@@ -10481,16 +11515,14 @@
         </p:nvSpPr>
         <p:spPr>
           <a:xfrm>
-            <a:off x="1466850" y="1619250"/>
-            <a:ext cx="6667500" cy="1238250"/>
-          </a:xfrm>
-          <a:prstGeom prst="roundRect">
-            <a:avLst>
-              <a:gd name="adj" fmla="val 9231"/>
-            </a:avLst>
-          </a:prstGeom>
-          <a:solidFill>
-            <a:srgbClr val="FCE9EE"/>
+            <a:off x="514350" y="1428750"/>
+            <a:ext cx="95250" cy="2057400"/>
+          </a:xfrm>
+          <a:prstGeom prst="rect">
+            <a:avLst/>
+          </a:prstGeom>
+          <a:solidFill>
+            <a:srgbClr val="D71440"/>
           </a:solidFill>
           <a:ln>
             <a:noFill/>
@@ -10505,80 +11537,30 @@
         </p:nvSpPr>
         <p:spPr>
           <a:xfrm>
-            <a:off x="1466850" y="3162300"/>
-            <a:ext cx="6667500" cy="1238250"/>
-          </a:xfrm>
-          <a:prstGeom prst="roundRect">
-            <a:avLst>
-              <a:gd name="adj" fmla="val 9231"/>
-            </a:avLst>
-          </a:prstGeom>
-          <a:solidFill>
-            <a:srgbClr val="EEF1FA"/>
-          </a:solidFill>
-          <a:ln>
-            <a:noFill/>
-          </a:ln>
-        </p:spPr>
-      </p:sp>
-      <p:sp>
-        <p:nvSpPr>
-          <p:cNvPr id="13" name="Rectangle 13"/>
-          <p:cNvSpPr/>
-          <p:nvPr/>
-        </p:nvSpPr>
-        <p:spPr>
-          <a:xfrm>
-            <a:off x="1466850" y="4695825"/>
-            <a:ext cx="6667500" cy="1238250"/>
-          </a:xfrm>
-          <a:prstGeom prst="roundRect">
-            <a:avLst>
-              <a:gd name="adj" fmla="val 9231"/>
-            </a:avLst>
-          </a:prstGeom>
-          <a:solidFill>
-            <a:srgbClr val="FCE9EE"/>
-          </a:solidFill>
-          <a:ln>
-            <a:noFill/>
-          </a:ln>
-        </p:spPr>
-      </p:sp>
-      <p:sp>
-        <p:nvSpPr>
-          <p:cNvPr id="14" name="Rectangle 14"/>
-          <p:cNvSpPr/>
-          <p:nvPr/>
-        </p:nvSpPr>
-        <p:spPr>
-          <a:xfrm>
-            <a:off x="8420100" y="1619250"/>
-            <a:ext cx="3200400" cy="4314825"/>
-          </a:xfrm>
-          <a:prstGeom prst="roundRect">
-            <a:avLst>
-              <a:gd name="adj" fmla="val 3571"/>
-            </a:avLst>
-          </a:prstGeom>
-          <a:solidFill>
-            <a:srgbClr val="181C62"/>
-          </a:solidFill>
-          <a:ln>
-            <a:noFill/>
-          </a:ln>
-        </p:spPr>
-      </p:sp>
-      <p:sp>
-        <p:nvSpPr>
-          <p:cNvPr id="15" name="TextBox 15"/>
+            <a:off x="6048375" y="3714750"/>
+            <a:ext cx="95250" cy="2362200"/>
+          </a:xfrm>
+          <a:prstGeom prst="rect">
+            <a:avLst/>
+          </a:prstGeom>
+          <a:solidFill>
+            <a:srgbClr val="D71440"/>
+          </a:solidFill>
+          <a:ln>
+            <a:noFill/>
+          </a:ln>
+        </p:spPr>
+      </p:sp>
+      <p:sp>
+        <p:nvSpPr>
+          <p:cNvPr id="13" name="TextBox 13"/>
           <p:cNvSpPr txBox="1"/>
           <p:nvPr/>
         </p:nvSpPr>
         <p:spPr>
           <a:xfrm>
-            <a:off x="950315" y="2159318"/>
-            <a:ext cx="118669" cy="264033"/>
+            <a:off x="794766" y="1639252"/>
+            <a:ext cx="1131928" cy="205359"/>
           </a:xfrm>
           <a:prstGeom prst="rect">
             <a:avLst/>
@@ -10594,39 +11576,39 @@
           </a:bodyPr>
           <a:lstStyle/>
           <a:p>
-            <a:pPr algn="ctr"/>
-            <a:r>
-              <a:rPr lang="en-US" sz="1350" b="1" dirty="0">
-                <a:solidFill>
-                  <a:srgbClr val="FFFFFF"/>
-                </a:solidFill>
-                <a:latin typeface="Arial" panose="020B0604020202090204"/>
-                <a:ea typeface="Arial" panose="020B0604020202090204"/>
-                <a:cs typeface="Arial" panose="020B0604020202090204"/>
-              </a:rPr>
-              <a:t>1</a:t>
-            </a:r>
-            <a:endParaRPr lang="en-US" sz="1350" b="1" dirty="0">
-              <a:solidFill>
-                <a:srgbClr val="FFFFFF"/>
-              </a:solidFill>
-              <a:latin typeface="Arial" panose="020B0604020202090204"/>
-              <a:ea typeface="Arial" panose="020B0604020202090204"/>
-              <a:cs typeface="Arial" panose="020B0604020202090204"/>
-            </a:endParaRPr>
-          </a:p>
-        </p:txBody>
-      </p:sp>
-      <p:sp>
-        <p:nvSpPr>
-          <p:cNvPr id="16" name="TextBox 16"/>
+            <a:pPr algn="l"/>
+            <a:r>
+              <a:rPr lang="en-US" sz="1050" b="1" dirty="0">
+                <a:solidFill>
+                  <a:srgbClr val="D71440"/>
+                </a:solidFill>
+                <a:latin typeface="Arial" panose="020B0604020202090204"/>
+                <a:ea typeface="Arial" panose="020B0604020202090204"/>
+                <a:cs typeface="Arial" panose="020B0604020202090204"/>
+              </a:rPr>
+              <a:t>RISK / BLOCKER</a:t>
+            </a:r>
+            <a:endParaRPr lang="en-US" sz="1050" b="1" dirty="0">
+              <a:solidFill>
+                <a:srgbClr val="D71440"/>
+              </a:solidFill>
+              <a:latin typeface="Arial" panose="020B0604020202090204"/>
+              <a:ea typeface="Arial" panose="020B0604020202090204"/>
+              <a:cs typeface="Arial" panose="020B0604020202090204"/>
+            </a:endParaRPr>
+          </a:p>
+        </p:txBody>
+      </p:sp>
+      <p:sp>
+        <p:nvSpPr>
+          <p:cNvPr id="14" name="TextBox 14"/>
           <p:cNvSpPr txBox="1"/>
           <p:nvPr/>
         </p:nvSpPr>
         <p:spPr>
           <a:xfrm>
-            <a:off x="950315" y="3702368"/>
-            <a:ext cx="118669" cy="264033"/>
+            <a:off x="6328791" y="1639252"/>
+            <a:ext cx="3092173" cy="205359"/>
           </a:xfrm>
           <a:prstGeom prst="rect">
             <a:avLst/>
@@ -10642,39 +11624,39 @@
           </a:bodyPr>
           <a:lstStyle/>
           <a:p>
-            <a:pPr algn="ctr"/>
-            <a:r>
-              <a:rPr lang="en-US" sz="1350" b="1" dirty="0">
-                <a:solidFill>
-                  <a:srgbClr val="FFFFFF"/>
-                </a:solidFill>
-                <a:latin typeface="Arial" panose="020B0604020202090204"/>
-                <a:ea typeface="Arial" panose="020B0604020202090204"/>
-                <a:cs typeface="Arial" panose="020B0604020202090204"/>
-              </a:rPr>
-              <a:t>2</a:t>
-            </a:r>
-            <a:endParaRPr lang="en-US" sz="1350" b="1" dirty="0">
-              <a:solidFill>
-                <a:srgbClr val="FFFFFF"/>
-              </a:solidFill>
-              <a:latin typeface="Arial" panose="020B0604020202090204"/>
-              <a:ea typeface="Arial" panose="020B0604020202090204"/>
-              <a:cs typeface="Arial" panose="020B0604020202090204"/>
-            </a:endParaRPr>
-          </a:p>
-        </p:txBody>
-      </p:sp>
-      <p:sp>
-        <p:nvSpPr>
-          <p:cNvPr id="17" name="TextBox 17"/>
+            <a:pPr algn="l"/>
+            <a:r>
+              <a:rPr lang="en-US" sz="1050" b="1" dirty="0">
+                <a:solidFill>
+                  <a:srgbClr val="D71440"/>
+                </a:solidFill>
+                <a:latin typeface="Arial" panose="020B0604020202090204"/>
+                <a:ea typeface="Arial" panose="020B0604020202090204"/>
+                <a:cs typeface="Arial" panose="020B0604020202090204"/>
+              </a:rPr>
+              <a:t>IMPACT ON SCOPE, EVIDENCE, OR TIMELINE</a:t>
+            </a:r>
+            <a:endParaRPr lang="en-US" sz="1050" b="1" dirty="0">
+              <a:solidFill>
+                <a:srgbClr val="D71440"/>
+              </a:solidFill>
+              <a:latin typeface="Arial" panose="020B0604020202090204"/>
+              <a:ea typeface="Arial" panose="020B0604020202090204"/>
+              <a:cs typeface="Arial" panose="020B0604020202090204"/>
+            </a:endParaRPr>
+          </a:p>
+        </p:txBody>
+      </p:sp>
+      <p:sp>
+        <p:nvSpPr>
+          <p:cNvPr id="15" name="TextBox 15"/>
           <p:cNvSpPr txBox="1"/>
           <p:nvPr/>
         </p:nvSpPr>
         <p:spPr>
           <a:xfrm>
-            <a:off x="950315" y="5235892"/>
-            <a:ext cx="118669" cy="264033"/>
+            <a:off x="794766" y="3925252"/>
+            <a:ext cx="2496259" cy="205359"/>
           </a:xfrm>
           <a:prstGeom prst="rect">
             <a:avLst/>
@@ -10690,39 +11672,39 @@
           </a:bodyPr>
           <a:lstStyle/>
           <a:p>
-            <a:pPr algn="ctr"/>
-            <a:r>
-              <a:rPr lang="en-US" sz="1350" b="1" dirty="0">
-                <a:solidFill>
-                  <a:srgbClr val="FFFFFF"/>
-                </a:solidFill>
-                <a:latin typeface="Arial" panose="020B0604020202090204"/>
-                <a:ea typeface="Arial" panose="020B0604020202090204"/>
-                <a:cs typeface="Arial" panose="020B0604020202090204"/>
-              </a:rPr>
-              <a:t>3</a:t>
-            </a:r>
-            <a:endParaRPr lang="en-US" sz="1350" b="1" dirty="0">
-              <a:solidFill>
-                <a:srgbClr val="FFFFFF"/>
-              </a:solidFill>
-              <a:latin typeface="Arial" panose="020B0604020202090204"/>
-              <a:ea typeface="Arial" panose="020B0604020202090204"/>
-              <a:cs typeface="Arial" panose="020B0604020202090204"/>
-            </a:endParaRPr>
-          </a:p>
-        </p:txBody>
-      </p:sp>
-      <p:sp>
-        <p:nvSpPr>
-          <p:cNvPr id="18" name="TextBox 18"/>
+            <a:pPr algn="l"/>
+            <a:r>
+              <a:rPr lang="en-US" sz="1050" b="1" dirty="0">
+                <a:solidFill>
+                  <a:srgbClr val="181C62"/>
+                </a:solidFill>
+                <a:latin typeface="Arial" panose="020B0604020202090204"/>
+                <a:ea typeface="Arial" panose="020B0604020202090204"/>
+                <a:cs typeface="Arial" panose="020B0604020202090204"/>
+              </a:rPr>
+              <a:t>MITIGATION / OWNER / CHECK DATE</a:t>
+            </a:r>
+            <a:endParaRPr lang="en-US" sz="1050" b="1" dirty="0">
+              <a:solidFill>
+                <a:srgbClr val="181C62"/>
+              </a:solidFill>
+              <a:latin typeface="Arial" panose="020B0604020202090204"/>
+              <a:ea typeface="Arial" panose="020B0604020202090204"/>
+              <a:cs typeface="Arial" panose="020B0604020202090204"/>
+            </a:endParaRPr>
+          </a:p>
+        </p:txBody>
+      </p:sp>
+      <p:sp>
+        <p:nvSpPr>
+          <p:cNvPr id="16" name="TextBox 16"/>
           <p:cNvSpPr txBox="1"/>
           <p:nvPr/>
         </p:nvSpPr>
         <p:spPr>
           <a:xfrm>
-            <a:off x="1747647" y="1809274"/>
-            <a:ext cx="1517465" cy="190690"/>
+            <a:off x="6328791" y="3925252"/>
+            <a:ext cx="2151256" cy="205359"/>
           </a:xfrm>
           <a:prstGeom prst="rect">
             <a:avLst/>
@@ -10740,37 +11722,37 @@
           <a:p>
             <a:pPr algn="l"/>
             <a:r>
-              <a:rPr lang="en-US" sz="980" b="1" dirty="0">
-                <a:solidFill>
-                  <a:srgbClr val="D71440"/>
-                </a:solidFill>
-                <a:latin typeface="Arial" panose="020B0604020202090204"/>
-                <a:ea typeface="Arial" panose="020B0604020202090204"/>
-                <a:cs typeface="Arial" panose="020B0604020202090204"/>
-              </a:rPr>
-              <a:t>DELIVERABLE 1 · BUILD</a:t>
-            </a:r>
-            <a:endParaRPr lang="en-US" sz="980" b="1" dirty="0">
-              <a:solidFill>
-                <a:srgbClr val="D71440"/>
-              </a:solidFill>
-              <a:latin typeface="Arial" panose="020B0604020202090204"/>
-              <a:ea typeface="Arial" panose="020B0604020202090204"/>
-              <a:cs typeface="Arial" panose="020B0604020202090204"/>
-            </a:endParaRPr>
-          </a:p>
-        </p:txBody>
-      </p:sp>
-      <p:sp>
-        <p:nvSpPr>
-          <p:cNvPr id="19" name="TextBox 19"/>
+              <a:rPr lang="en-US" sz="1050" b="1" dirty="0">
+                <a:solidFill>
+                  <a:srgbClr val="FFFFFF"/>
+                </a:solidFill>
+                <a:latin typeface="Arial" panose="020B0604020202090204"/>
+                <a:ea typeface="Arial" panose="020B0604020202090204"/>
+                <a:cs typeface="Arial" panose="020B0604020202090204"/>
+              </a:rPr>
+              <a:t>DECISION OR SUPPORT NEEDED</a:t>
+            </a:r>
+            <a:endParaRPr lang="en-US" sz="1050" b="1" dirty="0">
+              <a:solidFill>
+                <a:srgbClr val="FFFFFF"/>
+              </a:solidFill>
+              <a:latin typeface="Arial" panose="020B0604020202090204"/>
+              <a:ea typeface="Arial" panose="020B0604020202090204"/>
+              <a:cs typeface="Arial" panose="020B0604020202090204"/>
+            </a:endParaRPr>
+          </a:p>
+        </p:txBody>
+      </p:sp>
+      <p:sp>
+        <p:nvSpPr>
+          <p:cNvPr id="17" name="TextBox 17"/>
           <p:cNvSpPr txBox="1"/>
           <p:nvPr/>
         </p:nvSpPr>
         <p:spPr>
           <a:xfrm>
-            <a:off x="1747647" y="3352324"/>
-            <a:ext cx="1758967" cy="190690"/>
+            <a:off x="501396" y="543878"/>
+            <a:ext cx="2969122" cy="498729"/>
           </a:xfrm>
           <a:prstGeom prst="rect">
             <a:avLst/>
@@ -10788,37 +11770,37 @@
           <a:p>
             <a:pPr algn="l"/>
             <a:r>
-              <a:rPr lang="en-US" sz="980" b="1" dirty="0">
-                <a:solidFill>
-                  <a:srgbClr val="181C62"/>
-                </a:solidFill>
-                <a:latin typeface="Arial" panose="020B0604020202090204"/>
-                <a:ea typeface="Arial" panose="020B0604020202090204"/>
-                <a:cs typeface="Arial" panose="020B0604020202090204"/>
-              </a:rPr>
-              <a:t>DELIVERABLE 2 · VALIDATE</a:t>
-            </a:r>
-            <a:endParaRPr lang="en-US" sz="980" b="1" dirty="0">
-              <a:solidFill>
-                <a:srgbClr val="181C62"/>
-              </a:solidFill>
-              <a:latin typeface="Arial" panose="020B0604020202090204"/>
-              <a:ea typeface="Arial" panose="020B0604020202090204"/>
-              <a:cs typeface="Arial" panose="020B0604020202090204"/>
-            </a:endParaRPr>
-          </a:p>
-        </p:txBody>
-      </p:sp>
-      <p:sp>
-        <p:nvSpPr>
-          <p:cNvPr id="20" name="TextBox 20"/>
+              <a:rPr lang="en-US" sz="2550" b="1" dirty="0">
+                <a:solidFill>
+                  <a:srgbClr val="20243A"/>
+                </a:solidFill>
+                <a:latin typeface="Arial" panose="020B0604020202090204"/>
+                <a:ea typeface="Arial" panose="020B0604020202090204"/>
+                <a:cs typeface="Arial" panose="020B0604020202090204"/>
+              </a:rPr>
+              <a:t>Risks &amp; Decisions</a:t>
+            </a:r>
+            <a:endParaRPr lang="en-US" sz="2550" b="1" dirty="0">
+              <a:solidFill>
+                <a:srgbClr val="20243A"/>
+              </a:solidFill>
+              <a:latin typeface="Arial" panose="020B0604020202090204"/>
+              <a:ea typeface="Arial" panose="020B0604020202090204"/>
+              <a:cs typeface="Arial" panose="020B0604020202090204"/>
+            </a:endParaRPr>
+          </a:p>
+        </p:txBody>
+      </p:sp>
+      <p:sp>
+        <p:nvSpPr>
+          <p:cNvPr id="18" name="TextBox 18"/>
           <p:cNvSpPr txBox="1"/>
           <p:nvPr/>
         </p:nvSpPr>
         <p:spPr>
           <a:xfrm>
-            <a:off x="1747647" y="4885849"/>
-            <a:ext cx="1854104" cy="190690"/>
+            <a:off x="792099" y="2077879"/>
+            <a:ext cx="3269742" cy="603314"/>
           </a:xfrm>
           <a:prstGeom prst="rect">
             <a:avLst/>
@@ -10834,9 +11816,13 @@
           </a:bodyPr>
           <a:lstStyle/>
           <a:p>
-            <a:pPr algn="l"/>
-            <a:r>
-              <a:rPr lang="en-US" sz="980" b="1" dirty="0">
+            <a:pPr algn="l">
+              <a:lnSpc>
+                <a:spcPts val="2325"/>
+              </a:lnSpc>
+            </a:pPr>
+            <a:r>
+              <a:rPr lang="en-US" sz="1580" b="1" dirty="0">
                 <a:solidFill>
                   <a:srgbClr val="D71440"/>
                 </a:solidFill>
@@ -10844,9 +11830,9 @@
                 <a:ea typeface="Arial" panose="020B0604020202090204"/>
                 <a:cs typeface="Arial" panose="020B0604020202090204"/>
               </a:rPr>
-              <a:t>DELIVERABLE 3 · DOCUMENT</a:t>
-            </a:r>
-            <a:endParaRPr lang="en-US" sz="980" b="1" dirty="0">
+              <a:t>{{RISKS}}</a:t>
+            </a:r>
+            <a:endParaRPr lang="en-US" sz="1580" b="1" dirty="0">
               <a:solidFill>
                 <a:srgbClr val="D71440"/>
               </a:solidFill>
@@ -10855,18 +11841,44 @@
               <a:cs typeface="Arial" panose="020B0604020202090204"/>
             </a:endParaRPr>
           </a:p>
-        </p:txBody>
-      </p:sp>
-      <p:sp>
-        <p:nvSpPr>
-          <p:cNvPr id="21" name="TextBox 21"/>
+          <a:p>
+            <a:pPr algn="l">
+              <a:lnSpc>
+                <a:spcPts val="2325"/>
+              </a:lnSpc>
+            </a:pPr>
+            <a:r>
+              <a:rPr lang="en-US" sz="1050" dirty="0">
+                <a:solidFill>
+                  <a:srgbClr val="5E6478"/>
+                </a:solidFill>
+                <a:latin typeface="Arial" panose="020B0604020202090204"/>
+                <a:ea typeface="Arial" panose="020B0604020202090204"/>
+                <a:cs typeface="Arial" panose="020B0604020202090204"/>
+              </a:rPr>
+              <a:t>Describe the failure mode, trigger, and evidence.</a:t>
+            </a:r>
+            <a:endParaRPr lang="en-US" sz="1050" dirty="0">
+              <a:solidFill>
+                <a:srgbClr val="5E6478"/>
+              </a:solidFill>
+              <a:latin typeface="Arial" panose="020B0604020202090204"/>
+              <a:ea typeface="Arial" panose="020B0604020202090204"/>
+              <a:cs typeface="Arial" panose="020B0604020202090204"/>
+            </a:endParaRPr>
+          </a:p>
+        </p:txBody>
+      </p:sp>
+      <p:sp>
+        <p:nvSpPr>
+          <p:cNvPr id="19" name="TextBox 19"/>
           <p:cNvSpPr txBox="1"/>
           <p:nvPr/>
         </p:nvSpPr>
         <p:spPr>
           <a:xfrm>
-            <a:off x="8700516" y="1896428"/>
-            <a:ext cx="2598191" cy="205359"/>
+            <a:off x="6326124" y="2077879"/>
+            <a:ext cx="3843147" cy="603314"/>
           </a:xfrm>
           <a:prstGeom prst="rect">
             <a:avLst/>
@@ -10882,39 +11894,69 @@
           </a:bodyPr>
           <a:lstStyle/>
           <a:p>
-            <a:pPr algn="l"/>
-            <a:r>
-              <a:rPr lang="en-US" sz="1050" b="1" dirty="0">
-                <a:solidFill>
-                  <a:srgbClr val="FFFFFF"/>
-                </a:solidFill>
-                <a:latin typeface="Arial" panose="020B0604020202090204"/>
-                <a:ea typeface="Arial" panose="020B0604020202090204"/>
-                <a:cs typeface="Arial" panose="020B0604020202090204"/>
-              </a:rPr>
-              <a:t>OWNER · DUE DATE · SUCCESS CHECK</a:t>
-            </a:r>
-            <a:endParaRPr lang="en-US" sz="1050" b="1" dirty="0">
-              <a:solidFill>
-                <a:srgbClr val="FFFFFF"/>
-              </a:solidFill>
-              <a:latin typeface="Arial" panose="020B0604020202090204"/>
-              <a:ea typeface="Arial" panose="020B0604020202090204"/>
-              <a:cs typeface="Arial" panose="020B0604020202090204"/>
-            </a:endParaRPr>
-          </a:p>
-        </p:txBody>
-      </p:sp>
-      <p:sp>
-        <p:nvSpPr>
-          <p:cNvPr id="22" name="TextBox 22"/>
+            <a:pPr algn="l">
+              <a:lnSpc>
+                <a:spcPts val="2325"/>
+              </a:lnSpc>
+            </a:pPr>
+            <a:r>
+              <a:rPr lang="en-US" sz="1580" dirty="0">
+                <a:solidFill>
+                  <a:srgbClr val="20243A"/>
+                </a:solidFill>
+                <a:latin typeface="Arial" panose="020B0604020202090204"/>
+                <a:ea typeface="Arial" panose="020B0604020202090204"/>
+                <a:cs typeface="Arial" panose="020B0604020202090204"/>
+              </a:rPr>
+              <a:t>{{IMPACT}}</a:t>
+            </a:r>
+            <a:endParaRPr lang="en-US" sz="1580" dirty="0">
+              <a:solidFill>
+                <a:srgbClr val="20243A"/>
+              </a:solidFill>
+              <a:latin typeface="Arial" panose="020B0604020202090204"/>
+              <a:ea typeface="Arial" panose="020B0604020202090204"/>
+              <a:cs typeface="Arial" panose="020B0604020202090204"/>
+            </a:endParaRPr>
+          </a:p>
+          <a:p>
+            <a:pPr algn="l">
+              <a:lnSpc>
+                <a:spcPts val="2325"/>
+              </a:lnSpc>
+            </a:pPr>
+            <a:r>
+              <a:rPr lang="en-US" sz="1050" dirty="0">
+                <a:solidFill>
+                  <a:srgbClr val="5E6478"/>
+                </a:solidFill>
+                <a:latin typeface="Arial" panose="020B0604020202090204"/>
+                <a:ea typeface="Arial" panose="020B0604020202090204"/>
+                <a:cs typeface="Arial" panose="020B0604020202090204"/>
+              </a:rPr>
+              <a:t>Quantify delay, compute cost, metric risk, or lost scope.</a:t>
+            </a:r>
+            <a:endParaRPr lang="en-US" sz="1050" dirty="0">
+              <a:solidFill>
+                <a:srgbClr val="5E6478"/>
+              </a:solidFill>
+              <a:latin typeface="Arial" panose="020B0604020202090204"/>
+              <a:ea typeface="Arial" panose="020B0604020202090204"/>
+              <a:cs typeface="Arial" panose="020B0604020202090204"/>
+            </a:endParaRPr>
+          </a:p>
+        </p:txBody>
+      </p:sp>
+      <p:sp>
+        <p:nvSpPr>
+          <p:cNvPr id="20" name="TextBox 20"/>
           <p:cNvSpPr txBox="1"/>
           <p:nvPr/>
         </p:nvSpPr>
         <p:spPr>
           <a:xfrm>
-            <a:off x="501396" y="543878"/>
-            <a:ext cx="4335356" cy="498729"/>
+            <a:off x="792099" y="4363879"/>
+            <a:ext cx="2456307" cy="603314"/>
           </a:xfrm>
           <a:prstGeom prst="rect">
             <a:avLst/>
@@ -10930,39 +11972,69 @@
           </a:bodyPr>
           <a:lstStyle/>
           <a:p>
-            <a:pPr algn="l"/>
-            <a:r>
-              <a:rPr lang="en-US" sz="2550" b="1" dirty="0">
-                <a:solidFill>
-                  <a:srgbClr val="20243A"/>
-                </a:solidFill>
-                <a:latin typeface="Arial" panose="020B0604020202090204"/>
-                <a:ea typeface="Arial" panose="020B0604020202090204"/>
-                <a:cs typeface="Arial" panose="020B0604020202090204"/>
-              </a:rPr>
-              <a:t>Next-Week Commitments</a:t>
-            </a:r>
-            <a:endParaRPr lang="en-US" sz="2550" b="1" dirty="0">
-              <a:solidFill>
-                <a:srgbClr val="20243A"/>
-              </a:solidFill>
-              <a:latin typeface="Arial" panose="020B0604020202090204"/>
-              <a:ea typeface="Arial" panose="020B0604020202090204"/>
-              <a:cs typeface="Arial" panose="020B0604020202090204"/>
-            </a:endParaRPr>
-          </a:p>
-        </p:txBody>
-      </p:sp>
-      <p:sp>
-        <p:nvSpPr>
-          <p:cNvPr id="23" name="TextBox 23"/>
+            <a:pPr algn="l">
+              <a:lnSpc>
+                <a:spcPts val="2325"/>
+              </a:lnSpc>
+            </a:pPr>
+            <a:r>
+              <a:rPr lang="en-US" sz="1580" dirty="0">
+                <a:solidFill>
+                  <a:srgbClr val="181C62"/>
+                </a:solidFill>
+                <a:latin typeface="Arial" panose="020B0604020202090204"/>
+                <a:ea typeface="Arial" panose="020B0604020202090204"/>
+                <a:cs typeface="Arial" panose="020B0604020202090204"/>
+              </a:rPr>
+              <a:t>{{MITIGATION}}</a:t>
+            </a:r>
+            <a:endParaRPr lang="en-US" sz="1580" dirty="0">
+              <a:solidFill>
+                <a:srgbClr val="181C62"/>
+              </a:solidFill>
+              <a:latin typeface="Arial" panose="020B0604020202090204"/>
+              <a:ea typeface="Arial" panose="020B0604020202090204"/>
+              <a:cs typeface="Arial" panose="020B0604020202090204"/>
+            </a:endParaRPr>
+          </a:p>
+          <a:p>
+            <a:pPr algn="l">
+              <a:lnSpc>
+                <a:spcPts val="2325"/>
+              </a:lnSpc>
+            </a:pPr>
+            <a:r>
+              <a:rPr lang="en-US" sz="1050" dirty="0">
+                <a:solidFill>
+                  <a:srgbClr val="5E6478"/>
+                </a:solidFill>
+                <a:latin typeface="Arial" panose="020B0604020202090204"/>
+                <a:ea typeface="Arial" panose="020B0604020202090204"/>
+                <a:cs typeface="Arial" panose="020B0604020202090204"/>
+              </a:rPr>
+              <a:t>Owner: … | Check date: … | Fallback: …</a:t>
+            </a:r>
+            <a:endParaRPr lang="en-US" sz="1050" dirty="0">
+              <a:solidFill>
+                <a:srgbClr val="5E6478"/>
+              </a:solidFill>
+              <a:latin typeface="Arial" panose="020B0604020202090204"/>
+              <a:ea typeface="Arial" panose="020B0604020202090204"/>
+              <a:cs typeface="Arial" panose="020B0604020202090204"/>
+            </a:endParaRPr>
+          </a:p>
+        </p:txBody>
+      </p:sp>
+      <p:sp>
+        <p:nvSpPr>
+          <p:cNvPr id="21" name="TextBox 21"/>
           <p:cNvSpPr txBox="1"/>
           <p:nvPr/>
         </p:nvSpPr>
         <p:spPr>
           <a:xfrm>
-            <a:off x="1744599" y="2173129"/>
-            <a:ext cx="2916365" cy="546164"/>
+            <a:off x="6326124" y="4363879"/>
+            <a:ext cx="3423095" cy="603314"/>
           </a:xfrm>
           <a:prstGeom prst="rect">
             <a:avLst/>
@@ -10980,23 +12052,23 @@
           <a:p>
             <a:pPr algn="l">
               <a:lnSpc>
-                <a:spcPts val="1875"/>
+                <a:spcPts val="2325"/>
               </a:lnSpc>
             </a:pPr>
             <a:r>
               <a:rPr lang="en-US" sz="1580" b="1" dirty="0">
                 <a:solidFill>
-                  <a:srgbClr val="20243A"/>
-                </a:solidFill>
-                <a:latin typeface="Arial" panose="020B0604020202090204"/>
-                <a:ea typeface="Arial" panose="020B0604020202090204"/>
-                <a:cs typeface="Arial" panose="020B0604020202090204"/>
-              </a:rPr>
-              <a:t>{{NEXT_ACTION_1}}</a:t>
+                  <a:srgbClr val="FFFFFF"/>
+                </a:solidFill>
+                <a:latin typeface="Arial" panose="020B0604020202090204"/>
+                <a:ea typeface="Arial" panose="020B0604020202090204"/>
+                <a:cs typeface="Arial" panose="020B0604020202090204"/>
+              </a:rPr>
+              <a:t>{{DECISION_NEEDED}}</a:t>
             </a:r>
             <a:endParaRPr lang="en-US" sz="1580" b="1" dirty="0">
               <a:solidFill>
-                <a:srgbClr val="20243A"/>
+                <a:srgbClr val="FFFFFF"/>
               </a:solidFill>
               <a:latin typeface="Arial" panose="020B0604020202090204"/>
               <a:ea typeface="Arial" panose="020B0604020202090204"/>
@@ -11006,322 +12078,22 @@
           <a:p>
             <a:pPr algn="l">
               <a:lnSpc>
-                <a:spcPts val="1875"/>
+                <a:spcPts val="2325"/>
               </a:lnSpc>
             </a:pPr>
             <a:r>
               <a:rPr lang="en-US" sz="1050" dirty="0">
                 <a:solidFill>
-                  <a:srgbClr val="5E6478"/>
-                </a:solidFill>
-                <a:latin typeface="Arial" panose="020B0604020202090204"/>
-                <a:ea typeface="Arial" panose="020B0604020202090204"/>
-                <a:cs typeface="Arial" panose="020B0604020202090204"/>
-              </a:rPr>
-              <a:t>Output: code, dataset, or runnable module.</a:t>
+                  <a:srgbClr val="C8C8C8"/>
+                </a:solidFill>
+                <a:latin typeface="Arial" panose="020B0604020202090204"/>
+                <a:ea typeface="Arial" panose="020B0604020202090204"/>
+                <a:cs typeface="Arial" panose="020B0604020202090204"/>
+              </a:rPr>
+              <a:t>State the choice, approver, and latest useful date.</a:t>
             </a:r>
             <a:endParaRPr lang="en-US" sz="1050" dirty="0">
               <a:solidFill>
-                <a:srgbClr val="5E6478"/>
-              </a:solidFill>
-              <a:latin typeface="Arial" panose="020B0604020202090204"/>
-              <a:ea typeface="Arial" panose="020B0604020202090204"/>
-              <a:cs typeface="Arial" panose="020B0604020202090204"/>
-            </a:endParaRPr>
-          </a:p>
-        </p:txBody>
-      </p:sp>
-      <p:sp>
-        <p:nvSpPr>
-          <p:cNvPr id="24" name="TextBox 24"/>
-          <p:cNvSpPr txBox="1"/>
-          <p:nvPr/>
-        </p:nvSpPr>
-        <p:spPr>
-          <a:xfrm>
-            <a:off x="1744599" y="3716179"/>
-            <a:ext cx="3336417" cy="546164"/>
-          </a:xfrm>
-          <a:prstGeom prst="rect">
-            <a:avLst/>
-          </a:prstGeom>
-          <a:noFill/>
-          <a:ln>
-            <a:noFill/>
-          </a:ln>
-        </p:spPr>
-        <p:txBody>
-          <a:bodyPr wrap="none" lIns="0" tIns="0" rIns="0" bIns="0" anchor="t" anchorCtr="0">
-            <a:spAutoFit/>
-          </a:bodyPr>
-          <a:lstStyle/>
-          <a:p>
-            <a:pPr algn="l">
-              <a:lnSpc>
-                <a:spcPts val="1875"/>
-              </a:lnSpc>
-            </a:pPr>
-            <a:r>
-              <a:rPr lang="en-US" sz="1580" b="1" dirty="0">
-                <a:solidFill>
-                  <a:srgbClr val="20243A"/>
-                </a:solidFill>
-                <a:latin typeface="Arial" panose="020B0604020202090204"/>
-                <a:ea typeface="Arial" panose="020B0604020202090204"/>
-                <a:cs typeface="Arial" panose="020B0604020202090204"/>
-              </a:rPr>
-              <a:t>{{NEXT_ACTION_2}}</a:t>
-            </a:r>
-            <a:endParaRPr lang="en-US" sz="1580" b="1" dirty="0">
-              <a:solidFill>
-                <a:srgbClr val="20243A"/>
-              </a:solidFill>
-              <a:latin typeface="Arial" panose="020B0604020202090204"/>
-              <a:ea typeface="Arial" panose="020B0604020202090204"/>
-              <a:cs typeface="Arial" panose="020B0604020202090204"/>
-            </a:endParaRPr>
-          </a:p>
-          <a:p>
-            <a:pPr algn="l">
-              <a:lnSpc>
-                <a:spcPts val="1875"/>
-              </a:lnSpc>
-            </a:pPr>
-            <a:r>
-              <a:rPr lang="en-US" sz="1050" dirty="0">
-                <a:solidFill>
-                  <a:srgbClr val="5E6478"/>
-                </a:solidFill>
-                <a:latin typeface="Arial" panose="020B0604020202090204"/>
-                <a:ea typeface="Arial" panose="020B0604020202090204"/>
-                <a:cs typeface="Arial" panose="020B0604020202090204"/>
-              </a:rPr>
-              <a:t>Output: metric table, control, or ablation result.</a:t>
-            </a:r>
-            <a:endParaRPr lang="en-US" sz="1050" dirty="0">
-              <a:solidFill>
-                <a:srgbClr val="5E6478"/>
-              </a:solidFill>
-              <a:latin typeface="Arial" panose="020B0604020202090204"/>
-              <a:ea typeface="Arial" panose="020B0604020202090204"/>
-              <a:cs typeface="Arial" panose="020B0604020202090204"/>
-            </a:endParaRPr>
-          </a:p>
-        </p:txBody>
-      </p:sp>
-      <p:sp>
-        <p:nvSpPr>
-          <p:cNvPr id="25" name="TextBox 25"/>
-          <p:cNvSpPr txBox="1"/>
-          <p:nvPr/>
-        </p:nvSpPr>
-        <p:spPr>
-          <a:xfrm>
-            <a:off x="1744599" y="5249704"/>
-            <a:ext cx="3369755" cy="546164"/>
-          </a:xfrm>
-          <a:prstGeom prst="rect">
-            <a:avLst/>
-          </a:prstGeom>
-          <a:noFill/>
-          <a:ln>
-            <a:noFill/>
-          </a:ln>
-        </p:spPr>
-        <p:txBody>
-          <a:bodyPr wrap="none" lIns="0" tIns="0" rIns="0" bIns="0" anchor="t" anchorCtr="0">
-            <a:spAutoFit/>
-          </a:bodyPr>
-          <a:lstStyle/>
-          <a:p>
-            <a:pPr algn="l">
-              <a:lnSpc>
-                <a:spcPts val="1875"/>
-              </a:lnSpc>
-            </a:pPr>
-            <a:r>
-              <a:rPr lang="en-US" sz="1580" b="1" dirty="0">
-                <a:solidFill>
-                  <a:srgbClr val="20243A"/>
-                </a:solidFill>
-                <a:latin typeface="Arial" panose="020B0604020202090204"/>
-                <a:ea typeface="Arial" panose="020B0604020202090204"/>
-                <a:cs typeface="Arial" panose="020B0604020202090204"/>
-              </a:rPr>
-              <a:t>{{NEXT_ACTION_3}}</a:t>
-            </a:r>
-            <a:endParaRPr lang="en-US" sz="1580" b="1" dirty="0">
-              <a:solidFill>
-                <a:srgbClr val="20243A"/>
-              </a:solidFill>
-              <a:latin typeface="Arial" panose="020B0604020202090204"/>
-              <a:ea typeface="Arial" panose="020B0604020202090204"/>
-              <a:cs typeface="Arial" panose="020B0604020202090204"/>
-            </a:endParaRPr>
-          </a:p>
-          <a:p>
-            <a:pPr algn="l">
-              <a:lnSpc>
-                <a:spcPts val="1875"/>
-              </a:lnSpc>
-            </a:pPr>
-            <a:r>
-              <a:rPr lang="en-US" sz="1050" dirty="0">
-                <a:solidFill>
-                  <a:srgbClr val="5E6478"/>
-                </a:solidFill>
-                <a:latin typeface="Arial" panose="020B0604020202090204"/>
-                <a:ea typeface="Arial" panose="020B0604020202090204"/>
-                <a:cs typeface="Arial" panose="020B0604020202090204"/>
-              </a:rPr>
-              <a:t>Output: updated figure, notes, or report section.</a:t>
-            </a:r>
-            <a:endParaRPr lang="en-US" sz="1050" dirty="0">
-              <a:solidFill>
-                <a:srgbClr val="5E6478"/>
-              </a:solidFill>
-              <a:latin typeface="Arial" panose="020B0604020202090204"/>
-              <a:ea typeface="Arial" panose="020B0604020202090204"/>
-              <a:cs typeface="Arial" panose="020B0604020202090204"/>
-            </a:endParaRPr>
-          </a:p>
-        </p:txBody>
-      </p:sp>
-      <p:sp>
-        <p:nvSpPr>
-          <p:cNvPr id="26" name="TextBox 26"/>
-          <p:cNvSpPr txBox="1"/>
-          <p:nvPr/>
-        </p:nvSpPr>
-        <p:spPr>
-          <a:xfrm>
-            <a:off x="8697849" y="2382679"/>
-            <a:ext cx="2474087" cy="1441514"/>
-          </a:xfrm>
-          <a:prstGeom prst="rect">
-            <a:avLst/>
-          </a:prstGeom>
-          <a:noFill/>
-          <a:ln>
-            <a:noFill/>
-          </a:ln>
-        </p:spPr>
-        <p:txBody>
-          <a:bodyPr wrap="none" lIns="0" tIns="0" rIns="0" bIns="0" anchor="t" anchorCtr="0">
-            <a:spAutoFit/>
-          </a:bodyPr>
-          <a:lstStyle/>
-          <a:p>
-            <a:pPr algn="l">
-              <a:lnSpc>
-                <a:spcPts val="2025"/>
-              </a:lnSpc>
-            </a:pPr>
-            <a:r>
-              <a:rPr lang="en-US" sz="1580" dirty="0">
-                <a:solidFill>
-                  <a:srgbClr val="FFFFFF"/>
-                </a:solidFill>
-                <a:latin typeface="Arial" panose="020B0604020202090204"/>
-                <a:ea typeface="Arial" panose="020B0604020202090204"/>
-                <a:cs typeface="Arial" panose="020B0604020202090204"/>
-              </a:rPr>
-              <a:t>{{OWNER_AND_DEADLINE}}</a:t>
-            </a:r>
-            <a:endParaRPr lang="en-US" sz="1580" dirty="0">
-              <a:solidFill>
-                <a:srgbClr val="FFFFFF"/>
-              </a:solidFill>
-              <a:latin typeface="Arial" panose="020B0604020202090204"/>
-              <a:ea typeface="Arial" panose="020B0604020202090204"/>
-              <a:cs typeface="Arial" panose="020B0604020202090204"/>
-            </a:endParaRPr>
-          </a:p>
-          <a:p>
-            <a:pPr algn="l">
-              <a:lnSpc>
-                <a:spcPts val="2025"/>
-              </a:lnSpc>
-              <a:spcBef>
-                <a:spcPts val="825"/>
-              </a:spcBef>
-            </a:pPr>
-            <a:r>
-              <a:rPr lang="en-US" sz="1050" dirty="0">
-                <a:solidFill>
-                  <a:srgbClr val="C8C8C8"/>
-                </a:solidFill>
-                <a:latin typeface="Arial" panose="020B0604020202090204"/>
-                <a:ea typeface="Arial" panose="020B0604020202090204"/>
-                <a:cs typeface="Arial" panose="020B0604020202090204"/>
-              </a:rPr>
-              <a:t>Owner: …</a:t>
-            </a:r>
-            <a:br>
-              <a:rPr lang="en-US" sz="1050" dirty="0">
-                <a:solidFill>
-                  <a:srgbClr val="C8C8C8"/>
-                </a:solidFill>
-                <a:latin typeface="Arial" panose="020B0604020202090204"/>
-                <a:ea typeface="Arial" panose="020B0604020202090204"/>
-                <a:cs typeface="Arial" panose="020B0604020202090204"/>
-              </a:rPr>
-            </a:br>
-            <a:r>
-              <a:rPr lang="en-US" sz="1050" dirty="0">
-                <a:solidFill>
-                  <a:srgbClr val="C8C8C8"/>
-                </a:solidFill>
-                <a:latin typeface="Arial" panose="020B0604020202090204"/>
-                <a:ea typeface="Arial" panose="020B0604020202090204"/>
-                <a:cs typeface="Arial" panose="020B0604020202090204"/>
-              </a:rPr>
-              <a:t>Due: …</a:t>
-            </a:r>
-            <a:br>
-              <a:rPr lang="en-US" sz="1050" dirty="0">
-                <a:solidFill>
-                  <a:srgbClr val="C8C8C8"/>
-                </a:solidFill>
-                <a:latin typeface="Arial" panose="020B0604020202090204"/>
-                <a:ea typeface="Arial" panose="020B0604020202090204"/>
-                <a:cs typeface="Arial" panose="020B0604020202090204"/>
-              </a:rPr>
-            </a:br>
-            <a:r>
-              <a:rPr lang="en-US" sz="1050" dirty="0">
-                <a:solidFill>
-                  <a:srgbClr val="C8C8C8"/>
-                </a:solidFill>
-                <a:latin typeface="Arial" panose="020B0604020202090204"/>
-                <a:ea typeface="Arial" panose="020B0604020202090204"/>
-                <a:cs typeface="Arial" panose="020B0604020202090204"/>
-              </a:rPr>
-              <a:t>Success check: observable output</a:t>
-            </a:r>
-            <a:br>
-              <a:rPr lang="en-US" sz="1050" dirty="0">
-                <a:solidFill>
-                  <a:srgbClr val="C8C8C8"/>
-                </a:solidFill>
-                <a:latin typeface="Arial" panose="020B0604020202090204"/>
-                <a:ea typeface="Arial" panose="020B0604020202090204"/>
-                <a:cs typeface="Arial" panose="020B0604020202090204"/>
-              </a:rPr>
-            </a:br>
-            <a:r>
-              <a:rPr lang="en-US" sz="1050" dirty="0">
-                <a:solidFill>
-                  <a:srgbClr val="C8C8C8"/>
-                </a:solidFill>
-                <a:latin typeface="Arial" panose="020B0604020202090204"/>
-                <a:ea typeface="Arial" panose="020B0604020202090204"/>
-                <a:cs typeface="Arial" panose="020B0604020202090204"/>
-              </a:rPr>
-              <a:t>or agreed metric threshold.</a:t>
-            </a:r>
-            <a:endParaRPr lang="en-US" sz="1050" dirty="0">
-              <a:solidFill>
                 <a:srgbClr val="C8C8C8"/>
               </a:solidFill>
               <a:latin typeface="Arial" panose="020B0604020202090204"/>
@@ -11333,7 +12105,7 @@
       </p:sp>
       <p:sp>
         <p:nvSpPr>
-          <p:cNvPr id="27" name="TextBox 27"/>
+          <p:cNvPr id="22" name="TextBox 22"/>
           <p:cNvSpPr txBox="1"/>
           <p:nvPr/>
         </p:nvSpPr>
@@ -11552,24 +12324,34 @@
       </p:sp>
       <p:sp>
         <p:nvSpPr>
-          <p:cNvPr id="7" name="Rectangle 7"/>
+          <p:cNvPr id="7" name="Line 7"/>
           <p:cNvSpPr/>
           <p:nvPr/>
         </p:nvSpPr>
         <p:spPr>
           <a:xfrm>
-            <a:off x="514350" y="1304925"/>
-            <a:ext cx="11106150" cy="4772025"/>
-          </a:xfrm>
-          <a:prstGeom prst="roundRect">
-            <a:avLst>
-              <a:gd name="adj" fmla="val 1996"/>
-            </a:avLst>
-          </a:prstGeom>
-          <a:solidFill>
-            <a:srgbClr val="FFFFFF"/>
-          </a:solidFill>
-          <a:ln w="19050">
+            <a:off x="1009650" y="2238375"/>
+            <a:ext cx="9525" cy="3076575"/>
+          </a:xfrm>
+          <a:custGeom>
+            <a:avLst/>
+            <a:gdLst/>
+            <a:ahLst/>
+            <a:cxnLst/>
+            <a:rect l="l" t="t" r="r" b="b"/>
+            <a:pathLst>
+              <a:path w="9525" h="3076575">
+                <a:moveTo>
+                  <a:pt x="0" y="0"/>
+                </a:moveTo>
+                <a:lnTo>
+                  <a:pt x="0" y="3076575"/>
+                </a:lnTo>
+              </a:path>
+            </a:pathLst>
+          </a:custGeom>
+          <a:noFill/>
+          <a:ln w="47625">
             <a:solidFill>
               <a:srgbClr val="C8C8C8"/>
             </a:solidFill>
@@ -11578,14 +12360,176 @@
       </p:sp>
       <p:sp>
         <p:nvSpPr>
-          <p:cNvPr id="8" name="TextBox 8"/>
+          <p:cNvPr id="8" name="Ellipse 8"/>
+          <p:cNvSpPr/>
+          <p:nvPr/>
+        </p:nvSpPr>
+        <p:spPr>
+          <a:xfrm>
+            <a:off x="819150" y="2047875"/>
+            <a:ext cx="381000" cy="381000"/>
+          </a:xfrm>
+          <a:prstGeom prst="ellipse">
+            <a:avLst/>
+          </a:prstGeom>
+          <a:solidFill>
+            <a:srgbClr val="D71440"/>
+          </a:solidFill>
+          <a:ln>
+            <a:noFill/>
+          </a:ln>
+        </p:spPr>
+      </p:sp>
+      <p:sp>
+        <p:nvSpPr>
+          <p:cNvPr id="9" name="Ellipse 9"/>
+          <p:cNvSpPr/>
+          <p:nvPr/>
+        </p:nvSpPr>
+        <p:spPr>
+          <a:xfrm>
+            <a:off x="819150" y="3590925"/>
+            <a:ext cx="381000" cy="381000"/>
+          </a:xfrm>
+          <a:prstGeom prst="ellipse">
+            <a:avLst/>
+          </a:prstGeom>
+          <a:solidFill>
+            <a:srgbClr val="181C62"/>
+          </a:solidFill>
+          <a:ln>
+            <a:noFill/>
+          </a:ln>
+        </p:spPr>
+      </p:sp>
+      <p:sp>
+        <p:nvSpPr>
+          <p:cNvPr id="10" name="Ellipse 10"/>
+          <p:cNvSpPr/>
+          <p:nvPr/>
+        </p:nvSpPr>
+        <p:spPr>
+          <a:xfrm>
+            <a:off x="819150" y="5124450"/>
+            <a:ext cx="381000" cy="381000"/>
+          </a:xfrm>
+          <a:prstGeom prst="ellipse">
+            <a:avLst/>
+          </a:prstGeom>
+          <a:solidFill>
+            <a:srgbClr val="D71440"/>
+          </a:solidFill>
+          <a:ln>
+            <a:noFill/>
+          </a:ln>
+        </p:spPr>
+      </p:sp>
+      <p:sp>
+        <p:nvSpPr>
+          <p:cNvPr id="11" name="Rectangle 11"/>
+          <p:cNvSpPr/>
+          <p:nvPr/>
+        </p:nvSpPr>
+        <p:spPr>
+          <a:xfrm>
+            <a:off x="1466850" y="1619250"/>
+            <a:ext cx="6667500" cy="1238250"/>
+          </a:xfrm>
+          <a:prstGeom prst="roundRect">
+            <a:avLst>
+              <a:gd name="adj" fmla="val 9231"/>
+            </a:avLst>
+          </a:prstGeom>
+          <a:solidFill>
+            <a:srgbClr val="FCE9EE"/>
+          </a:solidFill>
+          <a:ln>
+            <a:noFill/>
+          </a:ln>
+        </p:spPr>
+      </p:sp>
+      <p:sp>
+        <p:nvSpPr>
+          <p:cNvPr id="12" name="Rectangle 12"/>
+          <p:cNvSpPr/>
+          <p:nvPr/>
+        </p:nvSpPr>
+        <p:spPr>
+          <a:xfrm>
+            <a:off x="1466850" y="3162300"/>
+            <a:ext cx="6667500" cy="1238250"/>
+          </a:xfrm>
+          <a:prstGeom prst="roundRect">
+            <a:avLst>
+              <a:gd name="adj" fmla="val 9231"/>
+            </a:avLst>
+          </a:prstGeom>
+          <a:solidFill>
+            <a:srgbClr val="EEF1FA"/>
+          </a:solidFill>
+          <a:ln>
+            <a:noFill/>
+          </a:ln>
+        </p:spPr>
+      </p:sp>
+      <p:sp>
+        <p:nvSpPr>
+          <p:cNvPr id="13" name="Rectangle 13"/>
+          <p:cNvSpPr/>
+          <p:nvPr/>
+        </p:nvSpPr>
+        <p:spPr>
+          <a:xfrm>
+            <a:off x="1466850" y="4695825"/>
+            <a:ext cx="6667500" cy="1238250"/>
+          </a:xfrm>
+          <a:prstGeom prst="roundRect">
+            <a:avLst>
+              <a:gd name="adj" fmla="val 9231"/>
+            </a:avLst>
+          </a:prstGeom>
+          <a:solidFill>
+            <a:srgbClr val="FCE9EE"/>
+          </a:solidFill>
+          <a:ln>
+            <a:noFill/>
+          </a:ln>
+        </p:spPr>
+      </p:sp>
+      <p:sp>
+        <p:nvSpPr>
+          <p:cNvPr id="14" name="Rectangle 14"/>
+          <p:cNvSpPr/>
+          <p:nvPr/>
+        </p:nvSpPr>
+        <p:spPr>
+          <a:xfrm>
+            <a:off x="8420100" y="1619250"/>
+            <a:ext cx="3200400" cy="4314825"/>
+          </a:xfrm>
+          <a:prstGeom prst="roundRect">
+            <a:avLst>
+              <a:gd name="adj" fmla="val 3571"/>
+            </a:avLst>
+          </a:prstGeom>
+          <a:solidFill>
+            <a:srgbClr val="181C62"/>
+          </a:solidFill>
+          <a:ln>
+            <a:noFill/>
+          </a:ln>
+        </p:spPr>
+      </p:sp>
+      <p:sp>
+        <p:nvSpPr>
+          <p:cNvPr id="15" name="TextBox 15"/>
           <p:cNvSpPr txBox="1"/>
           <p:nvPr/>
         </p:nvSpPr>
         <p:spPr>
           <a:xfrm>
-            <a:off x="501396" y="543878"/>
-            <a:ext cx="2213061" cy="498729"/>
+            <a:off x="950315" y="2159318"/>
+            <a:ext cx="118669" cy="264033"/>
           </a:xfrm>
           <a:prstGeom prst="rect">
             <a:avLst/>
@@ -11601,39 +12545,39 @@
           </a:bodyPr>
           <a:lstStyle/>
           <a:p>
-            <a:pPr algn="l"/>
-            <a:r>
-              <a:rPr lang="en-US" sz="2550" b="1" dirty="0">
-                <a:solidFill>
-                  <a:srgbClr val="20243A"/>
-                </a:solidFill>
-                <a:latin typeface="Arial" panose="020B0604020202090204"/>
-                <a:ea typeface="Arial" panose="020B0604020202090204"/>
-                <a:cs typeface="Arial" panose="020B0604020202090204"/>
-              </a:rPr>
-              <a:t>Open Canvas</a:t>
-            </a:r>
-            <a:endParaRPr lang="en-US" sz="2550" b="1" dirty="0">
-              <a:solidFill>
-                <a:srgbClr val="20243A"/>
-              </a:solidFill>
-              <a:latin typeface="Arial" panose="020B0604020202090204"/>
-              <a:ea typeface="Arial" panose="020B0604020202090204"/>
-              <a:cs typeface="Arial" panose="020B0604020202090204"/>
-            </a:endParaRPr>
-          </a:p>
-        </p:txBody>
-      </p:sp>
-      <p:sp>
-        <p:nvSpPr>
-          <p:cNvPr id="9" name="TextBox 9"/>
+            <a:pPr algn="ctr"/>
+            <a:r>
+              <a:rPr lang="en-US" sz="1350" b="1" dirty="0">
+                <a:solidFill>
+                  <a:srgbClr val="FFFFFF"/>
+                </a:solidFill>
+                <a:latin typeface="Arial" panose="020B0604020202090204"/>
+                <a:ea typeface="Arial" panose="020B0604020202090204"/>
+                <a:cs typeface="Arial" panose="020B0604020202090204"/>
+              </a:rPr>
+              <a:t>1</a:t>
+            </a:r>
+            <a:endParaRPr lang="en-US" sz="1350" b="1" dirty="0">
+              <a:solidFill>
+                <a:srgbClr val="FFFFFF"/>
+              </a:solidFill>
+              <a:latin typeface="Arial" panose="020B0604020202090204"/>
+              <a:ea typeface="Arial" panose="020B0604020202090204"/>
+              <a:cs typeface="Arial" panose="020B0604020202090204"/>
+            </a:endParaRPr>
+          </a:p>
+        </p:txBody>
+      </p:sp>
+      <p:sp>
+        <p:nvSpPr>
+          <p:cNvPr id="16" name="TextBox 16"/>
           <p:cNvSpPr txBox="1"/>
           <p:nvPr/>
         </p:nvSpPr>
         <p:spPr>
           <a:xfrm>
-            <a:off x="4218546" y="6665595"/>
-            <a:ext cx="739216" cy="176212"/>
+            <a:off x="950315" y="3702368"/>
+            <a:ext cx="118669" cy="264033"/>
           </a:xfrm>
           <a:prstGeom prst="rect">
             <a:avLst/>
@@ -11649,9 +12593,9 @@
           </a:bodyPr>
           <a:lstStyle/>
           <a:p>
-            <a:pPr algn="r"/>
-            <a:r>
-              <a:rPr lang="en-US" sz="900" dirty="0">
+            <a:pPr algn="ctr"/>
+            <a:r>
+              <a:rPr lang="en-US" sz="1350" b="1" dirty="0">
                 <a:solidFill>
                   <a:srgbClr val="FFFFFF"/>
                 </a:solidFill>
@@ -11659,9 +12603,9 @@
                 <a:ea typeface="Arial" panose="020B0604020202090204"/>
                 <a:cs typeface="Arial" panose="020B0604020202090204"/>
               </a:rPr>
-              <a:t>{{SOURCE}}</a:t>
-            </a:r>
-            <a:endParaRPr lang="en-US" sz="900" dirty="0">
+              <a:t>2</a:t>
+            </a:r>
+            <a:endParaRPr lang="en-US" sz="1350" b="1" dirty="0">
               <a:solidFill>
                 <a:srgbClr val="FFFFFF"/>
               </a:solidFill>
@@ -11674,7 +12618,673 @@
       </p:sp>
       <p:sp>
         <p:nvSpPr>
-          <p:cNvPr id="10" name="TextBox 10"/>
+          <p:cNvPr id="17" name="TextBox 17"/>
+          <p:cNvSpPr txBox="1"/>
+          <p:nvPr/>
+        </p:nvSpPr>
+        <p:spPr>
+          <a:xfrm>
+            <a:off x="950315" y="5235892"/>
+            <a:ext cx="118669" cy="264033"/>
+          </a:xfrm>
+          <a:prstGeom prst="rect">
+            <a:avLst/>
+          </a:prstGeom>
+          <a:noFill/>
+          <a:ln>
+            <a:noFill/>
+          </a:ln>
+        </p:spPr>
+        <p:txBody>
+          <a:bodyPr wrap="none" lIns="0" tIns="0" rIns="0" bIns="0" anchor="t" anchorCtr="0">
+            <a:spAutoFit/>
+          </a:bodyPr>
+          <a:lstStyle/>
+          <a:p>
+            <a:pPr algn="ctr"/>
+            <a:r>
+              <a:rPr lang="en-US" sz="1350" b="1" dirty="0">
+                <a:solidFill>
+                  <a:srgbClr val="FFFFFF"/>
+                </a:solidFill>
+                <a:latin typeface="Arial" panose="020B0604020202090204"/>
+                <a:ea typeface="Arial" panose="020B0604020202090204"/>
+                <a:cs typeface="Arial" panose="020B0604020202090204"/>
+              </a:rPr>
+              <a:t>3</a:t>
+            </a:r>
+            <a:endParaRPr lang="en-US" sz="1350" b="1" dirty="0">
+              <a:solidFill>
+                <a:srgbClr val="FFFFFF"/>
+              </a:solidFill>
+              <a:latin typeface="Arial" panose="020B0604020202090204"/>
+              <a:ea typeface="Arial" panose="020B0604020202090204"/>
+              <a:cs typeface="Arial" panose="020B0604020202090204"/>
+            </a:endParaRPr>
+          </a:p>
+        </p:txBody>
+      </p:sp>
+      <p:sp>
+        <p:nvSpPr>
+          <p:cNvPr id="18" name="TextBox 18"/>
+          <p:cNvSpPr txBox="1"/>
+          <p:nvPr/>
+        </p:nvSpPr>
+        <p:spPr>
+          <a:xfrm>
+            <a:off x="1747647" y="1809274"/>
+            <a:ext cx="1517465" cy="190690"/>
+          </a:xfrm>
+          <a:prstGeom prst="rect">
+            <a:avLst/>
+          </a:prstGeom>
+          <a:noFill/>
+          <a:ln>
+            <a:noFill/>
+          </a:ln>
+        </p:spPr>
+        <p:txBody>
+          <a:bodyPr wrap="none" lIns="0" tIns="0" rIns="0" bIns="0" anchor="t" anchorCtr="0">
+            <a:spAutoFit/>
+          </a:bodyPr>
+          <a:lstStyle/>
+          <a:p>
+            <a:pPr algn="l"/>
+            <a:r>
+              <a:rPr lang="en-US" sz="980" b="1" dirty="0">
+                <a:solidFill>
+                  <a:srgbClr val="D71440"/>
+                </a:solidFill>
+                <a:latin typeface="Arial" panose="020B0604020202090204"/>
+                <a:ea typeface="Arial" panose="020B0604020202090204"/>
+                <a:cs typeface="Arial" panose="020B0604020202090204"/>
+              </a:rPr>
+              <a:t>DELIVERABLE 1 · BUILD</a:t>
+            </a:r>
+            <a:endParaRPr lang="en-US" sz="980" b="1" dirty="0">
+              <a:solidFill>
+                <a:srgbClr val="D71440"/>
+              </a:solidFill>
+              <a:latin typeface="Arial" panose="020B0604020202090204"/>
+              <a:ea typeface="Arial" panose="020B0604020202090204"/>
+              <a:cs typeface="Arial" panose="020B0604020202090204"/>
+            </a:endParaRPr>
+          </a:p>
+        </p:txBody>
+      </p:sp>
+      <p:sp>
+        <p:nvSpPr>
+          <p:cNvPr id="19" name="TextBox 19"/>
+          <p:cNvSpPr txBox="1"/>
+          <p:nvPr/>
+        </p:nvSpPr>
+        <p:spPr>
+          <a:xfrm>
+            <a:off x="1747647" y="3352324"/>
+            <a:ext cx="1758967" cy="190690"/>
+          </a:xfrm>
+          <a:prstGeom prst="rect">
+            <a:avLst/>
+          </a:prstGeom>
+          <a:noFill/>
+          <a:ln>
+            <a:noFill/>
+          </a:ln>
+        </p:spPr>
+        <p:txBody>
+          <a:bodyPr wrap="none" lIns="0" tIns="0" rIns="0" bIns="0" anchor="t" anchorCtr="0">
+            <a:spAutoFit/>
+          </a:bodyPr>
+          <a:lstStyle/>
+          <a:p>
+            <a:pPr algn="l"/>
+            <a:r>
+              <a:rPr lang="en-US" sz="980" b="1" dirty="0">
+                <a:solidFill>
+                  <a:srgbClr val="181C62"/>
+                </a:solidFill>
+                <a:latin typeface="Arial" panose="020B0604020202090204"/>
+                <a:ea typeface="Arial" panose="020B0604020202090204"/>
+                <a:cs typeface="Arial" panose="020B0604020202090204"/>
+              </a:rPr>
+              <a:t>DELIVERABLE 2 · VALIDATE</a:t>
+            </a:r>
+            <a:endParaRPr lang="en-US" sz="980" b="1" dirty="0">
+              <a:solidFill>
+                <a:srgbClr val="181C62"/>
+              </a:solidFill>
+              <a:latin typeface="Arial" panose="020B0604020202090204"/>
+              <a:ea typeface="Arial" panose="020B0604020202090204"/>
+              <a:cs typeface="Arial" panose="020B0604020202090204"/>
+            </a:endParaRPr>
+          </a:p>
+        </p:txBody>
+      </p:sp>
+      <p:sp>
+        <p:nvSpPr>
+          <p:cNvPr id="20" name="TextBox 20"/>
+          <p:cNvSpPr txBox="1"/>
+          <p:nvPr/>
+        </p:nvSpPr>
+        <p:spPr>
+          <a:xfrm>
+            <a:off x="1747647" y="4885849"/>
+            <a:ext cx="1854104" cy="190690"/>
+          </a:xfrm>
+          <a:prstGeom prst="rect">
+            <a:avLst/>
+          </a:prstGeom>
+          <a:noFill/>
+          <a:ln>
+            <a:noFill/>
+          </a:ln>
+        </p:spPr>
+        <p:txBody>
+          <a:bodyPr wrap="none" lIns="0" tIns="0" rIns="0" bIns="0" anchor="t" anchorCtr="0">
+            <a:spAutoFit/>
+          </a:bodyPr>
+          <a:lstStyle/>
+          <a:p>
+            <a:pPr algn="l"/>
+            <a:r>
+              <a:rPr lang="en-US" sz="980" b="1" dirty="0">
+                <a:solidFill>
+                  <a:srgbClr val="D71440"/>
+                </a:solidFill>
+                <a:latin typeface="Arial" panose="020B0604020202090204"/>
+                <a:ea typeface="Arial" panose="020B0604020202090204"/>
+                <a:cs typeface="Arial" panose="020B0604020202090204"/>
+              </a:rPr>
+              <a:t>DELIVERABLE 3 · DOCUMENT</a:t>
+            </a:r>
+            <a:endParaRPr lang="en-US" sz="980" b="1" dirty="0">
+              <a:solidFill>
+                <a:srgbClr val="D71440"/>
+              </a:solidFill>
+              <a:latin typeface="Arial" panose="020B0604020202090204"/>
+              <a:ea typeface="Arial" panose="020B0604020202090204"/>
+              <a:cs typeface="Arial" panose="020B0604020202090204"/>
+            </a:endParaRPr>
+          </a:p>
+        </p:txBody>
+      </p:sp>
+      <p:sp>
+        <p:nvSpPr>
+          <p:cNvPr id="21" name="TextBox 21"/>
+          <p:cNvSpPr txBox="1"/>
+          <p:nvPr/>
+        </p:nvSpPr>
+        <p:spPr>
+          <a:xfrm>
+            <a:off x="8700516" y="1896428"/>
+            <a:ext cx="2598191" cy="205359"/>
+          </a:xfrm>
+          <a:prstGeom prst="rect">
+            <a:avLst/>
+          </a:prstGeom>
+          <a:noFill/>
+          <a:ln>
+            <a:noFill/>
+          </a:ln>
+        </p:spPr>
+        <p:txBody>
+          <a:bodyPr wrap="none" lIns="0" tIns="0" rIns="0" bIns="0" anchor="t" anchorCtr="0">
+            <a:spAutoFit/>
+          </a:bodyPr>
+          <a:lstStyle/>
+          <a:p>
+            <a:pPr algn="l"/>
+            <a:r>
+              <a:rPr lang="en-US" sz="1050" b="1" dirty="0">
+                <a:solidFill>
+                  <a:srgbClr val="FFFFFF"/>
+                </a:solidFill>
+                <a:latin typeface="Arial" panose="020B0604020202090204"/>
+                <a:ea typeface="Arial" panose="020B0604020202090204"/>
+                <a:cs typeface="Arial" panose="020B0604020202090204"/>
+              </a:rPr>
+              <a:t>OWNER · DUE DATE · SUCCESS CHECK</a:t>
+            </a:r>
+            <a:endParaRPr lang="en-US" sz="1050" b="1" dirty="0">
+              <a:solidFill>
+                <a:srgbClr val="FFFFFF"/>
+              </a:solidFill>
+              <a:latin typeface="Arial" panose="020B0604020202090204"/>
+              <a:ea typeface="Arial" panose="020B0604020202090204"/>
+              <a:cs typeface="Arial" panose="020B0604020202090204"/>
+            </a:endParaRPr>
+          </a:p>
+        </p:txBody>
+      </p:sp>
+      <p:sp>
+        <p:nvSpPr>
+          <p:cNvPr id="22" name="TextBox 22"/>
+          <p:cNvSpPr txBox="1"/>
+          <p:nvPr/>
+        </p:nvSpPr>
+        <p:spPr>
+          <a:xfrm>
+            <a:off x="501396" y="543878"/>
+            <a:ext cx="4335356" cy="498729"/>
+          </a:xfrm>
+          <a:prstGeom prst="rect">
+            <a:avLst/>
+          </a:prstGeom>
+          <a:noFill/>
+          <a:ln>
+            <a:noFill/>
+          </a:ln>
+        </p:spPr>
+        <p:txBody>
+          <a:bodyPr wrap="none" lIns="0" tIns="0" rIns="0" bIns="0" anchor="t" anchorCtr="0">
+            <a:spAutoFit/>
+          </a:bodyPr>
+          <a:lstStyle/>
+          <a:p>
+            <a:pPr algn="l"/>
+            <a:r>
+              <a:rPr lang="en-US" sz="2550" b="1" dirty="0">
+                <a:solidFill>
+                  <a:srgbClr val="20243A"/>
+                </a:solidFill>
+                <a:latin typeface="Arial" panose="020B0604020202090204"/>
+                <a:ea typeface="Arial" panose="020B0604020202090204"/>
+                <a:cs typeface="Arial" panose="020B0604020202090204"/>
+              </a:rPr>
+              <a:t>Next-Week Commitments</a:t>
+            </a:r>
+            <a:endParaRPr lang="en-US" sz="2550" b="1" dirty="0">
+              <a:solidFill>
+                <a:srgbClr val="20243A"/>
+              </a:solidFill>
+              <a:latin typeface="Arial" panose="020B0604020202090204"/>
+              <a:ea typeface="Arial" panose="020B0604020202090204"/>
+              <a:cs typeface="Arial" panose="020B0604020202090204"/>
+            </a:endParaRPr>
+          </a:p>
+        </p:txBody>
+      </p:sp>
+      <p:sp>
+        <p:nvSpPr>
+          <p:cNvPr id="23" name="TextBox 23"/>
+          <p:cNvSpPr txBox="1"/>
+          <p:nvPr/>
+        </p:nvSpPr>
+        <p:spPr>
+          <a:xfrm>
+            <a:off x="1744599" y="2173129"/>
+            <a:ext cx="2916365" cy="546164"/>
+          </a:xfrm>
+          <a:prstGeom prst="rect">
+            <a:avLst/>
+          </a:prstGeom>
+          <a:noFill/>
+          <a:ln>
+            <a:noFill/>
+          </a:ln>
+        </p:spPr>
+        <p:txBody>
+          <a:bodyPr wrap="none" lIns="0" tIns="0" rIns="0" bIns="0" anchor="t" anchorCtr="0">
+            <a:spAutoFit/>
+          </a:bodyPr>
+          <a:lstStyle/>
+          <a:p>
+            <a:pPr algn="l">
+              <a:lnSpc>
+                <a:spcPts val="1875"/>
+              </a:lnSpc>
+            </a:pPr>
+            <a:r>
+              <a:rPr lang="en-US" sz="1580" b="1" dirty="0">
+                <a:solidFill>
+                  <a:srgbClr val="20243A"/>
+                </a:solidFill>
+                <a:latin typeface="Arial" panose="020B0604020202090204"/>
+                <a:ea typeface="Arial" panose="020B0604020202090204"/>
+                <a:cs typeface="Arial" panose="020B0604020202090204"/>
+              </a:rPr>
+              <a:t>{{NEXT_ACTION_1}}</a:t>
+            </a:r>
+            <a:endParaRPr lang="en-US" sz="1580" b="1" dirty="0">
+              <a:solidFill>
+                <a:srgbClr val="20243A"/>
+              </a:solidFill>
+              <a:latin typeface="Arial" panose="020B0604020202090204"/>
+              <a:ea typeface="Arial" panose="020B0604020202090204"/>
+              <a:cs typeface="Arial" panose="020B0604020202090204"/>
+            </a:endParaRPr>
+          </a:p>
+          <a:p>
+            <a:pPr algn="l">
+              <a:lnSpc>
+                <a:spcPts val="1875"/>
+              </a:lnSpc>
+            </a:pPr>
+            <a:r>
+              <a:rPr lang="en-US" sz="1050" dirty="0">
+                <a:solidFill>
+                  <a:srgbClr val="5E6478"/>
+                </a:solidFill>
+                <a:latin typeface="Arial" panose="020B0604020202090204"/>
+                <a:ea typeface="Arial" panose="020B0604020202090204"/>
+                <a:cs typeface="Arial" panose="020B0604020202090204"/>
+              </a:rPr>
+              <a:t>Output: code, dataset, or runnable module.</a:t>
+            </a:r>
+            <a:endParaRPr lang="en-US" sz="1050" dirty="0">
+              <a:solidFill>
+                <a:srgbClr val="5E6478"/>
+              </a:solidFill>
+              <a:latin typeface="Arial" panose="020B0604020202090204"/>
+              <a:ea typeface="Arial" panose="020B0604020202090204"/>
+              <a:cs typeface="Arial" panose="020B0604020202090204"/>
+            </a:endParaRPr>
+          </a:p>
+        </p:txBody>
+      </p:sp>
+      <p:sp>
+        <p:nvSpPr>
+          <p:cNvPr id="24" name="TextBox 24"/>
+          <p:cNvSpPr txBox="1"/>
+          <p:nvPr/>
+        </p:nvSpPr>
+        <p:spPr>
+          <a:xfrm>
+            <a:off x="1744599" y="3716179"/>
+            <a:ext cx="3336417" cy="546164"/>
+          </a:xfrm>
+          <a:prstGeom prst="rect">
+            <a:avLst/>
+          </a:prstGeom>
+          <a:noFill/>
+          <a:ln>
+            <a:noFill/>
+          </a:ln>
+        </p:spPr>
+        <p:txBody>
+          <a:bodyPr wrap="none" lIns="0" tIns="0" rIns="0" bIns="0" anchor="t" anchorCtr="0">
+            <a:spAutoFit/>
+          </a:bodyPr>
+          <a:lstStyle/>
+          <a:p>
+            <a:pPr algn="l">
+              <a:lnSpc>
+                <a:spcPts val="1875"/>
+              </a:lnSpc>
+            </a:pPr>
+            <a:r>
+              <a:rPr lang="en-US" sz="1580" b="1" dirty="0">
+                <a:solidFill>
+                  <a:srgbClr val="20243A"/>
+                </a:solidFill>
+                <a:latin typeface="Arial" panose="020B0604020202090204"/>
+                <a:ea typeface="Arial" panose="020B0604020202090204"/>
+                <a:cs typeface="Arial" panose="020B0604020202090204"/>
+              </a:rPr>
+              <a:t>{{NEXT_ACTION_2}}</a:t>
+            </a:r>
+            <a:endParaRPr lang="en-US" sz="1580" b="1" dirty="0">
+              <a:solidFill>
+                <a:srgbClr val="20243A"/>
+              </a:solidFill>
+              <a:latin typeface="Arial" panose="020B0604020202090204"/>
+              <a:ea typeface="Arial" panose="020B0604020202090204"/>
+              <a:cs typeface="Arial" panose="020B0604020202090204"/>
+            </a:endParaRPr>
+          </a:p>
+          <a:p>
+            <a:pPr algn="l">
+              <a:lnSpc>
+                <a:spcPts val="1875"/>
+              </a:lnSpc>
+            </a:pPr>
+            <a:r>
+              <a:rPr lang="en-US" sz="1050" dirty="0">
+                <a:solidFill>
+                  <a:srgbClr val="5E6478"/>
+                </a:solidFill>
+                <a:latin typeface="Arial" panose="020B0604020202090204"/>
+                <a:ea typeface="Arial" panose="020B0604020202090204"/>
+                <a:cs typeface="Arial" panose="020B0604020202090204"/>
+              </a:rPr>
+              <a:t>Output: metric table, control, or ablation result.</a:t>
+            </a:r>
+            <a:endParaRPr lang="en-US" sz="1050" dirty="0">
+              <a:solidFill>
+                <a:srgbClr val="5E6478"/>
+              </a:solidFill>
+              <a:latin typeface="Arial" panose="020B0604020202090204"/>
+              <a:ea typeface="Arial" panose="020B0604020202090204"/>
+              <a:cs typeface="Arial" panose="020B0604020202090204"/>
+            </a:endParaRPr>
+          </a:p>
+        </p:txBody>
+      </p:sp>
+      <p:sp>
+        <p:nvSpPr>
+          <p:cNvPr id="25" name="TextBox 25"/>
+          <p:cNvSpPr txBox="1"/>
+          <p:nvPr/>
+        </p:nvSpPr>
+        <p:spPr>
+          <a:xfrm>
+            <a:off x="1744599" y="5249704"/>
+            <a:ext cx="3369755" cy="546164"/>
+          </a:xfrm>
+          <a:prstGeom prst="rect">
+            <a:avLst/>
+          </a:prstGeom>
+          <a:noFill/>
+          <a:ln>
+            <a:noFill/>
+          </a:ln>
+        </p:spPr>
+        <p:txBody>
+          <a:bodyPr wrap="none" lIns="0" tIns="0" rIns="0" bIns="0" anchor="t" anchorCtr="0">
+            <a:spAutoFit/>
+          </a:bodyPr>
+          <a:lstStyle/>
+          <a:p>
+            <a:pPr algn="l">
+              <a:lnSpc>
+                <a:spcPts val="1875"/>
+              </a:lnSpc>
+            </a:pPr>
+            <a:r>
+              <a:rPr lang="en-US" sz="1580" b="1" dirty="0">
+                <a:solidFill>
+                  <a:srgbClr val="20243A"/>
+                </a:solidFill>
+                <a:latin typeface="Arial" panose="020B0604020202090204"/>
+                <a:ea typeface="Arial" panose="020B0604020202090204"/>
+                <a:cs typeface="Arial" panose="020B0604020202090204"/>
+              </a:rPr>
+              <a:t>{{NEXT_ACTION_3}}</a:t>
+            </a:r>
+            <a:endParaRPr lang="en-US" sz="1580" b="1" dirty="0">
+              <a:solidFill>
+                <a:srgbClr val="20243A"/>
+              </a:solidFill>
+              <a:latin typeface="Arial" panose="020B0604020202090204"/>
+              <a:ea typeface="Arial" panose="020B0604020202090204"/>
+              <a:cs typeface="Arial" panose="020B0604020202090204"/>
+            </a:endParaRPr>
+          </a:p>
+          <a:p>
+            <a:pPr algn="l">
+              <a:lnSpc>
+                <a:spcPts val="1875"/>
+              </a:lnSpc>
+            </a:pPr>
+            <a:r>
+              <a:rPr lang="en-US" sz="1050" dirty="0">
+                <a:solidFill>
+                  <a:srgbClr val="5E6478"/>
+                </a:solidFill>
+                <a:latin typeface="Arial" panose="020B0604020202090204"/>
+                <a:ea typeface="Arial" panose="020B0604020202090204"/>
+                <a:cs typeface="Arial" panose="020B0604020202090204"/>
+              </a:rPr>
+              <a:t>Output: updated figure, notes, or report section.</a:t>
+            </a:r>
+            <a:endParaRPr lang="en-US" sz="1050" dirty="0">
+              <a:solidFill>
+                <a:srgbClr val="5E6478"/>
+              </a:solidFill>
+              <a:latin typeface="Arial" panose="020B0604020202090204"/>
+              <a:ea typeface="Arial" panose="020B0604020202090204"/>
+              <a:cs typeface="Arial" panose="020B0604020202090204"/>
+            </a:endParaRPr>
+          </a:p>
+        </p:txBody>
+      </p:sp>
+      <p:sp>
+        <p:nvSpPr>
+          <p:cNvPr id="26" name="TextBox 26"/>
+          <p:cNvSpPr txBox="1"/>
+          <p:nvPr/>
+        </p:nvSpPr>
+        <p:spPr>
+          <a:xfrm>
+            <a:off x="8697849" y="2382679"/>
+            <a:ext cx="2474087" cy="1441514"/>
+          </a:xfrm>
+          <a:prstGeom prst="rect">
+            <a:avLst/>
+          </a:prstGeom>
+          <a:noFill/>
+          <a:ln>
+            <a:noFill/>
+          </a:ln>
+        </p:spPr>
+        <p:txBody>
+          <a:bodyPr wrap="none" lIns="0" tIns="0" rIns="0" bIns="0" anchor="t" anchorCtr="0">
+            <a:spAutoFit/>
+          </a:bodyPr>
+          <a:lstStyle/>
+          <a:p>
+            <a:pPr algn="l">
+              <a:lnSpc>
+                <a:spcPts val="2025"/>
+              </a:lnSpc>
+            </a:pPr>
+            <a:r>
+              <a:rPr lang="en-US" sz="1580" dirty="0">
+                <a:solidFill>
+                  <a:srgbClr val="FFFFFF"/>
+                </a:solidFill>
+                <a:latin typeface="Arial" panose="020B0604020202090204"/>
+                <a:ea typeface="Arial" panose="020B0604020202090204"/>
+                <a:cs typeface="Arial" panose="020B0604020202090204"/>
+              </a:rPr>
+              <a:t>{{OWNER_AND_DEADLINE}}</a:t>
+            </a:r>
+            <a:endParaRPr lang="en-US" sz="1580" dirty="0">
+              <a:solidFill>
+                <a:srgbClr val="FFFFFF"/>
+              </a:solidFill>
+              <a:latin typeface="Arial" panose="020B0604020202090204"/>
+              <a:ea typeface="Arial" panose="020B0604020202090204"/>
+              <a:cs typeface="Arial" panose="020B0604020202090204"/>
+            </a:endParaRPr>
+          </a:p>
+          <a:p>
+            <a:pPr algn="l">
+              <a:lnSpc>
+                <a:spcPts val="2025"/>
+              </a:lnSpc>
+              <a:spcBef>
+                <a:spcPts val="825"/>
+              </a:spcBef>
+            </a:pPr>
+            <a:r>
+              <a:rPr lang="en-US" sz="1050" dirty="0">
+                <a:solidFill>
+                  <a:srgbClr val="C8C8C8"/>
+                </a:solidFill>
+                <a:latin typeface="Arial" panose="020B0604020202090204"/>
+                <a:ea typeface="Arial" panose="020B0604020202090204"/>
+                <a:cs typeface="Arial" panose="020B0604020202090204"/>
+              </a:rPr>
+              <a:t>Owner: …</a:t>
+            </a:r>
+            <a:br>
+              <a:rPr lang="en-US" sz="1050" dirty="0">
+                <a:solidFill>
+                  <a:srgbClr val="C8C8C8"/>
+                </a:solidFill>
+                <a:latin typeface="Arial" panose="020B0604020202090204"/>
+                <a:ea typeface="Arial" panose="020B0604020202090204"/>
+                <a:cs typeface="Arial" panose="020B0604020202090204"/>
+              </a:rPr>
+            </a:br>
+            <a:r>
+              <a:rPr lang="en-US" sz="1050" dirty="0">
+                <a:solidFill>
+                  <a:srgbClr val="C8C8C8"/>
+                </a:solidFill>
+                <a:latin typeface="Arial" panose="020B0604020202090204"/>
+                <a:ea typeface="Arial" panose="020B0604020202090204"/>
+                <a:cs typeface="Arial" panose="020B0604020202090204"/>
+              </a:rPr>
+              <a:t>Due: …</a:t>
+            </a:r>
+            <a:br>
+              <a:rPr lang="en-US" sz="1050" dirty="0">
+                <a:solidFill>
+                  <a:srgbClr val="C8C8C8"/>
+                </a:solidFill>
+                <a:latin typeface="Arial" panose="020B0604020202090204"/>
+                <a:ea typeface="Arial" panose="020B0604020202090204"/>
+                <a:cs typeface="Arial" panose="020B0604020202090204"/>
+              </a:rPr>
+            </a:br>
+            <a:r>
+              <a:rPr lang="en-US" sz="1050" dirty="0">
+                <a:solidFill>
+                  <a:srgbClr val="C8C8C8"/>
+                </a:solidFill>
+                <a:latin typeface="Arial" panose="020B0604020202090204"/>
+                <a:ea typeface="Arial" panose="020B0604020202090204"/>
+                <a:cs typeface="Arial" panose="020B0604020202090204"/>
+              </a:rPr>
+              <a:t>Success check: observable output</a:t>
+            </a:r>
+            <a:br>
+              <a:rPr lang="en-US" sz="1050" dirty="0">
+                <a:solidFill>
+                  <a:srgbClr val="C8C8C8"/>
+                </a:solidFill>
+                <a:latin typeface="Arial" panose="020B0604020202090204"/>
+                <a:ea typeface="Arial" panose="020B0604020202090204"/>
+                <a:cs typeface="Arial" panose="020B0604020202090204"/>
+              </a:rPr>
+            </a:br>
+            <a:r>
+              <a:rPr lang="en-US" sz="1050" dirty="0">
+                <a:solidFill>
+                  <a:srgbClr val="C8C8C8"/>
+                </a:solidFill>
+                <a:latin typeface="Arial" panose="020B0604020202090204"/>
+                <a:ea typeface="Arial" panose="020B0604020202090204"/>
+                <a:cs typeface="Arial" panose="020B0604020202090204"/>
+              </a:rPr>
+              <a:t>or agreed metric threshold.</a:t>
+            </a:r>
+            <a:endParaRPr lang="en-US" sz="1050" dirty="0">
+              <a:solidFill>
+                <a:srgbClr val="C8C8C8"/>
+              </a:solidFill>
+              <a:latin typeface="Arial" panose="020B0604020202090204"/>
+              <a:ea typeface="Arial" panose="020B0604020202090204"/>
+              <a:cs typeface="Arial" panose="020B0604020202090204"/>
+            </a:endParaRPr>
+          </a:p>
+        </p:txBody>
+      </p:sp>
+      <p:sp>
+        <p:nvSpPr>
+          <p:cNvPr id="27" name="TextBox 27"/>
           <p:cNvSpPr txBox="1"/>
           <p:nvPr/>
         </p:nvSpPr>
